--- a/mockemon_presentation.pptx
+++ b/mockemon_presentation.pptx
@@ -72,13 +72,13 @@
         </a:solidFill>
         <a:effectLst/>
         <a:uFillTx/>
-        <a:latin typeface="+mn-lt"/>
-        <a:ea typeface="+mn-ea"/>
-        <a:cs typeface="+mn-cs"/>
+        <a:latin typeface="+mj-lt"/>
+        <a:ea typeface="+mj-ea"/>
+        <a:cs typeface="+mj-cs"/>
         <a:sym typeface="Calibri"/>
       </a:defRPr>
     </a:lvl1pPr>
-    <a:lvl2pPr marL="0" marR="0" indent="457200" algn="l" defTabSz="914400" rtl="0" fontAlgn="auto" latinLnBrk="0" hangingPunct="0">
+    <a:lvl2pPr marL="0" marR="0" indent="0" algn="l" defTabSz="914400" rtl="0" fontAlgn="auto" latinLnBrk="0" hangingPunct="0">
       <a:lnSpc>
         <a:spcPct val="100000"/>
       </a:lnSpc>
@@ -102,13 +102,13 @@
         </a:solidFill>
         <a:effectLst/>
         <a:uFillTx/>
-        <a:latin typeface="+mn-lt"/>
-        <a:ea typeface="+mn-ea"/>
-        <a:cs typeface="+mn-cs"/>
+        <a:latin typeface="+mj-lt"/>
+        <a:ea typeface="+mj-ea"/>
+        <a:cs typeface="+mj-cs"/>
         <a:sym typeface="Calibri"/>
       </a:defRPr>
     </a:lvl2pPr>
-    <a:lvl3pPr marL="0" marR="0" indent="914400" algn="l" defTabSz="914400" rtl="0" fontAlgn="auto" latinLnBrk="0" hangingPunct="0">
+    <a:lvl3pPr marL="0" marR="0" indent="0" algn="l" defTabSz="914400" rtl="0" fontAlgn="auto" latinLnBrk="0" hangingPunct="0">
       <a:lnSpc>
         <a:spcPct val="100000"/>
       </a:lnSpc>
@@ -132,13 +132,13 @@
         </a:solidFill>
         <a:effectLst/>
         <a:uFillTx/>
-        <a:latin typeface="+mn-lt"/>
-        <a:ea typeface="+mn-ea"/>
-        <a:cs typeface="+mn-cs"/>
+        <a:latin typeface="+mj-lt"/>
+        <a:ea typeface="+mj-ea"/>
+        <a:cs typeface="+mj-cs"/>
         <a:sym typeface="Calibri"/>
       </a:defRPr>
     </a:lvl3pPr>
-    <a:lvl4pPr marL="0" marR="0" indent="1371600" algn="l" defTabSz="914400" rtl="0" fontAlgn="auto" latinLnBrk="0" hangingPunct="0">
+    <a:lvl4pPr marL="0" marR="0" indent="0" algn="l" defTabSz="914400" rtl="0" fontAlgn="auto" latinLnBrk="0" hangingPunct="0">
       <a:lnSpc>
         <a:spcPct val="100000"/>
       </a:lnSpc>
@@ -162,13 +162,13 @@
         </a:solidFill>
         <a:effectLst/>
         <a:uFillTx/>
-        <a:latin typeface="+mn-lt"/>
-        <a:ea typeface="+mn-ea"/>
-        <a:cs typeface="+mn-cs"/>
+        <a:latin typeface="+mj-lt"/>
+        <a:ea typeface="+mj-ea"/>
+        <a:cs typeface="+mj-cs"/>
         <a:sym typeface="Calibri"/>
       </a:defRPr>
     </a:lvl4pPr>
-    <a:lvl5pPr marL="0" marR="0" indent="1828800" algn="l" defTabSz="914400" rtl="0" fontAlgn="auto" latinLnBrk="0" hangingPunct="0">
+    <a:lvl5pPr marL="0" marR="0" indent="0" algn="l" defTabSz="914400" rtl="0" fontAlgn="auto" latinLnBrk="0" hangingPunct="0">
       <a:lnSpc>
         <a:spcPct val="100000"/>
       </a:lnSpc>
@@ -192,13 +192,13 @@
         </a:solidFill>
         <a:effectLst/>
         <a:uFillTx/>
-        <a:latin typeface="+mn-lt"/>
-        <a:ea typeface="+mn-ea"/>
-        <a:cs typeface="+mn-cs"/>
+        <a:latin typeface="+mj-lt"/>
+        <a:ea typeface="+mj-ea"/>
+        <a:cs typeface="+mj-cs"/>
         <a:sym typeface="Calibri"/>
       </a:defRPr>
     </a:lvl5pPr>
-    <a:lvl6pPr marL="0" marR="0" indent="2286000" algn="l" defTabSz="914400" rtl="0" fontAlgn="auto" latinLnBrk="0" hangingPunct="0">
+    <a:lvl6pPr marL="0" marR="0" indent="0" algn="l" defTabSz="914400" rtl="0" fontAlgn="auto" latinLnBrk="0" hangingPunct="0">
       <a:lnSpc>
         <a:spcPct val="100000"/>
       </a:lnSpc>
@@ -222,13 +222,13 @@
         </a:solidFill>
         <a:effectLst/>
         <a:uFillTx/>
-        <a:latin typeface="+mn-lt"/>
-        <a:ea typeface="+mn-ea"/>
-        <a:cs typeface="+mn-cs"/>
+        <a:latin typeface="+mj-lt"/>
+        <a:ea typeface="+mj-ea"/>
+        <a:cs typeface="+mj-cs"/>
         <a:sym typeface="Calibri"/>
       </a:defRPr>
     </a:lvl6pPr>
-    <a:lvl7pPr marL="0" marR="0" indent="2743200" algn="l" defTabSz="914400" rtl="0" fontAlgn="auto" latinLnBrk="0" hangingPunct="0">
+    <a:lvl7pPr marL="0" marR="0" indent="0" algn="l" defTabSz="914400" rtl="0" fontAlgn="auto" latinLnBrk="0" hangingPunct="0">
       <a:lnSpc>
         <a:spcPct val="100000"/>
       </a:lnSpc>
@@ -252,13 +252,13 @@
         </a:solidFill>
         <a:effectLst/>
         <a:uFillTx/>
-        <a:latin typeface="+mn-lt"/>
-        <a:ea typeface="+mn-ea"/>
-        <a:cs typeface="+mn-cs"/>
+        <a:latin typeface="+mj-lt"/>
+        <a:ea typeface="+mj-ea"/>
+        <a:cs typeface="+mj-cs"/>
         <a:sym typeface="Calibri"/>
       </a:defRPr>
     </a:lvl7pPr>
-    <a:lvl8pPr marL="0" marR="0" indent="3200400" algn="l" defTabSz="914400" rtl="0" fontAlgn="auto" latinLnBrk="0" hangingPunct="0">
+    <a:lvl8pPr marL="0" marR="0" indent="0" algn="l" defTabSz="914400" rtl="0" fontAlgn="auto" latinLnBrk="0" hangingPunct="0">
       <a:lnSpc>
         <a:spcPct val="100000"/>
       </a:lnSpc>
@@ -282,13 +282,13 @@
         </a:solidFill>
         <a:effectLst/>
         <a:uFillTx/>
-        <a:latin typeface="+mn-lt"/>
-        <a:ea typeface="+mn-ea"/>
-        <a:cs typeface="+mn-cs"/>
+        <a:latin typeface="+mj-lt"/>
+        <a:ea typeface="+mj-ea"/>
+        <a:cs typeface="+mj-cs"/>
         <a:sym typeface="Calibri"/>
       </a:defRPr>
     </a:lvl8pPr>
-    <a:lvl9pPr marL="0" marR="0" indent="3657600" algn="l" defTabSz="914400" rtl="0" fontAlgn="auto" latinLnBrk="0" hangingPunct="0">
+    <a:lvl9pPr marL="0" marR="0" indent="0" algn="l" defTabSz="914400" rtl="0" fontAlgn="auto" latinLnBrk="0" hangingPunct="0">
       <a:lnSpc>
         <a:spcPct val="100000"/>
       </a:lnSpc>
@@ -312,9 +312,9 @@
         </a:solidFill>
         <a:effectLst/>
         <a:uFillTx/>
-        <a:latin typeface="+mn-lt"/>
-        <a:ea typeface="+mn-ea"/>
-        <a:cs typeface="+mn-cs"/>
+        <a:latin typeface="+mj-lt"/>
+        <a:ea typeface="+mj-ea"/>
+        <a:cs typeface="+mj-cs"/>
         <a:sym typeface="Calibri"/>
       </a:defRPr>
     </a:lvl9pPr>
@@ -399,73 +399,73 @@
   <p:notesStyle>
     <a:lvl1pPr latinLnBrk="0">
       <a:defRPr sz="1200">
-        <a:latin typeface="+mn-lt"/>
-        <a:ea typeface="+mn-ea"/>
-        <a:cs typeface="+mn-cs"/>
+        <a:latin typeface="+mj-lt"/>
+        <a:ea typeface="+mj-ea"/>
+        <a:cs typeface="+mj-cs"/>
         <a:sym typeface="Calibri"/>
       </a:defRPr>
     </a:lvl1pPr>
     <a:lvl2pPr indent="228600" latinLnBrk="0">
       <a:defRPr sz="1200">
-        <a:latin typeface="+mn-lt"/>
-        <a:ea typeface="+mn-ea"/>
-        <a:cs typeface="+mn-cs"/>
+        <a:latin typeface="+mj-lt"/>
+        <a:ea typeface="+mj-ea"/>
+        <a:cs typeface="+mj-cs"/>
         <a:sym typeface="Calibri"/>
       </a:defRPr>
     </a:lvl2pPr>
     <a:lvl3pPr indent="457200" latinLnBrk="0">
       <a:defRPr sz="1200">
-        <a:latin typeface="+mn-lt"/>
-        <a:ea typeface="+mn-ea"/>
-        <a:cs typeface="+mn-cs"/>
+        <a:latin typeface="+mj-lt"/>
+        <a:ea typeface="+mj-ea"/>
+        <a:cs typeface="+mj-cs"/>
         <a:sym typeface="Calibri"/>
       </a:defRPr>
     </a:lvl3pPr>
     <a:lvl4pPr indent="685800" latinLnBrk="0">
       <a:defRPr sz="1200">
-        <a:latin typeface="+mn-lt"/>
-        <a:ea typeface="+mn-ea"/>
-        <a:cs typeface="+mn-cs"/>
+        <a:latin typeface="+mj-lt"/>
+        <a:ea typeface="+mj-ea"/>
+        <a:cs typeface="+mj-cs"/>
         <a:sym typeface="Calibri"/>
       </a:defRPr>
     </a:lvl4pPr>
     <a:lvl5pPr indent="914400" latinLnBrk="0">
       <a:defRPr sz="1200">
-        <a:latin typeface="+mn-lt"/>
-        <a:ea typeface="+mn-ea"/>
-        <a:cs typeface="+mn-cs"/>
+        <a:latin typeface="+mj-lt"/>
+        <a:ea typeface="+mj-ea"/>
+        <a:cs typeface="+mj-cs"/>
         <a:sym typeface="Calibri"/>
       </a:defRPr>
     </a:lvl5pPr>
     <a:lvl6pPr indent="1143000" latinLnBrk="0">
       <a:defRPr sz="1200">
-        <a:latin typeface="+mn-lt"/>
-        <a:ea typeface="+mn-ea"/>
-        <a:cs typeface="+mn-cs"/>
+        <a:latin typeface="+mj-lt"/>
+        <a:ea typeface="+mj-ea"/>
+        <a:cs typeface="+mj-cs"/>
         <a:sym typeface="Calibri"/>
       </a:defRPr>
     </a:lvl6pPr>
     <a:lvl7pPr indent="1371600" latinLnBrk="0">
       <a:defRPr sz="1200">
-        <a:latin typeface="+mn-lt"/>
-        <a:ea typeface="+mn-ea"/>
-        <a:cs typeface="+mn-cs"/>
+        <a:latin typeface="+mj-lt"/>
+        <a:ea typeface="+mj-ea"/>
+        <a:cs typeface="+mj-cs"/>
         <a:sym typeface="Calibri"/>
       </a:defRPr>
     </a:lvl7pPr>
     <a:lvl8pPr indent="1600200" latinLnBrk="0">
       <a:defRPr sz="1200">
-        <a:latin typeface="+mn-lt"/>
-        <a:ea typeface="+mn-ea"/>
-        <a:cs typeface="+mn-cs"/>
+        <a:latin typeface="+mj-lt"/>
+        <a:ea typeface="+mj-ea"/>
+        <a:cs typeface="+mj-cs"/>
         <a:sym typeface="Calibri"/>
       </a:defRPr>
     </a:lvl8pPr>
     <a:lvl9pPr indent="1828800" latinLnBrk="0">
       <a:defRPr sz="1200">
-        <a:latin typeface="+mn-lt"/>
-        <a:ea typeface="+mn-ea"/>
-        <a:cs typeface="+mn-cs"/>
+        <a:latin typeface="+mj-lt"/>
+        <a:ea typeface="+mj-ea"/>
+        <a:cs typeface="+mj-cs"/>
         <a:sym typeface="Calibri"/>
       </a:defRPr>
     </a:lvl9pPr>
@@ -555,8 +555,8 @@
         </p:nvSpPr>
         <p:spPr>
           <a:xfrm>
-            <a:off x="457200" y="69056"/>
-            <a:ext cx="8229600" cy="1131094"/>
+            <a:off x="1370012" y="577453"/>
+            <a:ext cx="7315201" cy="1251347"/>
           </a:xfrm>
           <a:prstGeom prst="rect">
             <a:avLst/>
@@ -571,7 +571,7 @@
           </a:extLst>
         </p:spPr>
         <p:txBody>
-          <a:bodyPr lIns="45719" rIns="45719" anchor="ctr"/>
+          <a:bodyPr lIns="45718" tIns="45718" rIns="45718" bIns="45718" anchor="ctr"/>
           <a:lstStyle/>
           <a:p>
             <a:pPr/>
@@ -591,8 +591,8 @@
         </p:nvSpPr>
         <p:spPr>
           <a:xfrm>
-            <a:off x="457200" y="1200150"/>
-            <a:ext cx="8229600" cy="3943350"/>
+            <a:off x="5103812" y="1828800"/>
+            <a:ext cx="3581401" cy="3314700"/>
           </a:xfrm>
           <a:prstGeom prst="rect">
             <a:avLst/>
@@ -607,7 +607,7 @@
           </a:extLst>
         </p:spPr>
         <p:txBody>
-          <a:bodyPr lIns="45719" rIns="45719"/>
+          <a:bodyPr lIns="45718" tIns="45718" rIns="45718" bIns="45718"/>
           <a:lstStyle/>
           <a:p>
             <a:pPr/>
@@ -651,18 +651,18 @@
         </p:nvSpPr>
         <p:spPr>
           <a:xfrm>
-            <a:off x="4419600" y="4627562"/>
-            <a:ext cx="2133600" cy="279401"/>
-          </a:xfrm>
-          <a:prstGeom prst="rect">
-            <a:avLst/>
-          </a:prstGeom>
-          <a:ln w="12700">
-            <a:miter lim="400000"/>
-          </a:ln>
-        </p:spPr>
-        <p:txBody>
-          <a:bodyPr wrap="none" lIns="45719" rIns="45719" anchor="ctr">
+            <a:off x="6294578" y="4643111"/>
+            <a:ext cx="258623" cy="248304"/>
+          </a:xfrm>
+          <a:prstGeom prst="rect">
+            <a:avLst/>
+          </a:prstGeom>
+          <a:ln w="12700">
+            <a:miter lim="400000"/>
+          </a:ln>
+        </p:spPr>
+        <p:txBody>
+          <a:bodyPr wrap="none" lIns="45718" tIns="45718" rIns="45718" bIns="45718" anchor="ctr">
             <a:spAutoFit/>
           </a:bodyPr>
           <a:lstStyle>
@@ -941,9 +941,9 @@
             <a:srgbClr val="000000"/>
           </a:solidFill>
           <a:uFillTx/>
-          <a:latin typeface="+mn-lt"/>
-          <a:ea typeface="+mn-ea"/>
-          <a:cs typeface="+mn-cs"/>
+          <a:latin typeface="+mj-lt"/>
+          <a:ea typeface="+mj-ea"/>
+          <a:cs typeface="+mj-cs"/>
           <a:sym typeface="Calibri"/>
         </a:defRPr>
       </a:lvl1pPr>
@@ -967,9 +967,9 @@
             <a:srgbClr val="000000"/>
           </a:solidFill>
           <a:uFillTx/>
-          <a:latin typeface="+mn-lt"/>
-          <a:ea typeface="+mn-ea"/>
-          <a:cs typeface="+mn-cs"/>
+          <a:latin typeface="+mj-lt"/>
+          <a:ea typeface="+mj-ea"/>
+          <a:cs typeface="+mj-cs"/>
           <a:sym typeface="Calibri"/>
         </a:defRPr>
       </a:lvl2pPr>
@@ -993,9 +993,9 @@
             <a:srgbClr val="000000"/>
           </a:solidFill>
           <a:uFillTx/>
-          <a:latin typeface="+mn-lt"/>
-          <a:ea typeface="+mn-ea"/>
-          <a:cs typeface="+mn-cs"/>
+          <a:latin typeface="+mj-lt"/>
+          <a:ea typeface="+mj-ea"/>
+          <a:cs typeface="+mj-cs"/>
           <a:sym typeface="Calibri"/>
         </a:defRPr>
       </a:lvl3pPr>
@@ -1019,9 +1019,9 @@
             <a:srgbClr val="000000"/>
           </a:solidFill>
           <a:uFillTx/>
-          <a:latin typeface="+mn-lt"/>
-          <a:ea typeface="+mn-ea"/>
-          <a:cs typeface="+mn-cs"/>
+          <a:latin typeface="+mj-lt"/>
+          <a:ea typeface="+mj-ea"/>
+          <a:cs typeface="+mj-cs"/>
           <a:sym typeface="Calibri"/>
         </a:defRPr>
       </a:lvl4pPr>
@@ -1045,9 +1045,9 @@
             <a:srgbClr val="000000"/>
           </a:solidFill>
           <a:uFillTx/>
-          <a:latin typeface="+mn-lt"/>
-          <a:ea typeface="+mn-ea"/>
-          <a:cs typeface="+mn-cs"/>
+          <a:latin typeface="+mj-lt"/>
+          <a:ea typeface="+mj-ea"/>
+          <a:cs typeface="+mj-cs"/>
           <a:sym typeface="Calibri"/>
         </a:defRPr>
       </a:lvl5pPr>
@@ -1071,9 +1071,9 @@
             <a:srgbClr val="000000"/>
           </a:solidFill>
           <a:uFillTx/>
-          <a:latin typeface="+mn-lt"/>
-          <a:ea typeface="+mn-ea"/>
-          <a:cs typeface="+mn-cs"/>
+          <a:latin typeface="+mj-lt"/>
+          <a:ea typeface="+mj-ea"/>
+          <a:cs typeface="+mj-cs"/>
           <a:sym typeface="Calibri"/>
         </a:defRPr>
       </a:lvl6pPr>
@@ -1097,9 +1097,9 @@
             <a:srgbClr val="000000"/>
           </a:solidFill>
           <a:uFillTx/>
-          <a:latin typeface="+mn-lt"/>
-          <a:ea typeface="+mn-ea"/>
-          <a:cs typeface="+mn-cs"/>
+          <a:latin typeface="+mj-lt"/>
+          <a:ea typeface="+mj-ea"/>
+          <a:cs typeface="+mj-cs"/>
           <a:sym typeface="Calibri"/>
         </a:defRPr>
       </a:lvl7pPr>
@@ -1123,9 +1123,9 @@
             <a:srgbClr val="000000"/>
           </a:solidFill>
           <a:uFillTx/>
-          <a:latin typeface="+mn-lt"/>
-          <a:ea typeface="+mn-ea"/>
-          <a:cs typeface="+mn-cs"/>
+          <a:latin typeface="+mj-lt"/>
+          <a:ea typeface="+mj-ea"/>
+          <a:cs typeface="+mj-cs"/>
           <a:sym typeface="Calibri"/>
         </a:defRPr>
       </a:lvl8pPr>
@@ -1149,9 +1149,9 @@
             <a:srgbClr val="000000"/>
           </a:solidFill>
           <a:uFillTx/>
-          <a:latin typeface="+mn-lt"/>
-          <a:ea typeface="+mn-ea"/>
-          <a:cs typeface="+mn-cs"/>
+          <a:latin typeface="+mj-lt"/>
+          <a:ea typeface="+mj-ea"/>
+          <a:cs typeface="+mj-cs"/>
           <a:sym typeface="Calibri"/>
         </a:defRPr>
       </a:lvl9pPr>
@@ -1183,7 +1183,7 @@
           <a:sym typeface="Calibri"/>
         </a:defRPr>
       </a:lvl1pPr>
-      <a:lvl2pPr marL="0" marR="0" indent="457200" algn="r" defTabSz="914400" rtl="0" latinLnBrk="0">
+      <a:lvl2pPr marL="0" marR="0" indent="0" algn="r" defTabSz="914400" rtl="0" latinLnBrk="0">
         <a:lnSpc>
           <a:spcPct val="100000"/>
         </a:lnSpc>
@@ -1209,7 +1209,7 @@
           <a:sym typeface="Calibri"/>
         </a:defRPr>
       </a:lvl2pPr>
-      <a:lvl3pPr marL="0" marR="0" indent="914400" algn="r" defTabSz="914400" rtl="0" latinLnBrk="0">
+      <a:lvl3pPr marL="0" marR="0" indent="0" algn="r" defTabSz="914400" rtl="0" latinLnBrk="0">
         <a:lnSpc>
           <a:spcPct val="100000"/>
         </a:lnSpc>
@@ -1235,7 +1235,7 @@
           <a:sym typeface="Calibri"/>
         </a:defRPr>
       </a:lvl3pPr>
-      <a:lvl4pPr marL="0" marR="0" indent="1371600" algn="r" defTabSz="914400" rtl="0" latinLnBrk="0">
+      <a:lvl4pPr marL="0" marR="0" indent="0" algn="r" defTabSz="914400" rtl="0" latinLnBrk="0">
         <a:lnSpc>
           <a:spcPct val="100000"/>
         </a:lnSpc>
@@ -1261,7 +1261,7 @@
           <a:sym typeface="Calibri"/>
         </a:defRPr>
       </a:lvl4pPr>
-      <a:lvl5pPr marL="0" marR="0" indent="1828800" algn="r" defTabSz="914400" rtl="0" latinLnBrk="0">
+      <a:lvl5pPr marL="0" marR="0" indent="0" algn="r" defTabSz="914400" rtl="0" latinLnBrk="0">
         <a:lnSpc>
           <a:spcPct val="100000"/>
         </a:lnSpc>
@@ -1287,7 +1287,7 @@
           <a:sym typeface="Calibri"/>
         </a:defRPr>
       </a:lvl5pPr>
-      <a:lvl6pPr marL="0" marR="0" indent="2286000" algn="r" defTabSz="914400" rtl="0" latinLnBrk="0">
+      <a:lvl6pPr marL="0" marR="0" indent="0" algn="r" defTabSz="914400" rtl="0" latinLnBrk="0">
         <a:lnSpc>
           <a:spcPct val="100000"/>
         </a:lnSpc>
@@ -1313,7 +1313,7 @@
           <a:sym typeface="Calibri"/>
         </a:defRPr>
       </a:lvl6pPr>
-      <a:lvl7pPr marL="0" marR="0" indent="2743200" algn="r" defTabSz="914400" rtl="0" latinLnBrk="0">
+      <a:lvl7pPr marL="0" marR="0" indent="0" algn="r" defTabSz="914400" rtl="0" latinLnBrk="0">
         <a:lnSpc>
           <a:spcPct val="100000"/>
         </a:lnSpc>
@@ -1339,7 +1339,7 @@
           <a:sym typeface="Calibri"/>
         </a:defRPr>
       </a:lvl7pPr>
-      <a:lvl8pPr marL="0" marR="0" indent="3200400" algn="r" defTabSz="914400" rtl="0" latinLnBrk="0">
+      <a:lvl8pPr marL="0" marR="0" indent="0" algn="r" defTabSz="914400" rtl="0" latinLnBrk="0">
         <a:lnSpc>
           <a:spcPct val="100000"/>
         </a:lnSpc>
@@ -1365,7 +1365,7 @@
           <a:sym typeface="Calibri"/>
         </a:defRPr>
       </a:lvl8pPr>
-      <a:lvl9pPr marL="0" marR="0" indent="3657600" algn="r" defTabSz="914400" rtl="0" latinLnBrk="0">
+      <a:lvl9pPr marL="0" marR="0" indent="0" algn="r" defTabSz="914400" rtl="0" latinLnBrk="0">
         <a:lnSpc>
           <a:spcPct val="100000"/>
         </a:lnSpc>
@@ -1457,8 +1457,8 @@
         </p:nvSpPr>
         <p:spPr>
           <a:xfrm>
-            <a:off x="960119" y="2067559"/>
-            <a:ext cx="7223762" cy="802641"/>
+            <a:off x="960118" y="2067560"/>
+            <a:ext cx="7223764" cy="802639"/>
           </a:xfrm>
           <a:prstGeom prst="rect">
             <a:avLst/>
@@ -1473,7 +1473,7 @@
           </a:extLst>
         </p:spPr>
         <p:txBody>
-          <a:bodyPr lIns="45719" rIns="45719" anchor="ctr">
+          <a:bodyPr lIns="45718" tIns="45718" rIns="45718" bIns="45718" anchor="ctr">
             <a:spAutoFit/>
           </a:bodyPr>
           <a:lstStyle/>
@@ -1519,8 +1519,8 @@
         </p:nvSpPr>
         <p:spPr>
           <a:xfrm>
-            <a:off x="2286000" y="3200400"/>
-            <a:ext cx="4572001" cy="0"/>
+            <a:off x="2285999" y="3200400"/>
+            <a:ext cx="4572002" cy="0"/>
           </a:xfrm>
           <a:prstGeom prst="line">
             <a:avLst/>
@@ -1532,7 +1532,7 @@
           </a:ln>
         </p:spPr>
         <p:txBody>
-          <a:bodyPr lIns="45719" rIns="45719"/>
+          <a:bodyPr lIns="45718" tIns="45718" rIns="45718" bIns="45718"/>
           <a:lstStyle/>
           <a:p>
             <a:pPr/>
@@ -1547,8 +1547,8 @@
         </p:nvSpPr>
         <p:spPr>
           <a:xfrm>
-            <a:off x="960119" y="3553023"/>
-            <a:ext cx="7223762" cy="300594"/>
+            <a:off x="960118" y="3553024"/>
+            <a:ext cx="7223764" cy="300592"/>
           </a:xfrm>
           <a:prstGeom prst="rect">
             <a:avLst/>
@@ -1563,7 +1563,7 @@
           </a:extLst>
         </p:spPr>
         <p:txBody>
-          <a:bodyPr lIns="45719" rIns="45719" anchor="ctr">
+          <a:bodyPr lIns="45718" tIns="45718" rIns="45718" bIns="45718" anchor="ctr">
             <a:spAutoFit/>
           </a:bodyPr>
           <a:lstStyle>
@@ -1587,7 +1587,7 @@
         <p:nvPicPr>
           <p:cNvPr id="24" name="Image 1" descr="Image 1"/>
           <p:cNvPicPr>
-            <a:picLocks noChangeAspect="0"/>
+            <a:picLocks noChangeAspect="1"/>
           </p:cNvPicPr>
           <p:nvPr/>
         </p:nvPicPr>
@@ -1601,8 +1601,8 @@
         </p:blipFill>
         <p:spPr>
           <a:xfrm>
-            <a:off x="6479920" y="4114800"/>
-            <a:ext cx="2024001" cy="640081"/>
+            <a:off x="6479919" y="4114800"/>
+            <a:ext cx="2024003" cy="640081"/>
           </a:xfrm>
           <a:prstGeom prst="rect">
             <a:avLst/>
@@ -1653,7 +1653,7 @@
         </p:nvSpPr>
         <p:spPr>
           <a:xfrm>
-            <a:off x="548640" y="327660"/>
+            <a:off x="548640" y="327659"/>
             <a:ext cx="8229601" cy="533401"/>
           </a:xfrm>
           <a:prstGeom prst="rect">
@@ -1702,7 +1702,7 @@
         <p:spPr>
           <a:xfrm>
             <a:off x="548640" y="1051560"/>
-            <a:ext cx="8046719" cy="914401"/>
+            <a:ext cx="8046719" cy="914402"/>
           </a:xfrm>
           <a:prstGeom prst="rect">
             <a:avLst/>
@@ -1715,7 +1715,7 @@
           </a:ln>
         </p:spPr>
         <p:txBody>
-          <a:bodyPr lIns="45719" rIns="45719"/>
+          <a:bodyPr lIns="45718" tIns="45718" rIns="45718" bIns="45718"/>
           <a:lstStyle/>
           <a:p>
             <a:pPr/>
@@ -1731,7 +1731,7 @@
         <p:spPr>
           <a:xfrm>
             <a:off x="548640" y="1051560"/>
-            <a:ext cx="73153" cy="914401"/>
+            <a:ext cx="73154" cy="914402"/>
           </a:xfrm>
           <a:prstGeom prst="rect">
             <a:avLst/>
@@ -1744,7 +1744,7 @@
           </a:ln>
         </p:spPr>
         <p:txBody>
-          <a:bodyPr lIns="45719" rIns="45719"/>
+          <a:bodyPr lIns="45718" tIns="45718" rIns="45718" bIns="45718"/>
           <a:lstStyle/>
           <a:p>
             <a:pPr/>
@@ -1760,7 +1760,7 @@
         <p:spPr>
           <a:xfrm>
             <a:off x="914399" y="1105661"/>
-            <a:ext cx="7406642" cy="358141"/>
+            <a:ext cx="7406641" cy="358139"/>
           </a:xfrm>
           <a:prstGeom prst="rect">
             <a:avLst/>
@@ -1775,7 +1775,7 @@
           </a:extLst>
         </p:spPr>
         <p:txBody>
-          <a:bodyPr lIns="45719" rIns="45719" anchor="ctr">
+          <a:bodyPr lIns="45718" tIns="45718" rIns="45718" bIns="45718" anchor="ctr">
             <a:spAutoFit/>
           </a:bodyPr>
           <a:lstStyle>
@@ -1808,7 +1808,7 @@
         <p:spPr>
           <a:xfrm>
             <a:off x="914399" y="1438079"/>
-            <a:ext cx="7406642" cy="461402"/>
+            <a:ext cx="7406641" cy="461401"/>
           </a:xfrm>
           <a:prstGeom prst="rect">
             <a:avLst/>
@@ -1823,7 +1823,7 @@
           </a:extLst>
         </p:spPr>
         <p:txBody>
-          <a:bodyPr lIns="45719" rIns="45719" anchor="ctr">
+          <a:bodyPr lIns="45718" tIns="45718" rIns="45718" bIns="45718" anchor="ctr">
             <a:spAutoFit/>
           </a:bodyPr>
           <a:lstStyle>
@@ -1838,7 +1838,7 @@
           <a:p>
             <a:pPr/>
             <a:r>
-              <a:t>~49% accuracy mot 5.6% slumpchans. Modellerna hittar meningsfulla mönster men 18 klasser med stor obalans sätter ett tydligt tak.</a:t>
+              <a:t>Nästan 49% accuracy mot 5.6% chans. Modellerna hittar meningsfulla mönster men 18 klasser med stor obalans sätter ett tydligt tak.</a:t>
             </a:r>
           </a:p>
         </p:txBody>
@@ -1865,7 +1865,7 @@
           </a:ln>
         </p:spPr>
         <p:txBody>
-          <a:bodyPr lIns="45719" rIns="45719"/>
+          <a:bodyPr lIns="45718" tIns="45718" rIns="45718" bIns="45718"/>
           <a:lstStyle/>
           <a:p>
             <a:pPr/>
@@ -1881,7 +1881,7 @@
         <p:spPr>
           <a:xfrm>
             <a:off x="548640" y="2148839"/>
-            <a:ext cx="73153" cy="914401"/>
+            <a:ext cx="73154" cy="914401"/>
           </a:xfrm>
           <a:prstGeom prst="rect">
             <a:avLst/>
@@ -1894,7 +1894,7 @@
           </a:ln>
         </p:spPr>
         <p:txBody>
-          <a:bodyPr lIns="45719" rIns="45719"/>
+          <a:bodyPr lIns="45718" tIns="45718" rIns="45718" bIns="45718"/>
           <a:lstStyle/>
           <a:p>
             <a:pPr/>
@@ -1909,8 +1909,8 @@
         </p:nvSpPr>
         <p:spPr>
           <a:xfrm>
-            <a:off x="914399" y="2202942"/>
-            <a:ext cx="7406642" cy="358141"/>
+            <a:off x="914399" y="2202943"/>
+            <a:ext cx="7406641" cy="358139"/>
           </a:xfrm>
           <a:prstGeom prst="rect">
             <a:avLst/>
@@ -1925,7 +1925,7 @@
           </a:extLst>
         </p:spPr>
         <p:txBody>
-          <a:bodyPr lIns="45719" rIns="45719" anchor="ctr">
+          <a:bodyPr lIns="45718" tIns="45718" rIns="45718" bIns="45718" anchor="ctr">
             <a:spAutoFit/>
           </a:bodyPr>
           <a:lstStyle>
@@ -1957,8 +1957,8 @@
         </p:nvSpPr>
         <p:spPr>
           <a:xfrm>
-            <a:off x="914399" y="2535359"/>
-            <a:ext cx="7406642" cy="461403"/>
+            <a:off x="914399" y="2535360"/>
+            <a:ext cx="7406641" cy="461400"/>
           </a:xfrm>
           <a:prstGeom prst="rect">
             <a:avLst/>
@@ -1973,7 +1973,7 @@
           </a:extLst>
         </p:spPr>
         <p:txBody>
-          <a:bodyPr lIns="45719" rIns="45719" anchor="ctr">
+          <a:bodyPr lIns="45718" tIns="45718" rIns="45718" bIns="45718" anchor="ctr">
             <a:spAutoFit/>
           </a:bodyPr>
           <a:lstStyle>
@@ -2002,7 +2002,7 @@
         <p:spPr>
           <a:xfrm>
             <a:off x="548640" y="3246120"/>
-            <a:ext cx="8046719" cy="914401"/>
+            <a:ext cx="8046719" cy="914402"/>
           </a:xfrm>
           <a:prstGeom prst="rect">
             <a:avLst/>
@@ -2015,7 +2015,7 @@
           </a:ln>
         </p:spPr>
         <p:txBody>
-          <a:bodyPr lIns="45719" rIns="45719"/>
+          <a:bodyPr lIns="45718" tIns="45718" rIns="45718" bIns="45718"/>
           <a:lstStyle/>
           <a:p>
             <a:pPr/>
@@ -2031,7 +2031,7 @@
         <p:spPr>
           <a:xfrm>
             <a:off x="548640" y="3246120"/>
-            <a:ext cx="73153" cy="914401"/>
+            <a:ext cx="73154" cy="914402"/>
           </a:xfrm>
           <a:prstGeom prst="rect">
             <a:avLst/>
@@ -2044,7 +2044,7 @@
           </a:ln>
         </p:spPr>
         <p:txBody>
-          <a:bodyPr lIns="45719" rIns="45719"/>
+          <a:bodyPr lIns="45718" tIns="45718" rIns="45718" bIns="45718"/>
           <a:lstStyle/>
           <a:p>
             <a:pPr/>
@@ -2059,8 +2059,8 @@
         </p:nvSpPr>
         <p:spPr>
           <a:xfrm>
-            <a:off x="914399" y="3300221"/>
-            <a:ext cx="7406642" cy="358141"/>
+            <a:off x="914399" y="3300222"/>
+            <a:ext cx="7406641" cy="358139"/>
           </a:xfrm>
           <a:prstGeom prst="rect">
             <a:avLst/>
@@ -2075,7 +2075,7 @@
           </a:extLst>
         </p:spPr>
         <p:txBody>
-          <a:bodyPr lIns="45719" rIns="45719" anchor="ctr">
+          <a:bodyPr lIns="45718" tIns="45718" rIns="45718" bIns="45718" anchor="ctr">
             <a:spAutoFit/>
           </a:bodyPr>
           <a:lstStyle>
@@ -2107,8 +2107,8 @@
         </p:nvSpPr>
         <p:spPr>
           <a:xfrm>
-            <a:off x="914399" y="3632639"/>
-            <a:ext cx="7406642" cy="461402"/>
+            <a:off x="914399" y="3734240"/>
+            <a:ext cx="7406641" cy="258201"/>
           </a:xfrm>
           <a:prstGeom prst="rect">
             <a:avLst/>
@@ -2123,7 +2123,7 @@
           </a:extLst>
         </p:spPr>
         <p:txBody>
-          <a:bodyPr lIns="45719" rIns="45719" anchor="ctr">
+          <a:bodyPr lIns="45718" tIns="45718" rIns="45718" bIns="45718" anchor="ctr">
             <a:spAutoFit/>
           </a:bodyPr>
           <a:lstStyle>
@@ -2138,7 +2138,7 @@
           <a:p>
             <a:pPr/>
             <a:r>
-              <a:t>Sprite-pixlar kodar design, inte typ. Alla bild-varianter presterar sämre. Image-only-modeller når ~10% (nära slumpchans).</a:t>
+              <a:t>Alla bild-varianter presterar sämre. Image-only-modeller når cirka 10% (nära slumpartat).</a:t>
             </a:r>
           </a:p>
         </p:txBody>
@@ -2152,7 +2152,7 @@
         <p:spPr>
           <a:xfrm>
             <a:off x="548640" y="4160520"/>
-            <a:ext cx="8046719" cy="640081"/>
+            <a:ext cx="8046719" cy="640082"/>
           </a:xfrm>
           <a:prstGeom prst="rect">
             <a:avLst/>
@@ -2165,7 +2165,7 @@
           </a:ln>
         </p:spPr>
         <p:txBody>
-          <a:bodyPr lIns="45719" rIns="45719"/>
+          <a:bodyPr lIns="45718" tIns="45718" rIns="45718" bIns="45718"/>
           <a:lstStyle/>
           <a:p>
             <a:pPr/>
@@ -2181,7 +2181,7 @@
         <p:spPr>
           <a:xfrm>
             <a:off x="548640" y="4160520"/>
-            <a:ext cx="73153" cy="640081"/>
+            <a:ext cx="73154" cy="640082"/>
           </a:xfrm>
           <a:prstGeom prst="rect">
             <a:avLst/>
@@ -2194,7 +2194,7 @@
           </a:ln>
         </p:spPr>
         <p:txBody>
-          <a:bodyPr lIns="45719" rIns="45719"/>
+          <a:bodyPr lIns="45718" tIns="45718" rIns="45718" bIns="45718"/>
           <a:lstStyle/>
           <a:p>
             <a:pPr/>
@@ -2210,7 +2210,7 @@
         <p:spPr>
           <a:xfrm>
             <a:off x="914399" y="4237159"/>
-            <a:ext cx="7406642" cy="486803"/>
+            <a:ext cx="7406641" cy="486801"/>
           </a:xfrm>
           <a:prstGeom prst="rect">
             <a:avLst/>
@@ -2225,7 +2225,7 @@
           </a:extLst>
         </p:spPr>
         <p:txBody>
-          <a:bodyPr lIns="45719" rIns="45719" anchor="ctr">
+          <a:bodyPr lIns="45718" tIns="45718" rIns="45718" bIns="45718" anchor="ctr">
             <a:spAutoFit/>
           </a:bodyPr>
           <a:lstStyle/>
@@ -2246,7 +2246,7 @@
                   <a:srgbClr val="FFFFFF"/>
                 </a:solidFill>
               </a:rPr>
-              <a:t>Typernas ekologiska mönster är tydliga, men stridsegenskaperna är inte distinkta nog. Överväg att differentiera battle stats mer mellan typerna.</a:t>
+              <a:t>Typernas ekologiska mönster är tydliga, men stridsegenskaperna är inte distinkta nog. Överväg att särskilja egenskaperna mer mellan typerna och inte individuella Mockemon.</a:t>
             </a:r>
           </a:p>
         </p:txBody>
@@ -2292,7 +2292,7 @@
         </p:nvSpPr>
         <p:spPr>
           <a:xfrm>
-            <a:off x="548640" y="327660"/>
+            <a:off x="548640" y="327659"/>
             <a:ext cx="8229601" cy="533401"/>
           </a:xfrm>
           <a:prstGeom prst="rect">
@@ -2340,8 +2340,8 @@
         </p:nvSpPr>
         <p:spPr>
           <a:xfrm>
-            <a:off x="548640" y="1097279"/>
-            <a:ext cx="5029201" cy="3474722"/>
+            <a:off x="548639" y="1097278"/>
+            <a:ext cx="5029203" cy="3474723"/>
           </a:xfrm>
           <a:prstGeom prst="rect">
             <a:avLst/>
@@ -2361,7 +2361,7 @@
           </a:effectLst>
         </p:spPr>
         <p:txBody>
-          <a:bodyPr lIns="45719" rIns="45719"/>
+          <a:bodyPr lIns="45718" tIns="45718" rIns="45718" bIns="45718"/>
           <a:lstStyle/>
           <a:p>
             <a:pPr/>
@@ -2376,8 +2376,8 @@
         </p:nvSpPr>
         <p:spPr>
           <a:xfrm>
-            <a:off x="548640" y="1097279"/>
-            <a:ext cx="64009" cy="3474722"/>
+            <a:off x="548640" y="1097278"/>
+            <a:ext cx="64010" cy="3474723"/>
           </a:xfrm>
           <a:prstGeom prst="rect">
             <a:avLst/>
@@ -2390,7 +2390,7 @@
           </a:ln>
         </p:spPr>
         <p:txBody>
-          <a:bodyPr lIns="45719" rIns="45719"/>
+          <a:bodyPr lIns="45718" tIns="45718" rIns="45718" bIns="45718"/>
           <a:lstStyle/>
           <a:p>
             <a:pPr/>
@@ -2405,8 +2405,8 @@
         </p:nvSpPr>
         <p:spPr>
           <a:xfrm>
-            <a:off x="914400" y="1280160"/>
-            <a:ext cx="4389120" cy="2391802"/>
+            <a:off x="914399" y="1280161"/>
+            <a:ext cx="4389122" cy="2391800"/>
           </a:xfrm>
           <a:prstGeom prst="rect">
             <a:avLst/>
@@ -2421,7 +2421,7 @@
           </a:extLst>
         </p:spPr>
         <p:txBody>
-          <a:bodyPr lIns="45719" rIns="45719">
+          <a:bodyPr lIns="45718" tIns="45718" rIns="45718" bIns="45718">
             <a:spAutoFit/>
           </a:bodyPr>
           <a:lstStyle/>
@@ -2475,7 +2475,7 @@
         <p:spPr>
           <a:xfrm>
             <a:off x="5852159" y="1097280"/>
-            <a:ext cx="2926081" cy="1554481"/>
+            <a:ext cx="2926082" cy="1554482"/>
           </a:xfrm>
           <a:prstGeom prst="rect">
             <a:avLst/>
@@ -2495,7 +2495,7 @@
           </a:effectLst>
         </p:spPr>
         <p:txBody>
-          <a:bodyPr lIns="45719" rIns="45719"/>
+          <a:bodyPr lIns="45718" tIns="45718" rIns="45718" bIns="45718"/>
           <a:lstStyle/>
           <a:p>
             <a:pPr/>
@@ -2511,7 +2511,7 @@
         <p:spPr>
           <a:xfrm>
             <a:off x="5852159" y="1346199"/>
-            <a:ext cx="2926081" cy="711201"/>
+            <a:ext cx="2926082" cy="711201"/>
           </a:xfrm>
           <a:prstGeom prst="rect">
             <a:avLst/>
@@ -2558,8 +2558,8 @@
         </p:nvSpPr>
         <p:spPr>
           <a:xfrm>
-            <a:off x="5897879" y="2103120"/>
-            <a:ext cx="2834641" cy="258202"/>
+            <a:off x="5897879" y="2103121"/>
+            <a:ext cx="2834642" cy="258200"/>
           </a:xfrm>
           <a:prstGeom prst="rect">
             <a:avLst/>
@@ -2574,7 +2574,7 @@
           </a:extLst>
         </p:spPr>
         <p:txBody>
-          <a:bodyPr lIns="45719" rIns="45719">
+          <a:bodyPr lIns="45718" tIns="45718" rIns="45718" bIns="45718">
             <a:spAutoFit/>
           </a:bodyPr>
           <a:lstStyle>
@@ -2603,7 +2603,7 @@
         <p:spPr>
           <a:xfrm>
             <a:off x="5852159" y="2880360"/>
-            <a:ext cx="2926081" cy="1554481"/>
+            <a:ext cx="2926082" cy="1554482"/>
           </a:xfrm>
           <a:prstGeom prst="rect">
             <a:avLst/>
@@ -2623,7 +2623,7 @@
           </a:effectLst>
         </p:spPr>
         <p:txBody>
-          <a:bodyPr lIns="45719" rIns="45719"/>
+          <a:bodyPr lIns="45718" tIns="45718" rIns="45718" bIns="45718"/>
           <a:lstStyle/>
           <a:p>
             <a:pPr/>
@@ -2638,8 +2638,8 @@
         </p:nvSpPr>
         <p:spPr>
           <a:xfrm>
-            <a:off x="5852159" y="3129279"/>
-            <a:ext cx="2926081" cy="711201"/>
+            <a:off x="5852159" y="3129278"/>
+            <a:ext cx="2926082" cy="711201"/>
           </a:xfrm>
           <a:prstGeom prst="rect">
             <a:avLst/>
@@ -2687,7 +2687,7 @@
         <p:spPr>
           <a:xfrm>
             <a:off x="5897879" y="3886199"/>
-            <a:ext cx="2834641" cy="258203"/>
+            <a:ext cx="2834642" cy="258201"/>
           </a:xfrm>
           <a:prstGeom prst="rect">
             <a:avLst/>
@@ -2702,7 +2702,7 @@
           </a:extLst>
         </p:spPr>
         <p:txBody>
-          <a:bodyPr lIns="45719" rIns="45719">
+          <a:bodyPr lIns="45718" tIns="45718" rIns="45718" bIns="45718">
             <a:spAutoFit/>
           </a:bodyPr>
           <a:lstStyle>
@@ -2717,7 +2717,7 @@
           <a:p>
             <a:pPr/>
             <a:r>
-              <a:t>unika typer att prediktera</a:t>
+              <a:t>unika typer att förutsäga</a:t>
             </a:r>
           </a:p>
         </p:txBody>
@@ -2763,7 +2763,7 @@
         </p:nvSpPr>
         <p:spPr>
           <a:xfrm>
-            <a:off x="548640" y="327660"/>
+            <a:off x="548640" y="327659"/>
             <a:ext cx="8229601" cy="533401"/>
           </a:xfrm>
           <a:prstGeom prst="rect">
@@ -2832,7 +2832,7 @@
           </a:effectLst>
         </p:spPr>
         <p:txBody>
-          <a:bodyPr lIns="45719" rIns="45719"/>
+          <a:bodyPr lIns="45718" tIns="45718" rIns="45718" bIns="45718"/>
           <a:lstStyle/>
           <a:p>
             <a:pPr/>
@@ -2848,7 +2848,7 @@
         <p:spPr>
           <a:xfrm>
             <a:off x="548640" y="1097280"/>
-            <a:ext cx="1920240" cy="64009"/>
+            <a:ext cx="1920240" cy="64010"/>
           </a:xfrm>
           <a:prstGeom prst="rect">
             <a:avLst/>
@@ -2861,7 +2861,7 @@
           </a:ln>
         </p:spPr>
         <p:txBody>
-          <a:bodyPr lIns="45719" rIns="45719"/>
+          <a:bodyPr lIns="45718" tIns="45718" rIns="45718" bIns="45718"/>
           <a:lstStyle/>
           <a:p>
             <a:pPr/>
@@ -2876,8 +2876,8 @@
         </p:nvSpPr>
         <p:spPr>
           <a:xfrm>
-            <a:off x="731519" y="1280160"/>
-            <a:ext cx="1554482" cy="307341"/>
+            <a:off x="731518" y="1280161"/>
+            <a:ext cx="1554484" cy="307339"/>
           </a:xfrm>
           <a:prstGeom prst="rect">
             <a:avLst/>
@@ -2892,7 +2892,7 @@
           </a:extLst>
         </p:spPr>
         <p:txBody>
-          <a:bodyPr lIns="45719" rIns="45719">
+          <a:bodyPr lIns="45718" tIns="45718" rIns="45718" bIns="45718">
             <a:spAutoFit/>
           </a:bodyPr>
           <a:lstStyle>
@@ -2924,8 +2924,8 @@
         </p:nvSpPr>
         <p:spPr>
           <a:xfrm>
-            <a:off x="731519" y="1828800"/>
-            <a:ext cx="1554482" cy="867802"/>
+            <a:off x="731518" y="1828801"/>
+            <a:ext cx="1554484" cy="1274200"/>
           </a:xfrm>
           <a:prstGeom prst="rect">
             <a:avLst/>
@@ -2940,7 +2940,7 @@
           </a:extLst>
         </p:spPr>
         <p:txBody>
-          <a:bodyPr lIns="45719" rIns="45719">
+          <a:bodyPr lIns="45718" tIns="45718" rIns="45718" bIns="45718">
             <a:spAutoFit/>
           </a:bodyPr>
           <a:lstStyle/>
@@ -2949,7 +2949,7 @@
               <a:defRPr sz="1300"/>
             </a:pPr>
             <a:r>
-              <a:t>HP, Attack, Defense,</a:t>
+              <a:t>HP</a:t>
             </a:r>
           </a:p>
           <a:p>
@@ -2957,7 +2957,31 @@
               <a:defRPr sz="1300"/>
             </a:pPr>
             <a:r>
-              <a:t>Sp. Attack, Sp. Defense,</a:t>
+              <a:t>Attack</a:t>
+            </a:r>
+          </a:p>
+          <a:p>
+            <a:pPr>
+              <a:defRPr sz="1300"/>
+            </a:pPr>
+            <a:r>
+              <a:t>Defense,</a:t>
+            </a:r>
+          </a:p>
+          <a:p>
+            <a:pPr>
+              <a:defRPr sz="1300"/>
+            </a:pPr>
+            <a:r>
+              <a:t>Sp. Attack,</a:t>
+            </a:r>
+          </a:p>
+          <a:p>
+            <a:pPr>
+              <a:defRPr sz="1300"/>
+            </a:pPr>
+            <a:r>
+              <a:t>Sp. Defense,</a:t>
             </a:r>
           </a:p>
           <a:p>
@@ -2999,7 +3023,7 @@
           </a:effectLst>
         </p:spPr>
         <p:txBody>
-          <a:bodyPr lIns="45719" rIns="45719"/>
+          <a:bodyPr lIns="45718" tIns="45718" rIns="45718" bIns="45718"/>
           <a:lstStyle/>
           <a:p>
             <a:pPr/>
@@ -3015,7 +3039,7 @@
         <p:spPr>
           <a:xfrm>
             <a:off x="2651760" y="1097280"/>
-            <a:ext cx="1920241" cy="64009"/>
+            <a:ext cx="1920241" cy="64010"/>
           </a:xfrm>
           <a:prstGeom prst="rect">
             <a:avLst/>
@@ -3028,7 +3052,7 @@
           </a:ln>
         </p:spPr>
         <p:txBody>
-          <a:bodyPr lIns="45719" rIns="45719"/>
+          <a:bodyPr lIns="45718" tIns="45718" rIns="45718" bIns="45718"/>
           <a:lstStyle/>
           <a:p>
             <a:pPr/>
@@ -3043,8 +3067,8 @@
         </p:nvSpPr>
         <p:spPr>
           <a:xfrm>
-            <a:off x="2834640" y="1280160"/>
-            <a:ext cx="1554481" cy="307341"/>
+            <a:off x="2834639" y="1280161"/>
+            <a:ext cx="1554482" cy="307339"/>
           </a:xfrm>
           <a:prstGeom prst="rect">
             <a:avLst/>
@@ -3059,7 +3083,7 @@
           </a:extLst>
         </p:spPr>
         <p:txBody>
-          <a:bodyPr lIns="45719" rIns="45719">
+          <a:bodyPr lIns="45718" tIns="45718" rIns="45718" bIns="45718">
             <a:spAutoFit/>
           </a:bodyPr>
           <a:lstStyle>
@@ -3091,8 +3115,8 @@
         </p:nvSpPr>
         <p:spPr>
           <a:xfrm>
-            <a:off x="2834640" y="1828800"/>
-            <a:ext cx="1554481" cy="461402"/>
+            <a:off x="2834639" y="1828800"/>
+            <a:ext cx="1554482" cy="867801"/>
           </a:xfrm>
           <a:prstGeom prst="rect">
             <a:avLst/>
@@ -3107,7 +3131,7 @@
           </a:extLst>
         </p:spPr>
         <p:txBody>
-          <a:bodyPr lIns="45719" rIns="45719">
+          <a:bodyPr lIns="45718" tIns="45718" rIns="45718" bIns="45718">
             <a:spAutoFit/>
           </a:bodyPr>
           <a:lstStyle/>
@@ -3116,7 +3140,7 @@
               <a:defRPr sz="1300"/>
             </a:pPr>
             <a:r>
-              <a:t>Height, Weight,</a:t>
+              <a:t>Height,</a:t>
             </a:r>
           </a:p>
           <a:p>
@@ -3124,7 +3148,23 @@
               <a:defRPr sz="1300"/>
             </a:pPr>
             <a:r>
-              <a:t>Shape, Color</a:t>
+              <a:t>Weight,</a:t>
+            </a:r>
+          </a:p>
+          <a:p>
+            <a:pPr>
+              <a:defRPr sz="1300"/>
+            </a:pPr>
+            <a:r>
+              <a:t>Shape,</a:t>
+            </a:r>
+          </a:p>
+          <a:p>
+            <a:pPr>
+              <a:defRPr sz="1300"/>
+            </a:pPr>
+            <a:r>
+              <a:t>Color</a:t>
             </a:r>
           </a:p>
         </p:txBody>
@@ -3158,7 +3198,7 @@
           </a:effectLst>
         </p:spPr>
         <p:txBody>
-          <a:bodyPr lIns="45719" rIns="45719"/>
+          <a:bodyPr lIns="45718" tIns="45718" rIns="45718" bIns="45718"/>
           <a:lstStyle/>
           <a:p>
             <a:pPr/>
@@ -3174,7 +3214,7 @@
         <p:spPr>
           <a:xfrm>
             <a:off x="4754879" y="1097280"/>
-            <a:ext cx="1920241" cy="64009"/>
+            <a:ext cx="1920241" cy="64010"/>
           </a:xfrm>
           <a:prstGeom prst="rect">
             <a:avLst/>
@@ -3187,7 +3227,7 @@
           </a:ln>
         </p:spPr>
         <p:txBody>
-          <a:bodyPr lIns="45719" rIns="45719"/>
+          <a:bodyPr lIns="45718" tIns="45718" rIns="45718" bIns="45718"/>
           <a:lstStyle/>
           <a:p>
             <a:pPr/>
@@ -3202,8 +3242,8 @@
         </p:nvSpPr>
         <p:spPr>
           <a:xfrm>
-            <a:off x="4937760" y="1280160"/>
-            <a:ext cx="1554481" cy="307341"/>
+            <a:off x="4937759" y="1280161"/>
+            <a:ext cx="1554482" cy="307339"/>
           </a:xfrm>
           <a:prstGeom prst="rect">
             <a:avLst/>
@@ -3218,7 +3258,7 @@
           </a:extLst>
         </p:spPr>
         <p:txBody>
-          <a:bodyPr lIns="45719" rIns="45719">
+          <a:bodyPr lIns="45718" tIns="45718" rIns="45718" bIns="45718">
             <a:spAutoFit/>
           </a:bodyPr>
           <a:lstStyle>
@@ -3250,8 +3290,8 @@
         </p:nvSpPr>
         <p:spPr>
           <a:xfrm>
-            <a:off x="4937760" y="1828800"/>
-            <a:ext cx="1554481" cy="664602"/>
+            <a:off x="4937759" y="1828800"/>
+            <a:ext cx="1554482" cy="867801"/>
           </a:xfrm>
           <a:prstGeom prst="rect">
             <a:avLst/>
@@ -3266,7 +3306,7 @@
           </a:extLst>
         </p:spPr>
         <p:txBody>
-          <a:bodyPr lIns="45719" rIns="45719">
+          <a:bodyPr lIns="45718" tIns="45718" rIns="45718" bIns="45718">
             <a:spAutoFit/>
           </a:bodyPr>
           <a:lstStyle/>
@@ -3275,7 +3315,15 @@
               <a:defRPr sz="1300"/>
             </a:pPr>
             <a:r>
-              <a:t>Habitat, Growth Rate,</a:t>
+              <a:t>Habitat,</a:t>
+            </a:r>
+          </a:p>
+          <a:p>
+            <a:pPr>
+              <a:defRPr sz="1300"/>
+            </a:pPr>
+            <a:r>
+              <a:t>Growth Rate,</a:t>
             </a:r>
           </a:p>
           <a:p>
@@ -3325,7 +3373,7 @@
           </a:effectLst>
         </p:spPr>
         <p:txBody>
-          <a:bodyPr lIns="45719" rIns="45719"/>
+          <a:bodyPr lIns="45718" tIns="45718" rIns="45718" bIns="45718"/>
           <a:lstStyle/>
           <a:p>
             <a:pPr/>
@@ -3341,7 +3389,7 @@
         <p:spPr>
           <a:xfrm>
             <a:off x="6858000" y="1097280"/>
-            <a:ext cx="1920240" cy="64009"/>
+            <a:ext cx="1920240" cy="64010"/>
           </a:xfrm>
           <a:prstGeom prst="rect">
             <a:avLst/>
@@ -3354,7 +3402,7 @@
           </a:ln>
         </p:spPr>
         <p:txBody>
-          <a:bodyPr lIns="45719" rIns="45719"/>
+          <a:bodyPr lIns="45718" tIns="45718" rIns="45718" bIns="45718"/>
           <a:lstStyle/>
           <a:p>
             <a:pPr/>
@@ -3369,8 +3417,8 @@
         </p:nvSpPr>
         <p:spPr>
           <a:xfrm>
-            <a:off x="7040879" y="1280160"/>
-            <a:ext cx="1554481" cy="307341"/>
+            <a:off x="7040878" y="1280161"/>
+            <a:ext cx="1554482" cy="307339"/>
           </a:xfrm>
           <a:prstGeom prst="rect">
             <a:avLst/>
@@ -3385,7 +3433,7 @@
           </a:extLst>
         </p:spPr>
         <p:txBody>
-          <a:bodyPr lIns="45719" rIns="45719">
+          <a:bodyPr lIns="45718" tIns="45718" rIns="45718" bIns="45718">
             <a:spAutoFit/>
           </a:bodyPr>
           <a:lstStyle>
@@ -3417,8 +3465,8 @@
         </p:nvSpPr>
         <p:spPr>
           <a:xfrm>
-            <a:off x="7040879" y="1828800"/>
-            <a:ext cx="1554481" cy="664602"/>
+            <a:off x="7040878" y="1828800"/>
+            <a:ext cx="1554482" cy="664601"/>
           </a:xfrm>
           <a:prstGeom prst="rect">
             <a:avLst/>
@@ -3433,7 +3481,7 @@
           </a:extLst>
         </p:spPr>
         <p:txBody>
-          <a:bodyPr lIns="45719" rIns="45719">
+          <a:bodyPr lIns="45718" tIns="45718" rIns="45718" bIns="45718">
             <a:spAutoFit/>
           </a:bodyPr>
           <a:lstStyle/>
@@ -3471,8 +3519,8 @@
         </p:nvSpPr>
         <p:spPr>
           <a:xfrm>
-            <a:off x="594360" y="3749040"/>
-            <a:ext cx="7955279" cy="438805"/>
+            <a:off x="594360" y="3749041"/>
+            <a:ext cx="7955279" cy="438803"/>
           </a:xfrm>
           <a:prstGeom prst="rect">
             <a:avLst/>
@@ -3487,7 +3535,7 @@
           </a:extLst>
         </p:spPr>
         <p:txBody>
-          <a:bodyPr lIns="45719" rIns="45719">
+          <a:bodyPr lIns="45718" tIns="45718" rIns="45718" bIns="45718">
             <a:spAutoFit/>
           </a:bodyPr>
           <a:lstStyle>
@@ -3548,7 +3596,7 @@
         </p:nvSpPr>
         <p:spPr>
           <a:xfrm>
-            <a:off x="548640" y="327660"/>
+            <a:off x="548640" y="327659"/>
             <a:ext cx="8229601" cy="533401"/>
           </a:xfrm>
           <a:prstGeom prst="rect">
@@ -3597,7 +3645,7 @@
         <p:spPr>
           <a:xfrm>
             <a:off x="731519" y="1280160"/>
-            <a:ext cx="640081" cy="640081"/>
+            <a:ext cx="640083" cy="640083"/>
           </a:xfrm>
           <a:prstGeom prst="ellipse">
             <a:avLst/>
@@ -3610,7 +3658,7 @@
           </a:ln>
         </p:spPr>
         <p:txBody>
-          <a:bodyPr lIns="45719" rIns="45719"/>
+          <a:bodyPr lIns="45718" tIns="45718" rIns="45718" bIns="45718"/>
           <a:lstStyle/>
           <a:p>
             <a:pPr/>
@@ -3625,8 +3673,8 @@
         </p:nvSpPr>
         <p:spPr>
           <a:xfrm>
-            <a:off x="777239" y="1389380"/>
-            <a:ext cx="548641" cy="421641"/>
+            <a:off x="777239" y="1389381"/>
+            <a:ext cx="548641" cy="421639"/>
           </a:xfrm>
           <a:prstGeom prst="rect">
             <a:avLst/>
@@ -3641,7 +3689,7 @@
           </a:extLst>
         </p:spPr>
         <p:txBody>
-          <a:bodyPr lIns="45719" rIns="45719" anchor="ctr">
+          <a:bodyPr lIns="45718" tIns="45718" rIns="45718" bIns="45718" anchor="ctr">
             <a:spAutoFit/>
           </a:bodyPr>
           <a:lstStyle>
@@ -3673,8 +3721,8 @@
         </p:nvSpPr>
         <p:spPr>
           <a:xfrm>
-            <a:off x="411479" y="2057399"/>
-            <a:ext cx="1280161" cy="294641"/>
+            <a:off x="411478" y="2057400"/>
+            <a:ext cx="1280163" cy="294639"/>
           </a:xfrm>
           <a:prstGeom prst="rect">
             <a:avLst/>
@@ -3689,7 +3737,7 @@
           </a:extLst>
         </p:spPr>
         <p:txBody>
-          <a:bodyPr lIns="45719" rIns="45719">
+          <a:bodyPr lIns="45718" tIns="45718" rIns="45718" bIns="45718">
             <a:spAutoFit/>
           </a:bodyPr>
           <a:lstStyle>
@@ -3721,8 +3769,8 @@
         </p:nvSpPr>
         <p:spPr>
           <a:xfrm>
-            <a:off x="411479" y="2468879"/>
-            <a:ext cx="1280161" cy="390809"/>
+            <a:off x="411478" y="2468879"/>
+            <a:ext cx="1280163" cy="390807"/>
           </a:xfrm>
           <a:prstGeom prst="rect">
             <a:avLst/>
@@ -3737,7 +3785,7 @@
           </a:extLst>
         </p:spPr>
         <p:txBody>
-          <a:bodyPr lIns="45719" rIns="45719">
+          <a:bodyPr lIns="45718" tIns="45718" rIns="45718" bIns="45718">
             <a:spAutoFit/>
           </a:bodyPr>
           <a:lstStyle/>
@@ -3775,8 +3823,8 @@
         </p:nvSpPr>
         <p:spPr>
           <a:xfrm>
-            <a:off x="1600200" y="1600200"/>
-            <a:ext cx="457201" cy="0"/>
+            <a:off x="1600199" y="1600200"/>
+            <a:ext cx="457202" cy="0"/>
           </a:xfrm>
           <a:prstGeom prst="line">
             <a:avLst/>
@@ -3788,7 +3836,7 @@
           </a:ln>
         </p:spPr>
         <p:txBody>
-          <a:bodyPr lIns="45719" rIns="45719"/>
+          <a:bodyPr lIns="45718" tIns="45718" rIns="45718" bIns="45718"/>
           <a:lstStyle/>
           <a:p>
             <a:pPr/>
@@ -3804,7 +3852,7 @@
         <p:spPr>
           <a:xfrm>
             <a:off x="2194560" y="1280160"/>
-            <a:ext cx="640081" cy="640081"/>
+            <a:ext cx="640083" cy="640083"/>
           </a:xfrm>
           <a:prstGeom prst="ellipse">
             <a:avLst/>
@@ -3817,7 +3865,7 @@
           </a:ln>
         </p:spPr>
         <p:txBody>
-          <a:bodyPr lIns="45719" rIns="45719"/>
+          <a:bodyPr lIns="45718" tIns="45718" rIns="45718" bIns="45718"/>
           <a:lstStyle/>
           <a:p>
             <a:pPr/>
@@ -3832,8 +3880,8 @@
         </p:nvSpPr>
         <p:spPr>
           <a:xfrm>
-            <a:off x="2240280" y="1389380"/>
-            <a:ext cx="548641" cy="421641"/>
+            <a:off x="2240279" y="1389381"/>
+            <a:ext cx="548642" cy="421639"/>
           </a:xfrm>
           <a:prstGeom prst="rect">
             <a:avLst/>
@@ -3848,7 +3896,7 @@
           </a:extLst>
         </p:spPr>
         <p:txBody>
-          <a:bodyPr lIns="45719" rIns="45719" anchor="ctr">
+          <a:bodyPr lIns="45718" tIns="45718" rIns="45718" bIns="45718" anchor="ctr">
             <a:spAutoFit/>
           </a:bodyPr>
           <a:lstStyle>
@@ -3880,8 +3928,8 @@
         </p:nvSpPr>
         <p:spPr>
           <a:xfrm>
-            <a:off x="1874519" y="2057399"/>
-            <a:ext cx="1280162" cy="294641"/>
+            <a:off x="1874518" y="2057400"/>
+            <a:ext cx="1280163" cy="294639"/>
           </a:xfrm>
           <a:prstGeom prst="rect">
             <a:avLst/>
@@ -3896,7 +3944,7 @@
           </a:extLst>
         </p:spPr>
         <p:txBody>
-          <a:bodyPr lIns="45719" rIns="45719">
+          <a:bodyPr lIns="45718" tIns="45718" rIns="45718" bIns="45718">
             <a:spAutoFit/>
           </a:bodyPr>
           <a:lstStyle>
@@ -3928,8 +3976,8 @@
         </p:nvSpPr>
         <p:spPr>
           <a:xfrm>
-            <a:off x="1874519" y="2468879"/>
-            <a:ext cx="1280162" cy="390809"/>
+            <a:off x="1874518" y="2468879"/>
+            <a:ext cx="1280163" cy="390807"/>
           </a:xfrm>
           <a:prstGeom prst="rect">
             <a:avLst/>
@@ -3944,7 +3992,7 @@
           </a:extLst>
         </p:spPr>
         <p:txBody>
-          <a:bodyPr lIns="45719" rIns="45719">
+          <a:bodyPr lIns="45718" tIns="45718" rIns="45718" bIns="45718">
             <a:spAutoFit/>
           </a:bodyPr>
           <a:lstStyle/>
@@ -3982,8 +4030,8 @@
         </p:nvSpPr>
         <p:spPr>
           <a:xfrm>
-            <a:off x="3063239" y="1600200"/>
-            <a:ext cx="457201" cy="0"/>
+            <a:off x="3063238" y="1600200"/>
+            <a:ext cx="457202" cy="0"/>
           </a:xfrm>
           <a:prstGeom prst="line">
             <a:avLst/>
@@ -3995,7 +4043,7 @@
           </a:ln>
         </p:spPr>
         <p:txBody>
-          <a:bodyPr lIns="45719" rIns="45719"/>
+          <a:bodyPr lIns="45718" tIns="45718" rIns="45718" bIns="45718"/>
           <a:lstStyle/>
           <a:p>
             <a:pPr/>
@@ -4010,8 +4058,8 @@
         </p:nvSpPr>
         <p:spPr>
           <a:xfrm>
-            <a:off x="3657599" y="1280160"/>
-            <a:ext cx="640082" cy="640081"/>
+            <a:off x="3657598" y="1280160"/>
+            <a:ext cx="640083" cy="640083"/>
           </a:xfrm>
           <a:prstGeom prst="ellipse">
             <a:avLst/>
@@ -4024,7 +4072,7 @@
           </a:ln>
         </p:spPr>
         <p:txBody>
-          <a:bodyPr lIns="45719" rIns="45719"/>
+          <a:bodyPr lIns="45718" tIns="45718" rIns="45718" bIns="45718"/>
           <a:lstStyle/>
           <a:p>
             <a:pPr/>
@@ -4039,8 +4087,8 @@
         </p:nvSpPr>
         <p:spPr>
           <a:xfrm>
-            <a:off x="3703319" y="1389380"/>
-            <a:ext cx="548642" cy="421641"/>
+            <a:off x="3703318" y="1389381"/>
+            <a:ext cx="548643" cy="421639"/>
           </a:xfrm>
           <a:prstGeom prst="rect">
             <a:avLst/>
@@ -4055,7 +4103,7 @@
           </a:extLst>
         </p:spPr>
         <p:txBody>
-          <a:bodyPr lIns="45719" rIns="45719" anchor="ctr">
+          <a:bodyPr lIns="45718" tIns="45718" rIns="45718" bIns="45718" anchor="ctr">
             <a:spAutoFit/>
           </a:bodyPr>
           <a:lstStyle>
@@ -4087,8 +4135,8 @@
         </p:nvSpPr>
         <p:spPr>
           <a:xfrm>
-            <a:off x="3337560" y="2057399"/>
-            <a:ext cx="1280161" cy="294641"/>
+            <a:off x="3337559" y="2057400"/>
+            <a:ext cx="1280162" cy="294639"/>
           </a:xfrm>
           <a:prstGeom prst="rect">
             <a:avLst/>
@@ -4103,7 +4151,7 @@
           </a:extLst>
         </p:spPr>
         <p:txBody>
-          <a:bodyPr lIns="45719" rIns="45719">
+          <a:bodyPr lIns="45718" tIns="45718" rIns="45718" bIns="45718">
             <a:spAutoFit/>
           </a:bodyPr>
           <a:lstStyle>
@@ -4135,8 +4183,8 @@
         </p:nvSpPr>
         <p:spPr>
           <a:xfrm>
-            <a:off x="3337560" y="2468879"/>
-            <a:ext cx="1280161" cy="390809"/>
+            <a:off x="3337559" y="2468879"/>
+            <a:ext cx="1280162" cy="390807"/>
           </a:xfrm>
           <a:prstGeom prst="rect">
             <a:avLst/>
@@ -4151,7 +4199,7 @@
           </a:extLst>
         </p:spPr>
         <p:txBody>
-          <a:bodyPr lIns="45719" rIns="45719">
+          <a:bodyPr lIns="45718" tIns="45718" rIns="45718" bIns="45718">
             <a:spAutoFit/>
           </a:bodyPr>
           <a:lstStyle/>
@@ -4190,7 +4238,7 @@
         <p:spPr>
           <a:xfrm>
             <a:off x="4526279" y="1600200"/>
-            <a:ext cx="457201" cy="0"/>
+            <a:ext cx="457202" cy="0"/>
           </a:xfrm>
           <a:prstGeom prst="line">
             <a:avLst/>
@@ -4202,7 +4250,7 @@
           </a:ln>
         </p:spPr>
         <p:txBody>
-          <a:bodyPr lIns="45719" rIns="45719"/>
+          <a:bodyPr lIns="45718" tIns="45718" rIns="45718" bIns="45718"/>
           <a:lstStyle/>
           <a:p>
             <a:pPr/>
@@ -4218,7 +4266,7 @@
         <p:spPr>
           <a:xfrm>
             <a:off x="5120640" y="1280160"/>
-            <a:ext cx="640081" cy="640081"/>
+            <a:ext cx="640083" cy="640083"/>
           </a:xfrm>
           <a:prstGeom prst="ellipse">
             <a:avLst/>
@@ -4231,7 +4279,7 @@
           </a:ln>
         </p:spPr>
         <p:txBody>
-          <a:bodyPr lIns="45719" rIns="45719"/>
+          <a:bodyPr lIns="45718" tIns="45718" rIns="45718" bIns="45718"/>
           <a:lstStyle/>
           <a:p>
             <a:pPr/>
@@ -4246,8 +4294,8 @@
         </p:nvSpPr>
         <p:spPr>
           <a:xfrm>
-            <a:off x="5166360" y="1389380"/>
-            <a:ext cx="548641" cy="421641"/>
+            <a:off x="5166359" y="1389381"/>
+            <a:ext cx="548642" cy="421639"/>
           </a:xfrm>
           <a:prstGeom prst="rect">
             <a:avLst/>
@@ -4262,7 +4310,7 @@
           </a:extLst>
         </p:spPr>
         <p:txBody>
-          <a:bodyPr lIns="45719" rIns="45719" anchor="ctr">
+          <a:bodyPr lIns="45718" tIns="45718" rIns="45718" bIns="45718" anchor="ctr">
             <a:spAutoFit/>
           </a:bodyPr>
           <a:lstStyle>
@@ -4294,8 +4342,8 @@
         </p:nvSpPr>
         <p:spPr>
           <a:xfrm>
-            <a:off x="4800599" y="2057399"/>
-            <a:ext cx="1280161" cy="294641"/>
+            <a:off x="4800598" y="2057400"/>
+            <a:ext cx="1280162" cy="294639"/>
           </a:xfrm>
           <a:prstGeom prst="rect">
             <a:avLst/>
@@ -4310,7 +4358,7 @@
           </a:extLst>
         </p:spPr>
         <p:txBody>
-          <a:bodyPr lIns="45719" rIns="45719">
+          <a:bodyPr lIns="45718" tIns="45718" rIns="45718" bIns="45718">
             <a:spAutoFit/>
           </a:bodyPr>
           <a:lstStyle>
@@ -4342,8 +4390,8 @@
         </p:nvSpPr>
         <p:spPr>
           <a:xfrm>
-            <a:off x="4800599" y="2468879"/>
-            <a:ext cx="1280161" cy="390809"/>
+            <a:off x="4800598" y="2468879"/>
+            <a:ext cx="1280162" cy="390807"/>
           </a:xfrm>
           <a:prstGeom prst="rect">
             <a:avLst/>
@@ -4358,7 +4406,7 @@
           </a:extLst>
         </p:spPr>
         <p:txBody>
-          <a:bodyPr lIns="45719" rIns="45719">
+          <a:bodyPr lIns="45718" tIns="45718" rIns="45718" bIns="45718">
             <a:spAutoFit/>
           </a:bodyPr>
           <a:lstStyle/>
@@ -4397,7 +4445,7 @@
         <p:spPr>
           <a:xfrm>
             <a:off x="5989320" y="1600200"/>
-            <a:ext cx="457201" cy="0"/>
+            <a:ext cx="457202" cy="0"/>
           </a:xfrm>
           <a:prstGeom prst="line">
             <a:avLst/>
@@ -4409,7 +4457,7 @@
           </a:ln>
         </p:spPr>
         <p:txBody>
-          <a:bodyPr lIns="45719" rIns="45719"/>
+          <a:bodyPr lIns="45718" tIns="45718" rIns="45718" bIns="45718"/>
           <a:lstStyle/>
           <a:p>
             <a:pPr/>
@@ -4425,7 +4473,7 @@
         <p:spPr>
           <a:xfrm>
             <a:off x="6583680" y="1280160"/>
-            <a:ext cx="640081" cy="640081"/>
+            <a:ext cx="640083" cy="640083"/>
           </a:xfrm>
           <a:prstGeom prst="ellipse">
             <a:avLst/>
@@ -4438,7 +4486,7 @@
           </a:ln>
         </p:spPr>
         <p:txBody>
-          <a:bodyPr lIns="45719" rIns="45719"/>
+          <a:bodyPr lIns="45718" tIns="45718" rIns="45718" bIns="45718"/>
           <a:lstStyle/>
           <a:p>
             <a:pPr/>
@@ -4453,8 +4501,8 @@
         </p:nvSpPr>
         <p:spPr>
           <a:xfrm>
-            <a:off x="6629400" y="1389380"/>
-            <a:ext cx="548641" cy="421641"/>
+            <a:off x="6629400" y="1389381"/>
+            <a:ext cx="548641" cy="421639"/>
           </a:xfrm>
           <a:prstGeom prst="rect">
             <a:avLst/>
@@ -4469,7 +4517,7 @@
           </a:extLst>
         </p:spPr>
         <p:txBody>
-          <a:bodyPr lIns="45719" rIns="45719" anchor="ctr">
+          <a:bodyPr lIns="45718" tIns="45718" rIns="45718" bIns="45718" anchor="ctr">
             <a:spAutoFit/>
           </a:bodyPr>
           <a:lstStyle>
@@ -4501,8 +4549,8 @@
         </p:nvSpPr>
         <p:spPr>
           <a:xfrm>
-            <a:off x="6263640" y="2057399"/>
-            <a:ext cx="1280161" cy="294641"/>
+            <a:off x="6263640" y="2057400"/>
+            <a:ext cx="1280162" cy="294639"/>
           </a:xfrm>
           <a:prstGeom prst="rect">
             <a:avLst/>
@@ -4517,7 +4565,7 @@
           </a:extLst>
         </p:spPr>
         <p:txBody>
-          <a:bodyPr lIns="45719" rIns="45719">
+          <a:bodyPr lIns="45718" tIns="45718" rIns="45718" bIns="45718">
             <a:spAutoFit/>
           </a:bodyPr>
           <a:lstStyle>
@@ -4550,7 +4598,7 @@
         <p:spPr>
           <a:xfrm>
             <a:off x="6263640" y="2468879"/>
-            <a:ext cx="1280161" cy="390809"/>
+            <a:ext cx="1280162" cy="390807"/>
           </a:xfrm>
           <a:prstGeom prst="rect">
             <a:avLst/>
@@ -4565,7 +4613,7 @@
           </a:extLst>
         </p:spPr>
         <p:txBody>
-          <a:bodyPr lIns="45719" rIns="45719">
+          <a:bodyPr lIns="45718" tIns="45718" rIns="45718" bIns="45718">
             <a:spAutoFit/>
           </a:bodyPr>
           <a:lstStyle/>
@@ -4604,7 +4652,7 @@
         <p:spPr>
           <a:xfrm>
             <a:off x="7452359" y="1600200"/>
-            <a:ext cx="457201" cy="0"/>
+            <a:ext cx="457202" cy="0"/>
           </a:xfrm>
           <a:prstGeom prst="line">
             <a:avLst/>
@@ -4616,7 +4664,7 @@
           </a:ln>
         </p:spPr>
         <p:txBody>
-          <a:bodyPr lIns="45719" rIns="45719"/>
+          <a:bodyPr lIns="45718" tIns="45718" rIns="45718" bIns="45718"/>
           <a:lstStyle/>
           <a:p>
             <a:pPr/>
@@ -4631,8 +4679,8 @@
         </p:nvSpPr>
         <p:spPr>
           <a:xfrm>
-            <a:off x="8046719" y="1280160"/>
-            <a:ext cx="640081" cy="640081"/>
+            <a:off x="8046718" y="1280160"/>
+            <a:ext cx="640083" cy="640083"/>
           </a:xfrm>
           <a:prstGeom prst="ellipse">
             <a:avLst/>
@@ -4645,7 +4693,7 @@
           </a:ln>
         </p:spPr>
         <p:txBody>
-          <a:bodyPr lIns="45719" rIns="45719"/>
+          <a:bodyPr lIns="45718" tIns="45718" rIns="45718" bIns="45718"/>
           <a:lstStyle/>
           <a:p>
             <a:pPr/>
@@ -4660,8 +4708,8 @@
         </p:nvSpPr>
         <p:spPr>
           <a:xfrm>
-            <a:off x="8092439" y="1389380"/>
-            <a:ext cx="548641" cy="421641"/>
+            <a:off x="8092439" y="1389381"/>
+            <a:ext cx="548642" cy="421639"/>
           </a:xfrm>
           <a:prstGeom prst="rect">
             <a:avLst/>
@@ -4676,7 +4724,7 @@
           </a:extLst>
         </p:spPr>
         <p:txBody>
-          <a:bodyPr lIns="45719" rIns="45719" anchor="ctr">
+          <a:bodyPr lIns="45718" tIns="45718" rIns="45718" bIns="45718" anchor="ctr">
             <a:spAutoFit/>
           </a:bodyPr>
           <a:lstStyle>
@@ -4708,8 +4756,8 @@
         </p:nvSpPr>
         <p:spPr>
           <a:xfrm>
-            <a:off x="7726679" y="2057399"/>
-            <a:ext cx="1280161" cy="294641"/>
+            <a:off x="7726678" y="2057400"/>
+            <a:ext cx="1280162" cy="294639"/>
           </a:xfrm>
           <a:prstGeom prst="rect">
             <a:avLst/>
@@ -4724,7 +4772,7 @@
           </a:extLst>
         </p:spPr>
         <p:txBody>
-          <a:bodyPr lIns="45719" rIns="45719">
+          <a:bodyPr lIns="45718" tIns="45718" rIns="45718" bIns="45718">
             <a:spAutoFit/>
           </a:bodyPr>
           <a:lstStyle>
@@ -4756,8 +4804,8 @@
         </p:nvSpPr>
         <p:spPr>
           <a:xfrm>
-            <a:off x="7726679" y="2468879"/>
-            <a:ext cx="1280161" cy="390809"/>
+            <a:off x="7726678" y="2468879"/>
+            <a:ext cx="1280162" cy="555907"/>
           </a:xfrm>
           <a:prstGeom prst="rect">
             <a:avLst/>
@@ -4772,7 +4820,7 @@
           </a:extLst>
         </p:spPr>
         <p:txBody>
-          <a:bodyPr lIns="45719" rIns="45719">
+          <a:bodyPr lIns="45718" tIns="45718" rIns="45718" bIns="45718">
             <a:spAutoFit/>
           </a:bodyPr>
           <a:lstStyle/>
@@ -4797,7 +4845,7 @@
               </a:defRPr>
             </a:pPr>
             <a:r>
-              <a:t>Confusion Matrix</a:t>
+              <a:t>Confusion Matrix, mm.</a:t>
             </a:r>
           </a:p>
         </p:txBody>
@@ -4811,7 +4859,7 @@
         <p:spPr>
           <a:xfrm>
             <a:off x="594360" y="3327400"/>
-            <a:ext cx="8138161" cy="294641"/>
+            <a:ext cx="8138160" cy="294639"/>
           </a:xfrm>
           <a:prstGeom prst="rect">
             <a:avLst/>
@@ -4826,7 +4874,7 @@
           </a:extLst>
         </p:spPr>
         <p:txBody>
-          <a:bodyPr lIns="45719" rIns="45719" anchor="ctr">
+          <a:bodyPr lIns="45718" tIns="45718" rIns="45718" bIns="45718" anchor="ctr">
             <a:spAutoFit/>
           </a:bodyPr>
           <a:lstStyle>
@@ -4859,7 +4907,7 @@
         <p:spPr>
           <a:xfrm>
             <a:off x="548640" y="3749040"/>
-            <a:ext cx="2606040" cy="822961"/>
+            <a:ext cx="2606040" cy="822962"/>
           </a:xfrm>
           <a:prstGeom prst="rect">
             <a:avLst/>
@@ -4872,7 +4920,7 @@
           </a:ln>
         </p:spPr>
         <p:txBody>
-          <a:bodyPr lIns="45719" rIns="45719"/>
+          <a:bodyPr lIns="45718" tIns="45718" rIns="45718" bIns="45718"/>
           <a:lstStyle/>
           <a:p>
             <a:pPr/>
@@ -4888,7 +4936,7 @@
         <p:spPr>
           <a:xfrm>
             <a:off x="548640" y="3749040"/>
-            <a:ext cx="54865" cy="822961"/>
+            <a:ext cx="54866" cy="822962"/>
           </a:xfrm>
           <a:prstGeom prst="rect">
             <a:avLst/>
@@ -4901,7 +4949,7 @@
           </a:ln>
         </p:spPr>
         <p:txBody>
-          <a:bodyPr lIns="45719" rIns="45719"/>
+          <a:bodyPr lIns="45718" tIns="45718" rIns="45718" bIns="45718"/>
           <a:lstStyle/>
           <a:p>
             <a:pPr/>
@@ -4916,8 +4964,8 @@
         </p:nvSpPr>
         <p:spPr>
           <a:xfrm>
-            <a:off x="777239" y="3836669"/>
-            <a:ext cx="2194561" cy="281941"/>
+            <a:off x="777238" y="3836669"/>
+            <a:ext cx="2194562" cy="281939"/>
           </a:xfrm>
           <a:prstGeom prst="rect">
             <a:avLst/>
@@ -4932,7 +4980,7 @@
           </a:extLst>
         </p:spPr>
         <p:txBody>
-          <a:bodyPr lIns="45719" rIns="45719" anchor="ctr">
+          <a:bodyPr lIns="45718" tIns="45718" rIns="45718" bIns="45718" anchor="ctr">
             <a:spAutoFit/>
           </a:bodyPr>
           <a:lstStyle>
@@ -4964,8 +5012,8 @@
         </p:nvSpPr>
         <p:spPr>
           <a:xfrm>
-            <a:off x="777239" y="4207686"/>
-            <a:ext cx="2194561" cy="225708"/>
+            <a:off x="777238" y="4207687"/>
+            <a:ext cx="2194562" cy="225706"/>
           </a:xfrm>
           <a:prstGeom prst="rect">
             <a:avLst/>
@@ -4980,7 +5028,7 @@
           </a:extLst>
         </p:spPr>
         <p:txBody>
-          <a:bodyPr lIns="45719" rIns="45719" anchor="ctr">
+          <a:bodyPr lIns="45718" tIns="45718" rIns="45718" bIns="45718" anchor="ctr">
             <a:spAutoFit/>
           </a:bodyPr>
           <a:lstStyle>
@@ -5009,7 +5057,7 @@
         <p:spPr>
           <a:xfrm>
             <a:off x="3383279" y="3749040"/>
-            <a:ext cx="2606041" cy="822961"/>
+            <a:ext cx="2606042" cy="822962"/>
           </a:xfrm>
           <a:prstGeom prst="rect">
             <a:avLst/>
@@ -5022,7 +5070,7 @@
           </a:ln>
         </p:spPr>
         <p:txBody>
-          <a:bodyPr lIns="45719" rIns="45719"/>
+          <a:bodyPr lIns="45718" tIns="45718" rIns="45718" bIns="45718"/>
           <a:lstStyle/>
           <a:p>
             <a:pPr/>
@@ -5038,7 +5086,7 @@
         <p:spPr>
           <a:xfrm>
             <a:off x="3383279" y="3749040"/>
-            <a:ext cx="54865" cy="822961"/>
+            <a:ext cx="54866" cy="822962"/>
           </a:xfrm>
           <a:prstGeom prst="rect">
             <a:avLst/>
@@ -5051,7 +5099,7 @@
           </a:ln>
         </p:spPr>
         <p:txBody>
-          <a:bodyPr lIns="45719" rIns="45719"/>
+          <a:bodyPr lIns="45718" tIns="45718" rIns="45718" bIns="45718"/>
           <a:lstStyle/>
           <a:p>
             <a:pPr/>
@@ -5067,7 +5115,7 @@
         <p:spPr>
           <a:xfrm>
             <a:off x="3611879" y="3836669"/>
-            <a:ext cx="2194561" cy="281941"/>
+            <a:ext cx="2194562" cy="281939"/>
           </a:xfrm>
           <a:prstGeom prst="rect">
             <a:avLst/>
@@ -5082,7 +5130,7 @@
           </a:extLst>
         </p:spPr>
         <p:txBody>
-          <a:bodyPr lIns="45719" rIns="45719" anchor="ctr">
+          <a:bodyPr lIns="45718" tIns="45718" rIns="45718" bIns="45718" anchor="ctr">
             <a:spAutoFit/>
           </a:bodyPr>
           <a:lstStyle>
@@ -5114,8 +5162,8 @@
         </p:nvSpPr>
         <p:spPr>
           <a:xfrm>
-            <a:off x="3611879" y="4207686"/>
-            <a:ext cx="2194561" cy="225708"/>
+            <a:off x="3611879" y="4207687"/>
+            <a:ext cx="2194562" cy="225706"/>
           </a:xfrm>
           <a:prstGeom prst="rect">
             <a:avLst/>
@@ -5130,7 +5178,7 @@
           </a:extLst>
         </p:spPr>
         <p:txBody>
-          <a:bodyPr lIns="45719" rIns="45719" anchor="ctr">
+          <a:bodyPr lIns="45718" tIns="45718" rIns="45718" bIns="45718" anchor="ctr">
             <a:spAutoFit/>
           </a:bodyPr>
           <a:lstStyle>
@@ -5159,7 +5207,7 @@
         <p:spPr>
           <a:xfrm>
             <a:off x="6217920" y="3749040"/>
-            <a:ext cx="2606041" cy="822961"/>
+            <a:ext cx="2606042" cy="822962"/>
           </a:xfrm>
           <a:prstGeom prst="rect">
             <a:avLst/>
@@ -5172,7 +5220,7 @@
           </a:ln>
         </p:spPr>
         <p:txBody>
-          <a:bodyPr lIns="45719" rIns="45719"/>
+          <a:bodyPr lIns="45718" tIns="45718" rIns="45718" bIns="45718"/>
           <a:lstStyle/>
           <a:p>
             <a:pPr/>
@@ -5188,7 +5236,7 @@
         <p:spPr>
           <a:xfrm>
             <a:off x="6217920" y="3749040"/>
-            <a:ext cx="54865" cy="822961"/>
+            <a:ext cx="54866" cy="822962"/>
           </a:xfrm>
           <a:prstGeom prst="rect">
             <a:avLst/>
@@ -5201,7 +5249,7 @@
           </a:ln>
         </p:spPr>
         <p:txBody>
-          <a:bodyPr lIns="45719" rIns="45719"/>
+          <a:bodyPr lIns="45718" tIns="45718" rIns="45718" bIns="45718"/>
           <a:lstStyle/>
           <a:p>
             <a:pPr/>
@@ -5216,8 +5264,8 @@
         </p:nvSpPr>
         <p:spPr>
           <a:xfrm>
-            <a:off x="6446519" y="3836669"/>
-            <a:ext cx="2194562" cy="281941"/>
+            <a:off x="6446518" y="3836669"/>
+            <a:ext cx="2194563" cy="281939"/>
           </a:xfrm>
           <a:prstGeom prst="rect">
             <a:avLst/>
@@ -5232,7 +5280,7 @@
           </a:extLst>
         </p:spPr>
         <p:txBody>
-          <a:bodyPr lIns="45719" rIns="45719" anchor="ctr">
+          <a:bodyPr lIns="45718" tIns="45718" rIns="45718" bIns="45718" anchor="ctr">
             <a:spAutoFit/>
           </a:bodyPr>
           <a:lstStyle>
@@ -5264,8 +5312,8 @@
         </p:nvSpPr>
         <p:spPr>
           <a:xfrm>
-            <a:off x="6446519" y="4207686"/>
-            <a:ext cx="2194562" cy="225708"/>
+            <a:off x="6446518" y="4207687"/>
+            <a:ext cx="2194563" cy="225706"/>
           </a:xfrm>
           <a:prstGeom prst="rect">
             <a:avLst/>
@@ -5280,7 +5328,7 @@
           </a:extLst>
         </p:spPr>
         <p:txBody>
-          <a:bodyPr lIns="45719" rIns="45719" anchor="ctr">
+          <a:bodyPr lIns="45718" tIns="45718" rIns="45718" bIns="45718" anchor="ctr">
             <a:spAutoFit/>
           </a:bodyPr>
           <a:lstStyle>
@@ -5341,7 +5389,7 @@
         </p:nvSpPr>
         <p:spPr>
           <a:xfrm>
-            <a:off x="548640" y="327660"/>
+            <a:off x="548640" y="327659"/>
             <a:ext cx="8229601" cy="533401"/>
           </a:xfrm>
           <a:prstGeom prst="rect">
@@ -5399,8 +5447,8 @@
         </p:blipFill>
         <p:spPr>
           <a:xfrm>
-            <a:off x="274320" y="1005839"/>
-            <a:ext cx="5029201" cy="3657601"/>
+            <a:off x="274320" y="1005838"/>
+            <a:ext cx="5029202" cy="3657603"/>
           </a:xfrm>
           <a:prstGeom prst="rect">
             <a:avLst/>
@@ -5418,8 +5466,8 @@
         </p:nvSpPr>
         <p:spPr>
           <a:xfrm>
-            <a:off x="5577840" y="1005839"/>
-            <a:ext cx="3291841" cy="3657601"/>
+            <a:off x="5577840" y="1005838"/>
+            <a:ext cx="3291842" cy="3657603"/>
           </a:xfrm>
           <a:prstGeom prst="rect">
             <a:avLst/>
@@ -5439,7 +5487,7 @@
           </a:effectLst>
         </p:spPr>
         <p:txBody>
-          <a:bodyPr lIns="45719" rIns="45719"/>
+          <a:bodyPr lIns="45718" tIns="45718" rIns="45718" bIns="45718"/>
           <a:lstStyle/>
           <a:p>
             <a:pPr/>
@@ -5454,8 +5502,8 @@
         </p:nvSpPr>
         <p:spPr>
           <a:xfrm>
-            <a:off x="5577840" y="1005839"/>
-            <a:ext cx="54865" cy="3657601"/>
+            <a:off x="5577840" y="1005838"/>
+            <a:ext cx="54866" cy="3657603"/>
           </a:xfrm>
           <a:prstGeom prst="rect">
             <a:avLst/>
@@ -5468,7 +5516,7 @@
           </a:ln>
         </p:spPr>
         <p:txBody>
-          <a:bodyPr lIns="45719" rIns="45719"/>
+          <a:bodyPr lIns="45718" tIns="45718" rIns="45718" bIns="45718"/>
           <a:lstStyle/>
           <a:p>
             <a:pPr/>
@@ -5483,8 +5531,8 @@
         </p:nvSpPr>
         <p:spPr>
           <a:xfrm>
-            <a:off x="5897879" y="1188719"/>
-            <a:ext cx="2743201" cy="2750206"/>
+            <a:off x="5897879" y="1188720"/>
+            <a:ext cx="2743202" cy="2750203"/>
           </a:xfrm>
           <a:prstGeom prst="rect">
             <a:avLst/>
@@ -5499,7 +5547,7 @@
           </a:extLst>
         </p:spPr>
         <p:txBody>
-          <a:bodyPr lIns="45719" rIns="45719">
+          <a:bodyPr lIns="45718" tIns="45718" rIns="45718" bIns="45718">
             <a:spAutoFit/>
           </a:bodyPr>
           <a:lstStyle/>
@@ -5525,7 +5573,7 @@
               <a:defRPr sz="1300"/>
             </a:pPr>
             <a:r>
-              <a:t>Water dominerar med ~130 st, medan Flying bara har ~4.</a:t>
+              <a:t>Water dominerar med 134 st, medans Flying bara har 9 st.</a:t>
             </a:r>
             <a:endParaRPr sz="1600"/>
           </a:p>
@@ -5562,21 +5610,17 @@
           </a:p>
           <a:p>
             <a:pPr>
-              <a:defRPr sz="1300">
+              <a:defRPr sz="1300"/>
+            </a:pPr>
+            <a:r>
+              <a:t>Slumpchans:</a:t>
+            </a:r>
+            <a:r>
+              <a:rPr>
                 <a:solidFill>
                   <a:srgbClr val="64748B"/>
                 </a:solidFill>
-              </a:defRPr>
-            </a:pPr>
-            <a:r>
-              <a:rPr>
-                <a:solidFill>
-                  <a:srgbClr val="000000"/>
-                </a:solidFill>
               </a:rPr>
-              <a:t>Slumpchans:</a:t>
-            </a:r>
-            <a:r>
               <a:t> </a:t>
             </a:r>
             <a:r>
@@ -5585,20 +5629,24 @@
                   <a:srgbClr val="3D5AF1"/>
                 </a:solidFill>
               </a:rPr>
-              <a:t>~5.6%</a:t>
-            </a:r>
-            <a:r>
-              <a:t> </a:t>
+              <a:t>5.6%</a:t>
             </a:r>
             <a:r>
               <a:rPr>
                 <a:solidFill>
-                  <a:srgbClr val="000000"/>
+                  <a:srgbClr val="64748B"/>
                 </a:solidFill>
               </a:rPr>
+              <a:t> </a:t>
+            </a:r>
+            <a:r>
               <a:t>(1/18)</a:t>
             </a:r>
-            <a:endParaRPr sz="1600"/>
+            <a:endParaRPr sz="1600">
+              <a:solidFill>
+                <a:srgbClr val="64748B"/>
+              </a:solidFill>
+            </a:endParaRPr>
           </a:p>
           <a:p>
             <a:pPr>
@@ -5656,7 +5704,7 @@
         </p:nvSpPr>
         <p:spPr>
           <a:xfrm>
-            <a:off x="548640" y="327660"/>
+            <a:off x="548640" y="327659"/>
             <a:ext cx="8229601" cy="533401"/>
           </a:xfrm>
           <a:prstGeom prst="rect">
@@ -5714,8 +5762,8 @@
         </p:blipFill>
         <p:spPr>
           <a:xfrm>
-            <a:off x="457200" y="1005839"/>
-            <a:ext cx="5029200" cy="3840481"/>
+            <a:off x="457200" y="1005838"/>
+            <a:ext cx="5029200" cy="3840483"/>
           </a:xfrm>
           <a:prstGeom prst="rect">
             <a:avLst/>
@@ -5733,8 +5781,8 @@
         </p:nvSpPr>
         <p:spPr>
           <a:xfrm>
-            <a:off x="5760720" y="1005840"/>
-            <a:ext cx="3108961" cy="3840480"/>
+            <a:off x="5760720" y="1005839"/>
+            <a:ext cx="3108962" cy="3840481"/>
           </a:xfrm>
           <a:prstGeom prst="rect">
             <a:avLst/>
@@ -5754,7 +5802,7 @@
           </a:effectLst>
         </p:spPr>
         <p:txBody>
-          <a:bodyPr lIns="45719" rIns="45719"/>
+          <a:bodyPr lIns="45718" tIns="45718" rIns="45718" bIns="45718"/>
           <a:lstStyle/>
           <a:p>
             <a:pPr/>
@@ -5769,8 +5817,8 @@
         </p:nvSpPr>
         <p:spPr>
           <a:xfrm>
-            <a:off x="5760720" y="1005840"/>
-            <a:ext cx="54865" cy="3840480"/>
+            <a:off x="5760720" y="1005839"/>
+            <a:ext cx="54866" cy="3840481"/>
           </a:xfrm>
           <a:prstGeom prst="rect">
             <a:avLst/>
@@ -5783,7 +5831,7 @@
           </a:ln>
         </p:spPr>
         <p:txBody>
-          <a:bodyPr lIns="45719" rIns="45719"/>
+          <a:bodyPr lIns="45718" tIns="45718" rIns="45718" bIns="45718"/>
           <a:lstStyle/>
           <a:p>
             <a:pPr/>
@@ -5798,8 +5846,8 @@
         </p:nvSpPr>
         <p:spPr>
           <a:xfrm>
-            <a:off x="6080760" y="1188719"/>
-            <a:ext cx="2560321" cy="3131206"/>
+            <a:off x="6080759" y="1188720"/>
+            <a:ext cx="2560322" cy="2267603"/>
           </a:xfrm>
           <a:prstGeom prst="rect">
             <a:avLst/>
@@ -5814,7 +5862,7 @@
           </a:extLst>
         </p:spPr>
         <p:txBody>
-          <a:bodyPr lIns="45719" rIns="45719">
+          <a:bodyPr lIns="45718" tIns="45718" rIns="45718" bIns="45718">
             <a:spAutoFit/>
           </a:bodyPr>
           <a:lstStyle/>
@@ -5840,7 +5888,7 @@
               <a:defRPr sz="1300"/>
             </a:pPr>
             <a:r>
-              <a:t>Sp. Attack och Sp. Defense korrelerar starkt (0.52).</a:t>
+              <a:t>Sp. Attack och Sp. Defense korrelerar starkt (0.49).</a:t>
             </a:r>
             <a:endParaRPr sz="1600"/>
           </a:p>
@@ -5854,35 +5902,13 @@
               <a:defRPr sz="1300"/>
             </a:pPr>
             <a:r>
-              <a:t>Battle stats varierar mellan typer men överlappar kraftigt.</a:t>
-            </a:r>
-            <a:endParaRPr sz="1600"/>
-          </a:p>
-          <a:p>
-            <a:pPr>
-              <a:defRPr sz="1600"/>
-            </a:pPr>
-          </a:p>
-          <a:p>
-            <a:pPr>
-              <a:defRPr b="1" sz="1300">
-                <a:solidFill>
-                  <a:srgbClr val="1A1A2E"/>
-                </a:solidFill>
-              </a:defRPr>
-            </a:pPr>
-            <a:r>
-              <a:t>Ingen enskild stat räcker </a:t>
-            </a:r>
-            <a:r>
-              <a:rPr b="0">
-                <a:solidFill>
-                  <a:srgbClr val="000000"/>
-                </a:solidFill>
-              </a:rPr>
-              <a:t>för att särskilja typerna — därför behövs kombinationer av features.</a:t>
-            </a:r>
-            <a:endParaRPr sz="1600"/>
+              <a:t>Stridsegenskaper varierar mellan typer men överlappar kraftigt.</a:t>
+            </a:r>
+            <a:endParaRPr b="1" sz="1600">
+              <a:solidFill>
+                <a:srgbClr val="1A1A2E"/>
+              </a:solidFill>
+            </a:endParaRPr>
           </a:p>
           <a:p>
             <a:pPr>
@@ -5940,7 +5966,7 @@
         </p:nvSpPr>
         <p:spPr>
           <a:xfrm>
-            <a:off x="548640" y="327660"/>
+            <a:off x="548640" y="327659"/>
             <a:ext cx="8229601" cy="533401"/>
           </a:xfrm>
           <a:prstGeom prst="rect">
@@ -5988,8 +6014,8 @@
         </p:nvSpPr>
         <p:spPr>
           <a:xfrm>
-            <a:off x="548640" y="1097279"/>
-            <a:ext cx="2606040" cy="3566161"/>
+            <a:off x="548640" y="1097278"/>
+            <a:ext cx="2606040" cy="3566162"/>
           </a:xfrm>
           <a:prstGeom prst="rect">
             <a:avLst/>
@@ -6009,7 +6035,7 @@
           </a:effectLst>
         </p:spPr>
         <p:txBody>
-          <a:bodyPr lIns="45719" rIns="45719"/>
+          <a:bodyPr lIns="45718" tIns="45718" rIns="45718" bIns="45718"/>
           <a:lstStyle/>
           <a:p>
             <a:pPr/>
@@ -6025,7 +6051,7 @@
         <p:spPr>
           <a:xfrm>
             <a:off x="548640" y="1097280"/>
-            <a:ext cx="2606040" cy="64009"/>
+            <a:ext cx="2606040" cy="64010"/>
           </a:xfrm>
           <a:prstGeom prst="rect">
             <a:avLst/>
@@ -6038,7 +6064,7 @@
           </a:ln>
         </p:spPr>
         <p:txBody>
-          <a:bodyPr lIns="45719" rIns="45719"/>
+          <a:bodyPr lIns="45718" tIns="45718" rIns="45718" bIns="45718"/>
           <a:lstStyle/>
           <a:p>
             <a:pPr/>
@@ -6053,8 +6079,8 @@
         </p:nvSpPr>
         <p:spPr>
           <a:xfrm>
-            <a:off x="731519" y="1342390"/>
-            <a:ext cx="2240282" cy="332741"/>
+            <a:off x="731518" y="1342390"/>
+            <a:ext cx="2240284" cy="332739"/>
           </a:xfrm>
           <a:prstGeom prst="rect">
             <a:avLst/>
@@ -6069,7 +6095,7 @@
           </a:extLst>
         </p:spPr>
         <p:txBody>
-          <a:bodyPr lIns="45719" rIns="45719" anchor="ctr">
+          <a:bodyPr lIns="45718" tIns="45718" rIns="45718" bIns="45718" anchor="ctr">
             <a:spAutoFit/>
           </a:bodyPr>
           <a:lstStyle>
@@ -6101,8 +6127,8 @@
         </p:nvSpPr>
         <p:spPr>
           <a:xfrm>
-            <a:off x="685799" y="1889759"/>
-            <a:ext cx="2331722" cy="609601"/>
+            <a:off x="685798" y="1889759"/>
+            <a:ext cx="2331723" cy="609601"/>
           </a:xfrm>
           <a:prstGeom prst="rect">
             <a:avLst/>
@@ -6149,8 +6175,8 @@
         </p:nvSpPr>
         <p:spPr>
           <a:xfrm>
-            <a:off x="731519" y="2527607"/>
-            <a:ext cx="2240282" cy="248306"/>
+            <a:off x="731518" y="2527607"/>
+            <a:ext cx="2240284" cy="248304"/>
           </a:xfrm>
           <a:prstGeom prst="rect">
             <a:avLst/>
@@ -6165,7 +6191,7 @@
           </a:extLst>
         </p:spPr>
         <p:txBody>
-          <a:bodyPr lIns="45719" rIns="45719" anchor="ctr">
+          <a:bodyPr lIns="45718" tIns="45718" rIns="45718" bIns="45718" anchor="ctr">
             <a:spAutoFit/>
           </a:bodyPr>
           <a:lstStyle>
@@ -6193,8 +6219,8 @@
         </p:nvSpPr>
         <p:spPr>
           <a:xfrm>
-            <a:off x="731519" y="3050978"/>
-            <a:ext cx="2240282" cy="664603"/>
+            <a:off x="731518" y="3050978"/>
+            <a:ext cx="2240284" cy="664601"/>
           </a:xfrm>
           <a:prstGeom prst="rect">
             <a:avLst/>
@@ -6209,7 +6235,7 @@
           </a:extLst>
         </p:spPr>
         <p:txBody>
-          <a:bodyPr lIns="45719" rIns="45719" anchor="ctr">
+          <a:bodyPr lIns="45718" tIns="45718" rIns="45718" bIns="45718" anchor="ctr">
             <a:spAutoFit/>
           </a:bodyPr>
           <a:lstStyle/>
@@ -6252,8 +6278,8 @@
         </p:nvSpPr>
         <p:spPr>
           <a:xfrm>
-            <a:off x="731519" y="4025900"/>
-            <a:ext cx="2240282" cy="269241"/>
+            <a:off x="731518" y="4025900"/>
+            <a:ext cx="2240284" cy="269239"/>
           </a:xfrm>
           <a:prstGeom prst="rect">
             <a:avLst/>
@@ -6268,7 +6294,7 @@
           </a:extLst>
         </p:spPr>
         <p:txBody>
-          <a:bodyPr lIns="45719" rIns="45719" anchor="ctr">
+          <a:bodyPr lIns="45718" tIns="45718" rIns="45718" bIns="45718" anchor="ctr">
             <a:spAutoFit/>
           </a:bodyPr>
           <a:lstStyle>
@@ -6300,8 +6326,8 @@
         </p:nvSpPr>
         <p:spPr>
           <a:xfrm>
-            <a:off x="3383279" y="1097279"/>
-            <a:ext cx="2606041" cy="3566161"/>
+            <a:off x="3383279" y="1097278"/>
+            <a:ext cx="2606042" cy="3566162"/>
           </a:xfrm>
           <a:prstGeom prst="rect">
             <a:avLst/>
@@ -6321,7 +6347,7 @@
           </a:effectLst>
         </p:spPr>
         <p:txBody>
-          <a:bodyPr lIns="45719" rIns="45719"/>
+          <a:bodyPr lIns="45718" tIns="45718" rIns="45718" bIns="45718"/>
           <a:lstStyle/>
           <a:p>
             <a:pPr/>
@@ -6337,7 +6363,7 @@
         <p:spPr>
           <a:xfrm>
             <a:off x="3383279" y="1097280"/>
-            <a:ext cx="2606041" cy="64009"/>
+            <a:ext cx="2606042" cy="64010"/>
           </a:xfrm>
           <a:prstGeom prst="rect">
             <a:avLst/>
@@ -6350,7 +6376,7 @@
           </a:ln>
         </p:spPr>
         <p:txBody>
-          <a:bodyPr lIns="45719" rIns="45719"/>
+          <a:bodyPr lIns="45718" tIns="45718" rIns="45718" bIns="45718"/>
           <a:lstStyle/>
           <a:p>
             <a:pPr/>
@@ -6365,8 +6391,8 @@
         </p:nvSpPr>
         <p:spPr>
           <a:xfrm>
-            <a:off x="3566160" y="1342390"/>
-            <a:ext cx="2240281" cy="332741"/>
+            <a:off x="3566159" y="1342390"/>
+            <a:ext cx="2240282" cy="332739"/>
           </a:xfrm>
           <a:prstGeom prst="rect">
             <a:avLst/>
@@ -6381,7 +6407,7 @@
           </a:extLst>
         </p:spPr>
         <p:txBody>
-          <a:bodyPr lIns="45719" rIns="45719" anchor="ctr">
+          <a:bodyPr lIns="45718" tIns="45718" rIns="45718" bIns="45718" anchor="ctr">
             <a:spAutoFit/>
           </a:bodyPr>
           <a:lstStyle>
@@ -6414,7 +6440,7 @@
         <p:spPr>
           <a:xfrm>
             <a:off x="3520440" y="1889759"/>
-            <a:ext cx="2331721" cy="609601"/>
+            <a:ext cx="2331722" cy="609601"/>
           </a:xfrm>
           <a:prstGeom prst="rect">
             <a:avLst/>
@@ -6461,8 +6487,8 @@
         </p:nvSpPr>
         <p:spPr>
           <a:xfrm>
-            <a:off x="3566160" y="2527607"/>
-            <a:ext cx="2240281" cy="248306"/>
+            <a:off x="3566159" y="2527607"/>
+            <a:ext cx="2240282" cy="248304"/>
           </a:xfrm>
           <a:prstGeom prst="rect">
             <a:avLst/>
@@ -6477,7 +6503,7 @@
           </a:extLst>
         </p:spPr>
         <p:txBody>
-          <a:bodyPr lIns="45719" rIns="45719" anchor="ctr">
+          <a:bodyPr lIns="45718" tIns="45718" rIns="45718" bIns="45718" anchor="ctr">
             <a:spAutoFit/>
           </a:bodyPr>
           <a:lstStyle>
@@ -6505,8 +6531,8 @@
         </p:nvSpPr>
         <p:spPr>
           <a:xfrm>
-            <a:off x="3566160" y="3050978"/>
-            <a:ext cx="2240281" cy="664603"/>
+            <a:off x="3566159" y="3050978"/>
+            <a:ext cx="2240282" cy="664601"/>
           </a:xfrm>
           <a:prstGeom prst="rect">
             <a:avLst/>
@@ -6521,7 +6547,7 @@
           </a:extLst>
         </p:spPr>
         <p:txBody>
-          <a:bodyPr lIns="45719" rIns="45719" anchor="ctr">
+          <a:bodyPr lIns="45718" tIns="45718" rIns="45718" bIns="45718" anchor="ctr">
             <a:spAutoFit/>
           </a:bodyPr>
           <a:lstStyle/>
@@ -6564,8 +6590,8 @@
         </p:nvSpPr>
         <p:spPr>
           <a:xfrm>
-            <a:off x="3566160" y="4025900"/>
-            <a:ext cx="2240281" cy="269241"/>
+            <a:off x="3566159" y="4025900"/>
+            <a:ext cx="2240282" cy="269239"/>
           </a:xfrm>
           <a:prstGeom prst="rect">
             <a:avLst/>
@@ -6580,7 +6606,7 @@
           </a:extLst>
         </p:spPr>
         <p:txBody>
-          <a:bodyPr lIns="45719" rIns="45719" anchor="ctr">
+          <a:bodyPr lIns="45718" tIns="45718" rIns="45718" bIns="45718" anchor="ctr">
             <a:spAutoFit/>
           </a:bodyPr>
           <a:lstStyle>
@@ -6612,8 +6638,8 @@
         </p:nvSpPr>
         <p:spPr>
           <a:xfrm>
-            <a:off x="6217920" y="1097279"/>
-            <a:ext cx="2606041" cy="3566161"/>
+            <a:off x="6217920" y="1097278"/>
+            <a:ext cx="2606042" cy="3566162"/>
           </a:xfrm>
           <a:prstGeom prst="rect">
             <a:avLst/>
@@ -6633,7 +6659,7 @@
           </a:effectLst>
         </p:spPr>
         <p:txBody>
-          <a:bodyPr lIns="45719" rIns="45719"/>
+          <a:bodyPr lIns="45718" tIns="45718" rIns="45718" bIns="45718"/>
           <a:lstStyle/>
           <a:p>
             <a:pPr/>
@@ -6649,7 +6675,7 @@
         <p:spPr>
           <a:xfrm>
             <a:off x="6217920" y="1097280"/>
-            <a:ext cx="2606041" cy="64009"/>
+            <a:ext cx="2606042" cy="64010"/>
           </a:xfrm>
           <a:prstGeom prst="rect">
             <a:avLst/>
@@ -6662,7 +6688,7 @@
           </a:ln>
         </p:spPr>
         <p:txBody>
-          <a:bodyPr lIns="45719" rIns="45719"/>
+          <a:bodyPr lIns="45718" tIns="45718" rIns="45718" bIns="45718"/>
           <a:lstStyle/>
           <a:p>
             <a:pPr/>
@@ -6677,8 +6703,8 @@
         </p:nvSpPr>
         <p:spPr>
           <a:xfrm>
-            <a:off x="6400799" y="1342390"/>
-            <a:ext cx="2240281" cy="332741"/>
+            <a:off x="6400798" y="1342390"/>
+            <a:ext cx="2240282" cy="332739"/>
           </a:xfrm>
           <a:prstGeom prst="rect">
             <a:avLst/>
@@ -6693,7 +6719,7 @@
           </a:extLst>
         </p:spPr>
         <p:txBody>
-          <a:bodyPr lIns="45719" rIns="45719" anchor="ctr">
+          <a:bodyPr lIns="45718" tIns="45718" rIns="45718" bIns="45718" anchor="ctr">
             <a:spAutoFit/>
           </a:bodyPr>
           <a:lstStyle>
@@ -6726,7 +6752,7 @@
         <p:spPr>
           <a:xfrm>
             <a:off x="6355079" y="1889759"/>
-            <a:ext cx="2331721" cy="609601"/>
+            <a:ext cx="2331722" cy="609601"/>
           </a:xfrm>
           <a:prstGeom prst="rect">
             <a:avLst/>
@@ -6773,8 +6799,8 @@
         </p:nvSpPr>
         <p:spPr>
           <a:xfrm>
-            <a:off x="6400799" y="2527607"/>
-            <a:ext cx="2240281" cy="248306"/>
+            <a:off x="6400798" y="2527607"/>
+            <a:ext cx="2240282" cy="248304"/>
           </a:xfrm>
           <a:prstGeom prst="rect">
             <a:avLst/>
@@ -6789,7 +6815,7 @@
           </a:extLst>
         </p:spPr>
         <p:txBody>
-          <a:bodyPr lIns="45719" rIns="45719" anchor="ctr">
+          <a:bodyPr lIns="45718" tIns="45718" rIns="45718" bIns="45718" anchor="ctr">
             <a:spAutoFit/>
           </a:bodyPr>
           <a:lstStyle>
@@ -6817,8 +6843,8 @@
         </p:nvSpPr>
         <p:spPr>
           <a:xfrm>
-            <a:off x="6400799" y="3050978"/>
-            <a:ext cx="2240281" cy="664603"/>
+            <a:off x="6400798" y="3050978"/>
+            <a:ext cx="2240282" cy="664601"/>
           </a:xfrm>
           <a:prstGeom prst="rect">
             <a:avLst/>
@@ -6833,7 +6859,7 @@
           </a:extLst>
         </p:spPr>
         <p:txBody>
-          <a:bodyPr lIns="45719" rIns="45719" anchor="ctr">
+          <a:bodyPr lIns="45718" tIns="45718" rIns="45718" bIns="45718" anchor="ctr">
             <a:spAutoFit/>
           </a:bodyPr>
           <a:lstStyle/>
@@ -6876,8 +6902,8 @@
         </p:nvSpPr>
         <p:spPr>
           <a:xfrm>
-            <a:off x="6400799" y="4025900"/>
-            <a:ext cx="2240281" cy="269241"/>
+            <a:off x="6400798" y="4025900"/>
+            <a:ext cx="2240282" cy="269239"/>
           </a:xfrm>
           <a:prstGeom prst="rect">
             <a:avLst/>
@@ -6892,7 +6918,7 @@
           </a:extLst>
         </p:spPr>
         <p:txBody>
-          <a:bodyPr lIns="45719" rIns="45719" anchor="ctr">
+          <a:bodyPr lIns="45718" tIns="45718" rIns="45718" bIns="45718" anchor="ctr">
             <a:spAutoFit/>
           </a:bodyPr>
           <a:lstStyle>
@@ -6957,7 +6983,7 @@
         </p:nvSpPr>
         <p:spPr>
           <a:xfrm>
-            <a:off x="548640" y="326389"/>
+            <a:off x="548640" y="326388"/>
             <a:ext cx="8229601" cy="444501"/>
           </a:xfrm>
           <a:prstGeom prst="rect">
@@ -7005,8 +7031,8 @@
         </p:nvSpPr>
         <p:spPr>
           <a:xfrm>
-            <a:off x="502919" y="779780"/>
-            <a:ext cx="4023362" cy="269241"/>
+            <a:off x="502918" y="779780"/>
+            <a:ext cx="4023364" cy="269239"/>
           </a:xfrm>
           <a:prstGeom prst="rect">
             <a:avLst/>
@@ -7021,7 +7047,7 @@
           </a:extLst>
         </p:spPr>
         <p:txBody>
-          <a:bodyPr lIns="45719" rIns="45719" anchor="ctr">
+          <a:bodyPr lIns="45718" tIns="45718" rIns="45718" bIns="45718" anchor="ctr">
             <a:spAutoFit/>
           </a:bodyPr>
           <a:lstStyle>
@@ -7064,7 +7090,7 @@
         <p:spPr>
           <a:xfrm>
             <a:off x="182879" y="1051560"/>
-            <a:ext cx="4389122" cy="3657601"/>
+            <a:ext cx="4389123" cy="3657602"/>
           </a:xfrm>
           <a:prstGeom prst="rect">
             <a:avLst/>
@@ -7082,8 +7108,8 @@
         </p:nvSpPr>
         <p:spPr>
           <a:xfrm>
-            <a:off x="4800599" y="779780"/>
-            <a:ext cx="4023361" cy="269241"/>
+            <a:off x="4800598" y="779780"/>
+            <a:ext cx="4023362" cy="269239"/>
           </a:xfrm>
           <a:prstGeom prst="rect">
             <a:avLst/>
@@ -7098,7 +7124,7 @@
           </a:extLst>
         </p:spPr>
         <p:txBody>
-          <a:bodyPr lIns="45719" rIns="45719" anchor="ctr">
+          <a:bodyPr lIns="45718" tIns="45718" rIns="45718" bIns="45718" anchor="ctr">
             <a:spAutoFit/>
           </a:bodyPr>
           <a:lstStyle>
@@ -7141,7 +7167,7 @@
         <p:spPr>
           <a:xfrm>
             <a:off x="4663440" y="1051560"/>
-            <a:ext cx="4297681" cy="3657601"/>
+            <a:ext cx="4297682" cy="3657602"/>
           </a:xfrm>
           <a:prstGeom prst="rect">
             <a:avLst/>
@@ -7192,8 +7218,8 @@
         </p:nvSpPr>
         <p:spPr>
           <a:xfrm>
-            <a:off x="548640" y="372110"/>
-            <a:ext cx="5486401" cy="444501"/>
+            <a:off x="548639" y="372109"/>
+            <a:ext cx="5486403" cy="444501"/>
           </a:xfrm>
           <a:prstGeom prst="rect">
             <a:avLst/>
@@ -7240,7 +7266,7 @@
         </p:nvSpPr>
         <p:spPr>
           <a:xfrm>
-            <a:off x="6858000" y="327660"/>
+            <a:off x="6858000" y="327659"/>
             <a:ext cx="1828800" cy="533401"/>
           </a:xfrm>
           <a:prstGeom prst="rect">
@@ -7287,8 +7313,8 @@
           <p:nvPr/>
         </p:nvGraphicFramePr>
         <p:xfrm>
-          <a:off x="548640" y="1097280"/>
-          <a:ext cx="5029201" cy="2542033"/>
+          <a:off x="548640" y="970280"/>
+          <a:ext cx="5035551" cy="2508113"/>
         </p:xfrm>
         <a:graphic xmlns:a="http://schemas.openxmlformats.org/drawingml/2006/main">
           <a:graphicData uri="http://schemas.openxmlformats.org/drawingml/2006/table">
@@ -7301,7 +7327,7 @@
                 <a:gridCol w="1371600"/>
                 <a:gridCol w="1371600"/>
               </a:tblGrid>
-              <a:tr h="347472">
+              <a:tr h="320952">
                 <a:tc>
                   <a:txBody>
                     <a:bodyPr/>
@@ -7435,7 +7461,7 @@
                   </a:tcPr>
                 </a:tc>
               </a:tr>
-              <a:tr h="347472">
+              <a:tr h="320952">
                 <a:tc>
                   <a:txBody>
                     <a:bodyPr/>
@@ -7569,7 +7595,7 @@
                   </a:tcPr>
                 </a:tc>
               </a:tr>
-              <a:tr h="347472">
+              <a:tr h="320952">
                 <a:tc>
                   <a:txBody>
                     <a:bodyPr/>
@@ -7703,7 +7729,7 @@
                   </a:tcPr>
                 </a:tc>
               </a:tr>
-              <a:tr h="347472">
+              <a:tr h="320952">
                 <a:tc>
                   <a:txBody>
                     <a:bodyPr/>
@@ -7837,15 +7863,13 @@
                   </a:tcPr>
                 </a:tc>
               </a:tr>
-              <a:tr h="109728">
+              <a:tr h="254654">
                 <a:tc>
                   <a:txBody>
                     <a:bodyPr/>
                     <a:lstStyle/>
                     <a:p>
-                      <a:pPr algn="l">
-                        <a:defRPr sz="1800"/>
-                      </a:pPr>
+                      <a:pPr indent="457200"/>
                     </a:p>
                   </a:txBody>
                   <a:tcPr marL="45720" marR="45720" marT="45720" marB="45720" anchor="t" anchorCtr="0" horzOverflow="overflow">
@@ -7879,9 +7903,7 @@
                     <a:bodyPr/>
                     <a:lstStyle/>
                     <a:p>
-                      <a:pPr algn="l">
-                        <a:defRPr sz="1800"/>
-                      </a:pPr>
+                      <a:pPr indent="457200"/>
                     </a:p>
                   </a:txBody>
                   <a:tcPr marL="45720" marR="45720" marT="45720" marB="45720" anchor="t" anchorCtr="0" horzOverflow="overflow">
@@ -7915,9 +7937,7 @@
                     <a:bodyPr/>
                     <a:lstStyle/>
                     <a:p>
-                      <a:pPr algn="l">
-                        <a:defRPr sz="1800"/>
-                      </a:pPr>
+                      <a:pPr indent="457200"/>
                     </a:p>
                   </a:txBody>
                   <a:tcPr marL="45720" marR="45720" marT="45720" marB="45720" anchor="t" anchorCtr="0" horzOverflow="overflow">
@@ -7947,7 +7967,7 @@
                   </a:tcPr>
                 </a:tc>
               </a:tr>
-              <a:tr h="347472">
+              <a:tr h="320952">
                 <a:tc>
                   <a:txBody>
                     <a:bodyPr/>
@@ -8081,7 +8101,7 @@
                   </a:tcPr>
                 </a:tc>
               </a:tr>
-              <a:tr h="347472">
+              <a:tr h="320952">
                 <a:tc>
                   <a:txBody>
                     <a:bodyPr/>
@@ -8215,7 +8235,7 @@
                   </a:tcPr>
                 </a:tc>
               </a:tr>
-              <a:tr h="347472">
+              <a:tr h="320952">
                 <a:tc>
                   <a:txBody>
                     <a:bodyPr/>
@@ -8349,6 +8369,530 @@
                   </a:tcPr>
                 </a:tc>
               </a:tr>
+              <a:tr h="320952">
+                <a:tc>
+                  <a:txBody>
+                    <a:bodyPr/>
+                    <a:lstStyle/>
+                    <a:p>
+                      <a:pPr algn="l">
+                        <a:defRPr>
+                          <a:solidFill>
+                            <a:srgbClr val="FFFFFF"/>
+                          </a:solidFill>
+                        </a:defRPr>
+                      </a:pPr>
+                    </a:p>
+                  </a:txBody>
+                  <a:tcPr marL="45720" marR="45720" marT="45720" marB="45720" anchor="t" anchorCtr="0" horzOverflow="overflow">
+                    <a:lnL w="6350">
+                      <a:solidFill>
+                        <a:srgbClr val="2A2A4A"/>
+                      </a:solidFill>
+                    </a:lnL>
+                    <a:lnR w="6350">
+                      <a:solidFill>
+                        <a:srgbClr val="2A2A4A"/>
+                      </a:solidFill>
+                    </a:lnR>
+                    <a:lnT w="6350">
+                      <a:solidFill>
+                        <a:srgbClr val="2A2A4A"/>
+                      </a:solidFill>
+                    </a:lnT>
+                    <a:lnB w="6350">
+                      <a:solidFill>
+                        <a:srgbClr val="2A2A4A"/>
+                      </a:solidFill>
+                    </a:lnB>
+                    <a:solidFill>
+                      <a:srgbClr val="1A1A2E"/>
+                    </a:solidFill>
+                  </a:tcPr>
+                </a:tc>
+                <a:tc>
+                  <a:txBody>
+                    <a:bodyPr/>
+                    <a:lstStyle/>
+                    <a:p>
+                      <a:pPr algn="ctr">
+                        <a:defRPr>
+                          <a:solidFill>
+                            <a:srgbClr val="E45756"/>
+                          </a:solidFill>
+                        </a:defRPr>
+                      </a:pPr>
+                    </a:p>
+                  </a:txBody>
+                  <a:tcPr marL="45720" marR="45720" marT="45720" marB="45720" anchor="t" anchorCtr="0" horzOverflow="overflow">
+                    <a:lnL w="6350">
+                      <a:solidFill>
+                        <a:srgbClr val="2A2A4A"/>
+                      </a:solidFill>
+                    </a:lnL>
+                    <a:lnR w="6350">
+                      <a:solidFill>
+                        <a:srgbClr val="2A2A4A"/>
+                      </a:solidFill>
+                    </a:lnR>
+                    <a:lnT w="6350">
+                      <a:solidFill>
+                        <a:srgbClr val="2A2A4A"/>
+                      </a:solidFill>
+                    </a:lnT>
+                    <a:lnB w="6350">
+                      <a:solidFill>
+                        <a:srgbClr val="2A2A4A"/>
+                      </a:solidFill>
+                    </a:lnB>
+                    <a:solidFill>
+                      <a:srgbClr val="1A1A2E"/>
+                    </a:solidFill>
+                  </a:tcPr>
+                </a:tc>
+                <a:tc>
+                  <a:txBody>
+                    <a:bodyPr/>
+                    <a:lstStyle/>
+                    <a:p>
+                      <a:pPr algn="ctr">
+                        <a:defRPr>
+                          <a:solidFill>
+                            <a:srgbClr val="E45756"/>
+                          </a:solidFill>
+                        </a:defRPr>
+                      </a:pPr>
+                    </a:p>
+                  </a:txBody>
+                  <a:tcPr marL="45720" marR="45720" marT="45720" marB="45720" anchor="t" anchorCtr="0" horzOverflow="overflow">
+                    <a:lnL w="6350">
+                      <a:solidFill>
+                        <a:srgbClr val="2A2A4A"/>
+                      </a:solidFill>
+                    </a:lnL>
+                    <a:lnR w="6350">
+                      <a:solidFill>
+                        <a:srgbClr val="2A2A4A"/>
+                      </a:solidFill>
+                    </a:lnR>
+                    <a:lnT w="6350">
+                      <a:solidFill>
+                        <a:srgbClr val="2A2A4A"/>
+                      </a:solidFill>
+                    </a:lnT>
+                    <a:lnB w="6350">
+                      <a:solidFill>
+                        <a:srgbClr val="2A2A4A"/>
+                      </a:solidFill>
+                    </a:lnB>
+                    <a:solidFill>
+                      <a:srgbClr val="1A1A2E"/>
+                    </a:solidFill>
+                  </a:tcPr>
+                </a:tc>
+              </a:tr>
+              <a:tr h="320952">
+                <a:tc>
+                  <a:txBody>
+                    <a:bodyPr/>
+                    <a:lstStyle/>
+                    <a:p>
+                      <a:pPr algn="l">
+                        <a:defRPr sz="1800"/>
+                      </a:pPr>
+                      <a:r>
+                        <a:rPr sz="1200">
+                          <a:solidFill>
+                            <a:srgbClr val="FFFFFF"/>
+                          </a:solidFill>
+                        </a:rPr>
+                        <a:t>Random Forest (tabell)</a:t>
+                      </a:r>
+                    </a:p>
+                  </a:txBody>
+                  <a:tcPr marL="45720" marR="45720" marT="45720" marB="45720" anchor="t" anchorCtr="0" horzOverflow="overflow">
+                    <a:lnL w="6350">
+                      <a:solidFill>
+                        <a:srgbClr val="2A2A4A"/>
+                      </a:solidFill>
+                    </a:lnL>
+                    <a:lnR w="6350">
+                      <a:solidFill>
+                        <a:srgbClr val="2A2A4A"/>
+                      </a:solidFill>
+                    </a:lnR>
+                    <a:lnT w="6350">
+                      <a:solidFill>
+                        <a:srgbClr val="2A2A4A"/>
+                      </a:solidFill>
+                    </a:lnT>
+                    <a:lnB w="6350">
+                      <a:solidFill>
+                        <a:srgbClr val="2A2A4A"/>
+                      </a:solidFill>
+                    </a:lnB>
+                    <a:solidFill>
+                      <a:srgbClr val="1A1A2E"/>
+                    </a:solidFill>
+                  </a:tcPr>
+                </a:tc>
+                <a:tc>
+                  <a:txBody>
+                    <a:bodyPr/>
+                    <a:lstStyle/>
+                    <a:p>
+                      <a:pPr algn="ctr">
+                        <a:defRPr sz="1800"/>
+                      </a:pPr>
+                      <a:r>
+                        <a:rPr b="1" sz="1200">
+                          <a:solidFill>
+                            <a:srgbClr val="54A24B"/>
+                          </a:solidFill>
+                        </a:rPr>
+                        <a:t>48.8%</a:t>
+                      </a:r>
+                    </a:p>
+                  </a:txBody>
+                  <a:tcPr marL="45720" marR="45720" marT="45720" marB="45720" anchor="t" anchorCtr="0" horzOverflow="overflow">
+                    <a:lnL w="6350">
+                      <a:solidFill>
+                        <a:srgbClr val="2A2A4A"/>
+                      </a:solidFill>
+                    </a:lnL>
+                    <a:lnR w="6350">
+                      <a:solidFill>
+                        <a:srgbClr val="2A2A4A"/>
+                      </a:solidFill>
+                    </a:lnR>
+                    <a:lnT w="6350">
+                      <a:solidFill>
+                        <a:srgbClr val="2A2A4A"/>
+                      </a:solidFill>
+                    </a:lnT>
+                    <a:lnB w="6350">
+                      <a:solidFill>
+                        <a:srgbClr val="2A2A4A"/>
+                      </a:solidFill>
+                    </a:lnB>
+                    <a:solidFill>
+                      <a:srgbClr val="1A1A2E"/>
+                    </a:solidFill>
+                  </a:tcPr>
+                </a:tc>
+                <a:tc>
+                  <a:txBody>
+                    <a:bodyPr/>
+                    <a:lstStyle/>
+                    <a:p>
+                      <a:pPr algn="ctr">
+                        <a:defRPr sz="1800"/>
+                      </a:pPr>
+                      <a:r>
+                        <a:rPr b="1" sz="1200">
+                          <a:solidFill>
+                            <a:srgbClr val="54A24B"/>
+                          </a:solidFill>
+                        </a:rPr>
+                        <a:t>37.8%</a:t>
+                      </a:r>
+                    </a:p>
+                  </a:txBody>
+                  <a:tcPr marL="45720" marR="45720" marT="45720" marB="45720" anchor="t" anchorCtr="0" horzOverflow="overflow">
+                    <a:lnL w="6350">
+                      <a:solidFill>
+                        <a:srgbClr val="2A2A4A"/>
+                      </a:solidFill>
+                    </a:lnL>
+                    <a:lnR w="6350">
+                      <a:solidFill>
+                        <a:srgbClr val="2A2A4A"/>
+                      </a:solidFill>
+                    </a:lnR>
+                    <a:lnT w="6350">
+                      <a:solidFill>
+                        <a:srgbClr val="2A2A4A"/>
+                      </a:solidFill>
+                    </a:lnT>
+                    <a:lnB w="6350">
+                      <a:solidFill>
+                        <a:srgbClr val="2A2A4A"/>
+                      </a:solidFill>
+                    </a:lnB>
+                    <a:solidFill>
+                      <a:srgbClr val="1A1A2E"/>
+                    </a:solidFill>
+                  </a:tcPr>
+                </a:tc>
+              </a:tr>
+              <a:tr h="320952">
+                <a:tc>
+                  <a:txBody>
+                    <a:bodyPr/>
+                    <a:lstStyle/>
+                    <a:p>
+                      <a:pPr algn="l">
+                        <a:defRPr sz="1800"/>
+                      </a:pPr>
+                      <a:r>
+                        <a:rPr sz="1200">
+                          <a:solidFill>
+                            <a:srgbClr val="FFFFFF"/>
+                          </a:solidFill>
+                        </a:rPr>
+                        <a:t>Random Forest (tabell + bild)</a:t>
+                      </a:r>
+                    </a:p>
+                  </a:txBody>
+                  <a:tcPr marL="45720" marR="45720" marT="45720" marB="45720" anchor="t" anchorCtr="0" horzOverflow="overflow">
+                    <a:lnL w="6350">
+                      <a:solidFill>
+                        <a:srgbClr val="2A2A4A"/>
+                      </a:solidFill>
+                    </a:lnL>
+                    <a:lnR w="6350">
+                      <a:solidFill>
+                        <a:srgbClr val="2A2A4A"/>
+                      </a:solidFill>
+                    </a:lnR>
+                    <a:lnT w="6350">
+                      <a:solidFill>
+                        <a:srgbClr val="2A2A4A"/>
+                      </a:solidFill>
+                    </a:lnT>
+                    <a:lnB w="6350">
+                      <a:solidFill>
+                        <a:srgbClr val="2A2A4A"/>
+                      </a:solidFill>
+                    </a:lnB>
+                    <a:solidFill>
+                      <a:srgbClr val="1A1A2E"/>
+                    </a:solidFill>
+                  </a:tcPr>
+                </a:tc>
+                <a:tc>
+                  <a:txBody>
+                    <a:bodyPr/>
+                    <a:lstStyle/>
+                    <a:p>
+                      <a:pPr algn="ctr">
+                        <a:defRPr sz="1800"/>
+                      </a:pPr>
+                      <a:r>
+                        <a:rPr sz="1200">
+                          <a:solidFill>
+                            <a:srgbClr val="F58518"/>
+                          </a:solidFill>
+                        </a:rPr>
+                        <a:t>37.1%</a:t>
+                      </a:r>
+                    </a:p>
+                  </a:txBody>
+                  <a:tcPr marL="45720" marR="45720" marT="45720" marB="45720" anchor="t" anchorCtr="0" horzOverflow="overflow">
+                    <a:lnL w="6350">
+                      <a:solidFill>
+                        <a:srgbClr val="2A2A4A"/>
+                      </a:solidFill>
+                    </a:lnL>
+                    <a:lnR w="6350">
+                      <a:solidFill>
+                        <a:srgbClr val="2A2A4A"/>
+                      </a:solidFill>
+                    </a:lnR>
+                    <a:lnT w="6350">
+                      <a:solidFill>
+                        <a:srgbClr val="2A2A4A"/>
+                      </a:solidFill>
+                    </a:lnT>
+                    <a:lnB w="6350">
+                      <a:solidFill>
+                        <a:srgbClr val="2A2A4A"/>
+                      </a:solidFill>
+                    </a:lnB>
+                    <a:solidFill>
+                      <a:srgbClr val="1A1A2E"/>
+                    </a:solidFill>
+                  </a:tcPr>
+                </a:tc>
+                <a:tc>
+                  <a:txBody>
+                    <a:bodyPr/>
+                    <a:lstStyle/>
+                    <a:p>
+                      <a:pPr algn="ctr">
+                        <a:defRPr sz="1800"/>
+                      </a:pPr>
+                      <a:r>
+                        <a:rPr sz="1200">
+                          <a:solidFill>
+                            <a:srgbClr val="F58518"/>
+                          </a:solidFill>
+                        </a:rPr>
+                        <a:t>21.3%</a:t>
+                      </a:r>
+                    </a:p>
+                  </a:txBody>
+                  <a:tcPr marL="45720" marR="45720" marT="45720" marB="45720" anchor="t" anchorCtr="0" horzOverflow="overflow">
+                    <a:lnL w="6350">
+                      <a:solidFill>
+                        <a:srgbClr val="2A2A4A"/>
+                      </a:solidFill>
+                    </a:lnL>
+                    <a:lnR w="6350">
+                      <a:solidFill>
+                        <a:srgbClr val="2A2A4A"/>
+                      </a:solidFill>
+                    </a:lnR>
+                    <a:lnT w="6350">
+                      <a:solidFill>
+                        <a:srgbClr val="2A2A4A"/>
+                      </a:solidFill>
+                    </a:lnT>
+                    <a:lnB w="6350">
+                      <a:solidFill>
+                        <a:srgbClr val="2A2A4A"/>
+                      </a:solidFill>
+                    </a:lnB>
+                    <a:solidFill>
+                      <a:srgbClr val="1A1A2E"/>
+                    </a:solidFill>
+                  </a:tcPr>
+                </a:tc>
+              </a:tr>
+              <a:tr h="320952">
+                <a:tc>
+                  <a:txBody>
+                    <a:bodyPr/>
+                    <a:lstStyle/>
+                    <a:p>
+                      <a:pPr algn="l">
+                        <a:defRPr sz="1800"/>
+                      </a:pPr>
+                      <a:r>
+                        <a:rPr sz="1200">
+                          <a:solidFill>
+                            <a:srgbClr val="FFFFFF"/>
+                          </a:solidFill>
+                        </a:rPr>
+                        <a:t>Random Forest (enbart bild)</a:t>
+                      </a:r>
+                    </a:p>
+                  </a:txBody>
+                  <a:tcPr marL="45720" marR="45720" marT="45720" marB="45720" anchor="t" anchorCtr="0" horzOverflow="overflow">
+                    <a:lnL w="6350">
+                      <a:solidFill>
+                        <a:srgbClr val="2A2A4A"/>
+                      </a:solidFill>
+                    </a:lnL>
+                    <a:lnR w="6350">
+                      <a:solidFill>
+                        <a:srgbClr val="2A2A4A"/>
+                      </a:solidFill>
+                    </a:lnR>
+                    <a:lnT w="6350">
+                      <a:solidFill>
+                        <a:srgbClr val="2A2A4A"/>
+                      </a:solidFill>
+                    </a:lnT>
+                    <a:lnB w="6350">
+                      <a:solidFill>
+                        <a:srgbClr val="2A2A4A"/>
+                      </a:solidFill>
+                    </a:lnB>
+                    <a:solidFill>
+                      <a:srgbClr val="1A1A2E"/>
+                    </a:solidFill>
+                  </a:tcPr>
+                </a:tc>
+                <a:tc>
+                  <a:txBody>
+                    <a:bodyPr/>
+                    <a:lstStyle/>
+                    <a:p>
+                      <a:pPr algn="ctr">
+                        <a:defRPr sz="1800"/>
+                      </a:pPr>
+                      <a:r>
+                        <a:rPr sz="1200">
+                          <a:solidFill>
+                            <a:srgbClr val="E45756"/>
+                          </a:solidFill>
+                        </a:rPr>
+                        <a:t>19.5%</a:t>
+                      </a:r>
+                    </a:p>
+                  </a:txBody>
+                  <a:tcPr marL="45720" marR="45720" marT="45720" marB="45720" anchor="t" anchorCtr="0" horzOverflow="overflow">
+                    <a:lnL w="6350">
+                      <a:solidFill>
+                        <a:srgbClr val="2A2A4A"/>
+                      </a:solidFill>
+                    </a:lnL>
+                    <a:lnR w="6350">
+                      <a:solidFill>
+                        <a:srgbClr val="2A2A4A"/>
+                      </a:solidFill>
+                    </a:lnR>
+                    <a:lnT w="6350">
+                      <a:solidFill>
+                        <a:srgbClr val="2A2A4A"/>
+                      </a:solidFill>
+                    </a:lnT>
+                    <a:lnB w="6350">
+                      <a:solidFill>
+                        <a:srgbClr val="2A2A4A"/>
+                      </a:solidFill>
+                    </a:lnB>
+                    <a:solidFill>
+                      <a:srgbClr val="1A1A2E"/>
+                    </a:solidFill>
+                  </a:tcPr>
+                </a:tc>
+                <a:tc>
+                  <a:txBody>
+                    <a:bodyPr/>
+                    <a:lstStyle/>
+                    <a:p>
+                      <a:pPr algn="ctr">
+                        <a:defRPr sz="1800"/>
+                      </a:pPr>
+                      <a:r>
+                        <a:rPr sz="1200">
+                          <a:solidFill>
+                            <a:srgbClr val="E45756"/>
+                          </a:solidFill>
+                        </a:rPr>
+                        <a:t>9.7%</a:t>
+                      </a:r>
+                    </a:p>
+                  </a:txBody>
+                  <a:tcPr marL="45720" marR="45720" marT="45720" marB="45720" anchor="t" anchorCtr="0" horzOverflow="overflow">
+                    <a:lnL w="6350">
+                      <a:solidFill>
+                        <a:srgbClr val="2A2A4A"/>
+                      </a:solidFill>
+                    </a:lnL>
+                    <a:lnR w="6350">
+                      <a:solidFill>
+                        <a:srgbClr val="2A2A4A"/>
+                      </a:solidFill>
+                    </a:lnR>
+                    <a:lnT w="6350">
+                      <a:solidFill>
+                        <a:srgbClr val="2A2A4A"/>
+                      </a:solidFill>
+                    </a:lnT>
+                    <a:lnB w="6350">
+                      <a:solidFill>
+                        <a:srgbClr val="2A2A4A"/>
+                      </a:solidFill>
+                    </a:lnB>
+                    <a:solidFill>
+                      <a:srgbClr val="1A1A2E"/>
+                    </a:solidFill>
+                  </a:tcPr>
+                </a:tc>
+              </a:tr>
             </a:tbl>
           </a:graphicData>
         </a:graphic>
@@ -8361,8 +8905,8 @@
         </p:nvSpPr>
         <p:spPr>
           <a:xfrm>
-            <a:off x="594360" y="3879413"/>
-            <a:ext cx="4937761" cy="287894"/>
+            <a:off x="594359" y="4761503"/>
+            <a:ext cx="4937762" cy="287892"/>
           </a:xfrm>
           <a:prstGeom prst="rect">
             <a:avLst/>
@@ -8377,7 +8921,7 @@
           </a:extLst>
         </p:spPr>
         <p:txBody>
-          <a:bodyPr lIns="45719" rIns="45719" anchor="ctr">
+          <a:bodyPr lIns="45718" tIns="45718" rIns="45718" bIns="45718" anchor="ctr">
             <a:spAutoFit/>
           </a:bodyPr>
           <a:lstStyle/>
@@ -8443,8 +8987,8 @@
         </p:nvSpPr>
         <p:spPr>
           <a:xfrm>
-            <a:off x="5852159" y="1097280"/>
-            <a:ext cx="3017521" cy="3063240"/>
+            <a:off x="5852159" y="970280"/>
+            <a:ext cx="3017522" cy="3063240"/>
           </a:xfrm>
           <a:prstGeom prst="rect">
             <a:avLst/>
@@ -8457,7 +9001,7 @@
           </a:ln>
         </p:spPr>
         <p:txBody>
-          <a:bodyPr lIns="45719" rIns="45719"/>
+          <a:bodyPr lIns="45718" tIns="45718" rIns="45718" bIns="45718"/>
           <a:lstStyle/>
           <a:p>
             <a:pPr/>
@@ -8473,7 +9017,7 @@
         <p:spPr>
           <a:xfrm>
             <a:off x="5852159" y="1097280"/>
-            <a:ext cx="54865" cy="3063240"/>
+            <a:ext cx="54866" cy="3063240"/>
           </a:xfrm>
           <a:prstGeom prst="rect">
             <a:avLst/>
@@ -8486,7 +9030,7 @@
           </a:ln>
         </p:spPr>
         <p:txBody>
-          <a:bodyPr lIns="45719" rIns="45719"/>
+          <a:bodyPr lIns="45718" tIns="45718" rIns="45718" bIns="45718"/>
           <a:lstStyle/>
           <a:p>
             <a:pPr/>
@@ -8501,8 +9045,8 @@
         </p:nvSpPr>
         <p:spPr>
           <a:xfrm>
-            <a:off x="6172199" y="1280160"/>
-            <a:ext cx="2468881" cy="2493402"/>
+            <a:off x="6172198" y="1153161"/>
+            <a:ext cx="2468882" cy="2493400"/>
           </a:xfrm>
           <a:prstGeom prst="rect">
             <a:avLst/>
@@ -8517,7 +9061,7 @@
           </a:extLst>
         </p:spPr>
         <p:txBody>
-          <a:bodyPr lIns="45719" rIns="45719">
+          <a:bodyPr lIns="45718" tIns="45718" rIns="45718" bIns="45718">
             <a:spAutoFit/>
           </a:bodyPr>
           <a:lstStyle/>
@@ -8644,14 +9188,14 @@
     </a:clrScheme>
     <a:fontScheme name="Office Theme">
       <a:majorFont>
+        <a:latin typeface="Calibri"/>
+        <a:ea typeface="Calibri"/>
+        <a:cs typeface="Calibri"/>
+      </a:majorFont>
+      <a:minorFont>
         <a:latin typeface="Helvetica"/>
         <a:ea typeface="Helvetica"/>
         <a:cs typeface="Helvetica"/>
-      </a:majorFont>
-      <a:minorFont>
-        <a:latin typeface="Calibri"/>
-        <a:ea typeface="Calibri"/>
-        <a:cs typeface="Calibri"/>
       </a:minorFont>
     </a:fontScheme>
     <a:fmtScheme name="Office Theme">
@@ -8794,17 +9338,17 @@
         <a:solidFill>
           <a:srgbClr val="FFFFFF"/>
         </a:solidFill>
-        <a:ln w="12700" cap="flat">
+        <a:ln w="25400" cap="flat">
           <a:solidFill>
             <a:schemeClr val="accent1"/>
           </a:solidFill>
           <a:prstDash val="solid"/>
-          <a:miter lim="800000"/>
+          <a:round/>
         </a:ln>
         <a:effectLst/>
         <a:sp3d/>
       </a:spPr>
-      <a:bodyPr rot="0" spcFirstLastPara="1" vertOverflow="overflow" horzOverflow="overflow" vert="horz" wrap="square" lIns="45719" tIns="45719" rIns="45719" bIns="45719" numCol="1" spcCol="38100" rtlCol="0" anchor="ctr" upright="0">
+      <a:bodyPr rot="0" spcFirstLastPara="1" vertOverflow="overflow" horzOverflow="overflow" vert="horz" wrap="square" lIns="45718" tIns="45718" rIns="45718" bIns="45718" numCol="1" spcCol="38100" rtlCol="0" anchor="ctr" upright="0">
         <a:spAutoFit/>
       </a:bodyPr>
       <a:lstStyle>
@@ -8832,9 +9376,9 @@
             </a:solidFill>
             <a:effectLst/>
             <a:uFillTx/>
-            <a:latin typeface="+mn-lt"/>
-            <a:ea typeface="+mn-ea"/>
-            <a:cs typeface="+mn-cs"/>
+            <a:latin typeface="+mj-lt"/>
+            <a:ea typeface="+mj-ea"/>
+            <a:cs typeface="+mj-cs"/>
             <a:sym typeface="Calibri"/>
           </a:defRPr>
         </a:defPPr>
@@ -9083,12 +9627,12 @@
     <a:lnDef>
       <a:spPr>
         <a:noFill/>
-        <a:ln w="12700" cap="flat">
+        <a:ln w="25400" cap="flat">
           <a:solidFill>
             <a:schemeClr val="accent1"/>
           </a:solidFill>
           <a:prstDash val="solid"/>
-          <a:miter lim="800000"/>
+          <a:round/>
         </a:ln>
         <a:effectLst/>
         <a:sp3d/>
@@ -9375,7 +9919,7 @@
         <a:effectLst/>
         <a:sp3d/>
       </a:spPr>
-      <a:bodyPr rot="0" spcFirstLastPara="1" vertOverflow="overflow" horzOverflow="overflow" vert="horz" wrap="square" lIns="45719" tIns="45719" rIns="45719" bIns="45719" numCol="1" spcCol="38100" rtlCol="0" anchor="t" upright="0">
+      <a:bodyPr rot="0" spcFirstLastPara="1" vertOverflow="overflow" horzOverflow="overflow" vert="horz" wrap="square" lIns="45718" tIns="45718" rIns="45718" bIns="45718" numCol="1" spcCol="38100" rtlCol="0" anchor="t" upright="0">
         <a:spAutoFit/>
       </a:bodyPr>
       <a:lstStyle>
@@ -9403,9 +9947,9 @@
             </a:solidFill>
             <a:effectLst/>
             <a:uFillTx/>
-            <a:latin typeface="+mn-lt"/>
-            <a:ea typeface="+mn-ea"/>
-            <a:cs typeface="+mn-cs"/>
+            <a:latin typeface="+mj-lt"/>
+            <a:ea typeface="+mj-ea"/>
+            <a:cs typeface="+mj-cs"/>
             <a:sym typeface="Calibri"/>
           </a:defRPr>
         </a:defPPr>
@@ -9698,14 +10242,14 @@
     </a:clrScheme>
     <a:fontScheme name="Office Theme">
       <a:majorFont>
+        <a:latin typeface="Calibri"/>
+        <a:ea typeface="Calibri"/>
+        <a:cs typeface="Calibri"/>
+      </a:majorFont>
+      <a:minorFont>
         <a:latin typeface="Helvetica"/>
         <a:ea typeface="Helvetica"/>
         <a:cs typeface="Helvetica"/>
-      </a:majorFont>
-      <a:minorFont>
-        <a:latin typeface="Calibri"/>
-        <a:ea typeface="Calibri"/>
-        <a:cs typeface="Calibri"/>
       </a:minorFont>
     </a:fontScheme>
     <a:fmtScheme name="Office Theme">
@@ -9848,17 +10392,17 @@
         <a:solidFill>
           <a:srgbClr val="FFFFFF"/>
         </a:solidFill>
-        <a:ln w="12700" cap="flat">
+        <a:ln w="25400" cap="flat">
           <a:solidFill>
             <a:schemeClr val="accent1"/>
           </a:solidFill>
           <a:prstDash val="solid"/>
-          <a:miter lim="800000"/>
+          <a:round/>
         </a:ln>
         <a:effectLst/>
         <a:sp3d/>
       </a:spPr>
-      <a:bodyPr rot="0" spcFirstLastPara="1" vertOverflow="overflow" horzOverflow="overflow" vert="horz" wrap="square" lIns="45719" tIns="45719" rIns="45719" bIns="45719" numCol="1" spcCol="38100" rtlCol="0" anchor="ctr" upright="0">
+      <a:bodyPr rot="0" spcFirstLastPara="1" vertOverflow="overflow" horzOverflow="overflow" vert="horz" wrap="square" lIns="45718" tIns="45718" rIns="45718" bIns="45718" numCol="1" spcCol="38100" rtlCol="0" anchor="ctr" upright="0">
         <a:spAutoFit/>
       </a:bodyPr>
       <a:lstStyle>
@@ -9886,9 +10430,9 @@
             </a:solidFill>
             <a:effectLst/>
             <a:uFillTx/>
-            <a:latin typeface="+mn-lt"/>
-            <a:ea typeface="+mn-ea"/>
-            <a:cs typeface="+mn-cs"/>
+            <a:latin typeface="+mj-lt"/>
+            <a:ea typeface="+mj-ea"/>
+            <a:cs typeface="+mj-cs"/>
             <a:sym typeface="Calibri"/>
           </a:defRPr>
         </a:defPPr>
@@ -10137,12 +10681,12 @@
     <a:lnDef>
       <a:spPr>
         <a:noFill/>
-        <a:ln w="12700" cap="flat">
+        <a:ln w="25400" cap="flat">
           <a:solidFill>
             <a:schemeClr val="accent1"/>
           </a:solidFill>
           <a:prstDash val="solid"/>
-          <a:miter lim="800000"/>
+          <a:round/>
         </a:ln>
         <a:effectLst/>
         <a:sp3d/>
@@ -10429,7 +10973,7 @@
         <a:effectLst/>
         <a:sp3d/>
       </a:spPr>
-      <a:bodyPr rot="0" spcFirstLastPara="1" vertOverflow="overflow" horzOverflow="overflow" vert="horz" wrap="square" lIns="45719" tIns="45719" rIns="45719" bIns="45719" numCol="1" spcCol="38100" rtlCol="0" anchor="t" upright="0">
+      <a:bodyPr rot="0" spcFirstLastPara="1" vertOverflow="overflow" horzOverflow="overflow" vert="horz" wrap="square" lIns="45718" tIns="45718" rIns="45718" bIns="45718" numCol="1" spcCol="38100" rtlCol="0" anchor="t" upright="0">
         <a:spAutoFit/>
       </a:bodyPr>
       <a:lstStyle>
@@ -10457,9 +11001,9 @@
             </a:solidFill>
             <a:effectLst/>
             <a:uFillTx/>
-            <a:latin typeface="+mn-lt"/>
-            <a:ea typeface="+mn-ea"/>
-            <a:cs typeface="+mn-cs"/>
+            <a:latin typeface="+mj-lt"/>
+            <a:ea typeface="+mj-ea"/>
+            <a:cs typeface="+mj-cs"/>
             <a:sym typeface="Calibri"/>
           </a:defRPr>
         </a:defPPr>

--- a/mockemon_presentation.pptx
+++ b/mockemon_presentation.pptx
@@ -18,6 +18,7 @@
     <p:sldId id="263" r:id="rId15"/>
     <p:sldId id="264" r:id="rId16"/>
     <p:sldId id="265" r:id="rId17"/>
+    <p:sldId id="266" r:id="rId18"/>
   </p:sldIdLst>
   <p:sldSz cx="9144000" cy="5143500"/>
   <p:notesSz cx="6858000" cy="9144000"/>
@@ -72,10 +73,10 @@
         </a:solidFill>
         <a:effectLst/>
         <a:uFillTx/>
-        <a:latin typeface="+mj-lt"/>
-        <a:ea typeface="+mj-ea"/>
-        <a:cs typeface="+mj-cs"/>
-        <a:sym typeface="Calibri"/>
+        <a:latin typeface="+mn-lt"/>
+        <a:ea typeface="+mn-ea"/>
+        <a:cs typeface="+mn-cs"/>
+        <a:sym typeface="Helvetica"/>
       </a:defRPr>
     </a:lvl1pPr>
     <a:lvl2pPr marL="0" marR="0" indent="0" algn="l" defTabSz="914400" rtl="0" fontAlgn="auto" latinLnBrk="0" hangingPunct="0">
@@ -102,10 +103,10 @@
         </a:solidFill>
         <a:effectLst/>
         <a:uFillTx/>
-        <a:latin typeface="+mj-lt"/>
-        <a:ea typeface="+mj-ea"/>
-        <a:cs typeface="+mj-cs"/>
-        <a:sym typeface="Calibri"/>
+        <a:latin typeface="+mn-lt"/>
+        <a:ea typeface="+mn-ea"/>
+        <a:cs typeface="+mn-cs"/>
+        <a:sym typeface="Helvetica"/>
       </a:defRPr>
     </a:lvl2pPr>
     <a:lvl3pPr marL="0" marR="0" indent="0" algn="l" defTabSz="914400" rtl="0" fontAlgn="auto" latinLnBrk="0" hangingPunct="0">
@@ -132,10 +133,10 @@
         </a:solidFill>
         <a:effectLst/>
         <a:uFillTx/>
-        <a:latin typeface="+mj-lt"/>
-        <a:ea typeface="+mj-ea"/>
-        <a:cs typeface="+mj-cs"/>
-        <a:sym typeface="Calibri"/>
+        <a:latin typeface="+mn-lt"/>
+        <a:ea typeface="+mn-ea"/>
+        <a:cs typeface="+mn-cs"/>
+        <a:sym typeface="Helvetica"/>
       </a:defRPr>
     </a:lvl3pPr>
     <a:lvl4pPr marL="0" marR="0" indent="0" algn="l" defTabSz="914400" rtl="0" fontAlgn="auto" latinLnBrk="0" hangingPunct="0">
@@ -162,10 +163,10 @@
         </a:solidFill>
         <a:effectLst/>
         <a:uFillTx/>
-        <a:latin typeface="+mj-lt"/>
-        <a:ea typeface="+mj-ea"/>
-        <a:cs typeface="+mj-cs"/>
-        <a:sym typeface="Calibri"/>
+        <a:latin typeface="+mn-lt"/>
+        <a:ea typeface="+mn-ea"/>
+        <a:cs typeface="+mn-cs"/>
+        <a:sym typeface="Helvetica"/>
       </a:defRPr>
     </a:lvl4pPr>
     <a:lvl5pPr marL="0" marR="0" indent="0" algn="l" defTabSz="914400" rtl="0" fontAlgn="auto" latinLnBrk="0" hangingPunct="0">
@@ -192,10 +193,10 @@
         </a:solidFill>
         <a:effectLst/>
         <a:uFillTx/>
-        <a:latin typeface="+mj-lt"/>
-        <a:ea typeface="+mj-ea"/>
-        <a:cs typeface="+mj-cs"/>
-        <a:sym typeface="Calibri"/>
+        <a:latin typeface="+mn-lt"/>
+        <a:ea typeface="+mn-ea"/>
+        <a:cs typeface="+mn-cs"/>
+        <a:sym typeface="Helvetica"/>
       </a:defRPr>
     </a:lvl5pPr>
     <a:lvl6pPr marL="0" marR="0" indent="0" algn="l" defTabSz="914400" rtl="0" fontAlgn="auto" latinLnBrk="0" hangingPunct="0">
@@ -222,10 +223,10 @@
         </a:solidFill>
         <a:effectLst/>
         <a:uFillTx/>
-        <a:latin typeface="+mj-lt"/>
-        <a:ea typeface="+mj-ea"/>
-        <a:cs typeface="+mj-cs"/>
-        <a:sym typeface="Calibri"/>
+        <a:latin typeface="+mn-lt"/>
+        <a:ea typeface="+mn-ea"/>
+        <a:cs typeface="+mn-cs"/>
+        <a:sym typeface="Helvetica"/>
       </a:defRPr>
     </a:lvl6pPr>
     <a:lvl7pPr marL="0" marR="0" indent="0" algn="l" defTabSz="914400" rtl="0" fontAlgn="auto" latinLnBrk="0" hangingPunct="0">
@@ -252,10 +253,10 @@
         </a:solidFill>
         <a:effectLst/>
         <a:uFillTx/>
-        <a:latin typeface="+mj-lt"/>
-        <a:ea typeface="+mj-ea"/>
-        <a:cs typeface="+mj-cs"/>
-        <a:sym typeface="Calibri"/>
+        <a:latin typeface="+mn-lt"/>
+        <a:ea typeface="+mn-ea"/>
+        <a:cs typeface="+mn-cs"/>
+        <a:sym typeface="Helvetica"/>
       </a:defRPr>
     </a:lvl7pPr>
     <a:lvl8pPr marL="0" marR="0" indent="0" algn="l" defTabSz="914400" rtl="0" fontAlgn="auto" latinLnBrk="0" hangingPunct="0">
@@ -282,10 +283,10 @@
         </a:solidFill>
         <a:effectLst/>
         <a:uFillTx/>
-        <a:latin typeface="+mj-lt"/>
-        <a:ea typeface="+mj-ea"/>
-        <a:cs typeface="+mj-cs"/>
-        <a:sym typeface="Calibri"/>
+        <a:latin typeface="+mn-lt"/>
+        <a:ea typeface="+mn-ea"/>
+        <a:cs typeface="+mn-cs"/>
+        <a:sym typeface="Helvetica"/>
       </a:defRPr>
     </a:lvl8pPr>
     <a:lvl9pPr marL="0" marR="0" indent="0" algn="l" defTabSz="914400" rtl="0" fontAlgn="auto" latinLnBrk="0" hangingPunct="0">
@@ -312,10 +313,10 @@
         </a:solidFill>
         <a:effectLst/>
         <a:uFillTx/>
-        <a:latin typeface="+mj-lt"/>
-        <a:ea typeface="+mj-ea"/>
-        <a:cs typeface="+mj-cs"/>
-        <a:sym typeface="Calibri"/>
+        <a:latin typeface="+mn-lt"/>
+        <a:ea typeface="+mn-ea"/>
+        <a:cs typeface="+mn-cs"/>
+        <a:sym typeface="Helvetica"/>
       </a:defRPr>
     </a:lvl9pPr>
   </p:defaultTextStyle>
@@ -651,8 +652,8 @@
         </p:nvSpPr>
         <p:spPr>
           <a:xfrm>
-            <a:off x="6294578" y="4643111"/>
-            <a:ext cx="258623" cy="248304"/>
+            <a:off x="6294581" y="4643112"/>
+            <a:ext cx="258621" cy="248302"/>
           </a:xfrm>
           <a:prstGeom prst="rect">
             <a:avLst/>
@@ -667,7 +668,12 @@
           </a:bodyPr>
           <a:lstStyle>
             <a:lvl1pPr algn="r">
-              <a:defRPr sz="1200"/>
+              <a:defRPr sz="1200">
+                <a:latin typeface="+mj-lt"/>
+                <a:ea typeface="+mj-ea"/>
+                <a:cs typeface="+mj-cs"/>
+                <a:sym typeface="Calibri"/>
+              </a:defRPr>
             </a:lvl1pPr>
           </a:lstStyle>
           <a:p>
@@ -1458,7 +1464,7 @@
         <p:spPr>
           <a:xfrm>
             <a:off x="960118" y="2067560"/>
-            <a:ext cx="7223764" cy="802639"/>
+            <a:ext cx="7223764" cy="802637"/>
           </a:xfrm>
           <a:prstGeom prst="rect">
             <a:avLst/>
@@ -1520,7 +1526,7 @@
         <p:spPr>
           <a:xfrm>
             <a:off x="2285999" y="3200400"/>
-            <a:ext cx="4572002" cy="0"/>
+            <a:ext cx="4572003" cy="0"/>
           </a:xfrm>
           <a:prstGeom prst="line">
             <a:avLst/>
@@ -1547,8 +1553,8 @@
         </p:nvSpPr>
         <p:spPr>
           <a:xfrm>
-            <a:off x="960118" y="3553024"/>
-            <a:ext cx="7223764" cy="300592"/>
+            <a:off x="960118" y="3553023"/>
+            <a:ext cx="7223764" cy="300590"/>
           </a:xfrm>
           <a:prstGeom prst="rect">
             <a:avLst/>
@@ -1572,6 +1578,10 @@
                 <a:solidFill>
                   <a:srgbClr val="FFFFFF"/>
                 </a:solidFill>
+                <a:latin typeface="+mj-lt"/>
+                <a:ea typeface="+mj-ea"/>
+                <a:cs typeface="+mj-cs"/>
+                <a:sym typeface="Calibri"/>
               </a:defRPr>
             </a:lvl1pPr>
           </a:lstStyle>
@@ -1601,8 +1611,8 @@
         </p:blipFill>
         <p:spPr>
           <a:xfrm>
-            <a:off x="6479919" y="4114800"/>
-            <a:ext cx="2024003" cy="640081"/>
+            <a:off x="6479918" y="4114800"/>
+            <a:ext cx="2024004" cy="640081"/>
           </a:xfrm>
           <a:prstGeom prst="rect">
             <a:avLst/>
@@ -1647,13 +1657,2002 @@
       </p:grpSpPr>
       <p:sp>
         <p:nvSpPr>
-          <p:cNvPr id="149" name="Text 0"/>
+          <p:cNvPr id="145" name="Text 0"/>
           <p:cNvSpPr txBox="1"/>
           <p:nvPr/>
         </p:nvSpPr>
         <p:spPr>
           <a:xfrm>
-            <a:off x="548640" y="327659"/>
+            <a:off x="548638" y="372108"/>
+            <a:ext cx="5486405" cy="444501"/>
+          </a:xfrm>
+          <a:prstGeom prst="rect">
+            <a:avLst/>
+          </a:prstGeom>
+          <a:ln w="12700">
+            <a:miter lim="400000"/>
+          </a:ln>
+          <a:extLst>
+            <a:ext uri="{C572A759-6A51-4108-AA02-DFA0A04FC94B}">
+              <ma14:wrappingTextBoxFlag xmlns:ma14="http://schemas.microsoft.com/office/mac/drawingml/2011/main" val="1"/>
+            </a:ext>
+          </a:extLst>
+        </p:spPr>
+        <p:txBody>
+          <a:bodyPr lIns="0" tIns="0" rIns="0" bIns="0" anchor="ctr">
+            <a:spAutoFit/>
+          </a:bodyPr>
+          <a:lstStyle>
+            <a:lvl1pPr>
+              <a:defRPr b="1" sz="3000">
+                <a:solidFill>
+                  <a:srgbClr val="FFFFFF"/>
+                </a:solidFill>
+                <a:latin typeface="Trebuchet MS"/>
+                <a:ea typeface="Trebuchet MS"/>
+                <a:cs typeface="Trebuchet MS"/>
+                <a:sym typeface="Trebuchet MS"/>
+              </a:defRPr>
+            </a:lvl1pPr>
+          </a:lstStyle>
+          <a:p>
+            <a:pPr/>
+            <a:r>
+              <a:t>Bildegenskaper — hjälpte det?</a:t>
+            </a:r>
+          </a:p>
+        </p:txBody>
+      </p:sp>
+      <p:sp>
+        <p:nvSpPr>
+          <p:cNvPr id="146" name="Text 1"/>
+          <p:cNvSpPr txBox="1"/>
+          <p:nvPr/>
+        </p:nvSpPr>
+        <p:spPr>
+          <a:xfrm>
+            <a:off x="6858000" y="327658"/>
+            <a:ext cx="1828800" cy="533401"/>
+          </a:xfrm>
+          <a:prstGeom prst="rect">
+            <a:avLst/>
+          </a:prstGeom>
+          <a:ln w="12700">
+            <a:miter lim="400000"/>
+          </a:ln>
+          <a:extLst>
+            <a:ext uri="{C572A759-6A51-4108-AA02-DFA0A04FC94B}">
+              <ma14:wrappingTextBoxFlag xmlns:ma14="http://schemas.microsoft.com/office/mac/drawingml/2011/main" val="1"/>
+            </a:ext>
+          </a:extLst>
+        </p:spPr>
+        <p:txBody>
+          <a:bodyPr lIns="0" tIns="0" rIns="0" bIns="0" anchor="ctr">
+            <a:spAutoFit/>
+          </a:bodyPr>
+          <a:lstStyle>
+            <a:lvl1pPr algn="r">
+              <a:defRPr b="1" sz="3600">
+                <a:solidFill>
+                  <a:srgbClr val="E45756"/>
+                </a:solidFill>
+                <a:latin typeface="Trebuchet MS"/>
+                <a:ea typeface="Trebuchet MS"/>
+                <a:cs typeface="Trebuchet MS"/>
+                <a:sym typeface="Trebuchet MS"/>
+              </a:defRPr>
+            </a:lvl1pPr>
+          </a:lstStyle>
+          <a:p>
+            <a:pPr/>
+            <a:r>
+              <a:t>Nej.</a:t>
+            </a:r>
+          </a:p>
+        </p:txBody>
+      </p:sp>
+      <p:graphicFrame>
+        <p:nvGraphicFramePr>
+          <p:cNvPr id="147" name="Table 0"/>
+          <p:cNvGraphicFramePr/>
+          <p:nvPr/>
+        </p:nvGraphicFramePr>
+        <p:xfrm>
+          <a:off x="548640" y="970280"/>
+          <a:ext cx="5029201" cy="3785126"/>
+        </p:xfrm>
+        <a:graphic xmlns:a="http://schemas.openxmlformats.org/drawingml/2006/main">
+          <a:graphicData uri="http://schemas.openxmlformats.org/drawingml/2006/table">
+            <a:tbl>
+              <a:tblPr firstCol="0" firstRow="0" lastCol="0" lastRow="0" bandCol="0" bandRow="0" rtl="0">
+                <a:tableStyleId>{4C3C2611-4C71-4FC5-86AE-919BDF0F9419}</a:tableStyleId>
+              </a:tblPr>
+              <a:tblGrid>
+                <a:gridCol w="2286000"/>
+                <a:gridCol w="1371600"/>
+                <a:gridCol w="1371600"/>
+              </a:tblGrid>
+              <a:tr h="320952">
+                <a:tc>
+                  <a:txBody>
+                    <a:bodyPr/>
+                    <a:lstStyle/>
+                    <a:p>
+                      <a:pPr algn="l">
+                        <a:defRPr sz="1800"/>
+                      </a:pPr>
+                      <a:r>
+                        <a:rPr b="1" sz="1200">
+                          <a:solidFill>
+                            <a:srgbClr val="FFFFFF"/>
+                          </a:solidFill>
+                        </a:rPr>
+                        <a:t>Modellvariant</a:t>
+                      </a:r>
+                    </a:p>
+                  </a:txBody>
+                  <a:tcPr marL="45720" marR="45720" marT="45720" marB="45720" anchor="t" anchorCtr="0" horzOverflow="overflow">
+                    <a:lnL w="6350">
+                      <a:solidFill>
+                        <a:srgbClr val="2A2A4A"/>
+                      </a:solidFill>
+                    </a:lnL>
+                    <a:lnR w="6350">
+                      <a:solidFill>
+                        <a:srgbClr val="2A2A4A"/>
+                      </a:solidFill>
+                    </a:lnR>
+                    <a:lnT w="6350">
+                      <a:solidFill>
+                        <a:srgbClr val="2A2A4A"/>
+                      </a:solidFill>
+                    </a:lnT>
+                    <a:lnB w="6350">
+                      <a:solidFill>
+                        <a:srgbClr val="2A2A4A"/>
+                      </a:solidFill>
+                    </a:lnB>
+                    <a:solidFill>
+                      <a:srgbClr val="16213E"/>
+                    </a:solidFill>
+                  </a:tcPr>
+                </a:tc>
+                <a:tc>
+                  <a:txBody>
+                    <a:bodyPr/>
+                    <a:lstStyle/>
+                    <a:p>
+                      <a:pPr algn="ctr">
+                        <a:defRPr sz="1800"/>
+                      </a:pPr>
+                      <a:r>
+                        <a:rPr b="1" sz="1200">
+                          <a:solidFill>
+                            <a:srgbClr val="FFFFFF"/>
+                          </a:solidFill>
+                        </a:rPr>
+                        <a:t>Accuracy</a:t>
+                      </a:r>
+                    </a:p>
+                  </a:txBody>
+                  <a:tcPr marL="45720" marR="45720" marT="45720" marB="45720" anchor="t" anchorCtr="0" horzOverflow="overflow">
+                    <a:lnL w="6350">
+                      <a:solidFill>
+                        <a:srgbClr val="2A2A4A"/>
+                      </a:solidFill>
+                    </a:lnL>
+                    <a:lnR w="6350">
+                      <a:solidFill>
+                        <a:srgbClr val="2A2A4A"/>
+                      </a:solidFill>
+                    </a:lnR>
+                    <a:lnT w="6350">
+                      <a:solidFill>
+                        <a:srgbClr val="2A2A4A"/>
+                      </a:solidFill>
+                    </a:lnT>
+                    <a:lnB w="6350">
+                      <a:solidFill>
+                        <a:srgbClr val="2A2A4A"/>
+                      </a:solidFill>
+                    </a:lnB>
+                    <a:solidFill>
+                      <a:srgbClr val="16213E"/>
+                    </a:solidFill>
+                  </a:tcPr>
+                </a:tc>
+                <a:tc>
+                  <a:txBody>
+                    <a:bodyPr/>
+                    <a:lstStyle/>
+                    <a:p>
+                      <a:pPr algn="ctr">
+                        <a:defRPr sz="1800"/>
+                      </a:pPr>
+                      <a:r>
+                        <a:rPr b="1" sz="1200">
+                          <a:solidFill>
+                            <a:srgbClr val="FFFFFF"/>
+                          </a:solidFill>
+                        </a:rPr>
+                        <a:t>Bal. Acc</a:t>
+                      </a:r>
+                    </a:p>
+                  </a:txBody>
+                  <a:tcPr marL="45720" marR="45720" marT="45720" marB="45720" anchor="t" anchorCtr="0" horzOverflow="overflow">
+                    <a:lnL w="6350">
+                      <a:solidFill>
+                        <a:srgbClr val="2A2A4A"/>
+                      </a:solidFill>
+                    </a:lnL>
+                    <a:lnR w="6350">
+                      <a:solidFill>
+                        <a:srgbClr val="2A2A4A"/>
+                      </a:solidFill>
+                    </a:lnR>
+                    <a:lnT w="6350">
+                      <a:solidFill>
+                        <a:srgbClr val="2A2A4A"/>
+                      </a:solidFill>
+                    </a:lnT>
+                    <a:lnB w="6350">
+                      <a:solidFill>
+                        <a:srgbClr val="2A2A4A"/>
+                      </a:solidFill>
+                    </a:lnB>
+                    <a:solidFill>
+                      <a:srgbClr val="16213E"/>
+                    </a:solidFill>
+                  </a:tcPr>
+                </a:tc>
+              </a:tr>
+              <a:tr h="320952">
+                <a:tc>
+                  <a:txBody>
+                    <a:bodyPr/>
+                    <a:lstStyle/>
+                    <a:p>
+                      <a:pPr algn="l">
+                        <a:defRPr sz="1800"/>
+                      </a:pPr>
+                      <a:r>
+                        <a:rPr sz="1200">
+                          <a:solidFill>
+                            <a:srgbClr val="FFFFFF"/>
+                          </a:solidFill>
+                        </a:rPr>
+                        <a:t>LogReg (tabell)</a:t>
+                      </a:r>
+                    </a:p>
+                  </a:txBody>
+                  <a:tcPr marL="45720" marR="45720" marT="45720" marB="45720" anchor="t" anchorCtr="0" horzOverflow="overflow">
+                    <a:lnL w="6350">
+                      <a:solidFill>
+                        <a:srgbClr val="2A2A4A"/>
+                      </a:solidFill>
+                    </a:lnL>
+                    <a:lnR w="6350">
+                      <a:solidFill>
+                        <a:srgbClr val="2A2A4A"/>
+                      </a:solidFill>
+                    </a:lnR>
+                    <a:lnT w="6350">
+                      <a:solidFill>
+                        <a:srgbClr val="2A2A4A"/>
+                      </a:solidFill>
+                    </a:lnT>
+                    <a:lnB w="6350">
+                      <a:solidFill>
+                        <a:srgbClr val="2A2A4A"/>
+                      </a:solidFill>
+                    </a:lnB>
+                    <a:solidFill>
+                      <a:srgbClr val="1A1A2E"/>
+                    </a:solidFill>
+                  </a:tcPr>
+                </a:tc>
+                <a:tc>
+                  <a:txBody>
+                    <a:bodyPr/>
+                    <a:lstStyle/>
+                    <a:p>
+                      <a:pPr algn="ctr">
+                        <a:defRPr sz="1800"/>
+                      </a:pPr>
+                      <a:r>
+                        <a:rPr b="1" sz="1200">
+                          <a:solidFill>
+                            <a:srgbClr val="54A24B"/>
+                          </a:solidFill>
+                        </a:rPr>
+                        <a:t>48.8%</a:t>
+                      </a:r>
+                    </a:p>
+                  </a:txBody>
+                  <a:tcPr marL="45720" marR="45720" marT="45720" marB="45720" anchor="t" anchorCtr="0" horzOverflow="overflow">
+                    <a:lnL w="6350">
+                      <a:solidFill>
+                        <a:srgbClr val="2A2A4A"/>
+                      </a:solidFill>
+                    </a:lnL>
+                    <a:lnR w="6350">
+                      <a:solidFill>
+                        <a:srgbClr val="2A2A4A"/>
+                      </a:solidFill>
+                    </a:lnR>
+                    <a:lnT w="6350">
+                      <a:solidFill>
+                        <a:srgbClr val="2A2A4A"/>
+                      </a:solidFill>
+                    </a:lnT>
+                    <a:lnB w="6350">
+                      <a:solidFill>
+                        <a:srgbClr val="2A2A4A"/>
+                      </a:solidFill>
+                    </a:lnB>
+                    <a:solidFill>
+                      <a:srgbClr val="1A1A2E"/>
+                    </a:solidFill>
+                  </a:tcPr>
+                </a:tc>
+                <a:tc>
+                  <a:txBody>
+                    <a:bodyPr/>
+                    <a:lstStyle/>
+                    <a:p>
+                      <a:pPr algn="ctr">
+                        <a:defRPr sz="1800"/>
+                      </a:pPr>
+                      <a:r>
+                        <a:rPr b="1" sz="1200">
+                          <a:solidFill>
+                            <a:srgbClr val="54A24B"/>
+                          </a:solidFill>
+                        </a:rPr>
+                        <a:t>40.5%</a:t>
+                      </a:r>
+                    </a:p>
+                  </a:txBody>
+                  <a:tcPr marL="45720" marR="45720" marT="45720" marB="45720" anchor="t" anchorCtr="0" horzOverflow="overflow">
+                    <a:lnL w="6350">
+                      <a:solidFill>
+                        <a:srgbClr val="2A2A4A"/>
+                      </a:solidFill>
+                    </a:lnL>
+                    <a:lnR w="6350">
+                      <a:solidFill>
+                        <a:srgbClr val="2A2A4A"/>
+                      </a:solidFill>
+                    </a:lnR>
+                    <a:lnT w="6350">
+                      <a:solidFill>
+                        <a:srgbClr val="2A2A4A"/>
+                      </a:solidFill>
+                    </a:lnT>
+                    <a:lnB w="6350">
+                      <a:solidFill>
+                        <a:srgbClr val="2A2A4A"/>
+                      </a:solidFill>
+                    </a:lnB>
+                    <a:solidFill>
+                      <a:srgbClr val="1A1A2E"/>
+                    </a:solidFill>
+                  </a:tcPr>
+                </a:tc>
+              </a:tr>
+              <a:tr h="320952">
+                <a:tc>
+                  <a:txBody>
+                    <a:bodyPr/>
+                    <a:lstStyle/>
+                    <a:p>
+                      <a:pPr algn="l">
+                        <a:defRPr sz="1800"/>
+                      </a:pPr>
+                      <a:r>
+                        <a:rPr sz="1200">
+                          <a:solidFill>
+                            <a:srgbClr val="FFFFFF"/>
+                          </a:solidFill>
+                        </a:rPr>
+                        <a:t>LogReg (tabell + bild)</a:t>
+                      </a:r>
+                    </a:p>
+                  </a:txBody>
+                  <a:tcPr marL="45720" marR="45720" marT="45720" marB="45720" anchor="t" anchorCtr="0" horzOverflow="overflow">
+                    <a:lnL w="6350">
+                      <a:solidFill>
+                        <a:srgbClr val="2A2A4A"/>
+                      </a:solidFill>
+                    </a:lnL>
+                    <a:lnR w="6350">
+                      <a:solidFill>
+                        <a:srgbClr val="2A2A4A"/>
+                      </a:solidFill>
+                    </a:lnR>
+                    <a:lnT w="6350">
+                      <a:solidFill>
+                        <a:srgbClr val="2A2A4A"/>
+                      </a:solidFill>
+                    </a:lnT>
+                    <a:lnB w="6350">
+                      <a:solidFill>
+                        <a:srgbClr val="2A2A4A"/>
+                      </a:solidFill>
+                    </a:lnB>
+                    <a:solidFill>
+                      <a:srgbClr val="1A1A2E"/>
+                    </a:solidFill>
+                  </a:tcPr>
+                </a:tc>
+                <a:tc>
+                  <a:txBody>
+                    <a:bodyPr/>
+                    <a:lstStyle/>
+                    <a:p>
+                      <a:pPr algn="ctr">
+                        <a:defRPr sz="1800"/>
+                      </a:pPr>
+                      <a:r>
+                        <a:rPr sz="1200">
+                          <a:solidFill>
+                            <a:srgbClr val="F58518"/>
+                          </a:solidFill>
+                        </a:rPr>
+                        <a:t>35.6%</a:t>
+                      </a:r>
+                    </a:p>
+                  </a:txBody>
+                  <a:tcPr marL="45720" marR="45720" marT="45720" marB="45720" anchor="t" anchorCtr="0" horzOverflow="overflow">
+                    <a:lnL w="6350">
+                      <a:solidFill>
+                        <a:srgbClr val="2A2A4A"/>
+                      </a:solidFill>
+                    </a:lnL>
+                    <a:lnR w="6350">
+                      <a:solidFill>
+                        <a:srgbClr val="2A2A4A"/>
+                      </a:solidFill>
+                    </a:lnR>
+                    <a:lnT w="6350">
+                      <a:solidFill>
+                        <a:srgbClr val="2A2A4A"/>
+                      </a:solidFill>
+                    </a:lnT>
+                    <a:lnB w="6350">
+                      <a:solidFill>
+                        <a:srgbClr val="2A2A4A"/>
+                      </a:solidFill>
+                    </a:lnB>
+                    <a:solidFill>
+                      <a:srgbClr val="1A1A2E"/>
+                    </a:solidFill>
+                  </a:tcPr>
+                </a:tc>
+                <a:tc>
+                  <a:txBody>
+                    <a:bodyPr/>
+                    <a:lstStyle/>
+                    <a:p>
+                      <a:pPr algn="ctr">
+                        <a:defRPr sz="1800"/>
+                      </a:pPr>
+                      <a:r>
+                        <a:rPr sz="1200">
+                          <a:solidFill>
+                            <a:srgbClr val="F58518"/>
+                          </a:solidFill>
+                        </a:rPr>
+                        <a:t>27.0%</a:t>
+                      </a:r>
+                    </a:p>
+                  </a:txBody>
+                  <a:tcPr marL="45720" marR="45720" marT="45720" marB="45720" anchor="t" anchorCtr="0" horzOverflow="overflow">
+                    <a:lnL w="6350">
+                      <a:solidFill>
+                        <a:srgbClr val="2A2A4A"/>
+                      </a:solidFill>
+                    </a:lnL>
+                    <a:lnR w="6350">
+                      <a:solidFill>
+                        <a:srgbClr val="2A2A4A"/>
+                      </a:solidFill>
+                    </a:lnR>
+                    <a:lnT w="6350">
+                      <a:solidFill>
+                        <a:srgbClr val="2A2A4A"/>
+                      </a:solidFill>
+                    </a:lnT>
+                    <a:lnB w="6350">
+                      <a:solidFill>
+                        <a:srgbClr val="2A2A4A"/>
+                      </a:solidFill>
+                    </a:lnB>
+                    <a:solidFill>
+                      <a:srgbClr val="1A1A2E"/>
+                    </a:solidFill>
+                  </a:tcPr>
+                </a:tc>
+              </a:tr>
+              <a:tr h="320952">
+                <a:tc>
+                  <a:txBody>
+                    <a:bodyPr/>
+                    <a:lstStyle/>
+                    <a:p>
+                      <a:pPr algn="l">
+                        <a:defRPr sz="1800"/>
+                      </a:pPr>
+                      <a:r>
+                        <a:rPr sz="1200">
+                          <a:solidFill>
+                            <a:srgbClr val="FFFFFF"/>
+                          </a:solidFill>
+                        </a:rPr>
+                        <a:t>LogReg (enbart bild)</a:t>
+                      </a:r>
+                    </a:p>
+                  </a:txBody>
+                  <a:tcPr marL="45720" marR="45720" marT="45720" marB="45720" anchor="t" anchorCtr="0" horzOverflow="overflow">
+                    <a:lnL w="6350">
+                      <a:solidFill>
+                        <a:srgbClr val="2A2A4A"/>
+                      </a:solidFill>
+                    </a:lnL>
+                    <a:lnR w="6350">
+                      <a:solidFill>
+                        <a:srgbClr val="2A2A4A"/>
+                      </a:solidFill>
+                    </a:lnR>
+                    <a:lnT w="6350">
+                      <a:solidFill>
+                        <a:srgbClr val="2A2A4A"/>
+                      </a:solidFill>
+                    </a:lnT>
+                    <a:lnB w="6350">
+                      <a:solidFill>
+                        <a:srgbClr val="2A2A4A"/>
+                      </a:solidFill>
+                    </a:lnB>
+                    <a:solidFill>
+                      <a:srgbClr val="1A1A2E"/>
+                    </a:solidFill>
+                  </a:tcPr>
+                </a:tc>
+                <a:tc>
+                  <a:txBody>
+                    <a:bodyPr/>
+                    <a:lstStyle/>
+                    <a:p>
+                      <a:pPr algn="ctr">
+                        <a:defRPr sz="1800"/>
+                      </a:pPr>
+                      <a:r>
+                        <a:rPr sz="1200">
+                          <a:solidFill>
+                            <a:srgbClr val="E45756"/>
+                          </a:solidFill>
+                        </a:rPr>
+                        <a:t>14.6%</a:t>
+                      </a:r>
+                    </a:p>
+                  </a:txBody>
+                  <a:tcPr marL="45720" marR="45720" marT="45720" marB="45720" anchor="t" anchorCtr="0" horzOverflow="overflow">
+                    <a:lnL w="6350">
+                      <a:solidFill>
+                        <a:srgbClr val="2A2A4A"/>
+                      </a:solidFill>
+                    </a:lnL>
+                    <a:lnR w="6350">
+                      <a:solidFill>
+                        <a:srgbClr val="2A2A4A"/>
+                      </a:solidFill>
+                    </a:lnR>
+                    <a:lnT w="6350">
+                      <a:solidFill>
+                        <a:srgbClr val="2A2A4A"/>
+                      </a:solidFill>
+                    </a:lnT>
+                    <a:lnB w="6350">
+                      <a:solidFill>
+                        <a:srgbClr val="2A2A4A"/>
+                      </a:solidFill>
+                    </a:lnB>
+                    <a:solidFill>
+                      <a:srgbClr val="1A1A2E"/>
+                    </a:solidFill>
+                  </a:tcPr>
+                </a:tc>
+                <a:tc>
+                  <a:txBody>
+                    <a:bodyPr/>
+                    <a:lstStyle/>
+                    <a:p>
+                      <a:pPr algn="ctr">
+                        <a:defRPr sz="1800"/>
+                      </a:pPr>
+                      <a:r>
+                        <a:rPr sz="1200">
+                          <a:solidFill>
+                            <a:srgbClr val="E45756"/>
+                          </a:solidFill>
+                        </a:rPr>
+                        <a:t>9.1%</a:t>
+                      </a:r>
+                    </a:p>
+                  </a:txBody>
+                  <a:tcPr marL="45720" marR="45720" marT="45720" marB="45720" anchor="t" anchorCtr="0" horzOverflow="overflow">
+                    <a:lnL w="6350">
+                      <a:solidFill>
+                        <a:srgbClr val="2A2A4A"/>
+                      </a:solidFill>
+                    </a:lnL>
+                    <a:lnR w="6350">
+                      <a:solidFill>
+                        <a:srgbClr val="2A2A4A"/>
+                      </a:solidFill>
+                    </a:lnR>
+                    <a:lnT w="6350">
+                      <a:solidFill>
+                        <a:srgbClr val="2A2A4A"/>
+                      </a:solidFill>
+                    </a:lnT>
+                    <a:lnB w="6350">
+                      <a:solidFill>
+                        <a:srgbClr val="2A2A4A"/>
+                      </a:solidFill>
+                    </a:lnB>
+                    <a:solidFill>
+                      <a:srgbClr val="1A1A2E"/>
+                    </a:solidFill>
+                  </a:tcPr>
+                </a:tc>
+              </a:tr>
+              <a:tr h="254654">
+                <a:tc>
+                  <a:txBody>
+                    <a:bodyPr/>
+                    <a:lstStyle/>
+                    <a:p>
+                      <a:pPr/>
+                    </a:p>
+                  </a:txBody>
+                  <a:tcPr marL="45720" marR="45720" marT="45720" marB="45720" anchor="t" anchorCtr="0" horzOverflow="overflow">
+                    <a:lnL w="6350">
+                      <a:solidFill>
+                        <a:srgbClr val="2A2A4A"/>
+                      </a:solidFill>
+                    </a:lnL>
+                    <a:lnR w="6350">
+                      <a:solidFill>
+                        <a:srgbClr val="2A2A4A"/>
+                      </a:solidFill>
+                    </a:lnR>
+                    <a:lnT w="6350">
+                      <a:solidFill>
+                        <a:srgbClr val="2A2A4A"/>
+                      </a:solidFill>
+                    </a:lnT>
+                    <a:lnB w="6350">
+                      <a:solidFill>
+                        <a:srgbClr val="2A2A4A"/>
+                      </a:solidFill>
+                    </a:lnB>
+                    <a:solidFill>
+                      <a:srgbClr val="1A1A2E"/>
+                    </a:solidFill>
+                  </a:tcPr>
+                </a:tc>
+                <a:tc>
+                  <a:txBody>
+                    <a:bodyPr/>
+                    <a:lstStyle/>
+                    <a:p>
+                      <a:pPr/>
+                    </a:p>
+                  </a:txBody>
+                  <a:tcPr marL="45720" marR="45720" marT="45720" marB="45720" anchor="t" anchorCtr="0" horzOverflow="overflow">
+                    <a:lnL w="6350">
+                      <a:solidFill>
+                        <a:srgbClr val="2A2A4A"/>
+                      </a:solidFill>
+                    </a:lnL>
+                    <a:lnR w="6350">
+                      <a:solidFill>
+                        <a:srgbClr val="2A2A4A"/>
+                      </a:solidFill>
+                    </a:lnR>
+                    <a:lnT w="6350">
+                      <a:solidFill>
+                        <a:srgbClr val="2A2A4A"/>
+                      </a:solidFill>
+                    </a:lnT>
+                    <a:lnB w="6350">
+                      <a:solidFill>
+                        <a:srgbClr val="2A2A4A"/>
+                      </a:solidFill>
+                    </a:lnB>
+                    <a:solidFill>
+                      <a:srgbClr val="1A1A2E"/>
+                    </a:solidFill>
+                  </a:tcPr>
+                </a:tc>
+                <a:tc>
+                  <a:txBody>
+                    <a:bodyPr/>
+                    <a:lstStyle/>
+                    <a:p>
+                      <a:pPr/>
+                    </a:p>
+                  </a:txBody>
+                  <a:tcPr marL="45720" marR="45720" marT="45720" marB="45720" anchor="t" anchorCtr="0" horzOverflow="overflow">
+                    <a:lnL w="6350">
+                      <a:solidFill>
+                        <a:srgbClr val="2A2A4A"/>
+                      </a:solidFill>
+                    </a:lnL>
+                    <a:lnR w="6350">
+                      <a:solidFill>
+                        <a:srgbClr val="2A2A4A"/>
+                      </a:solidFill>
+                    </a:lnR>
+                    <a:lnT w="6350">
+                      <a:solidFill>
+                        <a:srgbClr val="2A2A4A"/>
+                      </a:solidFill>
+                    </a:lnT>
+                    <a:lnB w="6350">
+                      <a:solidFill>
+                        <a:srgbClr val="2A2A4A"/>
+                      </a:solidFill>
+                    </a:lnB>
+                    <a:solidFill>
+                      <a:srgbClr val="1A1A2E"/>
+                    </a:solidFill>
+                  </a:tcPr>
+                </a:tc>
+              </a:tr>
+              <a:tr h="320952">
+                <a:tc>
+                  <a:txBody>
+                    <a:bodyPr/>
+                    <a:lstStyle/>
+                    <a:p>
+                      <a:pPr algn="l">
+                        <a:defRPr sz="1800"/>
+                      </a:pPr>
+                      <a:r>
+                        <a:rPr sz="1200">
+                          <a:solidFill>
+                            <a:srgbClr val="FFFFFF"/>
+                          </a:solidFill>
+                        </a:rPr>
+                        <a:t>XGBoost (tabell)</a:t>
+                      </a:r>
+                    </a:p>
+                  </a:txBody>
+                  <a:tcPr marL="45720" marR="45720" marT="45720" marB="45720" anchor="t" anchorCtr="0" horzOverflow="overflow">
+                    <a:lnL w="6350">
+                      <a:solidFill>
+                        <a:srgbClr val="2A2A4A"/>
+                      </a:solidFill>
+                    </a:lnL>
+                    <a:lnR w="6350">
+                      <a:solidFill>
+                        <a:srgbClr val="2A2A4A"/>
+                      </a:solidFill>
+                    </a:lnR>
+                    <a:lnT w="6350">
+                      <a:solidFill>
+                        <a:srgbClr val="2A2A4A"/>
+                      </a:solidFill>
+                    </a:lnT>
+                    <a:lnB w="6350">
+                      <a:solidFill>
+                        <a:srgbClr val="2A2A4A"/>
+                      </a:solidFill>
+                    </a:lnB>
+                    <a:solidFill>
+                      <a:srgbClr val="1A1A2E"/>
+                    </a:solidFill>
+                  </a:tcPr>
+                </a:tc>
+                <a:tc>
+                  <a:txBody>
+                    <a:bodyPr/>
+                    <a:lstStyle/>
+                    <a:p>
+                      <a:pPr algn="ctr">
+                        <a:defRPr sz="1800"/>
+                      </a:pPr>
+                      <a:r>
+                        <a:rPr b="1" sz="1200">
+                          <a:solidFill>
+                            <a:srgbClr val="54A24B"/>
+                          </a:solidFill>
+                        </a:rPr>
+                        <a:t>46.3%</a:t>
+                      </a:r>
+                    </a:p>
+                  </a:txBody>
+                  <a:tcPr marL="45720" marR="45720" marT="45720" marB="45720" anchor="t" anchorCtr="0" horzOverflow="overflow">
+                    <a:lnL w="6350">
+                      <a:solidFill>
+                        <a:srgbClr val="2A2A4A"/>
+                      </a:solidFill>
+                    </a:lnL>
+                    <a:lnR w="6350">
+                      <a:solidFill>
+                        <a:srgbClr val="2A2A4A"/>
+                      </a:solidFill>
+                    </a:lnR>
+                    <a:lnT w="6350">
+                      <a:solidFill>
+                        <a:srgbClr val="2A2A4A"/>
+                      </a:solidFill>
+                    </a:lnT>
+                    <a:lnB w="6350">
+                      <a:solidFill>
+                        <a:srgbClr val="2A2A4A"/>
+                      </a:solidFill>
+                    </a:lnB>
+                    <a:solidFill>
+                      <a:srgbClr val="1A1A2E"/>
+                    </a:solidFill>
+                  </a:tcPr>
+                </a:tc>
+                <a:tc>
+                  <a:txBody>
+                    <a:bodyPr/>
+                    <a:lstStyle/>
+                    <a:p>
+                      <a:pPr algn="ctr">
+                        <a:defRPr sz="1800"/>
+                      </a:pPr>
+                      <a:r>
+                        <a:rPr b="1" sz="1200">
+                          <a:solidFill>
+                            <a:srgbClr val="54A24B"/>
+                          </a:solidFill>
+                        </a:rPr>
+                        <a:t>38.7%</a:t>
+                      </a:r>
+                    </a:p>
+                  </a:txBody>
+                  <a:tcPr marL="45720" marR="45720" marT="45720" marB="45720" anchor="t" anchorCtr="0" horzOverflow="overflow">
+                    <a:lnL w="6350">
+                      <a:solidFill>
+                        <a:srgbClr val="2A2A4A"/>
+                      </a:solidFill>
+                    </a:lnL>
+                    <a:lnR w="6350">
+                      <a:solidFill>
+                        <a:srgbClr val="2A2A4A"/>
+                      </a:solidFill>
+                    </a:lnR>
+                    <a:lnT w="6350">
+                      <a:solidFill>
+                        <a:srgbClr val="2A2A4A"/>
+                      </a:solidFill>
+                    </a:lnT>
+                    <a:lnB w="6350">
+                      <a:solidFill>
+                        <a:srgbClr val="2A2A4A"/>
+                      </a:solidFill>
+                    </a:lnB>
+                    <a:solidFill>
+                      <a:srgbClr val="1A1A2E"/>
+                    </a:solidFill>
+                  </a:tcPr>
+                </a:tc>
+              </a:tr>
+              <a:tr h="320952">
+                <a:tc>
+                  <a:txBody>
+                    <a:bodyPr/>
+                    <a:lstStyle/>
+                    <a:p>
+                      <a:pPr algn="l">
+                        <a:defRPr sz="1800"/>
+                      </a:pPr>
+                      <a:r>
+                        <a:rPr sz="1200">
+                          <a:solidFill>
+                            <a:srgbClr val="FFFFFF"/>
+                          </a:solidFill>
+                        </a:rPr>
+                        <a:t>XGBoost (tabell + bild)</a:t>
+                      </a:r>
+                    </a:p>
+                  </a:txBody>
+                  <a:tcPr marL="45720" marR="45720" marT="45720" marB="45720" anchor="t" anchorCtr="0" horzOverflow="overflow">
+                    <a:lnL w="6350">
+                      <a:solidFill>
+                        <a:srgbClr val="2A2A4A"/>
+                      </a:solidFill>
+                    </a:lnL>
+                    <a:lnR w="6350">
+                      <a:solidFill>
+                        <a:srgbClr val="2A2A4A"/>
+                      </a:solidFill>
+                    </a:lnR>
+                    <a:lnT w="6350">
+                      <a:solidFill>
+                        <a:srgbClr val="2A2A4A"/>
+                      </a:solidFill>
+                    </a:lnT>
+                    <a:lnB w="6350">
+                      <a:solidFill>
+                        <a:srgbClr val="2A2A4A"/>
+                      </a:solidFill>
+                    </a:lnB>
+                    <a:solidFill>
+                      <a:srgbClr val="1A1A2E"/>
+                    </a:solidFill>
+                  </a:tcPr>
+                </a:tc>
+                <a:tc>
+                  <a:txBody>
+                    <a:bodyPr/>
+                    <a:lstStyle/>
+                    <a:p>
+                      <a:pPr algn="ctr">
+                        <a:defRPr sz="1800"/>
+                      </a:pPr>
+                      <a:r>
+                        <a:rPr sz="1200">
+                          <a:solidFill>
+                            <a:srgbClr val="F58518"/>
+                          </a:solidFill>
+                        </a:rPr>
+                        <a:t>35.1%</a:t>
+                      </a:r>
+                    </a:p>
+                  </a:txBody>
+                  <a:tcPr marL="45720" marR="45720" marT="45720" marB="45720" anchor="t" anchorCtr="0" horzOverflow="overflow">
+                    <a:lnL w="6350">
+                      <a:solidFill>
+                        <a:srgbClr val="2A2A4A"/>
+                      </a:solidFill>
+                    </a:lnL>
+                    <a:lnR w="6350">
+                      <a:solidFill>
+                        <a:srgbClr val="2A2A4A"/>
+                      </a:solidFill>
+                    </a:lnR>
+                    <a:lnT w="6350">
+                      <a:solidFill>
+                        <a:srgbClr val="2A2A4A"/>
+                      </a:solidFill>
+                    </a:lnT>
+                    <a:lnB w="6350">
+                      <a:solidFill>
+                        <a:srgbClr val="2A2A4A"/>
+                      </a:solidFill>
+                    </a:lnB>
+                    <a:solidFill>
+                      <a:srgbClr val="1A1A2E"/>
+                    </a:solidFill>
+                  </a:tcPr>
+                </a:tc>
+                <a:tc>
+                  <a:txBody>
+                    <a:bodyPr/>
+                    <a:lstStyle/>
+                    <a:p>
+                      <a:pPr algn="ctr">
+                        <a:defRPr sz="1800"/>
+                      </a:pPr>
+                      <a:r>
+                        <a:rPr sz="1200">
+                          <a:solidFill>
+                            <a:srgbClr val="F58518"/>
+                          </a:solidFill>
+                        </a:rPr>
+                        <a:t>21.7%</a:t>
+                      </a:r>
+                    </a:p>
+                  </a:txBody>
+                  <a:tcPr marL="45720" marR="45720" marT="45720" marB="45720" anchor="t" anchorCtr="0" horzOverflow="overflow">
+                    <a:lnL w="6350">
+                      <a:solidFill>
+                        <a:srgbClr val="2A2A4A"/>
+                      </a:solidFill>
+                    </a:lnL>
+                    <a:lnR w="6350">
+                      <a:solidFill>
+                        <a:srgbClr val="2A2A4A"/>
+                      </a:solidFill>
+                    </a:lnR>
+                    <a:lnT w="6350">
+                      <a:solidFill>
+                        <a:srgbClr val="2A2A4A"/>
+                      </a:solidFill>
+                    </a:lnT>
+                    <a:lnB w="6350">
+                      <a:solidFill>
+                        <a:srgbClr val="2A2A4A"/>
+                      </a:solidFill>
+                    </a:lnB>
+                    <a:solidFill>
+                      <a:srgbClr val="1A1A2E"/>
+                    </a:solidFill>
+                  </a:tcPr>
+                </a:tc>
+              </a:tr>
+              <a:tr h="320952">
+                <a:tc>
+                  <a:txBody>
+                    <a:bodyPr/>
+                    <a:lstStyle/>
+                    <a:p>
+                      <a:pPr algn="l">
+                        <a:defRPr sz="1800"/>
+                      </a:pPr>
+                      <a:r>
+                        <a:rPr sz="1200">
+                          <a:solidFill>
+                            <a:srgbClr val="FFFFFF"/>
+                          </a:solidFill>
+                        </a:rPr>
+                        <a:t>XGBoost (enbart bild)</a:t>
+                      </a:r>
+                    </a:p>
+                  </a:txBody>
+                  <a:tcPr marL="45720" marR="45720" marT="45720" marB="45720" anchor="t" anchorCtr="0" horzOverflow="overflow">
+                    <a:lnL w="6350">
+                      <a:solidFill>
+                        <a:srgbClr val="2A2A4A"/>
+                      </a:solidFill>
+                    </a:lnL>
+                    <a:lnR w="6350">
+                      <a:solidFill>
+                        <a:srgbClr val="2A2A4A"/>
+                      </a:solidFill>
+                    </a:lnR>
+                    <a:lnT w="6350">
+                      <a:solidFill>
+                        <a:srgbClr val="2A2A4A"/>
+                      </a:solidFill>
+                    </a:lnT>
+                    <a:lnB w="6350">
+                      <a:solidFill>
+                        <a:srgbClr val="2A2A4A"/>
+                      </a:solidFill>
+                    </a:lnB>
+                    <a:solidFill>
+                      <a:srgbClr val="1A1A2E"/>
+                    </a:solidFill>
+                  </a:tcPr>
+                </a:tc>
+                <a:tc>
+                  <a:txBody>
+                    <a:bodyPr/>
+                    <a:lstStyle/>
+                    <a:p>
+                      <a:pPr algn="ctr">
+                        <a:defRPr sz="1800"/>
+                      </a:pPr>
+                      <a:r>
+                        <a:rPr sz="1200">
+                          <a:solidFill>
+                            <a:srgbClr val="E45756"/>
+                          </a:solidFill>
+                        </a:rPr>
+                        <a:t>17.1%</a:t>
+                      </a:r>
+                    </a:p>
+                  </a:txBody>
+                  <a:tcPr marL="45720" marR="45720" marT="45720" marB="45720" anchor="t" anchorCtr="0" horzOverflow="overflow">
+                    <a:lnL w="6350">
+                      <a:solidFill>
+                        <a:srgbClr val="2A2A4A"/>
+                      </a:solidFill>
+                    </a:lnL>
+                    <a:lnR w="6350">
+                      <a:solidFill>
+                        <a:srgbClr val="2A2A4A"/>
+                      </a:solidFill>
+                    </a:lnR>
+                    <a:lnT w="6350">
+                      <a:solidFill>
+                        <a:srgbClr val="2A2A4A"/>
+                      </a:solidFill>
+                    </a:lnT>
+                    <a:lnB w="6350">
+                      <a:solidFill>
+                        <a:srgbClr val="2A2A4A"/>
+                      </a:solidFill>
+                    </a:lnB>
+                    <a:solidFill>
+                      <a:srgbClr val="1A1A2E"/>
+                    </a:solidFill>
+                  </a:tcPr>
+                </a:tc>
+                <a:tc>
+                  <a:txBody>
+                    <a:bodyPr/>
+                    <a:lstStyle/>
+                    <a:p>
+                      <a:pPr algn="ctr">
+                        <a:defRPr sz="1800"/>
+                      </a:pPr>
+                      <a:r>
+                        <a:rPr sz="1200">
+                          <a:solidFill>
+                            <a:srgbClr val="E45756"/>
+                          </a:solidFill>
+                        </a:rPr>
+                        <a:t>10.0%</a:t>
+                      </a:r>
+                    </a:p>
+                  </a:txBody>
+                  <a:tcPr marL="45720" marR="45720" marT="45720" marB="45720" anchor="t" anchorCtr="0" horzOverflow="overflow">
+                    <a:lnL w="6350">
+                      <a:solidFill>
+                        <a:srgbClr val="2A2A4A"/>
+                      </a:solidFill>
+                    </a:lnL>
+                    <a:lnR w="6350">
+                      <a:solidFill>
+                        <a:srgbClr val="2A2A4A"/>
+                      </a:solidFill>
+                    </a:lnR>
+                    <a:lnT w="6350">
+                      <a:solidFill>
+                        <a:srgbClr val="2A2A4A"/>
+                      </a:solidFill>
+                    </a:lnT>
+                    <a:lnB w="6350">
+                      <a:solidFill>
+                        <a:srgbClr val="2A2A4A"/>
+                      </a:solidFill>
+                    </a:lnB>
+                    <a:solidFill>
+                      <a:srgbClr val="1A1A2E"/>
+                    </a:solidFill>
+                  </a:tcPr>
+                </a:tc>
+              </a:tr>
+              <a:tr h="320952">
+                <a:tc>
+                  <a:txBody>
+                    <a:bodyPr/>
+                    <a:lstStyle/>
+                    <a:p>
+                      <a:pPr/>
+                    </a:p>
+                  </a:txBody>
+                  <a:tcPr marL="45720" marR="45720" marT="45720" marB="45720" anchor="t" anchorCtr="0" horzOverflow="overflow">
+                    <a:lnL w="6350">
+                      <a:solidFill>
+                        <a:srgbClr val="2A2A4A"/>
+                      </a:solidFill>
+                    </a:lnL>
+                    <a:lnR w="6350">
+                      <a:solidFill>
+                        <a:srgbClr val="2A2A4A"/>
+                      </a:solidFill>
+                    </a:lnR>
+                    <a:lnT w="6350">
+                      <a:solidFill>
+                        <a:srgbClr val="2A2A4A"/>
+                      </a:solidFill>
+                    </a:lnT>
+                    <a:lnB w="6350">
+                      <a:solidFill>
+                        <a:srgbClr val="2A2A4A"/>
+                      </a:solidFill>
+                    </a:lnB>
+                    <a:solidFill>
+                      <a:srgbClr val="1A1A2E"/>
+                    </a:solidFill>
+                  </a:tcPr>
+                </a:tc>
+                <a:tc>
+                  <a:txBody>
+                    <a:bodyPr/>
+                    <a:lstStyle/>
+                    <a:p>
+                      <a:pPr/>
+                    </a:p>
+                  </a:txBody>
+                  <a:tcPr marL="45720" marR="45720" marT="45720" marB="45720" anchor="t" anchorCtr="0" horzOverflow="overflow">
+                    <a:lnL w="6350">
+                      <a:solidFill>
+                        <a:srgbClr val="2A2A4A"/>
+                      </a:solidFill>
+                    </a:lnL>
+                    <a:lnR w="6350">
+                      <a:solidFill>
+                        <a:srgbClr val="2A2A4A"/>
+                      </a:solidFill>
+                    </a:lnR>
+                    <a:lnT w="6350">
+                      <a:solidFill>
+                        <a:srgbClr val="2A2A4A"/>
+                      </a:solidFill>
+                    </a:lnT>
+                    <a:lnB w="6350">
+                      <a:solidFill>
+                        <a:srgbClr val="2A2A4A"/>
+                      </a:solidFill>
+                    </a:lnB>
+                    <a:solidFill>
+                      <a:srgbClr val="1A1A2E"/>
+                    </a:solidFill>
+                  </a:tcPr>
+                </a:tc>
+                <a:tc>
+                  <a:txBody>
+                    <a:bodyPr/>
+                    <a:lstStyle/>
+                    <a:p>
+                      <a:pPr/>
+                    </a:p>
+                  </a:txBody>
+                  <a:tcPr marL="45720" marR="45720" marT="45720" marB="45720" anchor="t" anchorCtr="0" horzOverflow="overflow">
+                    <a:lnL w="6350">
+                      <a:solidFill>
+                        <a:srgbClr val="2A2A4A"/>
+                      </a:solidFill>
+                    </a:lnL>
+                    <a:lnR w="6350">
+                      <a:solidFill>
+                        <a:srgbClr val="2A2A4A"/>
+                      </a:solidFill>
+                    </a:lnR>
+                    <a:lnT w="6350">
+                      <a:solidFill>
+                        <a:srgbClr val="2A2A4A"/>
+                      </a:solidFill>
+                    </a:lnT>
+                    <a:lnB w="6350">
+                      <a:solidFill>
+                        <a:srgbClr val="2A2A4A"/>
+                      </a:solidFill>
+                    </a:lnB>
+                    <a:solidFill>
+                      <a:srgbClr val="1A1A2E"/>
+                    </a:solidFill>
+                  </a:tcPr>
+                </a:tc>
+              </a:tr>
+              <a:tr h="320952">
+                <a:tc>
+                  <a:txBody>
+                    <a:bodyPr/>
+                    <a:lstStyle/>
+                    <a:p>
+                      <a:pPr algn="l">
+                        <a:defRPr sz="1800"/>
+                      </a:pPr>
+                      <a:r>
+                        <a:rPr sz="1200">
+                          <a:solidFill>
+                            <a:srgbClr val="FFFFFF"/>
+                          </a:solidFill>
+                        </a:rPr>
+                        <a:t>Random Forest (tabell)</a:t>
+                      </a:r>
+                    </a:p>
+                  </a:txBody>
+                  <a:tcPr marL="45720" marR="45720" marT="45720" marB="45720" anchor="t" anchorCtr="0" horzOverflow="overflow">
+                    <a:lnL w="6350">
+                      <a:solidFill>
+                        <a:srgbClr val="2A2A4A"/>
+                      </a:solidFill>
+                    </a:lnL>
+                    <a:lnR w="6350">
+                      <a:solidFill>
+                        <a:srgbClr val="2A2A4A"/>
+                      </a:solidFill>
+                    </a:lnR>
+                    <a:lnT w="6350">
+                      <a:solidFill>
+                        <a:srgbClr val="2A2A4A"/>
+                      </a:solidFill>
+                    </a:lnT>
+                    <a:lnB w="6350">
+                      <a:solidFill>
+                        <a:srgbClr val="2A2A4A"/>
+                      </a:solidFill>
+                    </a:lnB>
+                    <a:solidFill>
+                      <a:srgbClr val="1A1A2E"/>
+                    </a:solidFill>
+                  </a:tcPr>
+                </a:tc>
+                <a:tc>
+                  <a:txBody>
+                    <a:bodyPr/>
+                    <a:lstStyle/>
+                    <a:p>
+                      <a:pPr algn="ctr">
+                        <a:defRPr sz="1800"/>
+                      </a:pPr>
+                      <a:r>
+                        <a:rPr b="1" sz="1200">
+                          <a:solidFill>
+                            <a:srgbClr val="54A24B"/>
+                          </a:solidFill>
+                        </a:rPr>
+                        <a:t>48.8%</a:t>
+                      </a:r>
+                    </a:p>
+                  </a:txBody>
+                  <a:tcPr marL="45720" marR="45720" marT="45720" marB="45720" anchor="t" anchorCtr="0" horzOverflow="overflow">
+                    <a:lnL w="6350">
+                      <a:solidFill>
+                        <a:srgbClr val="2A2A4A"/>
+                      </a:solidFill>
+                    </a:lnL>
+                    <a:lnR w="6350">
+                      <a:solidFill>
+                        <a:srgbClr val="2A2A4A"/>
+                      </a:solidFill>
+                    </a:lnR>
+                    <a:lnT w="6350">
+                      <a:solidFill>
+                        <a:srgbClr val="2A2A4A"/>
+                      </a:solidFill>
+                    </a:lnT>
+                    <a:lnB w="6350">
+                      <a:solidFill>
+                        <a:srgbClr val="2A2A4A"/>
+                      </a:solidFill>
+                    </a:lnB>
+                    <a:solidFill>
+                      <a:srgbClr val="1A1A2E"/>
+                    </a:solidFill>
+                  </a:tcPr>
+                </a:tc>
+                <a:tc>
+                  <a:txBody>
+                    <a:bodyPr/>
+                    <a:lstStyle/>
+                    <a:p>
+                      <a:pPr algn="ctr">
+                        <a:defRPr sz="1800"/>
+                      </a:pPr>
+                      <a:r>
+                        <a:rPr b="1" sz="1200">
+                          <a:solidFill>
+                            <a:srgbClr val="54A24B"/>
+                          </a:solidFill>
+                        </a:rPr>
+                        <a:t>37.8%</a:t>
+                      </a:r>
+                    </a:p>
+                  </a:txBody>
+                  <a:tcPr marL="45720" marR="45720" marT="45720" marB="45720" anchor="t" anchorCtr="0" horzOverflow="overflow">
+                    <a:lnL w="6350">
+                      <a:solidFill>
+                        <a:srgbClr val="2A2A4A"/>
+                      </a:solidFill>
+                    </a:lnL>
+                    <a:lnR w="6350">
+                      <a:solidFill>
+                        <a:srgbClr val="2A2A4A"/>
+                      </a:solidFill>
+                    </a:lnR>
+                    <a:lnT w="6350">
+                      <a:solidFill>
+                        <a:srgbClr val="2A2A4A"/>
+                      </a:solidFill>
+                    </a:lnT>
+                    <a:lnB w="6350">
+                      <a:solidFill>
+                        <a:srgbClr val="2A2A4A"/>
+                      </a:solidFill>
+                    </a:lnB>
+                    <a:solidFill>
+                      <a:srgbClr val="1A1A2E"/>
+                    </a:solidFill>
+                  </a:tcPr>
+                </a:tc>
+              </a:tr>
+              <a:tr h="320952">
+                <a:tc>
+                  <a:txBody>
+                    <a:bodyPr/>
+                    <a:lstStyle/>
+                    <a:p>
+                      <a:pPr algn="l">
+                        <a:defRPr sz="1800"/>
+                      </a:pPr>
+                      <a:r>
+                        <a:rPr sz="1200">
+                          <a:solidFill>
+                            <a:srgbClr val="FFFFFF"/>
+                          </a:solidFill>
+                        </a:rPr>
+                        <a:t>Random Forest (tabell + bild)</a:t>
+                      </a:r>
+                    </a:p>
+                  </a:txBody>
+                  <a:tcPr marL="45720" marR="45720" marT="45720" marB="45720" anchor="t" anchorCtr="0" horzOverflow="overflow">
+                    <a:lnL w="6350">
+                      <a:solidFill>
+                        <a:srgbClr val="2A2A4A"/>
+                      </a:solidFill>
+                    </a:lnL>
+                    <a:lnR w="6350">
+                      <a:solidFill>
+                        <a:srgbClr val="2A2A4A"/>
+                      </a:solidFill>
+                    </a:lnR>
+                    <a:lnT w="6350">
+                      <a:solidFill>
+                        <a:srgbClr val="2A2A4A"/>
+                      </a:solidFill>
+                    </a:lnT>
+                    <a:lnB w="6350">
+                      <a:solidFill>
+                        <a:srgbClr val="2A2A4A"/>
+                      </a:solidFill>
+                    </a:lnB>
+                    <a:solidFill>
+                      <a:srgbClr val="1A1A2E"/>
+                    </a:solidFill>
+                  </a:tcPr>
+                </a:tc>
+                <a:tc>
+                  <a:txBody>
+                    <a:bodyPr/>
+                    <a:lstStyle/>
+                    <a:p>
+                      <a:pPr algn="ctr">
+                        <a:defRPr sz="1800"/>
+                      </a:pPr>
+                      <a:r>
+                        <a:rPr sz="1200">
+                          <a:solidFill>
+                            <a:srgbClr val="F58518"/>
+                          </a:solidFill>
+                        </a:rPr>
+                        <a:t>37.1%</a:t>
+                      </a:r>
+                    </a:p>
+                  </a:txBody>
+                  <a:tcPr marL="45720" marR="45720" marT="45720" marB="45720" anchor="t" anchorCtr="0" horzOverflow="overflow">
+                    <a:lnL w="6350">
+                      <a:solidFill>
+                        <a:srgbClr val="2A2A4A"/>
+                      </a:solidFill>
+                    </a:lnL>
+                    <a:lnR w="6350">
+                      <a:solidFill>
+                        <a:srgbClr val="2A2A4A"/>
+                      </a:solidFill>
+                    </a:lnR>
+                    <a:lnT w="6350">
+                      <a:solidFill>
+                        <a:srgbClr val="2A2A4A"/>
+                      </a:solidFill>
+                    </a:lnT>
+                    <a:lnB w="6350">
+                      <a:solidFill>
+                        <a:srgbClr val="2A2A4A"/>
+                      </a:solidFill>
+                    </a:lnB>
+                    <a:solidFill>
+                      <a:srgbClr val="1A1A2E"/>
+                    </a:solidFill>
+                  </a:tcPr>
+                </a:tc>
+                <a:tc>
+                  <a:txBody>
+                    <a:bodyPr/>
+                    <a:lstStyle/>
+                    <a:p>
+                      <a:pPr algn="ctr">
+                        <a:defRPr sz="1800"/>
+                      </a:pPr>
+                      <a:r>
+                        <a:rPr sz="1200">
+                          <a:solidFill>
+                            <a:srgbClr val="F58518"/>
+                          </a:solidFill>
+                        </a:rPr>
+                        <a:t>21.3%</a:t>
+                      </a:r>
+                    </a:p>
+                  </a:txBody>
+                  <a:tcPr marL="45720" marR="45720" marT="45720" marB="45720" anchor="t" anchorCtr="0" horzOverflow="overflow">
+                    <a:lnL w="6350">
+                      <a:solidFill>
+                        <a:srgbClr val="2A2A4A"/>
+                      </a:solidFill>
+                    </a:lnL>
+                    <a:lnR w="6350">
+                      <a:solidFill>
+                        <a:srgbClr val="2A2A4A"/>
+                      </a:solidFill>
+                    </a:lnR>
+                    <a:lnT w="6350">
+                      <a:solidFill>
+                        <a:srgbClr val="2A2A4A"/>
+                      </a:solidFill>
+                    </a:lnT>
+                    <a:lnB w="6350">
+                      <a:solidFill>
+                        <a:srgbClr val="2A2A4A"/>
+                      </a:solidFill>
+                    </a:lnB>
+                    <a:solidFill>
+                      <a:srgbClr val="1A1A2E"/>
+                    </a:solidFill>
+                  </a:tcPr>
+                </a:tc>
+              </a:tr>
+              <a:tr h="320952">
+                <a:tc>
+                  <a:txBody>
+                    <a:bodyPr/>
+                    <a:lstStyle/>
+                    <a:p>
+                      <a:pPr algn="l">
+                        <a:defRPr sz="1800"/>
+                      </a:pPr>
+                      <a:r>
+                        <a:rPr sz="1200">
+                          <a:solidFill>
+                            <a:srgbClr val="FFFFFF"/>
+                          </a:solidFill>
+                        </a:rPr>
+                        <a:t>Random Forest (enbart bild)</a:t>
+                      </a:r>
+                    </a:p>
+                  </a:txBody>
+                  <a:tcPr marL="45720" marR="45720" marT="45720" marB="45720" anchor="t" anchorCtr="0" horzOverflow="overflow">
+                    <a:lnL w="6350">
+                      <a:solidFill>
+                        <a:srgbClr val="2A2A4A"/>
+                      </a:solidFill>
+                    </a:lnL>
+                    <a:lnR w="6350">
+                      <a:solidFill>
+                        <a:srgbClr val="2A2A4A"/>
+                      </a:solidFill>
+                    </a:lnR>
+                    <a:lnT w="6350">
+                      <a:solidFill>
+                        <a:srgbClr val="2A2A4A"/>
+                      </a:solidFill>
+                    </a:lnT>
+                    <a:lnB w="6350">
+                      <a:solidFill>
+                        <a:srgbClr val="2A2A4A"/>
+                      </a:solidFill>
+                    </a:lnB>
+                    <a:solidFill>
+                      <a:srgbClr val="1A1A2E"/>
+                    </a:solidFill>
+                  </a:tcPr>
+                </a:tc>
+                <a:tc>
+                  <a:txBody>
+                    <a:bodyPr/>
+                    <a:lstStyle/>
+                    <a:p>
+                      <a:pPr algn="ctr">
+                        <a:defRPr sz="1800"/>
+                      </a:pPr>
+                      <a:r>
+                        <a:rPr sz="1200">
+                          <a:solidFill>
+                            <a:srgbClr val="E45756"/>
+                          </a:solidFill>
+                        </a:rPr>
+                        <a:t>19.5%</a:t>
+                      </a:r>
+                    </a:p>
+                  </a:txBody>
+                  <a:tcPr marL="45720" marR="45720" marT="45720" marB="45720" anchor="t" anchorCtr="0" horzOverflow="overflow">
+                    <a:lnL w="6350">
+                      <a:solidFill>
+                        <a:srgbClr val="2A2A4A"/>
+                      </a:solidFill>
+                    </a:lnL>
+                    <a:lnR w="6350">
+                      <a:solidFill>
+                        <a:srgbClr val="2A2A4A"/>
+                      </a:solidFill>
+                    </a:lnR>
+                    <a:lnT w="6350">
+                      <a:solidFill>
+                        <a:srgbClr val="2A2A4A"/>
+                      </a:solidFill>
+                    </a:lnT>
+                    <a:lnB w="6350">
+                      <a:solidFill>
+                        <a:srgbClr val="2A2A4A"/>
+                      </a:solidFill>
+                    </a:lnB>
+                    <a:solidFill>
+                      <a:srgbClr val="1A1A2E"/>
+                    </a:solidFill>
+                  </a:tcPr>
+                </a:tc>
+                <a:tc>
+                  <a:txBody>
+                    <a:bodyPr/>
+                    <a:lstStyle/>
+                    <a:p>
+                      <a:pPr algn="ctr">
+                        <a:defRPr sz="1800"/>
+                      </a:pPr>
+                      <a:r>
+                        <a:rPr sz="1200">
+                          <a:solidFill>
+                            <a:srgbClr val="E45756"/>
+                          </a:solidFill>
+                        </a:rPr>
+                        <a:t>9.7%</a:t>
+                      </a:r>
+                    </a:p>
+                  </a:txBody>
+                  <a:tcPr marL="45720" marR="45720" marT="45720" marB="45720" anchor="t" anchorCtr="0" horzOverflow="overflow">
+                    <a:lnL w="6350">
+                      <a:solidFill>
+                        <a:srgbClr val="2A2A4A"/>
+                      </a:solidFill>
+                    </a:lnL>
+                    <a:lnR w="6350">
+                      <a:solidFill>
+                        <a:srgbClr val="2A2A4A"/>
+                      </a:solidFill>
+                    </a:lnR>
+                    <a:lnT w="6350">
+                      <a:solidFill>
+                        <a:srgbClr val="2A2A4A"/>
+                      </a:solidFill>
+                    </a:lnT>
+                    <a:lnB w="6350">
+                      <a:solidFill>
+                        <a:srgbClr val="2A2A4A"/>
+                      </a:solidFill>
+                    </a:lnB>
+                    <a:solidFill>
+                      <a:srgbClr val="1A1A2E"/>
+                    </a:solidFill>
+                  </a:tcPr>
+                </a:tc>
+              </a:tr>
+            </a:tbl>
+          </a:graphicData>
+        </a:graphic>
+      </p:graphicFrame>
+      <p:sp>
+        <p:nvSpPr>
+          <p:cNvPr id="148" name="Text 2"/>
+          <p:cNvSpPr txBox="1"/>
+          <p:nvPr/>
+        </p:nvSpPr>
+        <p:spPr>
+          <a:xfrm>
+            <a:off x="594358" y="4761503"/>
+            <a:ext cx="4937764" cy="287890"/>
+          </a:xfrm>
+          <a:prstGeom prst="rect">
+            <a:avLst/>
+          </a:prstGeom>
+          <a:ln w="12700">
+            <a:miter lim="400000"/>
+          </a:ln>
+          <a:extLst>
+            <a:ext uri="{C572A759-6A51-4108-AA02-DFA0A04FC94B}">
+              <ma14:wrappingTextBoxFlag xmlns:ma14="http://schemas.microsoft.com/office/mac/drawingml/2011/main" val="1"/>
+            </a:ext>
+          </a:extLst>
+        </p:spPr>
+        <p:txBody>
+          <a:bodyPr lIns="45718" tIns="45718" rIns="45718" bIns="45718" anchor="ctr">
+            <a:spAutoFit/>
+          </a:bodyPr>
+          <a:lstStyle/>
+          <a:p>
+            <a:pPr>
+              <a:defRPr sz="1200">
+                <a:solidFill>
+                  <a:srgbClr val="54A24B"/>
+                </a:solidFill>
+                <a:latin typeface="+mj-lt"/>
+                <a:ea typeface="+mj-ea"/>
+                <a:cs typeface="+mj-cs"/>
+                <a:sym typeface="Calibri"/>
+              </a:defRPr>
+            </a:pPr>
+            <a:r>
+              <a:t>■ </a:t>
+            </a:r>
+            <a:r>
+              <a:rPr sz="1100">
+                <a:solidFill>
+                  <a:srgbClr val="94A3B8"/>
+                </a:solidFill>
+              </a:rPr>
+              <a:t>Bättre   </a:t>
+            </a:r>
+            <a:r>
+              <a:rPr>
+                <a:solidFill>
+                  <a:srgbClr val="F58518"/>
+                </a:solidFill>
+              </a:rPr>
+              <a:t>■ </a:t>
+            </a:r>
+            <a:r>
+              <a:rPr sz="1100">
+                <a:solidFill>
+                  <a:srgbClr val="94A3B8"/>
+                </a:solidFill>
+              </a:rPr>
+              <a:t>Sämre   </a:t>
+            </a:r>
+            <a:r>
+              <a:rPr>
+                <a:solidFill>
+                  <a:srgbClr val="E45756"/>
+                </a:solidFill>
+              </a:rPr>
+              <a:t>■ </a:t>
+            </a:r>
+            <a:r>
+              <a:rPr sz="1100">
+                <a:solidFill>
+                  <a:srgbClr val="94A3B8"/>
+                </a:solidFill>
+              </a:rPr>
+              <a:t>Mycket sämre</a:t>
+            </a:r>
+          </a:p>
+        </p:txBody>
+      </p:sp>
+      <p:sp>
+        <p:nvSpPr>
+          <p:cNvPr id="149" name="Shape 3"/>
+          <p:cNvSpPr/>
+          <p:nvPr/>
+        </p:nvSpPr>
+        <p:spPr>
+          <a:xfrm>
+            <a:off x="5852159" y="970280"/>
+            <a:ext cx="3017523" cy="3063240"/>
+          </a:xfrm>
+          <a:prstGeom prst="rect">
+            <a:avLst/>
+          </a:prstGeom>
+          <a:solidFill>
+            <a:srgbClr val="16213E"/>
+          </a:solidFill>
+          <a:ln w="12700">
+            <a:miter lim="400000"/>
+          </a:ln>
+        </p:spPr>
+        <p:txBody>
+          <a:bodyPr lIns="45718" tIns="45718" rIns="45718" bIns="45718"/>
+          <a:lstStyle/>
+          <a:p>
+            <a:pPr>
+              <a:defRPr>
+                <a:latin typeface="+mj-lt"/>
+                <a:ea typeface="+mj-ea"/>
+                <a:cs typeface="+mj-cs"/>
+                <a:sym typeface="Calibri"/>
+              </a:defRPr>
+            </a:pPr>
+          </a:p>
+        </p:txBody>
+      </p:sp>
+      <p:sp>
+        <p:nvSpPr>
+          <p:cNvPr id="150" name="Shape 4"/>
+          <p:cNvSpPr/>
+          <p:nvPr/>
+        </p:nvSpPr>
+        <p:spPr>
+          <a:xfrm>
+            <a:off x="5852159" y="1097280"/>
+            <a:ext cx="54867" cy="3063240"/>
+          </a:xfrm>
+          <a:prstGeom prst="rect">
+            <a:avLst/>
+          </a:prstGeom>
+          <a:solidFill>
+            <a:srgbClr val="E45756"/>
+          </a:solidFill>
+          <a:ln w="12700">
+            <a:miter lim="400000"/>
+          </a:ln>
+        </p:spPr>
+        <p:txBody>
+          <a:bodyPr lIns="45718" tIns="45718" rIns="45718" bIns="45718"/>
+          <a:lstStyle/>
+          <a:p>
+            <a:pPr>
+              <a:defRPr>
+                <a:latin typeface="+mj-lt"/>
+                <a:ea typeface="+mj-ea"/>
+                <a:cs typeface="+mj-cs"/>
+                <a:sym typeface="Calibri"/>
+              </a:defRPr>
+            </a:pPr>
+          </a:p>
+        </p:txBody>
+      </p:sp>
+      <p:sp>
+        <p:nvSpPr>
+          <p:cNvPr id="151" name="Text 5"/>
+          <p:cNvSpPr txBox="1"/>
+          <p:nvPr/>
+        </p:nvSpPr>
+        <p:spPr>
+          <a:xfrm>
+            <a:off x="6172198" y="1153160"/>
+            <a:ext cx="2468883" cy="2493399"/>
+          </a:xfrm>
+          <a:prstGeom prst="rect">
+            <a:avLst/>
+          </a:prstGeom>
+          <a:ln w="12700">
+            <a:miter lim="400000"/>
+          </a:ln>
+          <a:extLst>
+            <a:ext uri="{C572A759-6A51-4108-AA02-DFA0A04FC94B}">
+              <ma14:wrappingTextBoxFlag xmlns:ma14="http://schemas.microsoft.com/office/mac/drawingml/2011/main" val="1"/>
+            </a:ext>
+          </a:extLst>
+        </p:spPr>
+        <p:txBody>
+          <a:bodyPr lIns="45718" tIns="45718" rIns="45718" bIns="45718">
+            <a:spAutoFit/>
+          </a:bodyPr>
+          <a:lstStyle/>
+          <a:p>
+            <a:pPr>
+              <a:defRPr b="1" sz="1600">
+                <a:solidFill>
+                  <a:srgbClr val="FFFFFF"/>
+                </a:solidFill>
+                <a:latin typeface="+mj-lt"/>
+                <a:ea typeface="+mj-ea"/>
+                <a:cs typeface="+mj-cs"/>
+                <a:sym typeface="Calibri"/>
+              </a:defRPr>
+            </a:pPr>
+            <a:r>
+              <a:t>Varför?</a:t>
+            </a:r>
+          </a:p>
+          <a:p>
+            <a:pPr>
+              <a:defRPr sz="1600">
+                <a:latin typeface="+mj-lt"/>
+                <a:ea typeface="+mj-ea"/>
+                <a:cs typeface="+mj-cs"/>
+                <a:sym typeface="Calibri"/>
+              </a:defRPr>
+            </a:pPr>
+          </a:p>
+          <a:p>
+            <a:pPr>
+              <a:defRPr sz="1300">
+                <a:solidFill>
+                  <a:srgbClr val="FFFFFF"/>
+                </a:solidFill>
+                <a:latin typeface="+mj-lt"/>
+                <a:ea typeface="+mj-ea"/>
+                <a:cs typeface="+mj-cs"/>
+                <a:sym typeface="Calibri"/>
+              </a:defRPr>
+            </a:pPr>
+            <a:r>
+              <a:t>Sprite-pixlar kodar visuell design — inte typinformation.</a:t>
+            </a:r>
+            <a:endParaRPr sz="1600"/>
+          </a:p>
+          <a:p>
+            <a:pPr>
+              <a:defRPr sz="1600">
+                <a:solidFill>
+                  <a:srgbClr val="FFFFFF"/>
+                </a:solidFill>
+                <a:latin typeface="+mj-lt"/>
+                <a:ea typeface="+mj-ea"/>
+                <a:cs typeface="+mj-cs"/>
+                <a:sym typeface="Calibri"/>
+              </a:defRPr>
+            </a:pPr>
+          </a:p>
+          <a:p>
+            <a:pPr>
+              <a:defRPr sz="1300">
+                <a:solidFill>
+                  <a:srgbClr val="FFFFFF"/>
+                </a:solidFill>
+                <a:latin typeface="+mj-lt"/>
+                <a:ea typeface="+mj-ea"/>
+                <a:cs typeface="+mj-cs"/>
+                <a:sym typeface="Calibri"/>
+              </a:defRPr>
+            </a:pPr>
+            <a:r>
+              <a:t>En blå Water-typ och en blå Flying-typ ser likadana ut som pixelvektorer.</a:t>
+            </a:r>
+            <a:endParaRPr sz="1600"/>
+          </a:p>
+          <a:p>
+            <a:pPr>
+              <a:defRPr sz="1600">
+                <a:latin typeface="+mj-lt"/>
+                <a:ea typeface="+mj-ea"/>
+                <a:cs typeface="+mj-cs"/>
+                <a:sym typeface="Calibri"/>
+              </a:defRPr>
+            </a:pPr>
+          </a:p>
+          <a:p>
+            <a:pPr>
+              <a:defRPr b="1" sz="1300">
+                <a:solidFill>
+                  <a:srgbClr val="FFFFFF"/>
+                </a:solidFill>
+                <a:latin typeface="+mj-lt"/>
+                <a:ea typeface="+mj-ea"/>
+                <a:cs typeface="+mj-cs"/>
+                <a:sym typeface="Calibri"/>
+              </a:defRPr>
+            </a:pPr>
+            <a:r>
+              <a:t>Bildegenskaper introducerar brus som försämrar alla modeller.</a:t>
+            </a:r>
+          </a:p>
+        </p:txBody>
+      </p:sp>
+    </p:spTree>
+  </p:cSld>
+  <p:clrMapOvr>
+    <a:masterClrMapping/>
+  </p:clrMapOvr>
+  <p:transition xmlns:p14="http://schemas.microsoft.com/office/powerpoint/2010/main" spd="med" advClick="1"/>
+</p:sld>
+</file>
+
+<file path=ppt/slides/slide11.xml><?xml version="1.0" encoding="utf-8"?>
+<p:sld xmlns:a="http://schemas.openxmlformats.org/drawingml/2006/main" xmlns:r="http://schemas.openxmlformats.org/officeDocument/2006/relationships" xmlns:p="http://schemas.openxmlformats.org/presentationml/2006/main" xmlns:m="http://schemas.openxmlformats.org/officeDocument/2006/math" xmlns:a14="http://schemas.microsoft.com/office/drawing/2010/main" showMasterSp="1" showMasterPhAnim="1">
+  <p:cSld>
+    <p:bg>
+      <p:bgPr>
+        <a:solidFill>
+          <a:srgbClr val="1A1A2E"/>
+        </a:solidFill>
+      </p:bgPr>
+    </p:bg>
+    <p:spTree>
+      <p:nvGrpSpPr>
+        <p:cNvPr id="1" name=""/>
+        <p:cNvGrpSpPr/>
+        <p:nvPr/>
+      </p:nvGrpSpPr>
+      <p:grpSpPr>
+        <a:xfrm>
+          <a:off x="0" y="0"/>
+          <a:ext cx="0" cy="0"/>
+          <a:chOff x="0" y="0"/>
+          <a:chExt cx="0" cy="0"/>
+        </a:xfrm>
+      </p:grpSpPr>
+      <p:sp>
+        <p:nvSpPr>
+          <p:cNvPr id="153" name="Text 0"/>
+          <p:cNvSpPr txBox="1"/>
+          <p:nvPr/>
+        </p:nvSpPr>
+        <p:spPr>
+          <a:xfrm>
+            <a:off x="548640" y="327658"/>
             <a:ext cx="8229601" cy="533401"/>
           </a:xfrm>
           <a:prstGeom prst="rect">
@@ -1695,14 +3694,14 @@
       </p:sp>
       <p:sp>
         <p:nvSpPr>
-          <p:cNvPr id="150" name="Shape 1"/>
+          <p:cNvPr id="154" name="Shape 1"/>
           <p:cNvSpPr/>
           <p:nvPr/>
         </p:nvSpPr>
         <p:spPr>
           <a:xfrm>
             <a:off x="548640" y="1051560"/>
-            <a:ext cx="8046719" cy="914402"/>
+            <a:ext cx="8046719" cy="914403"/>
           </a:xfrm>
           <a:prstGeom prst="rect">
             <a:avLst/>
@@ -1718,20 +3717,27 @@
           <a:bodyPr lIns="45718" tIns="45718" rIns="45718" bIns="45718"/>
           <a:lstStyle/>
           <a:p>
-            <a:pPr/>
-          </a:p>
-        </p:txBody>
-      </p:sp>
-      <p:sp>
-        <p:nvSpPr>
-          <p:cNvPr id="151" name="Shape 2"/>
+            <a:pPr>
+              <a:defRPr>
+                <a:latin typeface="+mj-lt"/>
+                <a:ea typeface="+mj-ea"/>
+                <a:cs typeface="+mj-cs"/>
+                <a:sym typeface="Calibri"/>
+              </a:defRPr>
+            </a:pPr>
+          </a:p>
+        </p:txBody>
+      </p:sp>
+      <p:sp>
+        <p:nvSpPr>
+          <p:cNvPr id="155" name="Shape 2"/>
           <p:cNvSpPr/>
           <p:nvPr/>
         </p:nvSpPr>
         <p:spPr>
           <a:xfrm>
             <a:off x="548640" y="1051560"/>
-            <a:ext cx="73154" cy="914402"/>
+            <a:ext cx="73155" cy="914403"/>
           </a:xfrm>
           <a:prstGeom prst="rect">
             <a:avLst/>
@@ -1747,20 +3753,27 @@
           <a:bodyPr lIns="45718" tIns="45718" rIns="45718" bIns="45718"/>
           <a:lstStyle/>
           <a:p>
-            <a:pPr/>
-          </a:p>
-        </p:txBody>
-      </p:sp>
-      <p:sp>
-        <p:nvSpPr>
-          <p:cNvPr id="152" name="Text 3"/>
+            <a:pPr>
+              <a:defRPr>
+                <a:latin typeface="+mj-lt"/>
+                <a:ea typeface="+mj-ea"/>
+                <a:cs typeface="+mj-cs"/>
+                <a:sym typeface="Calibri"/>
+              </a:defRPr>
+            </a:pPr>
+          </a:p>
+        </p:txBody>
+      </p:sp>
+      <p:sp>
+        <p:nvSpPr>
+          <p:cNvPr id="156" name="Text 3"/>
           <p:cNvSpPr txBox="1"/>
           <p:nvPr/>
         </p:nvSpPr>
         <p:spPr>
           <a:xfrm>
-            <a:off x="914399" y="1105661"/>
-            <a:ext cx="7406641" cy="358139"/>
+            <a:off x="914399" y="1105660"/>
+            <a:ext cx="7406641" cy="358137"/>
           </a:xfrm>
           <a:prstGeom prst="rect">
             <a:avLst/>
@@ -1801,14 +3814,14 @@
       </p:sp>
       <p:sp>
         <p:nvSpPr>
-          <p:cNvPr id="153" name="Text 4"/>
+          <p:cNvPr id="157" name="Text 4"/>
           <p:cNvSpPr txBox="1"/>
           <p:nvPr/>
         </p:nvSpPr>
         <p:spPr>
           <a:xfrm>
-            <a:off x="914399" y="1438079"/>
-            <a:ext cx="7406641" cy="461401"/>
+            <a:off x="914399" y="1438078"/>
+            <a:ext cx="7406641" cy="461399"/>
           </a:xfrm>
           <a:prstGeom prst="rect">
             <a:avLst/>
@@ -1832,6 +3845,10 @@
                 <a:solidFill>
                   <a:srgbClr val="FFFFFF"/>
                 </a:solidFill>
+                <a:latin typeface="+mj-lt"/>
+                <a:ea typeface="+mj-ea"/>
+                <a:cs typeface="+mj-cs"/>
+                <a:sym typeface="Calibri"/>
               </a:defRPr>
             </a:lvl1pPr>
           </a:lstStyle>
@@ -1845,7 +3862,7 @@
       </p:sp>
       <p:sp>
         <p:nvSpPr>
-          <p:cNvPr id="154" name="Shape 5"/>
+          <p:cNvPr id="158" name="Shape 5"/>
           <p:cNvSpPr/>
           <p:nvPr/>
         </p:nvSpPr>
@@ -1868,20 +3885,27 @@
           <a:bodyPr lIns="45718" tIns="45718" rIns="45718" bIns="45718"/>
           <a:lstStyle/>
           <a:p>
-            <a:pPr/>
-          </a:p>
-        </p:txBody>
-      </p:sp>
-      <p:sp>
-        <p:nvSpPr>
-          <p:cNvPr id="155" name="Shape 6"/>
+            <a:pPr>
+              <a:defRPr>
+                <a:latin typeface="+mj-lt"/>
+                <a:ea typeface="+mj-ea"/>
+                <a:cs typeface="+mj-cs"/>
+                <a:sym typeface="Calibri"/>
+              </a:defRPr>
+            </a:pPr>
+          </a:p>
+        </p:txBody>
+      </p:sp>
+      <p:sp>
+        <p:nvSpPr>
+          <p:cNvPr id="159" name="Shape 6"/>
           <p:cNvSpPr/>
           <p:nvPr/>
         </p:nvSpPr>
         <p:spPr>
           <a:xfrm>
             <a:off x="548640" y="2148839"/>
-            <a:ext cx="73154" cy="914401"/>
+            <a:ext cx="73155" cy="914401"/>
           </a:xfrm>
           <a:prstGeom prst="rect">
             <a:avLst/>
@@ -1897,20 +3921,27 @@
           <a:bodyPr lIns="45718" tIns="45718" rIns="45718" bIns="45718"/>
           <a:lstStyle/>
           <a:p>
-            <a:pPr/>
-          </a:p>
-        </p:txBody>
-      </p:sp>
-      <p:sp>
-        <p:nvSpPr>
-          <p:cNvPr id="156" name="Text 7"/>
+            <a:pPr>
+              <a:defRPr>
+                <a:latin typeface="+mj-lt"/>
+                <a:ea typeface="+mj-ea"/>
+                <a:cs typeface="+mj-cs"/>
+                <a:sym typeface="Calibri"/>
+              </a:defRPr>
+            </a:pPr>
+          </a:p>
+        </p:txBody>
+      </p:sp>
+      <p:sp>
+        <p:nvSpPr>
+          <p:cNvPr id="160" name="Text 7"/>
           <p:cNvSpPr txBox="1"/>
           <p:nvPr/>
         </p:nvSpPr>
         <p:spPr>
           <a:xfrm>
             <a:off x="914399" y="2202943"/>
-            <a:ext cx="7406641" cy="358139"/>
+            <a:ext cx="7406641" cy="358137"/>
           </a:xfrm>
           <a:prstGeom prst="rect">
             <a:avLst/>
@@ -1951,14 +3982,14 @@
       </p:sp>
       <p:sp>
         <p:nvSpPr>
-          <p:cNvPr id="157" name="Text 8"/>
+          <p:cNvPr id="161" name="Text 8"/>
           <p:cNvSpPr txBox="1"/>
           <p:nvPr/>
         </p:nvSpPr>
         <p:spPr>
           <a:xfrm>
-            <a:off x="914399" y="2535360"/>
-            <a:ext cx="7406641" cy="461400"/>
+            <a:off x="914399" y="2535359"/>
+            <a:ext cx="7406641" cy="461399"/>
           </a:xfrm>
           <a:prstGeom prst="rect">
             <a:avLst/>
@@ -1982,6 +4013,10 @@
                 <a:solidFill>
                   <a:srgbClr val="FFFFFF"/>
                 </a:solidFill>
+                <a:latin typeface="+mj-lt"/>
+                <a:ea typeface="+mj-ea"/>
+                <a:cs typeface="+mj-cs"/>
+                <a:sym typeface="Calibri"/>
               </a:defRPr>
             </a:lvl1pPr>
           </a:lstStyle>
@@ -1995,14 +4030,14 @@
       </p:sp>
       <p:sp>
         <p:nvSpPr>
-          <p:cNvPr id="158" name="Shape 9"/>
+          <p:cNvPr id="162" name="Shape 9"/>
           <p:cNvSpPr/>
           <p:nvPr/>
         </p:nvSpPr>
         <p:spPr>
           <a:xfrm>
             <a:off x="548640" y="3246120"/>
-            <a:ext cx="8046719" cy="914402"/>
+            <a:ext cx="8046719" cy="914403"/>
           </a:xfrm>
           <a:prstGeom prst="rect">
             <a:avLst/>
@@ -2018,20 +4053,27 @@
           <a:bodyPr lIns="45718" tIns="45718" rIns="45718" bIns="45718"/>
           <a:lstStyle/>
           <a:p>
-            <a:pPr/>
-          </a:p>
-        </p:txBody>
-      </p:sp>
-      <p:sp>
-        <p:nvSpPr>
-          <p:cNvPr id="159" name="Shape 10"/>
+            <a:pPr>
+              <a:defRPr>
+                <a:latin typeface="+mj-lt"/>
+                <a:ea typeface="+mj-ea"/>
+                <a:cs typeface="+mj-cs"/>
+                <a:sym typeface="Calibri"/>
+              </a:defRPr>
+            </a:pPr>
+          </a:p>
+        </p:txBody>
+      </p:sp>
+      <p:sp>
+        <p:nvSpPr>
+          <p:cNvPr id="163" name="Shape 10"/>
           <p:cNvSpPr/>
           <p:nvPr/>
         </p:nvSpPr>
         <p:spPr>
           <a:xfrm>
             <a:off x="548640" y="3246120"/>
-            <a:ext cx="73154" cy="914402"/>
+            <a:ext cx="73155" cy="914403"/>
           </a:xfrm>
           <a:prstGeom prst="rect">
             <a:avLst/>
@@ -2047,20 +4089,27 @@
           <a:bodyPr lIns="45718" tIns="45718" rIns="45718" bIns="45718"/>
           <a:lstStyle/>
           <a:p>
-            <a:pPr/>
-          </a:p>
-        </p:txBody>
-      </p:sp>
-      <p:sp>
-        <p:nvSpPr>
-          <p:cNvPr id="160" name="Text 11"/>
+            <a:pPr>
+              <a:defRPr>
+                <a:latin typeface="+mj-lt"/>
+                <a:ea typeface="+mj-ea"/>
+                <a:cs typeface="+mj-cs"/>
+                <a:sym typeface="Calibri"/>
+              </a:defRPr>
+            </a:pPr>
+          </a:p>
+        </p:txBody>
+      </p:sp>
+      <p:sp>
+        <p:nvSpPr>
+          <p:cNvPr id="164" name="Text 11"/>
           <p:cNvSpPr txBox="1"/>
           <p:nvPr/>
         </p:nvSpPr>
         <p:spPr>
           <a:xfrm>
-            <a:off x="914399" y="3300222"/>
-            <a:ext cx="7406641" cy="358139"/>
+            <a:off x="914399" y="3300221"/>
+            <a:ext cx="7406641" cy="358137"/>
           </a:xfrm>
           <a:prstGeom prst="rect">
             <a:avLst/>
@@ -2101,14 +4150,14 @@
       </p:sp>
       <p:sp>
         <p:nvSpPr>
-          <p:cNvPr id="161" name="Text 12"/>
+          <p:cNvPr id="165" name="Text 12"/>
           <p:cNvSpPr txBox="1"/>
           <p:nvPr/>
         </p:nvSpPr>
         <p:spPr>
           <a:xfrm>
-            <a:off x="914399" y="3734240"/>
-            <a:ext cx="7406641" cy="258201"/>
+            <a:off x="914399" y="3734239"/>
+            <a:ext cx="7406641" cy="258199"/>
           </a:xfrm>
           <a:prstGeom prst="rect">
             <a:avLst/>
@@ -2132,6 +4181,10 @@
                 <a:solidFill>
                   <a:srgbClr val="FFFFFF"/>
                 </a:solidFill>
+                <a:latin typeface="+mj-lt"/>
+                <a:ea typeface="+mj-ea"/>
+                <a:cs typeface="+mj-cs"/>
+                <a:sym typeface="Calibri"/>
               </a:defRPr>
             </a:lvl1pPr>
           </a:lstStyle>
@@ -2145,14 +4198,14 @@
       </p:sp>
       <p:sp>
         <p:nvSpPr>
-          <p:cNvPr id="162" name="Shape 13"/>
+          <p:cNvPr id="166" name="Shape 13"/>
           <p:cNvSpPr/>
           <p:nvPr/>
         </p:nvSpPr>
         <p:spPr>
           <a:xfrm>
             <a:off x="548640" y="4160520"/>
-            <a:ext cx="8046719" cy="640082"/>
+            <a:ext cx="8046719" cy="640083"/>
           </a:xfrm>
           <a:prstGeom prst="rect">
             <a:avLst/>
@@ -2168,20 +4221,27 @@
           <a:bodyPr lIns="45718" tIns="45718" rIns="45718" bIns="45718"/>
           <a:lstStyle/>
           <a:p>
-            <a:pPr/>
-          </a:p>
-        </p:txBody>
-      </p:sp>
-      <p:sp>
-        <p:nvSpPr>
-          <p:cNvPr id="163" name="Shape 14"/>
+            <a:pPr>
+              <a:defRPr>
+                <a:latin typeface="+mj-lt"/>
+                <a:ea typeface="+mj-ea"/>
+                <a:cs typeface="+mj-cs"/>
+                <a:sym typeface="Calibri"/>
+              </a:defRPr>
+            </a:pPr>
+          </a:p>
+        </p:txBody>
+      </p:sp>
+      <p:sp>
+        <p:nvSpPr>
+          <p:cNvPr id="167" name="Shape 14"/>
           <p:cNvSpPr/>
           <p:nvPr/>
         </p:nvSpPr>
         <p:spPr>
           <a:xfrm>
             <a:off x="548640" y="4160520"/>
-            <a:ext cx="73154" cy="640082"/>
+            <a:ext cx="73155" cy="640083"/>
           </a:xfrm>
           <a:prstGeom prst="rect">
             <a:avLst/>
@@ -2197,20 +4257,27 @@
           <a:bodyPr lIns="45718" tIns="45718" rIns="45718" bIns="45718"/>
           <a:lstStyle/>
           <a:p>
-            <a:pPr/>
-          </a:p>
-        </p:txBody>
-      </p:sp>
-      <p:sp>
-        <p:nvSpPr>
-          <p:cNvPr id="164" name="Text 15"/>
+            <a:pPr>
+              <a:defRPr>
+                <a:latin typeface="+mj-lt"/>
+                <a:ea typeface="+mj-ea"/>
+                <a:cs typeface="+mj-cs"/>
+                <a:sym typeface="Calibri"/>
+              </a:defRPr>
+            </a:pPr>
+          </a:p>
+        </p:txBody>
+      </p:sp>
+      <p:sp>
+        <p:nvSpPr>
+          <p:cNvPr id="168" name="Text 15"/>
           <p:cNvSpPr txBox="1"/>
           <p:nvPr/>
         </p:nvSpPr>
         <p:spPr>
           <a:xfrm>
-            <a:off x="914399" y="4237159"/>
-            <a:ext cx="7406641" cy="486801"/>
+            <a:off x="914399" y="4237158"/>
+            <a:ext cx="7406641" cy="486799"/>
           </a:xfrm>
           <a:prstGeom prst="rect">
             <a:avLst/>
@@ -2235,6 +4302,10 @@
                 <a:solidFill>
                   <a:srgbClr val="E2B714"/>
                 </a:solidFill>
+                <a:latin typeface="+mj-lt"/>
+                <a:ea typeface="+mj-ea"/>
+                <a:cs typeface="+mj-cs"/>
+                <a:sym typeface="Calibri"/>
               </a:defRPr>
             </a:pPr>
             <a:r>
@@ -2292,7 +4363,7 @@
         </p:nvSpPr>
         <p:spPr>
           <a:xfrm>
-            <a:off x="548640" y="327659"/>
+            <a:off x="548640" y="327658"/>
             <a:ext cx="8229601" cy="533401"/>
           </a:xfrm>
           <a:prstGeom prst="rect">
@@ -2340,8 +4411,8 @@
         </p:nvSpPr>
         <p:spPr>
           <a:xfrm>
-            <a:off x="548639" y="1097278"/>
-            <a:ext cx="5029203" cy="3474723"/>
+            <a:off x="548638" y="1097277"/>
+            <a:ext cx="5029205" cy="3474725"/>
           </a:xfrm>
           <a:prstGeom prst="rect">
             <a:avLst/>
@@ -2364,7 +4435,14 @@
           <a:bodyPr lIns="45718" tIns="45718" rIns="45718" bIns="45718"/>
           <a:lstStyle/>
           <a:p>
-            <a:pPr/>
+            <a:pPr>
+              <a:defRPr>
+                <a:latin typeface="+mj-lt"/>
+                <a:ea typeface="+mj-ea"/>
+                <a:cs typeface="+mj-cs"/>
+                <a:sym typeface="Calibri"/>
+              </a:defRPr>
+            </a:pPr>
           </a:p>
         </p:txBody>
       </p:sp>
@@ -2376,8 +4454,8 @@
         </p:nvSpPr>
         <p:spPr>
           <a:xfrm>
-            <a:off x="548640" y="1097278"/>
-            <a:ext cx="64010" cy="3474723"/>
+            <a:off x="548640" y="1097277"/>
+            <a:ext cx="64010" cy="3474725"/>
           </a:xfrm>
           <a:prstGeom prst="rect">
             <a:avLst/>
@@ -2393,7 +4471,14 @@
           <a:bodyPr lIns="45718" tIns="45718" rIns="45718" bIns="45718"/>
           <a:lstStyle/>
           <a:p>
-            <a:pPr/>
+            <a:pPr>
+              <a:defRPr>
+                <a:latin typeface="+mj-lt"/>
+                <a:ea typeface="+mj-ea"/>
+                <a:cs typeface="+mj-cs"/>
+                <a:sym typeface="Calibri"/>
+              </a:defRPr>
+            </a:pPr>
           </a:p>
         </p:txBody>
       </p:sp>
@@ -2405,8 +4490,8 @@
         </p:nvSpPr>
         <p:spPr>
           <a:xfrm>
-            <a:off x="914399" y="1280161"/>
-            <a:ext cx="4389122" cy="2391800"/>
+            <a:off x="914399" y="1280160"/>
+            <a:ext cx="4389123" cy="2391799"/>
           </a:xfrm>
           <a:prstGeom prst="rect">
             <a:avLst/>
@@ -2431,6 +4516,10 @@
                 <a:solidFill>
                   <a:srgbClr val="1A1A2E"/>
                 </a:solidFill>
+                <a:latin typeface="+mj-lt"/>
+                <a:ea typeface="+mj-ea"/>
+                <a:cs typeface="+mj-cs"/>
+                <a:sym typeface="Calibri"/>
               </a:defRPr>
             </a:pPr>
             <a:r>
@@ -2439,12 +4528,22 @@
           </a:p>
           <a:p>
             <a:pPr>
-              <a:defRPr sz="1600"/>
+              <a:defRPr sz="1600">
+                <a:latin typeface="+mj-lt"/>
+                <a:ea typeface="+mj-ea"/>
+                <a:cs typeface="+mj-cs"/>
+                <a:sym typeface="Calibri"/>
+              </a:defRPr>
             </a:pPr>
           </a:p>
           <a:p>
             <a:pPr>
-              <a:defRPr sz="1400"/>
+              <a:defRPr sz="1400">
+                <a:latin typeface="+mj-lt"/>
+                <a:ea typeface="+mj-ea"/>
+                <a:cs typeface="+mj-cs"/>
+                <a:sym typeface="Calibri"/>
+              </a:defRPr>
             </a:pPr>
             <a:r>
               <a:t>Vi ska analysera om statistik och visuell design är tillräckligt distinkta för att förutsäga typ med supervised learning.</a:t>
@@ -2453,12 +4552,22 @@
           </a:p>
           <a:p>
             <a:pPr>
-              <a:defRPr sz="1600"/>
+              <a:defRPr sz="1600">
+                <a:latin typeface="+mj-lt"/>
+                <a:ea typeface="+mj-ea"/>
+                <a:cs typeface="+mj-cs"/>
+                <a:sym typeface="Calibri"/>
+              </a:defRPr>
             </a:pPr>
           </a:p>
           <a:p>
             <a:pPr>
-              <a:defRPr sz="1300"/>
+              <a:defRPr sz="1300">
+                <a:latin typeface="+mj-lt"/>
+                <a:ea typeface="+mj-ea"/>
+                <a:cs typeface="+mj-cs"/>
+                <a:sym typeface="Calibri"/>
+              </a:defRPr>
             </a:pPr>
             <a:r>
               <a:t>Genom att kombinera tabellbaserade egenskaper med visuella bildegenskaper undersöker vi sambandet mellan en Mockemons egenskaper och dess typ.</a:t>
@@ -2474,8 +4583,8 @@
         </p:nvSpPr>
         <p:spPr>
           <a:xfrm>
-            <a:off x="5852159" y="1097280"/>
-            <a:ext cx="2926082" cy="1554482"/>
+            <a:off x="5852159" y="1097279"/>
+            <a:ext cx="2926083" cy="1554484"/>
           </a:xfrm>
           <a:prstGeom prst="rect">
             <a:avLst/>
@@ -2498,7 +4607,14 @@
           <a:bodyPr lIns="45718" tIns="45718" rIns="45718" bIns="45718"/>
           <a:lstStyle/>
           <a:p>
-            <a:pPr/>
+            <a:pPr>
+              <a:defRPr>
+                <a:latin typeface="+mj-lt"/>
+                <a:ea typeface="+mj-ea"/>
+                <a:cs typeface="+mj-cs"/>
+                <a:sym typeface="Calibri"/>
+              </a:defRPr>
+            </a:pPr>
           </a:p>
         </p:txBody>
       </p:sp>
@@ -2511,7 +4627,7 @@
         <p:spPr>
           <a:xfrm>
             <a:off x="5852159" y="1346199"/>
-            <a:ext cx="2926082" cy="711201"/>
+            <a:ext cx="2926083" cy="711201"/>
           </a:xfrm>
           <a:prstGeom prst="rect">
             <a:avLst/>
@@ -2559,7 +4675,7 @@
         <p:spPr>
           <a:xfrm>
             <a:off x="5897879" y="2103121"/>
-            <a:ext cx="2834642" cy="258200"/>
+            <a:ext cx="2834643" cy="258198"/>
           </a:xfrm>
           <a:prstGeom prst="rect">
             <a:avLst/>
@@ -2583,6 +4699,10 @@
                 <a:solidFill>
                   <a:srgbClr val="FFFFFF"/>
                 </a:solidFill>
+                <a:latin typeface="+mj-lt"/>
+                <a:ea typeface="+mj-ea"/>
+                <a:cs typeface="+mj-cs"/>
+                <a:sym typeface="Calibri"/>
               </a:defRPr>
             </a:lvl1pPr>
           </a:lstStyle>
@@ -2603,7 +4723,7 @@
         <p:spPr>
           <a:xfrm>
             <a:off x="5852159" y="2880360"/>
-            <a:ext cx="2926082" cy="1554482"/>
+            <a:ext cx="2926083" cy="1554483"/>
           </a:xfrm>
           <a:prstGeom prst="rect">
             <a:avLst/>
@@ -2626,7 +4746,14 @@
           <a:bodyPr lIns="45718" tIns="45718" rIns="45718" bIns="45718"/>
           <a:lstStyle/>
           <a:p>
-            <a:pPr/>
+            <a:pPr>
+              <a:defRPr>
+                <a:latin typeface="+mj-lt"/>
+                <a:ea typeface="+mj-ea"/>
+                <a:cs typeface="+mj-cs"/>
+                <a:sym typeface="Calibri"/>
+              </a:defRPr>
+            </a:pPr>
           </a:p>
         </p:txBody>
       </p:sp>
@@ -2638,8 +4765,8 @@
         </p:nvSpPr>
         <p:spPr>
           <a:xfrm>
-            <a:off x="5852159" y="3129278"/>
-            <a:ext cx="2926082" cy="711201"/>
+            <a:off x="5852159" y="3129277"/>
+            <a:ext cx="2926083" cy="711201"/>
           </a:xfrm>
           <a:prstGeom prst="rect">
             <a:avLst/>
@@ -2686,8 +4813,8 @@
         </p:nvSpPr>
         <p:spPr>
           <a:xfrm>
-            <a:off x="5897879" y="3886199"/>
-            <a:ext cx="2834642" cy="258201"/>
+            <a:off x="5897879" y="3886198"/>
+            <a:ext cx="2834643" cy="258199"/>
           </a:xfrm>
           <a:prstGeom prst="rect">
             <a:avLst/>
@@ -2711,6 +4838,10 @@
                 <a:solidFill>
                   <a:srgbClr val="FFFFFF"/>
                 </a:solidFill>
+                <a:latin typeface="+mj-lt"/>
+                <a:ea typeface="+mj-ea"/>
+                <a:cs typeface="+mj-cs"/>
+                <a:sym typeface="Calibri"/>
               </a:defRPr>
             </a:lvl1pPr>
           </a:lstStyle>
@@ -2763,7 +4894,7 @@
         </p:nvSpPr>
         <p:spPr>
           <a:xfrm>
-            <a:off x="548640" y="327659"/>
+            <a:off x="548640" y="327658"/>
             <a:ext cx="8229601" cy="533401"/>
           </a:xfrm>
           <a:prstGeom prst="rect">
@@ -2835,7 +4966,14 @@
           <a:bodyPr lIns="45718" tIns="45718" rIns="45718" bIns="45718"/>
           <a:lstStyle/>
           <a:p>
-            <a:pPr/>
+            <a:pPr>
+              <a:defRPr>
+                <a:latin typeface="+mj-lt"/>
+                <a:ea typeface="+mj-ea"/>
+                <a:cs typeface="+mj-cs"/>
+                <a:sym typeface="Calibri"/>
+              </a:defRPr>
+            </a:pPr>
           </a:p>
         </p:txBody>
       </p:sp>
@@ -2864,7 +5002,14 @@
           <a:bodyPr lIns="45718" tIns="45718" rIns="45718" bIns="45718"/>
           <a:lstStyle/>
           <a:p>
-            <a:pPr/>
+            <a:pPr>
+              <a:defRPr>
+                <a:latin typeface="+mj-lt"/>
+                <a:ea typeface="+mj-ea"/>
+                <a:cs typeface="+mj-cs"/>
+                <a:sym typeface="Calibri"/>
+              </a:defRPr>
+            </a:pPr>
           </a:p>
         </p:txBody>
       </p:sp>
@@ -2876,8 +5021,8 @@
         </p:nvSpPr>
         <p:spPr>
           <a:xfrm>
-            <a:off x="731518" y="1280161"/>
-            <a:ext cx="1554484" cy="307339"/>
+            <a:off x="731517" y="1280160"/>
+            <a:ext cx="1554485" cy="307338"/>
           </a:xfrm>
           <a:prstGeom prst="rect">
             <a:avLst/>
@@ -2924,8 +5069,8 @@
         </p:nvSpPr>
         <p:spPr>
           <a:xfrm>
-            <a:off x="731518" y="1828801"/>
-            <a:ext cx="1554484" cy="1274200"/>
+            <a:off x="731517" y="1828800"/>
+            <a:ext cx="1554485" cy="1274199"/>
           </a:xfrm>
           <a:prstGeom prst="rect">
             <a:avLst/>
@@ -2946,7 +5091,12 @@
           <a:lstStyle/>
           <a:p>
             <a:pPr>
-              <a:defRPr sz="1300"/>
+              <a:defRPr sz="1300">
+                <a:latin typeface="+mj-lt"/>
+                <a:ea typeface="+mj-ea"/>
+                <a:cs typeface="+mj-cs"/>
+                <a:sym typeface="Calibri"/>
+              </a:defRPr>
             </a:pPr>
             <a:r>
               <a:t>HP</a:t>
@@ -2954,7 +5104,12 @@
           </a:p>
           <a:p>
             <a:pPr>
-              <a:defRPr sz="1300"/>
+              <a:defRPr sz="1300">
+                <a:latin typeface="+mj-lt"/>
+                <a:ea typeface="+mj-ea"/>
+                <a:cs typeface="+mj-cs"/>
+                <a:sym typeface="Calibri"/>
+              </a:defRPr>
             </a:pPr>
             <a:r>
               <a:t>Attack</a:t>
@@ -2962,7 +5117,12 @@
           </a:p>
           <a:p>
             <a:pPr>
-              <a:defRPr sz="1300"/>
+              <a:defRPr sz="1300">
+                <a:latin typeface="+mj-lt"/>
+                <a:ea typeface="+mj-ea"/>
+                <a:cs typeface="+mj-cs"/>
+                <a:sym typeface="Calibri"/>
+              </a:defRPr>
             </a:pPr>
             <a:r>
               <a:t>Defense,</a:t>
@@ -2970,7 +5130,12 @@
           </a:p>
           <a:p>
             <a:pPr>
-              <a:defRPr sz="1300"/>
+              <a:defRPr sz="1300">
+                <a:latin typeface="+mj-lt"/>
+                <a:ea typeface="+mj-ea"/>
+                <a:cs typeface="+mj-cs"/>
+                <a:sym typeface="Calibri"/>
+              </a:defRPr>
             </a:pPr>
             <a:r>
               <a:t>Sp. Attack,</a:t>
@@ -2978,7 +5143,12 @@
           </a:p>
           <a:p>
             <a:pPr>
-              <a:defRPr sz="1300"/>
+              <a:defRPr sz="1300">
+                <a:latin typeface="+mj-lt"/>
+                <a:ea typeface="+mj-ea"/>
+                <a:cs typeface="+mj-cs"/>
+                <a:sym typeface="Calibri"/>
+              </a:defRPr>
             </a:pPr>
             <a:r>
               <a:t>Sp. Defense,</a:t>
@@ -2986,7 +5156,12 @@
           </a:p>
           <a:p>
             <a:pPr>
-              <a:defRPr sz="1300"/>
+              <a:defRPr sz="1300">
+                <a:latin typeface="+mj-lt"/>
+                <a:ea typeface="+mj-ea"/>
+                <a:cs typeface="+mj-cs"/>
+                <a:sym typeface="Calibri"/>
+              </a:defRPr>
             </a:pPr>
             <a:r>
               <a:t>Speed</a:t>
@@ -3026,7 +5201,14 @@
           <a:bodyPr lIns="45718" tIns="45718" rIns="45718" bIns="45718"/>
           <a:lstStyle/>
           <a:p>
-            <a:pPr/>
+            <a:pPr>
+              <a:defRPr>
+                <a:latin typeface="+mj-lt"/>
+                <a:ea typeface="+mj-ea"/>
+                <a:cs typeface="+mj-cs"/>
+                <a:sym typeface="Calibri"/>
+              </a:defRPr>
+            </a:pPr>
           </a:p>
         </p:txBody>
       </p:sp>
@@ -3055,7 +5237,14 @@
           <a:bodyPr lIns="45718" tIns="45718" rIns="45718" bIns="45718"/>
           <a:lstStyle/>
           <a:p>
-            <a:pPr/>
+            <a:pPr>
+              <a:defRPr>
+                <a:latin typeface="+mj-lt"/>
+                <a:ea typeface="+mj-ea"/>
+                <a:cs typeface="+mj-cs"/>
+                <a:sym typeface="Calibri"/>
+              </a:defRPr>
+            </a:pPr>
           </a:p>
         </p:txBody>
       </p:sp>
@@ -3067,8 +5256,8 @@
         </p:nvSpPr>
         <p:spPr>
           <a:xfrm>
-            <a:off x="2834639" y="1280161"/>
-            <a:ext cx="1554482" cy="307339"/>
+            <a:off x="2834638" y="1280160"/>
+            <a:ext cx="1554484" cy="307338"/>
           </a:xfrm>
           <a:prstGeom prst="rect">
             <a:avLst/>
@@ -3115,8 +5304,8 @@
         </p:nvSpPr>
         <p:spPr>
           <a:xfrm>
-            <a:off x="2834639" y="1828800"/>
-            <a:ext cx="1554482" cy="867801"/>
+            <a:off x="2834638" y="1828799"/>
+            <a:ext cx="1554484" cy="867799"/>
           </a:xfrm>
           <a:prstGeom prst="rect">
             <a:avLst/>
@@ -3137,7 +5326,12 @@
           <a:lstStyle/>
           <a:p>
             <a:pPr>
-              <a:defRPr sz="1300"/>
+              <a:defRPr sz="1300">
+                <a:latin typeface="+mj-lt"/>
+                <a:ea typeface="+mj-ea"/>
+                <a:cs typeface="+mj-cs"/>
+                <a:sym typeface="Calibri"/>
+              </a:defRPr>
             </a:pPr>
             <a:r>
               <a:t>Height,</a:t>
@@ -3145,7 +5339,12 @@
           </a:p>
           <a:p>
             <a:pPr>
-              <a:defRPr sz="1300"/>
+              <a:defRPr sz="1300">
+                <a:latin typeface="+mj-lt"/>
+                <a:ea typeface="+mj-ea"/>
+                <a:cs typeface="+mj-cs"/>
+                <a:sym typeface="Calibri"/>
+              </a:defRPr>
             </a:pPr>
             <a:r>
               <a:t>Weight,</a:t>
@@ -3153,7 +5352,12 @@
           </a:p>
           <a:p>
             <a:pPr>
-              <a:defRPr sz="1300"/>
+              <a:defRPr sz="1300">
+                <a:latin typeface="+mj-lt"/>
+                <a:ea typeface="+mj-ea"/>
+                <a:cs typeface="+mj-cs"/>
+                <a:sym typeface="Calibri"/>
+              </a:defRPr>
             </a:pPr>
             <a:r>
               <a:t>Shape,</a:t>
@@ -3161,7 +5365,12 @@
           </a:p>
           <a:p>
             <a:pPr>
-              <a:defRPr sz="1300"/>
+              <a:defRPr sz="1300">
+                <a:latin typeface="+mj-lt"/>
+                <a:ea typeface="+mj-ea"/>
+                <a:cs typeface="+mj-cs"/>
+                <a:sym typeface="Calibri"/>
+              </a:defRPr>
             </a:pPr>
             <a:r>
               <a:t>Color</a:t>
@@ -3201,7 +5410,14 @@
           <a:bodyPr lIns="45718" tIns="45718" rIns="45718" bIns="45718"/>
           <a:lstStyle/>
           <a:p>
-            <a:pPr/>
+            <a:pPr>
+              <a:defRPr>
+                <a:latin typeface="+mj-lt"/>
+                <a:ea typeface="+mj-ea"/>
+                <a:cs typeface="+mj-cs"/>
+                <a:sym typeface="Calibri"/>
+              </a:defRPr>
+            </a:pPr>
           </a:p>
         </p:txBody>
       </p:sp>
@@ -3230,7 +5446,14 @@
           <a:bodyPr lIns="45718" tIns="45718" rIns="45718" bIns="45718"/>
           <a:lstStyle/>
           <a:p>
-            <a:pPr/>
+            <a:pPr>
+              <a:defRPr>
+                <a:latin typeface="+mj-lt"/>
+                <a:ea typeface="+mj-ea"/>
+                <a:cs typeface="+mj-cs"/>
+                <a:sym typeface="Calibri"/>
+              </a:defRPr>
+            </a:pPr>
           </a:p>
         </p:txBody>
       </p:sp>
@@ -3242,8 +5465,8 @@
         </p:nvSpPr>
         <p:spPr>
           <a:xfrm>
-            <a:off x="4937759" y="1280161"/>
-            <a:ext cx="1554482" cy="307339"/>
+            <a:off x="4937759" y="1280160"/>
+            <a:ext cx="1554483" cy="307338"/>
           </a:xfrm>
           <a:prstGeom prst="rect">
             <a:avLst/>
@@ -3290,8 +5513,8 @@
         </p:nvSpPr>
         <p:spPr>
           <a:xfrm>
-            <a:off x="4937759" y="1828800"/>
-            <a:ext cx="1554482" cy="867801"/>
+            <a:off x="4937759" y="1828799"/>
+            <a:ext cx="1554483" cy="867799"/>
           </a:xfrm>
           <a:prstGeom prst="rect">
             <a:avLst/>
@@ -3312,7 +5535,12 @@
           <a:lstStyle/>
           <a:p>
             <a:pPr>
-              <a:defRPr sz="1300"/>
+              <a:defRPr sz="1300">
+                <a:latin typeface="+mj-lt"/>
+                <a:ea typeface="+mj-ea"/>
+                <a:cs typeface="+mj-cs"/>
+                <a:sym typeface="Calibri"/>
+              </a:defRPr>
             </a:pPr>
             <a:r>
               <a:t>Habitat,</a:t>
@@ -3320,7 +5548,12 @@
           </a:p>
           <a:p>
             <a:pPr>
-              <a:defRPr sz="1300"/>
+              <a:defRPr sz="1300">
+                <a:latin typeface="+mj-lt"/>
+                <a:ea typeface="+mj-ea"/>
+                <a:cs typeface="+mj-cs"/>
+                <a:sym typeface="Calibri"/>
+              </a:defRPr>
             </a:pPr>
             <a:r>
               <a:t>Growth Rate,</a:t>
@@ -3328,7 +5561,12 @@
           </a:p>
           <a:p>
             <a:pPr>
-              <a:defRPr sz="1300"/>
+              <a:defRPr sz="1300">
+                <a:latin typeface="+mj-lt"/>
+                <a:ea typeface="+mj-ea"/>
+                <a:cs typeface="+mj-cs"/>
+                <a:sym typeface="Calibri"/>
+              </a:defRPr>
             </a:pPr>
             <a:r>
               <a:t>Egg Groups,</a:t>
@@ -3336,7 +5574,12 @@
           </a:p>
           <a:p>
             <a:pPr>
-              <a:defRPr sz="1300"/>
+              <a:defRPr sz="1300">
+                <a:latin typeface="+mj-lt"/>
+                <a:ea typeface="+mj-ea"/>
+                <a:cs typeface="+mj-cs"/>
+                <a:sym typeface="Calibri"/>
+              </a:defRPr>
             </a:pPr>
             <a:r>
               <a:t>Capture Rate</a:t>
@@ -3376,7 +5619,14 @@
           <a:bodyPr lIns="45718" tIns="45718" rIns="45718" bIns="45718"/>
           <a:lstStyle/>
           <a:p>
-            <a:pPr/>
+            <a:pPr>
+              <a:defRPr>
+                <a:latin typeface="+mj-lt"/>
+                <a:ea typeface="+mj-ea"/>
+                <a:cs typeface="+mj-cs"/>
+                <a:sym typeface="Calibri"/>
+              </a:defRPr>
+            </a:pPr>
           </a:p>
         </p:txBody>
       </p:sp>
@@ -3405,7 +5655,14 @@
           <a:bodyPr lIns="45718" tIns="45718" rIns="45718" bIns="45718"/>
           <a:lstStyle/>
           <a:p>
-            <a:pPr/>
+            <a:pPr>
+              <a:defRPr>
+                <a:latin typeface="+mj-lt"/>
+                <a:ea typeface="+mj-ea"/>
+                <a:cs typeface="+mj-cs"/>
+                <a:sym typeface="Calibri"/>
+              </a:defRPr>
+            </a:pPr>
           </a:p>
         </p:txBody>
       </p:sp>
@@ -3417,8 +5674,8 @@
         </p:nvSpPr>
         <p:spPr>
           <a:xfrm>
-            <a:off x="7040878" y="1280161"/>
-            <a:ext cx="1554482" cy="307339"/>
+            <a:off x="7040877" y="1280160"/>
+            <a:ext cx="1554484" cy="307338"/>
           </a:xfrm>
           <a:prstGeom prst="rect">
             <a:avLst/>
@@ -3465,8 +5722,8 @@
         </p:nvSpPr>
         <p:spPr>
           <a:xfrm>
-            <a:off x="7040878" y="1828800"/>
-            <a:ext cx="1554482" cy="664601"/>
+            <a:off x="7040877" y="1828799"/>
+            <a:ext cx="1554484" cy="664599"/>
           </a:xfrm>
           <a:prstGeom prst="rect">
             <a:avLst/>
@@ -3487,7 +5744,12 @@
           <a:lstStyle/>
           <a:p>
             <a:pPr>
-              <a:defRPr sz="1300"/>
+              <a:defRPr sz="1300">
+                <a:latin typeface="+mj-lt"/>
+                <a:ea typeface="+mj-ea"/>
+                <a:cs typeface="+mj-cs"/>
+                <a:sym typeface="Calibri"/>
+              </a:defRPr>
             </a:pPr>
             <a:r>
               <a:t>Sprite-bilder</a:t>
@@ -3495,7 +5757,12 @@
           </a:p>
           <a:p>
             <a:pPr>
-              <a:defRPr sz="1300"/>
+              <a:defRPr sz="1300">
+                <a:latin typeface="+mj-lt"/>
+                <a:ea typeface="+mj-ea"/>
+                <a:cs typeface="+mj-cs"/>
+                <a:sym typeface="Calibri"/>
+              </a:defRPr>
             </a:pPr>
             <a:r>
               <a:t>(96×96 RGB)</a:t>
@@ -3503,7 +5770,12 @@
           </a:p>
           <a:p>
             <a:pPr>
-              <a:defRPr sz="1300"/>
+              <a:defRPr sz="1300">
+                <a:latin typeface="+mj-lt"/>
+                <a:ea typeface="+mj-ea"/>
+                <a:cs typeface="+mj-cs"/>
+                <a:sym typeface="Calibri"/>
+              </a:defRPr>
             </a:pPr>
             <a:r>
               <a:t>per Mockemon</a:t>
@@ -3519,8 +5791,8 @@
         </p:nvSpPr>
         <p:spPr>
           <a:xfrm>
-            <a:off x="594360" y="3749041"/>
-            <a:ext cx="7955279" cy="438803"/>
+            <a:off x="594360" y="3749040"/>
+            <a:ext cx="7955279" cy="438802"/>
           </a:xfrm>
           <a:prstGeom prst="rect">
             <a:avLst/>
@@ -3544,6 +5816,10 @@
                 <a:solidFill>
                   <a:srgbClr val="64748B"/>
                 </a:solidFill>
+                <a:latin typeface="+mj-lt"/>
+                <a:ea typeface="+mj-ea"/>
+                <a:cs typeface="+mj-cs"/>
+                <a:sym typeface="Calibri"/>
               </a:defRPr>
             </a:lvl1pPr>
           </a:lstStyle>
@@ -3596,7 +5872,7 @@
         </p:nvSpPr>
         <p:spPr>
           <a:xfrm>
-            <a:off x="548640" y="327659"/>
+            <a:off x="548640" y="327658"/>
             <a:ext cx="8229601" cy="533401"/>
           </a:xfrm>
           <a:prstGeom prst="rect">
@@ -3645,7 +5921,7 @@
         <p:spPr>
           <a:xfrm>
             <a:off x="731519" y="1280160"/>
-            <a:ext cx="640083" cy="640083"/>
+            <a:ext cx="640085" cy="640085"/>
           </a:xfrm>
           <a:prstGeom prst="ellipse">
             <a:avLst/>
@@ -3661,7 +5937,14 @@
           <a:bodyPr lIns="45718" tIns="45718" rIns="45718" bIns="45718"/>
           <a:lstStyle/>
           <a:p>
-            <a:pPr/>
+            <a:pPr>
+              <a:defRPr>
+                <a:latin typeface="+mj-lt"/>
+                <a:ea typeface="+mj-ea"/>
+                <a:cs typeface="+mj-cs"/>
+                <a:sym typeface="Calibri"/>
+              </a:defRPr>
+            </a:pPr>
           </a:p>
         </p:txBody>
       </p:sp>
@@ -3673,8 +5956,8 @@
         </p:nvSpPr>
         <p:spPr>
           <a:xfrm>
-            <a:off x="777239" y="1389381"/>
-            <a:ext cx="548641" cy="421639"/>
+            <a:off x="777239" y="1389380"/>
+            <a:ext cx="548641" cy="421637"/>
           </a:xfrm>
           <a:prstGeom prst="rect">
             <a:avLst/>
@@ -3721,8 +6004,8 @@
         </p:nvSpPr>
         <p:spPr>
           <a:xfrm>
-            <a:off x="411478" y="2057400"/>
-            <a:ext cx="1280163" cy="294639"/>
+            <a:off x="411477" y="2057400"/>
+            <a:ext cx="1280165" cy="294637"/>
           </a:xfrm>
           <a:prstGeom prst="rect">
             <a:avLst/>
@@ -3769,8 +6052,8 @@
         </p:nvSpPr>
         <p:spPr>
           <a:xfrm>
-            <a:off x="411478" y="2468879"/>
-            <a:ext cx="1280163" cy="390807"/>
+            <a:off x="411477" y="2468878"/>
+            <a:ext cx="1280165" cy="390805"/>
           </a:xfrm>
           <a:prstGeom prst="rect">
             <a:avLst/>
@@ -3795,6 +6078,10 @@
                 <a:solidFill>
                   <a:srgbClr val="FFFFFF"/>
                 </a:solidFill>
+                <a:latin typeface="+mj-lt"/>
+                <a:ea typeface="+mj-ea"/>
+                <a:cs typeface="+mj-cs"/>
+                <a:sym typeface="Calibri"/>
               </a:defRPr>
             </a:pPr>
             <a:r>
@@ -3807,6 +6094,10 @@
                 <a:solidFill>
                   <a:srgbClr val="FFFFFF"/>
                 </a:solidFill>
+                <a:latin typeface="+mj-lt"/>
+                <a:ea typeface="+mj-ea"/>
+                <a:cs typeface="+mj-cs"/>
+                <a:sym typeface="Calibri"/>
               </a:defRPr>
             </a:pPr>
             <a:r>
@@ -3824,7 +6115,7 @@
         <p:spPr>
           <a:xfrm>
             <a:off x="1600199" y="1600200"/>
-            <a:ext cx="457202" cy="0"/>
+            <a:ext cx="457203" cy="0"/>
           </a:xfrm>
           <a:prstGeom prst="line">
             <a:avLst/>
@@ -3852,7 +6143,7 @@
         <p:spPr>
           <a:xfrm>
             <a:off x="2194560" y="1280160"/>
-            <a:ext cx="640083" cy="640083"/>
+            <a:ext cx="640085" cy="640085"/>
           </a:xfrm>
           <a:prstGeom prst="ellipse">
             <a:avLst/>
@@ -3868,7 +6159,14 @@
           <a:bodyPr lIns="45718" tIns="45718" rIns="45718" bIns="45718"/>
           <a:lstStyle/>
           <a:p>
-            <a:pPr/>
+            <a:pPr>
+              <a:defRPr>
+                <a:latin typeface="+mj-lt"/>
+                <a:ea typeface="+mj-ea"/>
+                <a:cs typeface="+mj-cs"/>
+                <a:sym typeface="Calibri"/>
+              </a:defRPr>
+            </a:pPr>
           </a:p>
         </p:txBody>
       </p:sp>
@@ -3880,8 +6178,8 @@
         </p:nvSpPr>
         <p:spPr>
           <a:xfrm>
-            <a:off x="2240279" y="1389381"/>
-            <a:ext cx="548642" cy="421639"/>
+            <a:off x="2240278" y="1389380"/>
+            <a:ext cx="548643" cy="421637"/>
           </a:xfrm>
           <a:prstGeom prst="rect">
             <a:avLst/>
@@ -3928,8 +6226,8 @@
         </p:nvSpPr>
         <p:spPr>
           <a:xfrm>
-            <a:off x="1874518" y="2057400"/>
-            <a:ext cx="1280163" cy="294639"/>
+            <a:off x="1874517" y="2057400"/>
+            <a:ext cx="1280164" cy="294637"/>
           </a:xfrm>
           <a:prstGeom prst="rect">
             <a:avLst/>
@@ -3976,8 +6274,8 @@
         </p:nvSpPr>
         <p:spPr>
           <a:xfrm>
-            <a:off x="1874518" y="2468879"/>
-            <a:ext cx="1280163" cy="390807"/>
+            <a:off x="1874517" y="2468878"/>
+            <a:ext cx="1280164" cy="390805"/>
           </a:xfrm>
           <a:prstGeom prst="rect">
             <a:avLst/>
@@ -4002,6 +6300,10 @@
                 <a:solidFill>
                   <a:srgbClr val="FFFFFF"/>
                 </a:solidFill>
+                <a:latin typeface="+mj-lt"/>
+                <a:ea typeface="+mj-ea"/>
+                <a:cs typeface="+mj-cs"/>
+                <a:sym typeface="Calibri"/>
               </a:defRPr>
             </a:pPr>
             <a:r>
@@ -4014,6 +6316,10 @@
                 <a:solidFill>
                   <a:srgbClr val="FFFFFF"/>
                 </a:solidFill>
+                <a:latin typeface="+mj-lt"/>
+                <a:ea typeface="+mj-ea"/>
+                <a:cs typeface="+mj-cs"/>
+                <a:sym typeface="Calibri"/>
               </a:defRPr>
             </a:pPr>
             <a:r>
@@ -4031,7 +6337,7 @@
         <p:spPr>
           <a:xfrm>
             <a:off x="3063238" y="1600200"/>
-            <a:ext cx="457202" cy="0"/>
+            <a:ext cx="457203" cy="0"/>
           </a:xfrm>
           <a:prstGeom prst="line">
             <a:avLst/>
@@ -4059,7 +6365,7 @@
         <p:spPr>
           <a:xfrm>
             <a:off x="3657598" y="1280160"/>
-            <a:ext cx="640083" cy="640083"/>
+            <a:ext cx="640085" cy="640085"/>
           </a:xfrm>
           <a:prstGeom prst="ellipse">
             <a:avLst/>
@@ -4075,7 +6381,14 @@
           <a:bodyPr lIns="45718" tIns="45718" rIns="45718" bIns="45718"/>
           <a:lstStyle/>
           <a:p>
-            <a:pPr/>
+            <a:pPr>
+              <a:defRPr>
+                <a:latin typeface="+mj-lt"/>
+                <a:ea typeface="+mj-ea"/>
+                <a:cs typeface="+mj-cs"/>
+                <a:sym typeface="Calibri"/>
+              </a:defRPr>
+            </a:pPr>
           </a:p>
         </p:txBody>
       </p:sp>
@@ -4087,8 +6400,8 @@
         </p:nvSpPr>
         <p:spPr>
           <a:xfrm>
-            <a:off x="3703318" y="1389381"/>
-            <a:ext cx="548643" cy="421639"/>
+            <a:off x="3703318" y="1389380"/>
+            <a:ext cx="548644" cy="421637"/>
           </a:xfrm>
           <a:prstGeom prst="rect">
             <a:avLst/>
@@ -4136,7 +6449,7 @@
         <p:spPr>
           <a:xfrm>
             <a:off x="3337559" y="2057400"/>
-            <a:ext cx="1280162" cy="294639"/>
+            <a:ext cx="1280163" cy="294637"/>
           </a:xfrm>
           <a:prstGeom prst="rect">
             <a:avLst/>
@@ -4183,8 +6496,8 @@
         </p:nvSpPr>
         <p:spPr>
           <a:xfrm>
-            <a:off x="3337559" y="2468879"/>
-            <a:ext cx="1280162" cy="390807"/>
+            <a:off x="3337559" y="2468878"/>
+            <a:ext cx="1280163" cy="390805"/>
           </a:xfrm>
           <a:prstGeom prst="rect">
             <a:avLst/>
@@ -4209,6 +6522,10 @@
                 <a:solidFill>
                   <a:srgbClr val="FFFFFF"/>
                 </a:solidFill>
+                <a:latin typeface="+mj-lt"/>
+                <a:ea typeface="+mj-ea"/>
+                <a:cs typeface="+mj-cs"/>
+                <a:sym typeface="Calibri"/>
               </a:defRPr>
             </a:pPr>
             <a:r>
@@ -4221,6 +6538,10 @@
                 <a:solidFill>
                   <a:srgbClr val="FFFFFF"/>
                 </a:solidFill>
+                <a:latin typeface="+mj-lt"/>
+                <a:ea typeface="+mj-ea"/>
+                <a:cs typeface="+mj-cs"/>
+                <a:sym typeface="Calibri"/>
               </a:defRPr>
             </a:pPr>
             <a:r>
@@ -4238,7 +6559,7 @@
         <p:spPr>
           <a:xfrm>
             <a:off x="4526279" y="1600200"/>
-            <a:ext cx="457202" cy="0"/>
+            <a:ext cx="457203" cy="0"/>
           </a:xfrm>
           <a:prstGeom prst="line">
             <a:avLst/>
@@ -4266,7 +6587,7 @@
         <p:spPr>
           <a:xfrm>
             <a:off x="5120640" y="1280160"/>
-            <a:ext cx="640083" cy="640083"/>
+            <a:ext cx="640085" cy="640085"/>
           </a:xfrm>
           <a:prstGeom prst="ellipse">
             <a:avLst/>
@@ -4282,7 +6603,14 @@
           <a:bodyPr lIns="45718" tIns="45718" rIns="45718" bIns="45718"/>
           <a:lstStyle/>
           <a:p>
-            <a:pPr/>
+            <a:pPr>
+              <a:defRPr>
+                <a:latin typeface="+mj-lt"/>
+                <a:ea typeface="+mj-ea"/>
+                <a:cs typeface="+mj-cs"/>
+                <a:sym typeface="Calibri"/>
+              </a:defRPr>
+            </a:pPr>
           </a:p>
         </p:txBody>
       </p:sp>
@@ -4294,8 +6622,8 @@
         </p:nvSpPr>
         <p:spPr>
           <a:xfrm>
-            <a:off x="5166359" y="1389381"/>
-            <a:ext cx="548642" cy="421639"/>
+            <a:off x="5166359" y="1389380"/>
+            <a:ext cx="548643" cy="421637"/>
           </a:xfrm>
           <a:prstGeom prst="rect">
             <a:avLst/>
@@ -4343,7 +6671,7 @@
         <p:spPr>
           <a:xfrm>
             <a:off x="4800598" y="2057400"/>
-            <a:ext cx="1280162" cy="294639"/>
+            <a:ext cx="1280163" cy="294637"/>
           </a:xfrm>
           <a:prstGeom prst="rect">
             <a:avLst/>
@@ -4390,8 +6718,8 @@
         </p:nvSpPr>
         <p:spPr>
           <a:xfrm>
-            <a:off x="4800598" y="2468879"/>
-            <a:ext cx="1280162" cy="390807"/>
+            <a:off x="4800598" y="2468878"/>
+            <a:ext cx="1280163" cy="390805"/>
           </a:xfrm>
           <a:prstGeom prst="rect">
             <a:avLst/>
@@ -4416,6 +6744,10 @@
                 <a:solidFill>
                   <a:srgbClr val="FFFFFF"/>
                 </a:solidFill>
+                <a:latin typeface="+mj-lt"/>
+                <a:ea typeface="+mj-ea"/>
+                <a:cs typeface="+mj-cs"/>
+                <a:sym typeface="Calibri"/>
               </a:defRPr>
             </a:pPr>
             <a:r>
@@ -4428,6 +6760,10 @@
                 <a:solidFill>
                   <a:srgbClr val="FFFFFF"/>
                 </a:solidFill>
+                <a:latin typeface="+mj-lt"/>
+                <a:ea typeface="+mj-ea"/>
+                <a:cs typeface="+mj-cs"/>
+                <a:sym typeface="Calibri"/>
               </a:defRPr>
             </a:pPr>
             <a:r>
@@ -4445,7 +6781,7 @@
         <p:spPr>
           <a:xfrm>
             <a:off x="5989320" y="1600200"/>
-            <a:ext cx="457202" cy="0"/>
+            <a:ext cx="457203" cy="0"/>
           </a:xfrm>
           <a:prstGeom prst="line">
             <a:avLst/>
@@ -4473,7 +6809,7 @@
         <p:spPr>
           <a:xfrm>
             <a:off x="6583680" y="1280160"/>
-            <a:ext cx="640083" cy="640083"/>
+            <a:ext cx="640085" cy="640085"/>
           </a:xfrm>
           <a:prstGeom prst="ellipse">
             <a:avLst/>
@@ -4489,7 +6825,14 @@
           <a:bodyPr lIns="45718" tIns="45718" rIns="45718" bIns="45718"/>
           <a:lstStyle/>
           <a:p>
-            <a:pPr/>
+            <a:pPr>
+              <a:defRPr>
+                <a:latin typeface="+mj-lt"/>
+                <a:ea typeface="+mj-ea"/>
+                <a:cs typeface="+mj-cs"/>
+                <a:sym typeface="Calibri"/>
+              </a:defRPr>
+            </a:pPr>
           </a:p>
         </p:txBody>
       </p:sp>
@@ -4501,8 +6844,8 @@
         </p:nvSpPr>
         <p:spPr>
           <a:xfrm>
-            <a:off x="6629400" y="1389381"/>
-            <a:ext cx="548641" cy="421639"/>
+            <a:off x="6629400" y="1389380"/>
+            <a:ext cx="548641" cy="421637"/>
           </a:xfrm>
           <a:prstGeom prst="rect">
             <a:avLst/>
@@ -4550,7 +6893,7 @@
         <p:spPr>
           <a:xfrm>
             <a:off x="6263640" y="2057400"/>
-            <a:ext cx="1280162" cy="294639"/>
+            <a:ext cx="1280163" cy="294637"/>
           </a:xfrm>
           <a:prstGeom prst="rect">
             <a:avLst/>
@@ -4597,8 +6940,8 @@
         </p:nvSpPr>
         <p:spPr>
           <a:xfrm>
-            <a:off x="6263640" y="2468879"/>
-            <a:ext cx="1280162" cy="390807"/>
+            <a:off x="6263640" y="2468878"/>
+            <a:ext cx="1280163" cy="390805"/>
           </a:xfrm>
           <a:prstGeom prst="rect">
             <a:avLst/>
@@ -4623,6 +6966,10 @@
                 <a:solidFill>
                   <a:srgbClr val="FFFFFF"/>
                 </a:solidFill>
+                <a:latin typeface="+mj-lt"/>
+                <a:ea typeface="+mj-ea"/>
+                <a:cs typeface="+mj-cs"/>
+                <a:sym typeface="Calibri"/>
               </a:defRPr>
             </a:pPr>
             <a:r>
@@ -4635,6 +6982,10 @@
                 <a:solidFill>
                   <a:srgbClr val="FFFFFF"/>
                 </a:solidFill>
+                <a:latin typeface="+mj-lt"/>
+                <a:ea typeface="+mj-ea"/>
+                <a:cs typeface="+mj-cs"/>
+                <a:sym typeface="Calibri"/>
               </a:defRPr>
             </a:pPr>
             <a:r>
@@ -4652,7 +7003,7 @@
         <p:spPr>
           <a:xfrm>
             <a:off x="7452359" y="1600200"/>
-            <a:ext cx="457202" cy="0"/>
+            <a:ext cx="457203" cy="0"/>
           </a:xfrm>
           <a:prstGeom prst="line">
             <a:avLst/>
@@ -4680,7 +7031,7 @@
         <p:spPr>
           <a:xfrm>
             <a:off x="8046718" y="1280160"/>
-            <a:ext cx="640083" cy="640083"/>
+            <a:ext cx="640085" cy="640085"/>
           </a:xfrm>
           <a:prstGeom prst="ellipse">
             <a:avLst/>
@@ -4696,7 +7047,14 @@
           <a:bodyPr lIns="45718" tIns="45718" rIns="45718" bIns="45718"/>
           <a:lstStyle/>
           <a:p>
-            <a:pPr/>
+            <a:pPr>
+              <a:defRPr>
+                <a:latin typeface="+mj-lt"/>
+                <a:ea typeface="+mj-ea"/>
+                <a:cs typeface="+mj-cs"/>
+                <a:sym typeface="Calibri"/>
+              </a:defRPr>
+            </a:pPr>
           </a:p>
         </p:txBody>
       </p:sp>
@@ -4708,8 +7066,8 @@
         </p:nvSpPr>
         <p:spPr>
           <a:xfrm>
-            <a:off x="8092439" y="1389381"/>
-            <a:ext cx="548642" cy="421639"/>
+            <a:off x="8092439" y="1389380"/>
+            <a:ext cx="548643" cy="421637"/>
           </a:xfrm>
           <a:prstGeom prst="rect">
             <a:avLst/>
@@ -4756,8 +7114,8 @@
         </p:nvSpPr>
         <p:spPr>
           <a:xfrm>
-            <a:off x="7726678" y="2057400"/>
-            <a:ext cx="1280162" cy="294639"/>
+            <a:off x="7726677" y="2057400"/>
+            <a:ext cx="1280163" cy="294637"/>
           </a:xfrm>
           <a:prstGeom prst="rect">
             <a:avLst/>
@@ -4804,8 +7162,8 @@
         </p:nvSpPr>
         <p:spPr>
           <a:xfrm>
-            <a:off x="7726678" y="2468879"/>
-            <a:ext cx="1280162" cy="555907"/>
+            <a:off x="7726677" y="2468878"/>
+            <a:ext cx="1280163" cy="555905"/>
           </a:xfrm>
           <a:prstGeom prst="rect">
             <a:avLst/>
@@ -4830,6 +7188,10 @@
                 <a:solidFill>
                   <a:srgbClr val="FFFFFF"/>
                 </a:solidFill>
+                <a:latin typeface="+mj-lt"/>
+                <a:ea typeface="+mj-ea"/>
+                <a:cs typeface="+mj-cs"/>
+                <a:sym typeface="Calibri"/>
               </a:defRPr>
             </a:pPr>
             <a:r>
@@ -4842,6 +7204,10 @@
                 <a:solidFill>
                   <a:srgbClr val="FFFFFF"/>
                 </a:solidFill>
+                <a:latin typeface="+mj-lt"/>
+                <a:ea typeface="+mj-ea"/>
+                <a:cs typeface="+mj-cs"/>
+                <a:sym typeface="Calibri"/>
               </a:defRPr>
             </a:pPr>
             <a:r>
@@ -4859,7 +7225,7 @@
         <p:spPr>
           <a:xfrm>
             <a:off x="594360" y="3327400"/>
-            <a:ext cx="8138160" cy="294639"/>
+            <a:ext cx="8138160" cy="294637"/>
           </a:xfrm>
           <a:prstGeom prst="rect">
             <a:avLst/>
@@ -4907,7 +7273,7 @@
         <p:spPr>
           <a:xfrm>
             <a:off x="548640" y="3749040"/>
-            <a:ext cx="2606040" cy="822962"/>
+            <a:ext cx="2606040" cy="822963"/>
           </a:xfrm>
           <a:prstGeom prst="rect">
             <a:avLst/>
@@ -4923,7 +7289,14 @@
           <a:bodyPr lIns="45718" tIns="45718" rIns="45718" bIns="45718"/>
           <a:lstStyle/>
           <a:p>
-            <a:pPr/>
+            <a:pPr>
+              <a:defRPr>
+                <a:latin typeface="+mj-lt"/>
+                <a:ea typeface="+mj-ea"/>
+                <a:cs typeface="+mj-cs"/>
+                <a:sym typeface="Calibri"/>
+              </a:defRPr>
+            </a:pPr>
           </a:p>
         </p:txBody>
       </p:sp>
@@ -4936,7 +7309,7 @@
         <p:spPr>
           <a:xfrm>
             <a:off x="548640" y="3749040"/>
-            <a:ext cx="54866" cy="822962"/>
+            <a:ext cx="54867" cy="822963"/>
           </a:xfrm>
           <a:prstGeom prst="rect">
             <a:avLst/>
@@ -4952,7 +7325,14 @@
           <a:bodyPr lIns="45718" tIns="45718" rIns="45718" bIns="45718"/>
           <a:lstStyle/>
           <a:p>
-            <a:pPr/>
+            <a:pPr>
+              <a:defRPr>
+                <a:latin typeface="+mj-lt"/>
+                <a:ea typeface="+mj-ea"/>
+                <a:cs typeface="+mj-cs"/>
+                <a:sym typeface="Calibri"/>
+              </a:defRPr>
+            </a:pPr>
           </a:p>
         </p:txBody>
       </p:sp>
@@ -4964,8 +7344,8 @@
         </p:nvSpPr>
         <p:spPr>
           <a:xfrm>
-            <a:off x="777238" y="3836669"/>
-            <a:ext cx="2194562" cy="281939"/>
+            <a:off x="777238" y="3836668"/>
+            <a:ext cx="2194563" cy="281937"/>
           </a:xfrm>
           <a:prstGeom prst="rect">
             <a:avLst/>
@@ -5012,8 +7392,8 @@
         </p:nvSpPr>
         <p:spPr>
           <a:xfrm>
-            <a:off x="777238" y="4207687"/>
-            <a:ext cx="2194562" cy="225706"/>
+            <a:off x="777238" y="4207686"/>
+            <a:ext cx="2194563" cy="225705"/>
           </a:xfrm>
           <a:prstGeom prst="rect">
             <a:avLst/>
@@ -5037,6 +7417,10 @@
                 <a:solidFill>
                   <a:srgbClr val="FFFFFF"/>
                 </a:solidFill>
+                <a:latin typeface="+mj-lt"/>
+                <a:ea typeface="+mj-ea"/>
+                <a:cs typeface="+mj-cs"/>
+                <a:sym typeface="Calibri"/>
               </a:defRPr>
             </a:lvl1pPr>
           </a:lstStyle>
@@ -5057,7 +7441,7 @@
         <p:spPr>
           <a:xfrm>
             <a:off x="3383279" y="3749040"/>
-            <a:ext cx="2606042" cy="822962"/>
+            <a:ext cx="2606043" cy="822963"/>
           </a:xfrm>
           <a:prstGeom prst="rect">
             <a:avLst/>
@@ -5073,7 +7457,14 @@
           <a:bodyPr lIns="45718" tIns="45718" rIns="45718" bIns="45718"/>
           <a:lstStyle/>
           <a:p>
-            <a:pPr/>
+            <a:pPr>
+              <a:defRPr>
+                <a:latin typeface="+mj-lt"/>
+                <a:ea typeface="+mj-ea"/>
+                <a:cs typeface="+mj-cs"/>
+                <a:sym typeface="Calibri"/>
+              </a:defRPr>
+            </a:pPr>
           </a:p>
         </p:txBody>
       </p:sp>
@@ -5086,7 +7477,7 @@
         <p:spPr>
           <a:xfrm>
             <a:off x="3383279" y="3749040"/>
-            <a:ext cx="54866" cy="822962"/>
+            <a:ext cx="54867" cy="822963"/>
           </a:xfrm>
           <a:prstGeom prst="rect">
             <a:avLst/>
@@ -5102,7 +7493,14 @@
           <a:bodyPr lIns="45718" tIns="45718" rIns="45718" bIns="45718"/>
           <a:lstStyle/>
           <a:p>
-            <a:pPr/>
+            <a:pPr>
+              <a:defRPr>
+                <a:latin typeface="+mj-lt"/>
+                <a:ea typeface="+mj-ea"/>
+                <a:cs typeface="+mj-cs"/>
+                <a:sym typeface="Calibri"/>
+              </a:defRPr>
+            </a:pPr>
           </a:p>
         </p:txBody>
       </p:sp>
@@ -5114,8 +7512,8 @@
         </p:nvSpPr>
         <p:spPr>
           <a:xfrm>
-            <a:off x="3611879" y="3836669"/>
-            <a:ext cx="2194562" cy="281939"/>
+            <a:off x="3611879" y="3836668"/>
+            <a:ext cx="2194563" cy="281937"/>
           </a:xfrm>
           <a:prstGeom prst="rect">
             <a:avLst/>
@@ -5162,8 +7560,8 @@
         </p:nvSpPr>
         <p:spPr>
           <a:xfrm>
-            <a:off x="3611879" y="4207687"/>
-            <a:ext cx="2194562" cy="225706"/>
+            <a:off x="3611879" y="4207686"/>
+            <a:ext cx="2194563" cy="225705"/>
           </a:xfrm>
           <a:prstGeom prst="rect">
             <a:avLst/>
@@ -5187,6 +7585,10 @@
                 <a:solidFill>
                   <a:srgbClr val="FFFFFF"/>
                 </a:solidFill>
+                <a:latin typeface="+mj-lt"/>
+                <a:ea typeface="+mj-ea"/>
+                <a:cs typeface="+mj-cs"/>
+                <a:sym typeface="Calibri"/>
               </a:defRPr>
             </a:lvl1pPr>
           </a:lstStyle>
@@ -5207,7 +7609,7 @@
         <p:spPr>
           <a:xfrm>
             <a:off x="6217920" y="3749040"/>
-            <a:ext cx="2606042" cy="822962"/>
+            <a:ext cx="2606043" cy="822963"/>
           </a:xfrm>
           <a:prstGeom prst="rect">
             <a:avLst/>
@@ -5223,7 +7625,14 @@
           <a:bodyPr lIns="45718" tIns="45718" rIns="45718" bIns="45718"/>
           <a:lstStyle/>
           <a:p>
-            <a:pPr/>
+            <a:pPr>
+              <a:defRPr>
+                <a:latin typeface="+mj-lt"/>
+                <a:ea typeface="+mj-ea"/>
+                <a:cs typeface="+mj-cs"/>
+                <a:sym typeface="Calibri"/>
+              </a:defRPr>
+            </a:pPr>
           </a:p>
         </p:txBody>
       </p:sp>
@@ -5236,7 +7645,7 @@
         <p:spPr>
           <a:xfrm>
             <a:off x="6217920" y="3749040"/>
-            <a:ext cx="54866" cy="822962"/>
+            <a:ext cx="54867" cy="822963"/>
           </a:xfrm>
           <a:prstGeom prst="rect">
             <a:avLst/>
@@ -5252,7 +7661,14 @@
           <a:bodyPr lIns="45718" tIns="45718" rIns="45718" bIns="45718"/>
           <a:lstStyle/>
           <a:p>
-            <a:pPr/>
+            <a:pPr>
+              <a:defRPr>
+                <a:latin typeface="+mj-lt"/>
+                <a:ea typeface="+mj-ea"/>
+                <a:cs typeface="+mj-cs"/>
+                <a:sym typeface="Calibri"/>
+              </a:defRPr>
+            </a:pPr>
           </a:p>
         </p:txBody>
       </p:sp>
@@ -5264,8 +7680,8 @@
         </p:nvSpPr>
         <p:spPr>
           <a:xfrm>
-            <a:off x="6446518" y="3836669"/>
-            <a:ext cx="2194563" cy="281939"/>
+            <a:off x="6446518" y="3836668"/>
+            <a:ext cx="2194564" cy="281937"/>
           </a:xfrm>
           <a:prstGeom prst="rect">
             <a:avLst/>
@@ -5312,8 +7728,8 @@
         </p:nvSpPr>
         <p:spPr>
           <a:xfrm>
-            <a:off x="6446518" y="4207687"/>
-            <a:ext cx="2194563" cy="225706"/>
+            <a:off x="6446518" y="4207686"/>
+            <a:ext cx="2194564" cy="225705"/>
           </a:xfrm>
           <a:prstGeom prst="rect">
             <a:avLst/>
@@ -5337,6 +7753,10 @@
                 <a:solidFill>
                   <a:srgbClr val="FFFFFF"/>
                 </a:solidFill>
+                <a:latin typeface="+mj-lt"/>
+                <a:ea typeface="+mj-ea"/>
+                <a:cs typeface="+mj-cs"/>
+                <a:sym typeface="Calibri"/>
               </a:defRPr>
             </a:lvl1pPr>
           </a:lstStyle>
@@ -5389,7 +7809,7 @@
         </p:nvSpPr>
         <p:spPr>
           <a:xfrm>
-            <a:off x="548640" y="327659"/>
+            <a:off x="548640" y="327658"/>
             <a:ext cx="8229601" cy="533401"/>
           </a:xfrm>
           <a:prstGeom prst="rect">
@@ -5448,7 +7868,7 @@
         <p:spPr>
           <a:xfrm>
             <a:off x="274320" y="1005838"/>
-            <a:ext cx="5029202" cy="3657603"/>
+            <a:ext cx="5029202" cy="3657604"/>
           </a:xfrm>
           <a:prstGeom prst="rect">
             <a:avLst/>
@@ -5466,8 +7886,8 @@
         </p:nvSpPr>
         <p:spPr>
           <a:xfrm>
-            <a:off x="5577840" y="1005838"/>
-            <a:ext cx="3291842" cy="3657603"/>
+            <a:off x="5577840" y="1005837"/>
+            <a:ext cx="3291843" cy="3657605"/>
           </a:xfrm>
           <a:prstGeom prst="rect">
             <a:avLst/>
@@ -5490,7 +7910,14 @@
           <a:bodyPr lIns="45718" tIns="45718" rIns="45718" bIns="45718"/>
           <a:lstStyle/>
           <a:p>
-            <a:pPr/>
+            <a:pPr>
+              <a:defRPr>
+                <a:latin typeface="+mj-lt"/>
+                <a:ea typeface="+mj-ea"/>
+                <a:cs typeface="+mj-cs"/>
+                <a:sym typeface="Calibri"/>
+              </a:defRPr>
+            </a:pPr>
           </a:p>
         </p:txBody>
       </p:sp>
@@ -5502,8 +7929,8 @@
         </p:nvSpPr>
         <p:spPr>
           <a:xfrm>
-            <a:off x="5577840" y="1005838"/>
-            <a:ext cx="54866" cy="3657603"/>
+            <a:off x="5577840" y="1005837"/>
+            <a:ext cx="54867" cy="3657605"/>
           </a:xfrm>
           <a:prstGeom prst="rect">
             <a:avLst/>
@@ -5519,7 +7946,14 @@
           <a:bodyPr lIns="45718" tIns="45718" rIns="45718" bIns="45718"/>
           <a:lstStyle/>
           <a:p>
-            <a:pPr/>
+            <a:pPr>
+              <a:defRPr>
+                <a:latin typeface="+mj-lt"/>
+                <a:ea typeface="+mj-ea"/>
+                <a:cs typeface="+mj-cs"/>
+                <a:sym typeface="Calibri"/>
+              </a:defRPr>
+            </a:pPr>
           </a:p>
         </p:txBody>
       </p:sp>
@@ -5531,8 +7965,8 @@
         </p:nvSpPr>
         <p:spPr>
           <a:xfrm>
-            <a:off x="5897879" y="1188720"/>
-            <a:ext cx="2743202" cy="2750203"/>
+            <a:off x="5897879" y="1188719"/>
+            <a:ext cx="2743203" cy="2750202"/>
           </a:xfrm>
           <a:prstGeom prst="rect">
             <a:avLst/>
@@ -5557,6 +7991,10 @@
                 <a:solidFill>
                   <a:srgbClr val="1A1A2E"/>
                 </a:solidFill>
+                <a:latin typeface="+mj-lt"/>
+                <a:ea typeface="+mj-ea"/>
+                <a:cs typeface="+mj-cs"/>
+                <a:sym typeface="Calibri"/>
               </a:defRPr>
             </a:pPr>
             <a:r>
@@ -5565,12 +8003,22 @@
           </a:p>
           <a:p>
             <a:pPr>
-              <a:defRPr sz="1600"/>
+              <a:defRPr sz="1600">
+                <a:latin typeface="+mj-lt"/>
+                <a:ea typeface="+mj-ea"/>
+                <a:cs typeface="+mj-cs"/>
+                <a:sym typeface="Calibri"/>
+              </a:defRPr>
             </a:pPr>
           </a:p>
           <a:p>
             <a:pPr>
-              <a:defRPr sz="1300"/>
+              <a:defRPr sz="1300">
+                <a:latin typeface="+mj-lt"/>
+                <a:ea typeface="+mj-ea"/>
+                <a:cs typeface="+mj-cs"/>
+                <a:sym typeface="Calibri"/>
+              </a:defRPr>
             </a:pPr>
             <a:r>
               <a:t>Water dominerar med 134 st, medans Flying bara har 9 st.</a:t>
@@ -5579,7 +8027,12 @@
           </a:p>
           <a:p>
             <a:pPr>
-              <a:defRPr sz="1600"/>
+              <a:defRPr sz="1600">
+                <a:latin typeface="+mj-lt"/>
+                <a:ea typeface="+mj-ea"/>
+                <a:cs typeface="+mj-cs"/>
+                <a:sym typeface="Calibri"/>
+              </a:defRPr>
             </a:pPr>
           </a:p>
           <a:p>
@@ -5588,6 +8041,10 @@
                 <a:solidFill>
                   <a:srgbClr val="1A1A2E"/>
                 </a:solidFill>
+                <a:latin typeface="+mj-lt"/>
+                <a:ea typeface="+mj-ea"/>
+                <a:cs typeface="+mj-cs"/>
+                <a:sym typeface="Calibri"/>
               </a:defRPr>
             </a:pPr>
             <a:r>
@@ -5605,12 +8062,22 @@
           </a:p>
           <a:p>
             <a:pPr>
-              <a:defRPr sz="1600"/>
+              <a:defRPr sz="1600">
+                <a:latin typeface="+mj-lt"/>
+                <a:ea typeface="+mj-ea"/>
+                <a:cs typeface="+mj-cs"/>
+                <a:sym typeface="Calibri"/>
+              </a:defRPr>
             </a:pPr>
           </a:p>
           <a:p>
             <a:pPr>
-              <a:defRPr sz="1300"/>
+              <a:defRPr sz="1300">
+                <a:latin typeface="+mj-lt"/>
+                <a:ea typeface="+mj-ea"/>
+                <a:cs typeface="+mj-cs"/>
+                <a:sym typeface="Calibri"/>
+              </a:defRPr>
             </a:pPr>
             <a:r>
               <a:t>Slumpchans:</a:t>
@@ -5650,12 +8117,22 @@
           </a:p>
           <a:p>
             <a:pPr>
-              <a:defRPr sz="1600"/>
+              <a:defRPr sz="1600">
+                <a:latin typeface="+mj-lt"/>
+                <a:ea typeface="+mj-ea"/>
+                <a:cs typeface="+mj-cs"/>
+                <a:sym typeface="Calibri"/>
+              </a:defRPr>
             </a:pPr>
           </a:p>
           <a:p>
             <a:pPr>
-              <a:defRPr sz="1200"/>
+              <a:defRPr sz="1200">
+                <a:latin typeface="+mj-lt"/>
+                <a:ea typeface="+mj-ea"/>
+                <a:cs typeface="+mj-cs"/>
+                <a:sym typeface="Calibri"/>
+              </a:defRPr>
             </a:pPr>
             <a:r>
               <a:t>Vi använder balanced accuracy och macro F1 för rättvis jämförelse.</a:t>
@@ -5704,7 +8181,7 @@
         </p:nvSpPr>
         <p:spPr>
           <a:xfrm>
-            <a:off x="548640" y="327659"/>
+            <a:off x="548640" y="327658"/>
             <a:ext cx="8229601" cy="533401"/>
           </a:xfrm>
           <a:prstGeom prst="rect">
@@ -5763,7 +8240,7 @@
         <p:spPr>
           <a:xfrm>
             <a:off x="457200" y="1005838"/>
-            <a:ext cx="5029200" cy="3840483"/>
+            <a:ext cx="5029200" cy="3840484"/>
           </a:xfrm>
           <a:prstGeom prst="rect">
             <a:avLst/>
@@ -5781,8 +8258,8 @@
         </p:nvSpPr>
         <p:spPr>
           <a:xfrm>
-            <a:off x="5760720" y="1005839"/>
-            <a:ext cx="3108962" cy="3840481"/>
+            <a:off x="5760720" y="1005838"/>
+            <a:ext cx="3108963" cy="3840483"/>
           </a:xfrm>
           <a:prstGeom prst="rect">
             <a:avLst/>
@@ -5805,7 +8282,14 @@
           <a:bodyPr lIns="45718" tIns="45718" rIns="45718" bIns="45718"/>
           <a:lstStyle/>
           <a:p>
-            <a:pPr/>
+            <a:pPr>
+              <a:defRPr>
+                <a:latin typeface="+mj-lt"/>
+                <a:ea typeface="+mj-ea"/>
+                <a:cs typeface="+mj-cs"/>
+                <a:sym typeface="Calibri"/>
+              </a:defRPr>
+            </a:pPr>
           </a:p>
         </p:txBody>
       </p:sp>
@@ -5817,8 +8301,8 @@
         </p:nvSpPr>
         <p:spPr>
           <a:xfrm>
-            <a:off x="5760720" y="1005839"/>
-            <a:ext cx="54866" cy="3840481"/>
+            <a:off x="5760720" y="1005838"/>
+            <a:ext cx="54867" cy="3840483"/>
           </a:xfrm>
           <a:prstGeom prst="rect">
             <a:avLst/>
@@ -5834,7 +8318,14 @@
           <a:bodyPr lIns="45718" tIns="45718" rIns="45718" bIns="45718"/>
           <a:lstStyle/>
           <a:p>
-            <a:pPr/>
+            <a:pPr>
+              <a:defRPr>
+                <a:latin typeface="+mj-lt"/>
+                <a:ea typeface="+mj-ea"/>
+                <a:cs typeface="+mj-cs"/>
+                <a:sym typeface="Calibri"/>
+              </a:defRPr>
+            </a:pPr>
           </a:p>
         </p:txBody>
       </p:sp>
@@ -5846,8 +8337,8 @@
         </p:nvSpPr>
         <p:spPr>
           <a:xfrm>
-            <a:off x="6080759" y="1188720"/>
-            <a:ext cx="2560322" cy="2267603"/>
+            <a:off x="6080759" y="1188719"/>
+            <a:ext cx="2560323" cy="2267602"/>
           </a:xfrm>
           <a:prstGeom prst="rect">
             <a:avLst/>
@@ -5872,6 +8363,10 @@
                 <a:solidFill>
                   <a:srgbClr val="1A1A2E"/>
                 </a:solidFill>
+                <a:latin typeface="+mj-lt"/>
+                <a:ea typeface="+mj-ea"/>
+                <a:cs typeface="+mj-cs"/>
+                <a:sym typeface="Calibri"/>
               </a:defRPr>
             </a:pPr>
             <a:r>
@@ -5880,12 +8375,22 @@
           </a:p>
           <a:p>
             <a:pPr>
-              <a:defRPr sz="1600"/>
+              <a:defRPr sz="1600">
+                <a:latin typeface="+mj-lt"/>
+                <a:ea typeface="+mj-ea"/>
+                <a:cs typeface="+mj-cs"/>
+                <a:sym typeface="Calibri"/>
+              </a:defRPr>
             </a:pPr>
           </a:p>
           <a:p>
             <a:pPr>
-              <a:defRPr sz="1300"/>
+              <a:defRPr sz="1300">
+                <a:latin typeface="+mj-lt"/>
+                <a:ea typeface="+mj-ea"/>
+                <a:cs typeface="+mj-cs"/>
+                <a:sym typeface="Calibri"/>
+              </a:defRPr>
             </a:pPr>
             <a:r>
               <a:t>Sp. Attack och Sp. Defense korrelerar starkt (0.49).</a:t>
@@ -5894,12 +8399,22 @@
           </a:p>
           <a:p>
             <a:pPr>
-              <a:defRPr sz="1600"/>
+              <a:defRPr sz="1600">
+                <a:latin typeface="+mj-lt"/>
+                <a:ea typeface="+mj-ea"/>
+                <a:cs typeface="+mj-cs"/>
+                <a:sym typeface="Calibri"/>
+              </a:defRPr>
             </a:pPr>
           </a:p>
           <a:p>
             <a:pPr>
-              <a:defRPr sz="1300"/>
+              <a:defRPr sz="1300">
+                <a:latin typeface="+mj-lt"/>
+                <a:ea typeface="+mj-ea"/>
+                <a:cs typeface="+mj-cs"/>
+                <a:sym typeface="Calibri"/>
+              </a:defRPr>
             </a:pPr>
             <a:r>
               <a:t>Stridsegenskaper varierar mellan typer men överlappar kraftigt.</a:t>
@@ -5912,12 +8427,22 @@
           </a:p>
           <a:p>
             <a:pPr>
-              <a:defRPr sz="1600"/>
+              <a:defRPr sz="1600">
+                <a:latin typeface="+mj-lt"/>
+                <a:ea typeface="+mj-ea"/>
+                <a:cs typeface="+mj-cs"/>
+                <a:sym typeface="Calibri"/>
+              </a:defRPr>
             </a:pPr>
           </a:p>
           <a:p>
             <a:pPr>
-              <a:defRPr sz="1200"/>
+              <a:defRPr sz="1200">
+                <a:latin typeface="+mj-lt"/>
+                <a:ea typeface="+mj-ea"/>
+                <a:cs typeface="+mj-cs"/>
+                <a:sym typeface="Calibri"/>
+              </a:defRPr>
             </a:pPr>
             <a:r>
               <a:t>Height och weight korrelerar starkt (0.63) — fysisk storlek hänger ihop.</a:t>
@@ -5937,13 +8462,6 @@
 <file path=ppt/slides/slide7.xml><?xml version="1.0" encoding="utf-8"?>
 <p:sld xmlns:a="http://schemas.openxmlformats.org/drawingml/2006/main" xmlns:r="http://schemas.openxmlformats.org/officeDocument/2006/relationships" xmlns:p="http://schemas.openxmlformats.org/presentationml/2006/main" xmlns:m="http://schemas.openxmlformats.org/officeDocument/2006/math" xmlns:a14="http://schemas.microsoft.com/office/drawing/2010/main" showMasterSp="1" showMasterPhAnim="1">
   <p:cSld>
-    <p:bg>
-      <p:bgPr>
-        <a:solidFill>
-          <a:srgbClr val="F5F5F5"/>
-        </a:solidFill>
-      </p:bgPr>
-    </p:bg>
     <p:spTree>
       <p:nvGrpSpPr>
         <p:cNvPr id="1" name=""/>
@@ -5958,16 +8476,77 @@
           <a:chExt cx="0" cy="0"/>
         </a:xfrm>
       </p:grpSpPr>
-      <p:sp>
-        <p:nvSpPr>
-          <p:cNvPr id="112" name="Text 0"/>
+      <p:pic>
+        <p:nvPicPr>
+          <p:cNvPr id="112" name="pokemon_type_training_model_comparison.png" descr="pokemon_type_training_model_comparison.png"/>
+          <p:cNvPicPr>
+            <a:picLocks noChangeAspect="1"/>
+          </p:cNvPicPr>
+          <p:nvPr/>
+        </p:nvPicPr>
+        <p:blipFill>
+          <a:blip r:embed="rId2">
+            <a:extLst/>
+          </a:blip>
+          <a:srcRect l="0" t="5084" r="0" b="0"/>
+          <a:stretch>
+            <a:fillRect/>
+          </a:stretch>
+        </p:blipFill>
+        <p:spPr>
+          <a:xfrm>
+            <a:off x="285749" y="361408"/>
+            <a:ext cx="8572501" cy="4881977"/>
+          </a:xfrm>
+          <a:prstGeom prst="rect">
+            <a:avLst/>
+          </a:prstGeom>
+          <a:ln w="12700">
+            <a:miter lim="400000"/>
+          </a:ln>
+        </p:spPr>
+      </p:pic>
+      <p:sp>
+        <p:nvSpPr>
+          <p:cNvPr id="113" name="Rounded Rectangle"/>
+          <p:cNvSpPr/>
+          <p:nvPr/>
+        </p:nvSpPr>
+        <p:spPr>
+          <a:xfrm>
+            <a:off x="3352745" y="-878710"/>
+            <a:ext cx="2946510" cy="1270001"/>
+          </a:xfrm>
+          <a:prstGeom prst="roundRect">
+            <a:avLst>
+              <a:gd name="adj" fmla="val 15000"/>
+            </a:avLst>
+          </a:prstGeom>
+          <a:solidFill>
+            <a:srgbClr val="FFFFFF"/>
+          </a:solidFill>
+          <a:ln w="12700">
+            <a:miter lim="400000"/>
+          </a:ln>
+        </p:spPr>
+        <p:txBody>
+          <a:bodyPr lIns="45718" tIns="45718" rIns="45718" bIns="45718" anchor="ctr"/>
+          <a:lstStyle/>
+          <a:p>
+            <a:pPr/>
+          </a:p>
+        </p:txBody>
+      </p:sp>
+      <p:sp>
+        <p:nvSpPr>
+          <p:cNvPr id="114" name="11 tränade modeller"/>
           <p:cNvSpPr txBox="1"/>
           <p:nvPr/>
         </p:nvSpPr>
         <p:spPr>
           <a:xfrm>
-            <a:off x="548640" y="327659"/>
-            <a:ext cx="8229601" cy="533401"/>
+            <a:off x="3511714" y="16337"/>
+            <a:ext cx="2120572" cy="370837"/>
           </a:xfrm>
           <a:prstGeom prst="rect">
             <a:avLst/>
@@ -5982,962 +8561,14 @@
           </a:extLst>
         </p:spPr>
         <p:txBody>
-          <a:bodyPr lIns="0" tIns="0" rIns="0" bIns="0" anchor="ctr">
-            <a:spAutoFit/>
-          </a:bodyPr>
-          <a:lstStyle>
-            <a:lvl1pPr>
-              <a:defRPr b="1" sz="3600">
-                <a:solidFill>
-                  <a:srgbClr val="1A1A2E"/>
-                </a:solidFill>
-                <a:latin typeface="Trebuchet MS"/>
-                <a:ea typeface="Trebuchet MS"/>
-                <a:cs typeface="Trebuchet MS"/>
-                <a:sym typeface="Trebuchet MS"/>
-              </a:defRPr>
-            </a:lvl1pPr>
-          </a:lstStyle>
-          <a:p>
-            <a:pPr/>
-            <a:r>
-              <a:t>Resultat — bästa modellerna</a:t>
-            </a:r>
-          </a:p>
-        </p:txBody>
-      </p:sp>
-      <p:sp>
-        <p:nvSpPr>
-          <p:cNvPr id="113" name="Shape 1"/>
-          <p:cNvSpPr/>
-          <p:nvPr/>
-        </p:nvSpPr>
-        <p:spPr>
-          <a:xfrm>
-            <a:off x="548640" y="1097278"/>
-            <a:ext cx="2606040" cy="3566162"/>
-          </a:xfrm>
-          <a:prstGeom prst="rect">
-            <a:avLst/>
-          </a:prstGeom>
-          <a:solidFill>
-            <a:srgbClr val="FFFFFF"/>
-          </a:solidFill>
-          <a:ln w="12700">
-            <a:miter lim="400000"/>
-          </a:ln>
-          <a:effectLst>
-            <a:outerShdw sx="100000" sy="100000" kx="0" ky="0" algn="b" rotWithShape="0" blurRad="76200" dist="25400" dir="8100000">
-              <a:srgbClr val="000000">
-                <a:alpha val="12000"/>
-              </a:srgbClr>
-            </a:outerShdw>
-          </a:effectLst>
-        </p:spPr>
-        <p:txBody>
-          <a:bodyPr lIns="45718" tIns="45718" rIns="45718" bIns="45718"/>
-          <a:lstStyle/>
-          <a:p>
-            <a:pPr/>
-          </a:p>
-        </p:txBody>
-      </p:sp>
-      <p:sp>
-        <p:nvSpPr>
-          <p:cNvPr id="114" name="Shape 2"/>
-          <p:cNvSpPr/>
-          <p:nvPr/>
-        </p:nvSpPr>
-        <p:spPr>
-          <a:xfrm>
-            <a:off x="548640" y="1097280"/>
-            <a:ext cx="2606040" cy="64010"/>
-          </a:xfrm>
-          <a:prstGeom prst="rect">
-            <a:avLst/>
-          </a:prstGeom>
-          <a:solidFill>
-            <a:srgbClr val="3D5AF1"/>
-          </a:solidFill>
-          <a:ln w="12700">
-            <a:miter lim="400000"/>
-          </a:ln>
-        </p:spPr>
-        <p:txBody>
-          <a:bodyPr lIns="45718" tIns="45718" rIns="45718" bIns="45718"/>
-          <a:lstStyle/>
-          <a:p>
-            <a:pPr/>
-          </a:p>
-        </p:txBody>
-      </p:sp>
-      <p:sp>
-        <p:nvSpPr>
-          <p:cNvPr id="115" name="Text 3"/>
-          <p:cNvSpPr txBox="1"/>
-          <p:nvPr/>
-        </p:nvSpPr>
-        <p:spPr>
-          <a:xfrm>
-            <a:off x="731518" y="1342390"/>
-            <a:ext cx="2240284" cy="332739"/>
-          </a:xfrm>
-          <a:prstGeom prst="rect">
-            <a:avLst/>
-          </a:prstGeom>
-          <a:ln w="12700">
-            <a:miter lim="400000"/>
-          </a:ln>
-          <a:extLst>
-            <a:ext uri="{C572A759-6A51-4108-AA02-DFA0A04FC94B}">
-              <ma14:wrappingTextBoxFlag xmlns:ma14="http://schemas.microsoft.com/office/mac/drawingml/2011/main" val="1"/>
-            </a:ext>
-          </a:extLst>
-        </p:spPr>
-        <p:txBody>
-          <a:bodyPr lIns="45718" tIns="45718" rIns="45718" bIns="45718" anchor="ctr">
-            <a:spAutoFit/>
-          </a:bodyPr>
-          <a:lstStyle>
-            <a:lvl1pPr algn="ctr">
-              <a:defRPr b="1" sz="1600">
-                <a:solidFill>
-                  <a:srgbClr val="1A1A2E"/>
-                </a:solidFill>
-                <a:latin typeface="Trebuchet MS"/>
-                <a:ea typeface="Trebuchet MS"/>
-                <a:cs typeface="Trebuchet MS"/>
-                <a:sym typeface="Trebuchet MS"/>
-              </a:defRPr>
-            </a:lvl1pPr>
-          </a:lstStyle>
-          <a:p>
-            <a:pPr/>
-            <a:r>
-              <a:t>LogReg (PCA)</a:t>
-            </a:r>
-          </a:p>
-        </p:txBody>
-      </p:sp>
-      <p:sp>
-        <p:nvSpPr>
-          <p:cNvPr id="116" name="Text 4"/>
-          <p:cNvSpPr txBox="1"/>
-          <p:nvPr/>
-        </p:nvSpPr>
-        <p:spPr>
-          <a:xfrm>
-            <a:off x="685798" y="1889759"/>
-            <a:ext cx="2331723" cy="609601"/>
-          </a:xfrm>
-          <a:prstGeom prst="rect">
-            <a:avLst/>
-          </a:prstGeom>
-          <a:ln w="12700">
-            <a:miter lim="400000"/>
-          </a:ln>
-          <a:extLst>
-            <a:ext uri="{C572A759-6A51-4108-AA02-DFA0A04FC94B}">
-              <ma14:wrappingTextBoxFlag xmlns:ma14="http://schemas.microsoft.com/office/mac/drawingml/2011/main" val="1"/>
-            </a:ext>
-          </a:extLst>
-        </p:spPr>
-        <p:txBody>
-          <a:bodyPr lIns="0" tIns="0" rIns="0" bIns="0" anchor="ctr">
-            <a:spAutoFit/>
-          </a:bodyPr>
-          <a:lstStyle>
-            <a:lvl1pPr algn="ctr">
-              <a:defRPr b="1" sz="4200">
-                <a:solidFill>
-                  <a:srgbClr val="3D5AF1"/>
-                </a:solidFill>
-                <a:latin typeface="Trebuchet MS"/>
-                <a:ea typeface="Trebuchet MS"/>
-                <a:cs typeface="Trebuchet MS"/>
-                <a:sym typeface="Trebuchet MS"/>
-              </a:defRPr>
-            </a:lvl1pPr>
-          </a:lstStyle>
-          <a:p>
-            <a:pPr/>
-            <a:r>
-              <a:t>48.8%</a:t>
-            </a:r>
-          </a:p>
-        </p:txBody>
-      </p:sp>
-      <p:sp>
-        <p:nvSpPr>
-          <p:cNvPr id="117" name="Text 5"/>
-          <p:cNvSpPr txBox="1"/>
-          <p:nvPr/>
-        </p:nvSpPr>
-        <p:spPr>
-          <a:xfrm>
-            <a:off x="731518" y="2527607"/>
-            <a:ext cx="2240284" cy="248304"/>
-          </a:xfrm>
-          <a:prstGeom prst="rect">
-            <a:avLst/>
-          </a:prstGeom>
-          <a:ln w="12700">
-            <a:miter lim="400000"/>
-          </a:ln>
-          <a:extLst>
-            <a:ext uri="{C572A759-6A51-4108-AA02-DFA0A04FC94B}">
-              <ma14:wrappingTextBoxFlag xmlns:ma14="http://schemas.microsoft.com/office/mac/drawingml/2011/main" val="1"/>
-            </a:ext>
-          </a:extLst>
-        </p:spPr>
-        <p:txBody>
-          <a:bodyPr lIns="45718" tIns="45718" rIns="45718" bIns="45718" anchor="ctr">
-            <a:spAutoFit/>
-          </a:bodyPr>
-          <a:lstStyle>
-            <a:lvl1pPr algn="ctr">
-              <a:defRPr sz="1200">
-                <a:solidFill>
-                  <a:srgbClr val="64748B"/>
-                </a:solidFill>
-              </a:defRPr>
-            </a:lvl1pPr>
-          </a:lstStyle>
-          <a:p>
-            <a:pPr/>
-            <a:r>
-              <a:t>accuracy</a:t>
-            </a:r>
-          </a:p>
-        </p:txBody>
-      </p:sp>
-      <p:sp>
-        <p:nvSpPr>
-          <p:cNvPr id="118" name="Text 6"/>
-          <p:cNvSpPr txBox="1"/>
-          <p:nvPr/>
-        </p:nvSpPr>
-        <p:spPr>
-          <a:xfrm>
-            <a:off x="731518" y="3050978"/>
-            <a:ext cx="2240284" cy="664601"/>
-          </a:xfrm>
-          <a:prstGeom prst="rect">
-            <a:avLst/>
-          </a:prstGeom>
-          <a:ln w="12700">
-            <a:miter lim="400000"/>
-          </a:ln>
-          <a:extLst>
-            <a:ext uri="{C572A759-6A51-4108-AA02-DFA0A04FC94B}">
-              <ma14:wrappingTextBoxFlag xmlns:ma14="http://schemas.microsoft.com/office/mac/drawingml/2011/main" val="1"/>
-            </a:ext>
-          </a:extLst>
-        </p:spPr>
-        <p:txBody>
-          <a:bodyPr lIns="45718" tIns="45718" rIns="45718" bIns="45718" anchor="ctr">
+          <a:bodyPr wrap="none" lIns="45718" tIns="45718" rIns="45718" bIns="45718">
             <a:spAutoFit/>
           </a:bodyPr>
           <a:lstStyle/>
           <a:p>
-            <a:pPr algn="ctr">
-              <a:defRPr sz="1300"/>
-            </a:pPr>
-            <a:r>
-              <a:t>Balanced Acc: </a:t>
-            </a:r>
-            <a:r>
-              <a:rPr b="1"/>
-              <a:t>40.5%</a:t>
-            </a:r>
-          </a:p>
-          <a:p>
-            <a:pPr algn="ctr">
-              <a:defRPr sz="1300"/>
-            </a:pPr>
-          </a:p>
-          <a:p>
-            <a:pPr algn="ctr">
-              <a:defRPr sz="1300"/>
-            </a:pPr>
-            <a:r>
-              <a:t>Macro F1: </a:t>
-            </a:r>
-            <a:r>
-              <a:rPr b="1"/>
-              <a:t>0.404</a:t>
-            </a:r>
-          </a:p>
-        </p:txBody>
-      </p:sp>
-      <p:sp>
-        <p:nvSpPr>
-          <p:cNvPr id="119" name="Text 7"/>
-          <p:cNvSpPr txBox="1"/>
-          <p:nvPr/>
-        </p:nvSpPr>
-        <p:spPr>
-          <a:xfrm>
-            <a:off x="731518" y="4025900"/>
-            <a:ext cx="2240284" cy="269239"/>
-          </a:xfrm>
-          <a:prstGeom prst="rect">
-            <a:avLst/>
-          </a:prstGeom>
-          <a:ln w="12700">
-            <a:miter lim="400000"/>
-          </a:ln>
-          <a:extLst>
-            <a:ext uri="{C572A759-6A51-4108-AA02-DFA0A04FC94B}">
-              <ma14:wrappingTextBoxFlag xmlns:ma14="http://schemas.microsoft.com/office/mac/drawingml/2011/main" val="1"/>
-            </a:ext>
-          </a:extLst>
-        </p:spPr>
-        <p:txBody>
-          <a:bodyPr lIns="45718" tIns="45718" rIns="45718" bIns="45718" anchor="ctr">
-            <a:spAutoFit/>
-          </a:bodyPr>
-          <a:lstStyle>
-            <a:lvl1pPr algn="ctr">
-              <a:defRPr b="1" sz="1200">
-                <a:solidFill>
-                  <a:srgbClr val="3D5AF1"/>
-                </a:solidFill>
-                <a:latin typeface="Trebuchet MS"/>
-                <a:ea typeface="Trebuchet MS"/>
-                <a:cs typeface="Trebuchet MS"/>
-                <a:sym typeface="Trebuchet MS"/>
-              </a:defRPr>
-            </a:lvl1pPr>
-          </a:lstStyle>
-          <a:p>
             <a:pPr/>
             <a:r>
-              <a:t>Bäst accuracy (delad)</a:t>
-            </a:r>
-          </a:p>
-        </p:txBody>
-      </p:sp>
-      <p:sp>
-        <p:nvSpPr>
-          <p:cNvPr id="120" name="Shape 8"/>
-          <p:cNvSpPr/>
-          <p:nvPr/>
-        </p:nvSpPr>
-        <p:spPr>
-          <a:xfrm>
-            <a:off x="3383279" y="1097278"/>
-            <a:ext cx="2606042" cy="3566162"/>
-          </a:xfrm>
-          <a:prstGeom prst="rect">
-            <a:avLst/>
-          </a:prstGeom>
-          <a:solidFill>
-            <a:srgbClr val="FFFFFF"/>
-          </a:solidFill>
-          <a:ln w="12700">
-            <a:miter lim="400000"/>
-          </a:ln>
-          <a:effectLst>
-            <a:outerShdw sx="100000" sy="100000" kx="0" ky="0" algn="b" rotWithShape="0" blurRad="76200" dist="25400" dir="8100000">
-              <a:srgbClr val="000000">
-                <a:alpha val="12000"/>
-              </a:srgbClr>
-            </a:outerShdw>
-          </a:effectLst>
-        </p:spPr>
-        <p:txBody>
-          <a:bodyPr lIns="45718" tIns="45718" rIns="45718" bIns="45718"/>
-          <a:lstStyle/>
-          <a:p>
-            <a:pPr/>
-          </a:p>
-        </p:txBody>
-      </p:sp>
-      <p:sp>
-        <p:nvSpPr>
-          <p:cNvPr id="121" name="Shape 9"/>
-          <p:cNvSpPr/>
-          <p:nvPr/>
-        </p:nvSpPr>
-        <p:spPr>
-          <a:xfrm>
-            <a:off x="3383279" y="1097280"/>
-            <a:ext cx="2606042" cy="64010"/>
-          </a:xfrm>
-          <a:prstGeom prst="rect">
-            <a:avLst/>
-          </a:prstGeom>
-          <a:solidFill>
-            <a:srgbClr val="54A24B"/>
-          </a:solidFill>
-          <a:ln w="12700">
-            <a:miter lim="400000"/>
-          </a:ln>
-        </p:spPr>
-        <p:txBody>
-          <a:bodyPr lIns="45718" tIns="45718" rIns="45718" bIns="45718"/>
-          <a:lstStyle/>
-          <a:p>
-            <a:pPr/>
-          </a:p>
-        </p:txBody>
-      </p:sp>
-      <p:sp>
-        <p:nvSpPr>
-          <p:cNvPr id="122" name="Text 10"/>
-          <p:cNvSpPr txBox="1"/>
-          <p:nvPr/>
-        </p:nvSpPr>
-        <p:spPr>
-          <a:xfrm>
-            <a:off x="3566159" y="1342390"/>
-            <a:ext cx="2240282" cy="332739"/>
-          </a:xfrm>
-          <a:prstGeom prst="rect">
-            <a:avLst/>
-          </a:prstGeom>
-          <a:ln w="12700">
-            <a:miter lim="400000"/>
-          </a:ln>
-          <a:extLst>
-            <a:ext uri="{C572A759-6A51-4108-AA02-DFA0A04FC94B}">
-              <ma14:wrappingTextBoxFlag xmlns:ma14="http://schemas.microsoft.com/office/mac/drawingml/2011/main" val="1"/>
-            </a:ext>
-          </a:extLst>
-        </p:spPr>
-        <p:txBody>
-          <a:bodyPr lIns="45718" tIns="45718" rIns="45718" bIns="45718" anchor="ctr">
-            <a:spAutoFit/>
-          </a:bodyPr>
-          <a:lstStyle>
-            <a:lvl1pPr algn="ctr">
-              <a:defRPr b="1" sz="1600">
-                <a:solidFill>
-                  <a:srgbClr val="1A1A2E"/>
-                </a:solidFill>
-                <a:latin typeface="Trebuchet MS"/>
-                <a:ea typeface="Trebuchet MS"/>
-                <a:cs typeface="Trebuchet MS"/>
-                <a:sym typeface="Trebuchet MS"/>
-              </a:defRPr>
-            </a:lvl1pPr>
-          </a:lstStyle>
-          <a:p>
-            <a:pPr/>
-            <a:r>
-              <a:t>Random Forest</a:t>
-            </a:r>
-          </a:p>
-        </p:txBody>
-      </p:sp>
-      <p:sp>
-        <p:nvSpPr>
-          <p:cNvPr id="123" name="Text 11"/>
-          <p:cNvSpPr txBox="1"/>
-          <p:nvPr/>
-        </p:nvSpPr>
-        <p:spPr>
-          <a:xfrm>
-            <a:off x="3520440" y="1889759"/>
-            <a:ext cx="2331722" cy="609601"/>
-          </a:xfrm>
-          <a:prstGeom prst="rect">
-            <a:avLst/>
-          </a:prstGeom>
-          <a:ln w="12700">
-            <a:miter lim="400000"/>
-          </a:ln>
-          <a:extLst>
-            <a:ext uri="{C572A759-6A51-4108-AA02-DFA0A04FC94B}">
-              <ma14:wrappingTextBoxFlag xmlns:ma14="http://schemas.microsoft.com/office/mac/drawingml/2011/main" val="1"/>
-            </a:ext>
-          </a:extLst>
-        </p:spPr>
-        <p:txBody>
-          <a:bodyPr lIns="0" tIns="0" rIns="0" bIns="0" anchor="ctr">
-            <a:spAutoFit/>
-          </a:bodyPr>
-          <a:lstStyle>
-            <a:lvl1pPr algn="ctr">
-              <a:defRPr b="1" sz="4200">
-                <a:solidFill>
-                  <a:srgbClr val="54A24B"/>
-                </a:solidFill>
-                <a:latin typeface="Trebuchet MS"/>
-                <a:ea typeface="Trebuchet MS"/>
-                <a:cs typeface="Trebuchet MS"/>
-                <a:sym typeface="Trebuchet MS"/>
-              </a:defRPr>
-            </a:lvl1pPr>
-          </a:lstStyle>
-          <a:p>
-            <a:pPr/>
-            <a:r>
-              <a:t>48.8%</a:t>
-            </a:r>
-          </a:p>
-        </p:txBody>
-      </p:sp>
-      <p:sp>
-        <p:nvSpPr>
-          <p:cNvPr id="124" name="Text 12"/>
-          <p:cNvSpPr txBox="1"/>
-          <p:nvPr/>
-        </p:nvSpPr>
-        <p:spPr>
-          <a:xfrm>
-            <a:off x="3566159" y="2527607"/>
-            <a:ext cx="2240282" cy="248304"/>
-          </a:xfrm>
-          <a:prstGeom prst="rect">
-            <a:avLst/>
-          </a:prstGeom>
-          <a:ln w="12700">
-            <a:miter lim="400000"/>
-          </a:ln>
-          <a:extLst>
-            <a:ext uri="{C572A759-6A51-4108-AA02-DFA0A04FC94B}">
-              <ma14:wrappingTextBoxFlag xmlns:ma14="http://schemas.microsoft.com/office/mac/drawingml/2011/main" val="1"/>
-            </a:ext>
-          </a:extLst>
-        </p:spPr>
-        <p:txBody>
-          <a:bodyPr lIns="45718" tIns="45718" rIns="45718" bIns="45718" anchor="ctr">
-            <a:spAutoFit/>
-          </a:bodyPr>
-          <a:lstStyle>
-            <a:lvl1pPr algn="ctr">
-              <a:defRPr sz="1200">
-                <a:solidFill>
-                  <a:srgbClr val="64748B"/>
-                </a:solidFill>
-              </a:defRPr>
-            </a:lvl1pPr>
-          </a:lstStyle>
-          <a:p>
-            <a:pPr/>
-            <a:r>
-              <a:t>accuracy</a:t>
-            </a:r>
-          </a:p>
-        </p:txBody>
-      </p:sp>
-      <p:sp>
-        <p:nvSpPr>
-          <p:cNvPr id="125" name="Text 13"/>
-          <p:cNvSpPr txBox="1"/>
-          <p:nvPr/>
-        </p:nvSpPr>
-        <p:spPr>
-          <a:xfrm>
-            <a:off x="3566159" y="3050978"/>
-            <a:ext cx="2240282" cy="664601"/>
-          </a:xfrm>
-          <a:prstGeom prst="rect">
-            <a:avLst/>
-          </a:prstGeom>
-          <a:ln w="12700">
-            <a:miter lim="400000"/>
-          </a:ln>
-          <a:extLst>
-            <a:ext uri="{C572A759-6A51-4108-AA02-DFA0A04FC94B}">
-              <ma14:wrappingTextBoxFlag xmlns:ma14="http://schemas.microsoft.com/office/mac/drawingml/2011/main" val="1"/>
-            </a:ext>
-          </a:extLst>
-        </p:spPr>
-        <p:txBody>
-          <a:bodyPr lIns="45718" tIns="45718" rIns="45718" bIns="45718" anchor="ctr">
-            <a:spAutoFit/>
-          </a:bodyPr>
-          <a:lstStyle/>
-          <a:p>
-            <a:pPr algn="ctr">
-              <a:defRPr sz="1300"/>
-            </a:pPr>
-            <a:r>
-              <a:t>Balanced Acc: </a:t>
-            </a:r>
-            <a:r>
-              <a:rPr b="1"/>
-              <a:t>37.8%</a:t>
-            </a:r>
-          </a:p>
-          <a:p>
-            <a:pPr algn="ctr">
-              <a:defRPr sz="1300"/>
-            </a:pPr>
-          </a:p>
-          <a:p>
-            <a:pPr algn="ctr">
-              <a:defRPr sz="1300"/>
-            </a:pPr>
-            <a:r>
-              <a:t>Macro F1: </a:t>
-            </a:r>
-            <a:r>
-              <a:rPr b="1"/>
-              <a:t>0.365</a:t>
-            </a:r>
-          </a:p>
-        </p:txBody>
-      </p:sp>
-      <p:sp>
-        <p:nvSpPr>
-          <p:cNvPr id="126" name="Text 14"/>
-          <p:cNvSpPr txBox="1"/>
-          <p:nvPr/>
-        </p:nvSpPr>
-        <p:spPr>
-          <a:xfrm>
-            <a:off x="3566159" y="4025900"/>
-            <a:ext cx="2240282" cy="269239"/>
-          </a:xfrm>
-          <a:prstGeom prst="rect">
-            <a:avLst/>
-          </a:prstGeom>
-          <a:ln w="12700">
-            <a:miter lim="400000"/>
-          </a:ln>
-          <a:extLst>
-            <a:ext uri="{C572A759-6A51-4108-AA02-DFA0A04FC94B}">
-              <ma14:wrappingTextBoxFlag xmlns:ma14="http://schemas.microsoft.com/office/mac/drawingml/2011/main" val="1"/>
-            </a:ext>
-          </a:extLst>
-        </p:spPr>
-        <p:txBody>
-          <a:bodyPr lIns="45718" tIns="45718" rIns="45718" bIns="45718" anchor="ctr">
-            <a:spAutoFit/>
-          </a:bodyPr>
-          <a:lstStyle>
-            <a:lvl1pPr algn="ctr">
-              <a:defRPr b="1" sz="1200">
-                <a:solidFill>
-                  <a:srgbClr val="54A24B"/>
-                </a:solidFill>
-                <a:latin typeface="Trebuchet MS"/>
-                <a:ea typeface="Trebuchet MS"/>
-                <a:cs typeface="Trebuchet MS"/>
-                <a:sym typeface="Trebuchet MS"/>
-              </a:defRPr>
-            </a:lvl1pPr>
-          </a:lstStyle>
-          <a:p>
-            <a:pPr/>
-            <a:r>
-              <a:t>Bäst accuracy (delad)</a:t>
-            </a:r>
-          </a:p>
-        </p:txBody>
-      </p:sp>
-      <p:sp>
-        <p:nvSpPr>
-          <p:cNvPr id="127" name="Shape 15"/>
-          <p:cNvSpPr/>
-          <p:nvPr/>
-        </p:nvSpPr>
-        <p:spPr>
-          <a:xfrm>
-            <a:off x="6217920" y="1097278"/>
-            <a:ext cx="2606042" cy="3566162"/>
-          </a:xfrm>
-          <a:prstGeom prst="rect">
-            <a:avLst/>
-          </a:prstGeom>
-          <a:solidFill>
-            <a:srgbClr val="FFFFFF"/>
-          </a:solidFill>
-          <a:ln w="12700">
-            <a:miter lim="400000"/>
-          </a:ln>
-          <a:effectLst>
-            <a:outerShdw sx="100000" sy="100000" kx="0" ky="0" algn="b" rotWithShape="0" blurRad="76200" dist="25400" dir="8100000">
-              <a:srgbClr val="000000">
-                <a:alpha val="12000"/>
-              </a:srgbClr>
-            </a:outerShdw>
-          </a:effectLst>
-        </p:spPr>
-        <p:txBody>
-          <a:bodyPr lIns="45718" tIns="45718" rIns="45718" bIns="45718"/>
-          <a:lstStyle/>
-          <a:p>
-            <a:pPr/>
-          </a:p>
-        </p:txBody>
-      </p:sp>
-      <p:sp>
-        <p:nvSpPr>
-          <p:cNvPr id="128" name="Shape 16"/>
-          <p:cNvSpPr/>
-          <p:nvPr/>
-        </p:nvSpPr>
-        <p:spPr>
-          <a:xfrm>
-            <a:off x="6217920" y="1097280"/>
-            <a:ext cx="2606042" cy="64010"/>
-          </a:xfrm>
-          <a:prstGeom prst="rect">
-            <a:avLst/>
-          </a:prstGeom>
-          <a:solidFill>
-            <a:srgbClr val="E2B714"/>
-          </a:solidFill>
-          <a:ln w="12700">
-            <a:miter lim="400000"/>
-          </a:ln>
-        </p:spPr>
-        <p:txBody>
-          <a:bodyPr lIns="45718" tIns="45718" rIns="45718" bIns="45718"/>
-          <a:lstStyle/>
-          <a:p>
-            <a:pPr/>
-          </a:p>
-        </p:txBody>
-      </p:sp>
-      <p:sp>
-        <p:nvSpPr>
-          <p:cNvPr id="129" name="Text 17"/>
-          <p:cNvSpPr txBox="1"/>
-          <p:nvPr/>
-        </p:nvSpPr>
-        <p:spPr>
-          <a:xfrm>
-            <a:off x="6400798" y="1342390"/>
-            <a:ext cx="2240282" cy="332739"/>
-          </a:xfrm>
-          <a:prstGeom prst="rect">
-            <a:avLst/>
-          </a:prstGeom>
-          <a:ln w="12700">
-            <a:miter lim="400000"/>
-          </a:ln>
-          <a:extLst>
-            <a:ext uri="{C572A759-6A51-4108-AA02-DFA0A04FC94B}">
-              <ma14:wrappingTextBoxFlag xmlns:ma14="http://schemas.microsoft.com/office/mac/drawingml/2011/main" val="1"/>
-            </a:ext>
-          </a:extLst>
-        </p:spPr>
-        <p:txBody>
-          <a:bodyPr lIns="45718" tIns="45718" rIns="45718" bIns="45718" anchor="ctr">
-            <a:spAutoFit/>
-          </a:bodyPr>
-          <a:lstStyle>
-            <a:lvl1pPr algn="ctr">
-              <a:defRPr b="1" sz="1600">
-                <a:solidFill>
-                  <a:srgbClr val="1A1A2E"/>
-                </a:solidFill>
-                <a:latin typeface="Trebuchet MS"/>
-                <a:ea typeface="Trebuchet MS"/>
-                <a:cs typeface="Trebuchet MS"/>
-                <a:sym typeface="Trebuchet MS"/>
-              </a:defRPr>
-            </a:lvl1pPr>
-          </a:lstStyle>
-          <a:p>
-            <a:pPr/>
-            <a:r>
-              <a:t>XGBoost stripped</a:t>
-            </a:r>
-          </a:p>
-        </p:txBody>
-      </p:sp>
-      <p:sp>
-        <p:nvSpPr>
-          <p:cNvPr id="130" name="Text 18"/>
-          <p:cNvSpPr txBox="1"/>
-          <p:nvPr/>
-        </p:nvSpPr>
-        <p:spPr>
-          <a:xfrm>
-            <a:off x="6355079" y="1889759"/>
-            <a:ext cx="2331722" cy="609601"/>
-          </a:xfrm>
-          <a:prstGeom prst="rect">
-            <a:avLst/>
-          </a:prstGeom>
-          <a:ln w="12700">
-            <a:miter lim="400000"/>
-          </a:ln>
-          <a:extLst>
-            <a:ext uri="{C572A759-6A51-4108-AA02-DFA0A04FC94B}">
-              <ma14:wrappingTextBoxFlag xmlns:ma14="http://schemas.microsoft.com/office/mac/drawingml/2011/main" val="1"/>
-            </a:ext>
-          </a:extLst>
-        </p:spPr>
-        <p:txBody>
-          <a:bodyPr lIns="0" tIns="0" rIns="0" bIns="0" anchor="ctr">
-            <a:spAutoFit/>
-          </a:bodyPr>
-          <a:lstStyle>
-            <a:lvl1pPr algn="ctr">
-              <a:defRPr b="1" sz="4200">
-                <a:solidFill>
-                  <a:srgbClr val="E2B714"/>
-                </a:solidFill>
-                <a:latin typeface="Trebuchet MS"/>
-                <a:ea typeface="Trebuchet MS"/>
-                <a:cs typeface="Trebuchet MS"/>
-                <a:sym typeface="Trebuchet MS"/>
-              </a:defRPr>
-            </a:lvl1pPr>
-          </a:lstStyle>
-          <a:p>
-            <a:pPr/>
-            <a:r>
-              <a:t>44.4%</a:t>
-            </a:r>
-          </a:p>
-        </p:txBody>
-      </p:sp>
-      <p:sp>
-        <p:nvSpPr>
-          <p:cNvPr id="131" name="Text 19"/>
-          <p:cNvSpPr txBox="1"/>
-          <p:nvPr/>
-        </p:nvSpPr>
-        <p:spPr>
-          <a:xfrm>
-            <a:off x="6400798" y="2527607"/>
-            <a:ext cx="2240282" cy="248304"/>
-          </a:xfrm>
-          <a:prstGeom prst="rect">
-            <a:avLst/>
-          </a:prstGeom>
-          <a:ln w="12700">
-            <a:miter lim="400000"/>
-          </a:ln>
-          <a:extLst>
-            <a:ext uri="{C572A759-6A51-4108-AA02-DFA0A04FC94B}">
-              <ma14:wrappingTextBoxFlag xmlns:ma14="http://schemas.microsoft.com/office/mac/drawingml/2011/main" val="1"/>
-            </a:ext>
-          </a:extLst>
-        </p:spPr>
-        <p:txBody>
-          <a:bodyPr lIns="45718" tIns="45718" rIns="45718" bIns="45718" anchor="ctr">
-            <a:spAutoFit/>
-          </a:bodyPr>
-          <a:lstStyle>
-            <a:lvl1pPr algn="ctr">
-              <a:defRPr sz="1200">
-                <a:solidFill>
-                  <a:srgbClr val="64748B"/>
-                </a:solidFill>
-              </a:defRPr>
-            </a:lvl1pPr>
-          </a:lstStyle>
-          <a:p>
-            <a:pPr/>
-            <a:r>
-              <a:t>accuracy</a:t>
-            </a:r>
-          </a:p>
-        </p:txBody>
-      </p:sp>
-      <p:sp>
-        <p:nvSpPr>
-          <p:cNvPr id="132" name="Text 20"/>
-          <p:cNvSpPr txBox="1"/>
-          <p:nvPr/>
-        </p:nvSpPr>
-        <p:spPr>
-          <a:xfrm>
-            <a:off x="6400798" y="3050978"/>
-            <a:ext cx="2240282" cy="664601"/>
-          </a:xfrm>
-          <a:prstGeom prst="rect">
-            <a:avLst/>
-          </a:prstGeom>
-          <a:ln w="12700">
-            <a:miter lim="400000"/>
-          </a:ln>
-          <a:extLst>
-            <a:ext uri="{C572A759-6A51-4108-AA02-DFA0A04FC94B}">
-              <ma14:wrappingTextBoxFlag xmlns:ma14="http://schemas.microsoft.com/office/mac/drawingml/2011/main" val="1"/>
-            </a:ext>
-          </a:extLst>
-        </p:spPr>
-        <p:txBody>
-          <a:bodyPr lIns="45718" tIns="45718" rIns="45718" bIns="45718" anchor="ctr">
-            <a:spAutoFit/>
-          </a:bodyPr>
-          <a:lstStyle/>
-          <a:p>
-            <a:pPr algn="ctr">
-              <a:defRPr sz="1300"/>
-            </a:pPr>
-            <a:r>
-              <a:t>Balanced Acc: </a:t>
-            </a:r>
-            <a:r>
-              <a:rPr b="1"/>
-              <a:t>42.0%</a:t>
-            </a:r>
-          </a:p>
-          <a:p>
-            <a:pPr algn="ctr">
-              <a:defRPr sz="1300"/>
-            </a:pPr>
-          </a:p>
-          <a:p>
-            <a:pPr algn="ctr">
-              <a:defRPr sz="1300"/>
-            </a:pPr>
-            <a:r>
-              <a:t>Macro F1: </a:t>
-            </a:r>
-            <a:r>
-              <a:rPr b="1"/>
-              <a:t>0.404</a:t>
-            </a:r>
-          </a:p>
-        </p:txBody>
-      </p:sp>
-      <p:sp>
-        <p:nvSpPr>
-          <p:cNvPr id="133" name="Text 21"/>
-          <p:cNvSpPr txBox="1"/>
-          <p:nvPr/>
-        </p:nvSpPr>
-        <p:spPr>
-          <a:xfrm>
-            <a:off x="6400798" y="4025900"/>
-            <a:ext cx="2240282" cy="269239"/>
-          </a:xfrm>
-          <a:prstGeom prst="rect">
-            <a:avLst/>
-          </a:prstGeom>
-          <a:ln w="12700">
-            <a:miter lim="400000"/>
-          </a:ln>
-          <a:extLst>
-            <a:ext uri="{C572A759-6A51-4108-AA02-DFA0A04FC94B}">
-              <ma14:wrappingTextBoxFlag xmlns:ma14="http://schemas.microsoft.com/office/mac/drawingml/2011/main" val="1"/>
-            </a:ext>
-          </a:extLst>
-        </p:spPr>
-        <p:txBody>
-          <a:bodyPr lIns="45718" tIns="45718" rIns="45718" bIns="45718" anchor="ctr">
-            <a:spAutoFit/>
-          </a:bodyPr>
-          <a:lstStyle>
-            <a:lvl1pPr algn="ctr">
-              <a:defRPr b="1" sz="1200">
-                <a:solidFill>
-                  <a:srgbClr val="E2B714"/>
-                </a:solidFill>
-                <a:latin typeface="Trebuchet MS"/>
-                <a:ea typeface="Trebuchet MS"/>
-                <a:cs typeface="Trebuchet MS"/>
-                <a:sym typeface="Trebuchet MS"/>
-              </a:defRPr>
-            </a:lvl1pPr>
-          </a:lstStyle>
-          <a:p>
-            <a:pPr/>
-            <a:r>
-              <a:t>Bäst balanced accuracy!</a:t>
+              <a:t>11 tränade modeller</a:t>
             </a:r>
           </a:p>
         </p:txBody>
@@ -6977,14 +8608,14 @@
       </p:grpSpPr>
       <p:sp>
         <p:nvSpPr>
-          <p:cNvPr id="135" name="Text 0"/>
+          <p:cNvPr id="116" name="Text 0"/>
           <p:cNvSpPr txBox="1"/>
           <p:nvPr/>
         </p:nvSpPr>
         <p:spPr>
           <a:xfrm>
-            <a:off x="548640" y="326388"/>
-            <a:ext cx="8229601" cy="444501"/>
+            <a:off x="548640" y="327658"/>
+            <a:ext cx="8229601" cy="533401"/>
           </a:xfrm>
           <a:prstGeom prst="rect">
             <a:avLst/>
@@ -7004,7 +8635,7 @@
           </a:bodyPr>
           <a:lstStyle>
             <a:lvl1pPr>
-              <a:defRPr b="1" sz="3000">
+              <a:defRPr b="1" sz="3600">
                 <a:solidFill>
                   <a:srgbClr val="1A1A2E"/>
                 </a:solidFill>
@@ -7018,21 +8649,196 @@
           <a:p>
             <a:pPr/>
             <a:r>
-              <a:t>Random Forest — detaljer</a:t>
-            </a:r>
-          </a:p>
-        </p:txBody>
-      </p:sp>
-      <p:sp>
-        <p:nvSpPr>
-          <p:cNvPr id="136" name="Text 1"/>
+              <a:t>Resultat — bästa modellerna</a:t>
+            </a:r>
+          </a:p>
+        </p:txBody>
+      </p:sp>
+      <p:sp>
+        <p:nvSpPr>
+          <p:cNvPr id="117" name="Shape 1"/>
+          <p:cNvSpPr/>
+          <p:nvPr/>
+        </p:nvSpPr>
+        <p:spPr>
+          <a:xfrm>
+            <a:off x="548640" y="1097277"/>
+            <a:ext cx="2606040" cy="3566164"/>
+          </a:xfrm>
+          <a:prstGeom prst="rect">
+            <a:avLst/>
+          </a:prstGeom>
+          <a:solidFill>
+            <a:srgbClr val="FFFFFF"/>
+          </a:solidFill>
+          <a:ln w="12700">
+            <a:miter lim="400000"/>
+          </a:ln>
+          <a:effectLst>
+            <a:outerShdw sx="100000" sy="100000" kx="0" ky="0" algn="b" rotWithShape="0" blurRad="76200" dist="25400" dir="8100000">
+              <a:srgbClr val="000000">
+                <a:alpha val="12000"/>
+              </a:srgbClr>
+            </a:outerShdw>
+          </a:effectLst>
+        </p:spPr>
+        <p:txBody>
+          <a:bodyPr lIns="45718" tIns="45718" rIns="45718" bIns="45718"/>
+          <a:lstStyle/>
+          <a:p>
+            <a:pPr>
+              <a:defRPr>
+                <a:latin typeface="+mj-lt"/>
+                <a:ea typeface="+mj-ea"/>
+                <a:cs typeface="+mj-cs"/>
+                <a:sym typeface="Calibri"/>
+              </a:defRPr>
+            </a:pPr>
+          </a:p>
+        </p:txBody>
+      </p:sp>
+      <p:sp>
+        <p:nvSpPr>
+          <p:cNvPr id="118" name="Shape 2"/>
+          <p:cNvSpPr/>
+          <p:nvPr/>
+        </p:nvSpPr>
+        <p:spPr>
+          <a:xfrm>
+            <a:off x="548640" y="1097280"/>
+            <a:ext cx="2606040" cy="64010"/>
+          </a:xfrm>
+          <a:prstGeom prst="rect">
+            <a:avLst/>
+          </a:prstGeom>
+          <a:solidFill>
+            <a:srgbClr val="3D5AF1"/>
+          </a:solidFill>
+          <a:ln w="12700">
+            <a:miter lim="400000"/>
+          </a:ln>
+        </p:spPr>
+        <p:txBody>
+          <a:bodyPr lIns="45718" tIns="45718" rIns="45718" bIns="45718"/>
+          <a:lstStyle/>
+          <a:p>
+            <a:pPr>
+              <a:defRPr>
+                <a:latin typeface="+mj-lt"/>
+                <a:ea typeface="+mj-ea"/>
+                <a:cs typeface="+mj-cs"/>
+                <a:sym typeface="Calibri"/>
+              </a:defRPr>
+            </a:pPr>
+          </a:p>
+        </p:txBody>
+      </p:sp>
+      <p:sp>
+        <p:nvSpPr>
+          <p:cNvPr id="119" name="Text 3"/>
           <p:cNvSpPr txBox="1"/>
           <p:nvPr/>
         </p:nvSpPr>
         <p:spPr>
           <a:xfrm>
-            <a:off x="502918" y="779780"/>
-            <a:ext cx="4023364" cy="269239"/>
+            <a:off x="731517" y="1342389"/>
+            <a:ext cx="2240285" cy="332737"/>
+          </a:xfrm>
+          <a:prstGeom prst="rect">
+            <a:avLst/>
+          </a:prstGeom>
+          <a:ln w="12700">
+            <a:miter lim="400000"/>
+          </a:ln>
+          <a:extLst>
+            <a:ext uri="{C572A759-6A51-4108-AA02-DFA0A04FC94B}">
+              <ma14:wrappingTextBoxFlag xmlns:ma14="http://schemas.microsoft.com/office/mac/drawingml/2011/main" val="1"/>
+            </a:ext>
+          </a:extLst>
+        </p:spPr>
+        <p:txBody>
+          <a:bodyPr lIns="45718" tIns="45718" rIns="45718" bIns="45718" anchor="ctr">
+            <a:spAutoFit/>
+          </a:bodyPr>
+          <a:lstStyle>
+            <a:lvl1pPr algn="ctr">
+              <a:defRPr b="1" sz="1600">
+                <a:solidFill>
+                  <a:srgbClr val="1A1A2E"/>
+                </a:solidFill>
+                <a:latin typeface="Trebuchet MS"/>
+                <a:ea typeface="Trebuchet MS"/>
+                <a:cs typeface="Trebuchet MS"/>
+                <a:sym typeface="Trebuchet MS"/>
+              </a:defRPr>
+            </a:lvl1pPr>
+          </a:lstStyle>
+          <a:p>
+            <a:pPr/>
+            <a:r>
+              <a:t>LogReg (PCA)</a:t>
+            </a:r>
+          </a:p>
+        </p:txBody>
+      </p:sp>
+      <p:sp>
+        <p:nvSpPr>
+          <p:cNvPr id="120" name="Text 4"/>
+          <p:cNvSpPr txBox="1"/>
+          <p:nvPr/>
+        </p:nvSpPr>
+        <p:spPr>
+          <a:xfrm>
+            <a:off x="685798" y="1889759"/>
+            <a:ext cx="2331724" cy="609601"/>
+          </a:xfrm>
+          <a:prstGeom prst="rect">
+            <a:avLst/>
+          </a:prstGeom>
+          <a:ln w="12700">
+            <a:miter lim="400000"/>
+          </a:ln>
+          <a:extLst>
+            <a:ext uri="{C572A759-6A51-4108-AA02-DFA0A04FC94B}">
+              <ma14:wrappingTextBoxFlag xmlns:ma14="http://schemas.microsoft.com/office/mac/drawingml/2011/main" val="1"/>
+            </a:ext>
+          </a:extLst>
+        </p:spPr>
+        <p:txBody>
+          <a:bodyPr lIns="0" tIns="0" rIns="0" bIns="0" anchor="ctr">
+            <a:spAutoFit/>
+          </a:bodyPr>
+          <a:lstStyle>
+            <a:lvl1pPr algn="ctr">
+              <a:defRPr b="1" sz="4200">
+                <a:solidFill>
+                  <a:srgbClr val="3D5AF1"/>
+                </a:solidFill>
+                <a:latin typeface="Trebuchet MS"/>
+                <a:ea typeface="Trebuchet MS"/>
+                <a:cs typeface="Trebuchet MS"/>
+                <a:sym typeface="Trebuchet MS"/>
+              </a:defRPr>
+            </a:lvl1pPr>
+          </a:lstStyle>
+          <a:p>
+            <a:pPr/>
+            <a:r>
+              <a:t>48.8%</a:t>
+            </a:r>
+          </a:p>
+        </p:txBody>
+      </p:sp>
+      <p:sp>
+        <p:nvSpPr>
+          <p:cNvPr id="121" name="Text 5"/>
+          <p:cNvSpPr txBox="1"/>
+          <p:nvPr/>
+        </p:nvSpPr>
+        <p:spPr>
+          <a:xfrm>
+            <a:off x="731517" y="2527606"/>
+            <a:ext cx="2240285" cy="248302"/>
           </a:xfrm>
           <a:prstGeom prst="rect">
             <a:avLst/>
@@ -7056,6 +8862,128 @@
                 <a:solidFill>
                   <a:srgbClr val="64748B"/>
                 </a:solidFill>
+                <a:latin typeface="+mj-lt"/>
+                <a:ea typeface="+mj-ea"/>
+                <a:cs typeface="+mj-cs"/>
+                <a:sym typeface="Calibri"/>
+              </a:defRPr>
+            </a:lvl1pPr>
+          </a:lstStyle>
+          <a:p>
+            <a:pPr/>
+            <a:r>
+              <a:t>accuracy</a:t>
+            </a:r>
+          </a:p>
+        </p:txBody>
+      </p:sp>
+      <p:sp>
+        <p:nvSpPr>
+          <p:cNvPr id="122" name="Text 6"/>
+          <p:cNvSpPr txBox="1"/>
+          <p:nvPr/>
+        </p:nvSpPr>
+        <p:spPr>
+          <a:xfrm>
+            <a:off x="731517" y="3050977"/>
+            <a:ext cx="2240285" cy="664599"/>
+          </a:xfrm>
+          <a:prstGeom prst="rect">
+            <a:avLst/>
+          </a:prstGeom>
+          <a:ln w="12700">
+            <a:miter lim="400000"/>
+          </a:ln>
+          <a:extLst>
+            <a:ext uri="{C572A759-6A51-4108-AA02-DFA0A04FC94B}">
+              <ma14:wrappingTextBoxFlag xmlns:ma14="http://schemas.microsoft.com/office/mac/drawingml/2011/main" val="1"/>
+            </a:ext>
+          </a:extLst>
+        </p:spPr>
+        <p:txBody>
+          <a:bodyPr lIns="45718" tIns="45718" rIns="45718" bIns="45718" anchor="ctr">
+            <a:spAutoFit/>
+          </a:bodyPr>
+          <a:lstStyle/>
+          <a:p>
+            <a:pPr algn="ctr">
+              <a:defRPr sz="1300">
+                <a:latin typeface="+mj-lt"/>
+                <a:ea typeface="+mj-ea"/>
+                <a:cs typeface="+mj-cs"/>
+                <a:sym typeface="Calibri"/>
+              </a:defRPr>
+            </a:pPr>
+            <a:r>
+              <a:t>Balanced Acc: </a:t>
+            </a:r>
+            <a:r>
+              <a:rPr b="1"/>
+              <a:t>40.5%</a:t>
+            </a:r>
+          </a:p>
+          <a:p>
+            <a:pPr algn="ctr">
+              <a:defRPr sz="1300">
+                <a:latin typeface="+mj-lt"/>
+                <a:ea typeface="+mj-ea"/>
+                <a:cs typeface="+mj-cs"/>
+                <a:sym typeface="Calibri"/>
+              </a:defRPr>
+            </a:pPr>
+          </a:p>
+          <a:p>
+            <a:pPr algn="ctr">
+              <a:defRPr sz="1300">
+                <a:latin typeface="+mj-lt"/>
+                <a:ea typeface="+mj-ea"/>
+                <a:cs typeface="+mj-cs"/>
+                <a:sym typeface="Calibri"/>
+              </a:defRPr>
+            </a:pPr>
+            <a:r>
+              <a:t>Macro F1: </a:t>
+            </a:r>
+            <a:r>
+              <a:rPr b="1"/>
+              <a:t>0.404</a:t>
+            </a:r>
+          </a:p>
+        </p:txBody>
+      </p:sp>
+      <p:sp>
+        <p:nvSpPr>
+          <p:cNvPr id="123" name="Text 7"/>
+          <p:cNvSpPr txBox="1"/>
+          <p:nvPr/>
+        </p:nvSpPr>
+        <p:spPr>
+          <a:xfrm>
+            <a:off x="731517" y="4025900"/>
+            <a:ext cx="2240285" cy="269237"/>
+          </a:xfrm>
+          <a:prstGeom prst="rect">
+            <a:avLst/>
+          </a:prstGeom>
+          <a:ln w="12700">
+            <a:miter lim="400000"/>
+          </a:ln>
+          <a:extLst>
+            <a:ext uri="{C572A759-6A51-4108-AA02-DFA0A04FC94B}">
+              <ma14:wrappingTextBoxFlag xmlns:ma14="http://schemas.microsoft.com/office/mac/drawingml/2011/main" val="1"/>
+            </a:ext>
+          </a:extLst>
+        </p:spPr>
+        <p:txBody>
+          <a:bodyPr lIns="45718" tIns="45718" rIns="45718" bIns="45718" anchor="ctr">
+            <a:spAutoFit/>
+          </a:bodyPr>
+          <a:lstStyle>
+            <a:lvl1pPr algn="ctr">
+              <a:defRPr b="1" sz="1200">
+                <a:solidFill>
+                  <a:srgbClr val="3D5AF1"/>
+                </a:solidFill>
                 <a:latin typeface="Trebuchet MS"/>
                 <a:ea typeface="Trebuchet MS"/>
                 <a:cs typeface="Trebuchet MS"/>
@@ -7066,50 +8994,196 @@
           <a:p>
             <a:pPr/>
             <a:r>
-              <a:t>Confusion Matrix</a:t>
-            </a:r>
-          </a:p>
-        </p:txBody>
-      </p:sp>
-      <p:pic>
-        <p:nvPicPr>
-          <p:cNvPr id="137" name="Image 0" descr="Image 0"/>
-          <p:cNvPicPr>
-            <a:picLocks noChangeAspect="1"/>
-          </p:cNvPicPr>
-          <p:nvPr/>
-        </p:nvPicPr>
-        <p:blipFill>
-          <a:blip r:embed="rId2">
-            <a:extLst/>
-          </a:blip>
-          <a:stretch>
-            <a:fillRect/>
-          </a:stretch>
-        </p:blipFill>
-        <p:spPr>
-          <a:xfrm>
-            <a:off x="182879" y="1051560"/>
-            <a:ext cx="4389123" cy="3657602"/>
-          </a:xfrm>
-          <a:prstGeom prst="rect">
-            <a:avLst/>
-          </a:prstGeom>
-          <a:ln w="12700">
-            <a:miter lim="400000"/>
-          </a:ln>
-        </p:spPr>
-      </p:pic>
-      <p:sp>
-        <p:nvSpPr>
-          <p:cNvPr id="138" name="Text 2"/>
+              <a:t>Bäst accuracy (delad)</a:t>
+            </a:r>
+          </a:p>
+        </p:txBody>
+      </p:sp>
+      <p:sp>
+        <p:nvSpPr>
+          <p:cNvPr id="124" name="Shape 8"/>
+          <p:cNvSpPr/>
+          <p:nvPr/>
+        </p:nvSpPr>
+        <p:spPr>
+          <a:xfrm>
+            <a:off x="3383279" y="1097277"/>
+            <a:ext cx="2606043" cy="3566164"/>
+          </a:xfrm>
+          <a:prstGeom prst="rect">
+            <a:avLst/>
+          </a:prstGeom>
+          <a:solidFill>
+            <a:srgbClr val="FFFFFF"/>
+          </a:solidFill>
+          <a:ln w="12700">
+            <a:miter lim="400000"/>
+          </a:ln>
+          <a:effectLst>
+            <a:outerShdw sx="100000" sy="100000" kx="0" ky="0" algn="b" rotWithShape="0" blurRad="76200" dist="25400" dir="8100000">
+              <a:srgbClr val="000000">
+                <a:alpha val="12000"/>
+              </a:srgbClr>
+            </a:outerShdw>
+          </a:effectLst>
+        </p:spPr>
+        <p:txBody>
+          <a:bodyPr lIns="45718" tIns="45718" rIns="45718" bIns="45718"/>
+          <a:lstStyle/>
+          <a:p>
+            <a:pPr>
+              <a:defRPr>
+                <a:latin typeface="+mj-lt"/>
+                <a:ea typeface="+mj-ea"/>
+                <a:cs typeface="+mj-cs"/>
+                <a:sym typeface="Calibri"/>
+              </a:defRPr>
+            </a:pPr>
+          </a:p>
+        </p:txBody>
+      </p:sp>
+      <p:sp>
+        <p:nvSpPr>
+          <p:cNvPr id="125" name="Shape 9"/>
+          <p:cNvSpPr/>
+          <p:nvPr/>
+        </p:nvSpPr>
+        <p:spPr>
+          <a:xfrm>
+            <a:off x="3383279" y="1097280"/>
+            <a:ext cx="2606043" cy="64010"/>
+          </a:xfrm>
+          <a:prstGeom prst="rect">
+            <a:avLst/>
+          </a:prstGeom>
+          <a:solidFill>
+            <a:srgbClr val="54A24B"/>
+          </a:solidFill>
+          <a:ln w="12700">
+            <a:miter lim="400000"/>
+          </a:ln>
+        </p:spPr>
+        <p:txBody>
+          <a:bodyPr lIns="45718" tIns="45718" rIns="45718" bIns="45718"/>
+          <a:lstStyle/>
+          <a:p>
+            <a:pPr>
+              <a:defRPr>
+                <a:latin typeface="+mj-lt"/>
+                <a:ea typeface="+mj-ea"/>
+                <a:cs typeface="+mj-cs"/>
+                <a:sym typeface="Calibri"/>
+              </a:defRPr>
+            </a:pPr>
+          </a:p>
+        </p:txBody>
+      </p:sp>
+      <p:sp>
+        <p:nvSpPr>
+          <p:cNvPr id="126" name="Text 10"/>
           <p:cNvSpPr txBox="1"/>
           <p:nvPr/>
         </p:nvSpPr>
         <p:spPr>
           <a:xfrm>
-            <a:off x="4800598" y="779780"/>
-            <a:ext cx="4023362" cy="269239"/>
+            <a:off x="3566159" y="1342389"/>
+            <a:ext cx="2240283" cy="332737"/>
+          </a:xfrm>
+          <a:prstGeom prst="rect">
+            <a:avLst/>
+          </a:prstGeom>
+          <a:ln w="12700">
+            <a:miter lim="400000"/>
+          </a:ln>
+          <a:extLst>
+            <a:ext uri="{C572A759-6A51-4108-AA02-DFA0A04FC94B}">
+              <ma14:wrappingTextBoxFlag xmlns:ma14="http://schemas.microsoft.com/office/mac/drawingml/2011/main" val="1"/>
+            </a:ext>
+          </a:extLst>
+        </p:spPr>
+        <p:txBody>
+          <a:bodyPr lIns="45718" tIns="45718" rIns="45718" bIns="45718" anchor="ctr">
+            <a:spAutoFit/>
+          </a:bodyPr>
+          <a:lstStyle>
+            <a:lvl1pPr algn="ctr">
+              <a:defRPr b="1" sz="1600">
+                <a:solidFill>
+                  <a:srgbClr val="1A1A2E"/>
+                </a:solidFill>
+                <a:latin typeface="Trebuchet MS"/>
+                <a:ea typeface="Trebuchet MS"/>
+                <a:cs typeface="Trebuchet MS"/>
+                <a:sym typeface="Trebuchet MS"/>
+              </a:defRPr>
+            </a:lvl1pPr>
+          </a:lstStyle>
+          <a:p>
+            <a:pPr/>
+            <a:r>
+              <a:t>Random Forest</a:t>
+            </a:r>
+          </a:p>
+        </p:txBody>
+      </p:sp>
+      <p:sp>
+        <p:nvSpPr>
+          <p:cNvPr id="127" name="Text 11"/>
+          <p:cNvSpPr txBox="1"/>
+          <p:nvPr/>
+        </p:nvSpPr>
+        <p:spPr>
+          <a:xfrm>
+            <a:off x="3520440" y="1889759"/>
+            <a:ext cx="2331723" cy="609601"/>
+          </a:xfrm>
+          <a:prstGeom prst="rect">
+            <a:avLst/>
+          </a:prstGeom>
+          <a:ln w="12700">
+            <a:miter lim="400000"/>
+          </a:ln>
+          <a:extLst>
+            <a:ext uri="{C572A759-6A51-4108-AA02-DFA0A04FC94B}">
+              <ma14:wrappingTextBoxFlag xmlns:ma14="http://schemas.microsoft.com/office/mac/drawingml/2011/main" val="1"/>
+            </a:ext>
+          </a:extLst>
+        </p:spPr>
+        <p:txBody>
+          <a:bodyPr lIns="0" tIns="0" rIns="0" bIns="0" anchor="ctr">
+            <a:spAutoFit/>
+          </a:bodyPr>
+          <a:lstStyle>
+            <a:lvl1pPr algn="ctr">
+              <a:defRPr b="1" sz="4200">
+                <a:solidFill>
+                  <a:srgbClr val="54A24B"/>
+                </a:solidFill>
+                <a:latin typeface="Trebuchet MS"/>
+                <a:ea typeface="Trebuchet MS"/>
+                <a:cs typeface="Trebuchet MS"/>
+                <a:sym typeface="Trebuchet MS"/>
+              </a:defRPr>
+            </a:lvl1pPr>
+          </a:lstStyle>
+          <a:p>
+            <a:pPr/>
+            <a:r>
+              <a:t>48.8%</a:t>
+            </a:r>
+          </a:p>
+        </p:txBody>
+      </p:sp>
+      <p:sp>
+        <p:nvSpPr>
+          <p:cNvPr id="128" name="Text 12"/>
+          <p:cNvSpPr txBox="1"/>
+          <p:nvPr/>
+        </p:nvSpPr>
+        <p:spPr>
+          <a:xfrm>
+            <a:off x="3566159" y="2527606"/>
+            <a:ext cx="2240283" cy="248302"/>
           </a:xfrm>
           <a:prstGeom prst="rect">
             <a:avLst/>
@@ -7133,6 +9207,128 @@
                 <a:solidFill>
                   <a:srgbClr val="64748B"/>
                 </a:solidFill>
+                <a:latin typeface="+mj-lt"/>
+                <a:ea typeface="+mj-ea"/>
+                <a:cs typeface="+mj-cs"/>
+                <a:sym typeface="Calibri"/>
+              </a:defRPr>
+            </a:lvl1pPr>
+          </a:lstStyle>
+          <a:p>
+            <a:pPr/>
+            <a:r>
+              <a:t>accuracy</a:t>
+            </a:r>
+          </a:p>
+        </p:txBody>
+      </p:sp>
+      <p:sp>
+        <p:nvSpPr>
+          <p:cNvPr id="129" name="Text 13"/>
+          <p:cNvSpPr txBox="1"/>
+          <p:nvPr/>
+        </p:nvSpPr>
+        <p:spPr>
+          <a:xfrm>
+            <a:off x="3566159" y="3050977"/>
+            <a:ext cx="2240283" cy="664599"/>
+          </a:xfrm>
+          <a:prstGeom prst="rect">
+            <a:avLst/>
+          </a:prstGeom>
+          <a:ln w="12700">
+            <a:miter lim="400000"/>
+          </a:ln>
+          <a:extLst>
+            <a:ext uri="{C572A759-6A51-4108-AA02-DFA0A04FC94B}">
+              <ma14:wrappingTextBoxFlag xmlns:ma14="http://schemas.microsoft.com/office/mac/drawingml/2011/main" val="1"/>
+            </a:ext>
+          </a:extLst>
+        </p:spPr>
+        <p:txBody>
+          <a:bodyPr lIns="45718" tIns="45718" rIns="45718" bIns="45718" anchor="ctr">
+            <a:spAutoFit/>
+          </a:bodyPr>
+          <a:lstStyle/>
+          <a:p>
+            <a:pPr algn="ctr">
+              <a:defRPr sz="1300">
+                <a:latin typeface="+mj-lt"/>
+                <a:ea typeface="+mj-ea"/>
+                <a:cs typeface="+mj-cs"/>
+                <a:sym typeface="Calibri"/>
+              </a:defRPr>
+            </a:pPr>
+            <a:r>
+              <a:t>Balanced Acc: </a:t>
+            </a:r>
+            <a:r>
+              <a:rPr b="1"/>
+              <a:t>37.8%</a:t>
+            </a:r>
+          </a:p>
+          <a:p>
+            <a:pPr algn="ctr">
+              <a:defRPr sz="1300">
+                <a:latin typeface="+mj-lt"/>
+                <a:ea typeface="+mj-ea"/>
+                <a:cs typeface="+mj-cs"/>
+                <a:sym typeface="Calibri"/>
+              </a:defRPr>
+            </a:pPr>
+          </a:p>
+          <a:p>
+            <a:pPr algn="ctr">
+              <a:defRPr sz="1300">
+                <a:latin typeface="+mj-lt"/>
+                <a:ea typeface="+mj-ea"/>
+                <a:cs typeface="+mj-cs"/>
+                <a:sym typeface="Calibri"/>
+              </a:defRPr>
+            </a:pPr>
+            <a:r>
+              <a:t>Macro F1: </a:t>
+            </a:r>
+            <a:r>
+              <a:rPr b="1"/>
+              <a:t>0.365</a:t>
+            </a:r>
+          </a:p>
+        </p:txBody>
+      </p:sp>
+      <p:sp>
+        <p:nvSpPr>
+          <p:cNvPr id="130" name="Text 14"/>
+          <p:cNvSpPr txBox="1"/>
+          <p:nvPr/>
+        </p:nvSpPr>
+        <p:spPr>
+          <a:xfrm>
+            <a:off x="3566159" y="4025900"/>
+            <a:ext cx="2240283" cy="269237"/>
+          </a:xfrm>
+          <a:prstGeom prst="rect">
+            <a:avLst/>
+          </a:prstGeom>
+          <a:ln w="12700">
+            <a:miter lim="400000"/>
+          </a:ln>
+          <a:extLst>
+            <a:ext uri="{C572A759-6A51-4108-AA02-DFA0A04FC94B}">
+              <ma14:wrappingTextBoxFlag xmlns:ma14="http://schemas.microsoft.com/office/mac/drawingml/2011/main" val="1"/>
+            </a:ext>
+          </a:extLst>
+        </p:spPr>
+        <p:txBody>
+          <a:bodyPr lIns="45718" tIns="45718" rIns="45718" bIns="45718" anchor="ctr">
+            <a:spAutoFit/>
+          </a:bodyPr>
+          <a:lstStyle>
+            <a:lvl1pPr algn="ctr">
+              <a:defRPr b="1" sz="1200">
+                <a:solidFill>
+                  <a:srgbClr val="54A24B"/>
+                </a:solidFill>
                 <a:latin typeface="Trebuchet MS"/>
                 <a:ea typeface="Trebuchet MS"/>
                 <a:cs typeface="Trebuchet MS"/>
@@ -7143,40 +9339,356 @@
           <a:p>
             <a:pPr/>
             <a:r>
-              <a:t>Grupperad Permutation Importance</a:t>
-            </a:r>
-          </a:p>
-        </p:txBody>
-      </p:sp>
-      <p:pic>
-        <p:nvPicPr>
-          <p:cNvPr id="139" name="Image 1" descr="Image 1"/>
-          <p:cNvPicPr>
-            <a:picLocks noChangeAspect="1"/>
-          </p:cNvPicPr>
-          <p:nvPr/>
-        </p:nvPicPr>
-        <p:blipFill>
-          <a:blip r:embed="rId3">
-            <a:extLst/>
-          </a:blip>
-          <a:stretch>
-            <a:fillRect/>
-          </a:stretch>
-        </p:blipFill>
-        <p:spPr>
-          <a:xfrm>
-            <a:off x="4663440" y="1051560"/>
-            <a:ext cx="4297682" cy="3657602"/>
-          </a:xfrm>
-          <a:prstGeom prst="rect">
-            <a:avLst/>
-          </a:prstGeom>
-          <a:ln w="12700">
-            <a:miter lim="400000"/>
-          </a:ln>
-        </p:spPr>
-      </p:pic>
+              <a:t>Bäst accuracy (delad)</a:t>
+            </a:r>
+          </a:p>
+        </p:txBody>
+      </p:sp>
+      <p:sp>
+        <p:nvSpPr>
+          <p:cNvPr id="131" name="Shape 15"/>
+          <p:cNvSpPr/>
+          <p:nvPr/>
+        </p:nvSpPr>
+        <p:spPr>
+          <a:xfrm>
+            <a:off x="6217920" y="1097277"/>
+            <a:ext cx="2606043" cy="3566164"/>
+          </a:xfrm>
+          <a:prstGeom prst="rect">
+            <a:avLst/>
+          </a:prstGeom>
+          <a:solidFill>
+            <a:srgbClr val="FFFFFF"/>
+          </a:solidFill>
+          <a:ln w="12700">
+            <a:miter lim="400000"/>
+          </a:ln>
+          <a:effectLst>
+            <a:outerShdw sx="100000" sy="100000" kx="0" ky="0" algn="b" rotWithShape="0" blurRad="76200" dist="25400" dir="8100000">
+              <a:srgbClr val="000000">
+                <a:alpha val="12000"/>
+              </a:srgbClr>
+            </a:outerShdw>
+          </a:effectLst>
+        </p:spPr>
+        <p:txBody>
+          <a:bodyPr lIns="45718" tIns="45718" rIns="45718" bIns="45718"/>
+          <a:lstStyle/>
+          <a:p>
+            <a:pPr>
+              <a:defRPr>
+                <a:latin typeface="+mj-lt"/>
+                <a:ea typeface="+mj-ea"/>
+                <a:cs typeface="+mj-cs"/>
+                <a:sym typeface="Calibri"/>
+              </a:defRPr>
+            </a:pPr>
+          </a:p>
+        </p:txBody>
+      </p:sp>
+      <p:sp>
+        <p:nvSpPr>
+          <p:cNvPr id="132" name="Shape 16"/>
+          <p:cNvSpPr/>
+          <p:nvPr/>
+        </p:nvSpPr>
+        <p:spPr>
+          <a:xfrm>
+            <a:off x="6217920" y="1097280"/>
+            <a:ext cx="2606043" cy="64010"/>
+          </a:xfrm>
+          <a:prstGeom prst="rect">
+            <a:avLst/>
+          </a:prstGeom>
+          <a:solidFill>
+            <a:srgbClr val="E2B714"/>
+          </a:solidFill>
+          <a:ln w="12700">
+            <a:miter lim="400000"/>
+          </a:ln>
+        </p:spPr>
+        <p:txBody>
+          <a:bodyPr lIns="45718" tIns="45718" rIns="45718" bIns="45718"/>
+          <a:lstStyle/>
+          <a:p>
+            <a:pPr>
+              <a:defRPr>
+                <a:latin typeface="+mj-lt"/>
+                <a:ea typeface="+mj-ea"/>
+                <a:cs typeface="+mj-cs"/>
+                <a:sym typeface="Calibri"/>
+              </a:defRPr>
+            </a:pPr>
+          </a:p>
+        </p:txBody>
+      </p:sp>
+      <p:sp>
+        <p:nvSpPr>
+          <p:cNvPr id="133" name="Text 17"/>
+          <p:cNvSpPr txBox="1"/>
+          <p:nvPr/>
+        </p:nvSpPr>
+        <p:spPr>
+          <a:xfrm>
+            <a:off x="6400798" y="1342389"/>
+            <a:ext cx="2240283" cy="332737"/>
+          </a:xfrm>
+          <a:prstGeom prst="rect">
+            <a:avLst/>
+          </a:prstGeom>
+          <a:ln w="12700">
+            <a:miter lim="400000"/>
+          </a:ln>
+          <a:extLst>
+            <a:ext uri="{C572A759-6A51-4108-AA02-DFA0A04FC94B}">
+              <ma14:wrappingTextBoxFlag xmlns:ma14="http://schemas.microsoft.com/office/mac/drawingml/2011/main" val="1"/>
+            </a:ext>
+          </a:extLst>
+        </p:spPr>
+        <p:txBody>
+          <a:bodyPr lIns="45718" tIns="45718" rIns="45718" bIns="45718" anchor="ctr">
+            <a:spAutoFit/>
+          </a:bodyPr>
+          <a:lstStyle>
+            <a:lvl1pPr algn="ctr">
+              <a:defRPr b="1" sz="1600">
+                <a:solidFill>
+                  <a:srgbClr val="1A1A2E"/>
+                </a:solidFill>
+                <a:latin typeface="Trebuchet MS"/>
+                <a:ea typeface="Trebuchet MS"/>
+                <a:cs typeface="Trebuchet MS"/>
+                <a:sym typeface="Trebuchet MS"/>
+              </a:defRPr>
+            </a:lvl1pPr>
+          </a:lstStyle>
+          <a:p>
+            <a:pPr/>
+            <a:r>
+              <a:t>XGBoost stripped</a:t>
+            </a:r>
+          </a:p>
+        </p:txBody>
+      </p:sp>
+      <p:sp>
+        <p:nvSpPr>
+          <p:cNvPr id="134" name="Text 18"/>
+          <p:cNvSpPr txBox="1"/>
+          <p:nvPr/>
+        </p:nvSpPr>
+        <p:spPr>
+          <a:xfrm>
+            <a:off x="6355079" y="1889759"/>
+            <a:ext cx="2331723" cy="609601"/>
+          </a:xfrm>
+          <a:prstGeom prst="rect">
+            <a:avLst/>
+          </a:prstGeom>
+          <a:ln w="12700">
+            <a:miter lim="400000"/>
+          </a:ln>
+          <a:extLst>
+            <a:ext uri="{C572A759-6A51-4108-AA02-DFA0A04FC94B}">
+              <ma14:wrappingTextBoxFlag xmlns:ma14="http://schemas.microsoft.com/office/mac/drawingml/2011/main" val="1"/>
+            </a:ext>
+          </a:extLst>
+        </p:spPr>
+        <p:txBody>
+          <a:bodyPr lIns="0" tIns="0" rIns="0" bIns="0" anchor="ctr">
+            <a:spAutoFit/>
+          </a:bodyPr>
+          <a:lstStyle>
+            <a:lvl1pPr algn="ctr">
+              <a:defRPr b="1" sz="4200">
+                <a:solidFill>
+                  <a:srgbClr val="E2B714"/>
+                </a:solidFill>
+                <a:latin typeface="Trebuchet MS"/>
+                <a:ea typeface="Trebuchet MS"/>
+                <a:cs typeface="Trebuchet MS"/>
+                <a:sym typeface="Trebuchet MS"/>
+              </a:defRPr>
+            </a:lvl1pPr>
+          </a:lstStyle>
+          <a:p>
+            <a:pPr/>
+            <a:r>
+              <a:t>44.4%</a:t>
+            </a:r>
+          </a:p>
+        </p:txBody>
+      </p:sp>
+      <p:sp>
+        <p:nvSpPr>
+          <p:cNvPr id="135" name="Text 19"/>
+          <p:cNvSpPr txBox="1"/>
+          <p:nvPr/>
+        </p:nvSpPr>
+        <p:spPr>
+          <a:xfrm>
+            <a:off x="6400798" y="2527606"/>
+            <a:ext cx="2240283" cy="248302"/>
+          </a:xfrm>
+          <a:prstGeom prst="rect">
+            <a:avLst/>
+          </a:prstGeom>
+          <a:ln w="12700">
+            <a:miter lim="400000"/>
+          </a:ln>
+          <a:extLst>
+            <a:ext uri="{C572A759-6A51-4108-AA02-DFA0A04FC94B}">
+              <ma14:wrappingTextBoxFlag xmlns:ma14="http://schemas.microsoft.com/office/mac/drawingml/2011/main" val="1"/>
+            </a:ext>
+          </a:extLst>
+        </p:spPr>
+        <p:txBody>
+          <a:bodyPr lIns="45718" tIns="45718" rIns="45718" bIns="45718" anchor="ctr">
+            <a:spAutoFit/>
+          </a:bodyPr>
+          <a:lstStyle>
+            <a:lvl1pPr algn="ctr">
+              <a:defRPr sz="1200">
+                <a:solidFill>
+                  <a:srgbClr val="64748B"/>
+                </a:solidFill>
+                <a:latin typeface="+mj-lt"/>
+                <a:ea typeface="+mj-ea"/>
+                <a:cs typeface="+mj-cs"/>
+                <a:sym typeface="Calibri"/>
+              </a:defRPr>
+            </a:lvl1pPr>
+          </a:lstStyle>
+          <a:p>
+            <a:pPr/>
+            <a:r>
+              <a:t>accuracy</a:t>
+            </a:r>
+          </a:p>
+        </p:txBody>
+      </p:sp>
+      <p:sp>
+        <p:nvSpPr>
+          <p:cNvPr id="136" name="Text 20"/>
+          <p:cNvSpPr txBox="1"/>
+          <p:nvPr/>
+        </p:nvSpPr>
+        <p:spPr>
+          <a:xfrm>
+            <a:off x="6400798" y="3050977"/>
+            <a:ext cx="2240283" cy="664599"/>
+          </a:xfrm>
+          <a:prstGeom prst="rect">
+            <a:avLst/>
+          </a:prstGeom>
+          <a:ln w="12700">
+            <a:miter lim="400000"/>
+          </a:ln>
+          <a:extLst>
+            <a:ext uri="{C572A759-6A51-4108-AA02-DFA0A04FC94B}">
+              <ma14:wrappingTextBoxFlag xmlns:ma14="http://schemas.microsoft.com/office/mac/drawingml/2011/main" val="1"/>
+            </a:ext>
+          </a:extLst>
+        </p:spPr>
+        <p:txBody>
+          <a:bodyPr lIns="45718" tIns="45718" rIns="45718" bIns="45718" anchor="ctr">
+            <a:spAutoFit/>
+          </a:bodyPr>
+          <a:lstStyle/>
+          <a:p>
+            <a:pPr algn="ctr">
+              <a:defRPr sz="1300">
+                <a:latin typeface="+mj-lt"/>
+                <a:ea typeface="+mj-ea"/>
+                <a:cs typeface="+mj-cs"/>
+                <a:sym typeface="Calibri"/>
+              </a:defRPr>
+            </a:pPr>
+            <a:r>
+              <a:t>Balanced Acc: </a:t>
+            </a:r>
+            <a:r>
+              <a:rPr b="1"/>
+              <a:t>42.0%</a:t>
+            </a:r>
+          </a:p>
+          <a:p>
+            <a:pPr algn="ctr">
+              <a:defRPr sz="1300">
+                <a:latin typeface="+mj-lt"/>
+                <a:ea typeface="+mj-ea"/>
+                <a:cs typeface="+mj-cs"/>
+                <a:sym typeface="Calibri"/>
+              </a:defRPr>
+            </a:pPr>
+          </a:p>
+          <a:p>
+            <a:pPr algn="ctr">
+              <a:defRPr sz="1300">
+                <a:latin typeface="+mj-lt"/>
+                <a:ea typeface="+mj-ea"/>
+                <a:cs typeface="+mj-cs"/>
+                <a:sym typeface="Calibri"/>
+              </a:defRPr>
+            </a:pPr>
+            <a:r>
+              <a:t>Macro F1: </a:t>
+            </a:r>
+            <a:r>
+              <a:rPr b="1"/>
+              <a:t>0.404</a:t>
+            </a:r>
+          </a:p>
+        </p:txBody>
+      </p:sp>
+      <p:sp>
+        <p:nvSpPr>
+          <p:cNvPr id="137" name="Text 21"/>
+          <p:cNvSpPr txBox="1"/>
+          <p:nvPr/>
+        </p:nvSpPr>
+        <p:spPr>
+          <a:xfrm>
+            <a:off x="6400798" y="4025900"/>
+            <a:ext cx="2240283" cy="269237"/>
+          </a:xfrm>
+          <a:prstGeom prst="rect">
+            <a:avLst/>
+          </a:prstGeom>
+          <a:ln w="12700">
+            <a:miter lim="400000"/>
+          </a:ln>
+          <a:extLst>
+            <a:ext uri="{C572A759-6A51-4108-AA02-DFA0A04FC94B}">
+              <ma14:wrappingTextBoxFlag xmlns:ma14="http://schemas.microsoft.com/office/mac/drawingml/2011/main" val="1"/>
+            </a:ext>
+          </a:extLst>
+        </p:spPr>
+        <p:txBody>
+          <a:bodyPr lIns="45718" tIns="45718" rIns="45718" bIns="45718" anchor="ctr">
+            <a:spAutoFit/>
+          </a:bodyPr>
+          <a:lstStyle>
+            <a:lvl1pPr algn="ctr">
+              <a:defRPr b="1" sz="1200">
+                <a:solidFill>
+                  <a:srgbClr val="E2B714"/>
+                </a:solidFill>
+                <a:latin typeface="Trebuchet MS"/>
+                <a:ea typeface="Trebuchet MS"/>
+                <a:cs typeface="Trebuchet MS"/>
+                <a:sym typeface="Trebuchet MS"/>
+              </a:defRPr>
+            </a:lvl1pPr>
+          </a:lstStyle>
+          <a:p>
+            <a:pPr/>
+            <a:r>
+              <a:t>Bäst balanced accuracy!</a:t>
+            </a:r>
+          </a:p>
+        </p:txBody>
+      </p:sp>
     </p:spTree>
   </p:cSld>
   <p:clrMapOvr>
@@ -7192,7 +9704,7 @@
     <p:bg>
       <p:bgPr>
         <a:solidFill>
-          <a:srgbClr val="1A1A2E"/>
+          <a:srgbClr val="F5F5F5"/>
         </a:solidFill>
       </p:bgPr>
     </p:bg>
@@ -7212,14 +9724,14 @@
       </p:grpSpPr>
       <p:sp>
         <p:nvSpPr>
-          <p:cNvPr id="141" name="Text 0"/>
+          <p:cNvPr id="139" name="Text 0"/>
           <p:cNvSpPr txBox="1"/>
           <p:nvPr/>
         </p:nvSpPr>
         <p:spPr>
           <a:xfrm>
-            <a:off x="548639" y="372109"/>
-            <a:ext cx="5486403" cy="444501"/>
+            <a:off x="548640" y="326387"/>
+            <a:ext cx="8229601" cy="444501"/>
           </a:xfrm>
           <a:prstGeom prst="rect">
             <a:avLst/>
@@ -7241,7 +9753,7 @@
             <a:lvl1pPr>
               <a:defRPr b="1" sz="3000">
                 <a:solidFill>
-                  <a:srgbClr val="FFFFFF"/>
+                  <a:srgbClr val="1A1A2E"/>
                 </a:solidFill>
                 <a:latin typeface="Trebuchet MS"/>
                 <a:ea typeface="Trebuchet MS"/>
@@ -7253,21 +9765,21 @@
           <a:p>
             <a:pPr/>
             <a:r>
-              <a:t>Bildegenskaper — hjälpte det?</a:t>
-            </a:r>
-          </a:p>
-        </p:txBody>
-      </p:sp>
-      <p:sp>
-        <p:nvSpPr>
-          <p:cNvPr id="142" name="Text 1"/>
+              <a:t>Random Forest — detaljer</a:t>
+            </a:r>
+          </a:p>
+        </p:txBody>
+      </p:sp>
+      <p:sp>
+        <p:nvSpPr>
+          <p:cNvPr id="140" name="Text 1"/>
           <p:cNvSpPr txBox="1"/>
           <p:nvPr/>
         </p:nvSpPr>
         <p:spPr>
           <a:xfrm>
-            <a:off x="6858000" y="327659"/>
-            <a:ext cx="1828800" cy="533401"/>
+            <a:off x="502917" y="779780"/>
+            <a:ext cx="4023366" cy="269237"/>
           </a:xfrm>
           <a:prstGeom prst="rect">
             <a:avLst/>
@@ -7282,14 +9794,14 @@
           </a:extLst>
         </p:spPr>
         <p:txBody>
-          <a:bodyPr lIns="0" tIns="0" rIns="0" bIns="0" anchor="ctr">
+          <a:bodyPr lIns="45718" tIns="45718" rIns="45718" bIns="45718" anchor="ctr">
             <a:spAutoFit/>
           </a:bodyPr>
           <a:lstStyle>
-            <a:lvl1pPr algn="r">
-              <a:defRPr b="1" sz="3600">
+            <a:lvl1pPr algn="ctr">
+              <a:defRPr sz="1200">
                 <a:solidFill>
-                  <a:srgbClr val="E45756"/>
+                  <a:srgbClr val="64748B"/>
                 </a:solidFill>
                 <a:latin typeface="Trebuchet MS"/>
                 <a:ea typeface="Trebuchet MS"/>
@@ -7301,1612 +9813,50 @@
           <a:p>
             <a:pPr/>
             <a:r>
-              <a:t>Nej.</a:t>
-            </a:r>
-          </a:p>
-        </p:txBody>
-      </p:sp>
-      <p:graphicFrame>
-        <p:nvGraphicFramePr>
-          <p:cNvPr id="143" name="Table 0"/>
-          <p:cNvGraphicFramePr/>
-          <p:nvPr/>
-        </p:nvGraphicFramePr>
-        <p:xfrm>
-          <a:off x="548640" y="970280"/>
-          <a:ext cx="5035551" cy="2508113"/>
-        </p:xfrm>
-        <a:graphic xmlns:a="http://schemas.openxmlformats.org/drawingml/2006/main">
-          <a:graphicData uri="http://schemas.openxmlformats.org/drawingml/2006/table">
-            <a:tbl>
-              <a:tblPr firstCol="0" firstRow="0" lastCol="0" lastRow="0" bandCol="0" bandRow="0" rtl="0">
-                <a:tableStyleId>{4C3C2611-4C71-4FC5-86AE-919BDF0F9419}</a:tableStyleId>
-              </a:tblPr>
-              <a:tblGrid>
-                <a:gridCol w="2286000"/>
-                <a:gridCol w="1371600"/>
-                <a:gridCol w="1371600"/>
-              </a:tblGrid>
-              <a:tr h="320952">
-                <a:tc>
-                  <a:txBody>
-                    <a:bodyPr/>
-                    <a:lstStyle/>
-                    <a:p>
-                      <a:pPr algn="l">
-                        <a:defRPr sz="1800"/>
-                      </a:pPr>
-                      <a:r>
-                        <a:rPr b="1" sz="1200">
-                          <a:solidFill>
-                            <a:srgbClr val="FFFFFF"/>
-                          </a:solidFill>
-                        </a:rPr>
-                        <a:t>Modellvariant</a:t>
-                      </a:r>
-                    </a:p>
-                  </a:txBody>
-                  <a:tcPr marL="45720" marR="45720" marT="45720" marB="45720" anchor="t" anchorCtr="0" horzOverflow="overflow">
-                    <a:lnL w="6350">
-                      <a:solidFill>
-                        <a:srgbClr val="2A2A4A"/>
-                      </a:solidFill>
-                    </a:lnL>
-                    <a:lnR w="6350">
-                      <a:solidFill>
-                        <a:srgbClr val="2A2A4A"/>
-                      </a:solidFill>
-                    </a:lnR>
-                    <a:lnT w="6350">
-                      <a:solidFill>
-                        <a:srgbClr val="2A2A4A"/>
-                      </a:solidFill>
-                    </a:lnT>
-                    <a:lnB w="6350">
-                      <a:solidFill>
-                        <a:srgbClr val="2A2A4A"/>
-                      </a:solidFill>
-                    </a:lnB>
-                    <a:solidFill>
-                      <a:srgbClr val="16213E"/>
-                    </a:solidFill>
-                  </a:tcPr>
-                </a:tc>
-                <a:tc>
-                  <a:txBody>
-                    <a:bodyPr/>
-                    <a:lstStyle/>
-                    <a:p>
-                      <a:pPr algn="ctr">
-                        <a:defRPr sz="1800"/>
-                      </a:pPr>
-                      <a:r>
-                        <a:rPr b="1" sz="1200">
-                          <a:solidFill>
-                            <a:srgbClr val="FFFFFF"/>
-                          </a:solidFill>
-                        </a:rPr>
-                        <a:t>Accuracy</a:t>
-                      </a:r>
-                    </a:p>
-                  </a:txBody>
-                  <a:tcPr marL="45720" marR="45720" marT="45720" marB="45720" anchor="t" anchorCtr="0" horzOverflow="overflow">
-                    <a:lnL w="6350">
-                      <a:solidFill>
-                        <a:srgbClr val="2A2A4A"/>
-                      </a:solidFill>
-                    </a:lnL>
-                    <a:lnR w="6350">
-                      <a:solidFill>
-                        <a:srgbClr val="2A2A4A"/>
-                      </a:solidFill>
-                    </a:lnR>
-                    <a:lnT w="6350">
-                      <a:solidFill>
-                        <a:srgbClr val="2A2A4A"/>
-                      </a:solidFill>
-                    </a:lnT>
-                    <a:lnB w="6350">
-                      <a:solidFill>
-                        <a:srgbClr val="2A2A4A"/>
-                      </a:solidFill>
-                    </a:lnB>
-                    <a:solidFill>
-                      <a:srgbClr val="16213E"/>
-                    </a:solidFill>
-                  </a:tcPr>
-                </a:tc>
-                <a:tc>
-                  <a:txBody>
-                    <a:bodyPr/>
-                    <a:lstStyle/>
-                    <a:p>
-                      <a:pPr algn="ctr">
-                        <a:defRPr sz="1800"/>
-                      </a:pPr>
-                      <a:r>
-                        <a:rPr b="1" sz="1200">
-                          <a:solidFill>
-                            <a:srgbClr val="FFFFFF"/>
-                          </a:solidFill>
-                        </a:rPr>
-                        <a:t>Bal. Acc</a:t>
-                      </a:r>
-                    </a:p>
-                  </a:txBody>
-                  <a:tcPr marL="45720" marR="45720" marT="45720" marB="45720" anchor="t" anchorCtr="0" horzOverflow="overflow">
-                    <a:lnL w="6350">
-                      <a:solidFill>
-                        <a:srgbClr val="2A2A4A"/>
-                      </a:solidFill>
-                    </a:lnL>
-                    <a:lnR w="6350">
-                      <a:solidFill>
-                        <a:srgbClr val="2A2A4A"/>
-                      </a:solidFill>
-                    </a:lnR>
-                    <a:lnT w="6350">
-                      <a:solidFill>
-                        <a:srgbClr val="2A2A4A"/>
-                      </a:solidFill>
-                    </a:lnT>
-                    <a:lnB w="6350">
-                      <a:solidFill>
-                        <a:srgbClr val="2A2A4A"/>
-                      </a:solidFill>
-                    </a:lnB>
-                    <a:solidFill>
-                      <a:srgbClr val="16213E"/>
-                    </a:solidFill>
-                  </a:tcPr>
-                </a:tc>
-              </a:tr>
-              <a:tr h="320952">
-                <a:tc>
-                  <a:txBody>
-                    <a:bodyPr/>
-                    <a:lstStyle/>
-                    <a:p>
-                      <a:pPr algn="l">
-                        <a:defRPr sz="1800"/>
-                      </a:pPr>
-                      <a:r>
-                        <a:rPr sz="1200">
-                          <a:solidFill>
-                            <a:srgbClr val="FFFFFF"/>
-                          </a:solidFill>
-                        </a:rPr>
-                        <a:t>LogReg (tabell)</a:t>
-                      </a:r>
-                    </a:p>
-                  </a:txBody>
-                  <a:tcPr marL="45720" marR="45720" marT="45720" marB="45720" anchor="t" anchorCtr="0" horzOverflow="overflow">
-                    <a:lnL w="6350">
-                      <a:solidFill>
-                        <a:srgbClr val="2A2A4A"/>
-                      </a:solidFill>
-                    </a:lnL>
-                    <a:lnR w="6350">
-                      <a:solidFill>
-                        <a:srgbClr val="2A2A4A"/>
-                      </a:solidFill>
-                    </a:lnR>
-                    <a:lnT w="6350">
-                      <a:solidFill>
-                        <a:srgbClr val="2A2A4A"/>
-                      </a:solidFill>
-                    </a:lnT>
-                    <a:lnB w="6350">
-                      <a:solidFill>
-                        <a:srgbClr val="2A2A4A"/>
-                      </a:solidFill>
-                    </a:lnB>
-                    <a:solidFill>
-                      <a:srgbClr val="1A1A2E"/>
-                    </a:solidFill>
-                  </a:tcPr>
-                </a:tc>
-                <a:tc>
-                  <a:txBody>
-                    <a:bodyPr/>
-                    <a:lstStyle/>
-                    <a:p>
-                      <a:pPr algn="ctr">
-                        <a:defRPr sz="1800"/>
-                      </a:pPr>
-                      <a:r>
-                        <a:rPr b="1" sz="1200">
-                          <a:solidFill>
-                            <a:srgbClr val="54A24B"/>
-                          </a:solidFill>
-                        </a:rPr>
-                        <a:t>48.8%</a:t>
-                      </a:r>
-                    </a:p>
-                  </a:txBody>
-                  <a:tcPr marL="45720" marR="45720" marT="45720" marB="45720" anchor="t" anchorCtr="0" horzOverflow="overflow">
-                    <a:lnL w="6350">
-                      <a:solidFill>
-                        <a:srgbClr val="2A2A4A"/>
-                      </a:solidFill>
-                    </a:lnL>
-                    <a:lnR w="6350">
-                      <a:solidFill>
-                        <a:srgbClr val="2A2A4A"/>
-                      </a:solidFill>
-                    </a:lnR>
-                    <a:lnT w="6350">
-                      <a:solidFill>
-                        <a:srgbClr val="2A2A4A"/>
-                      </a:solidFill>
-                    </a:lnT>
-                    <a:lnB w="6350">
-                      <a:solidFill>
-                        <a:srgbClr val="2A2A4A"/>
-                      </a:solidFill>
-                    </a:lnB>
-                    <a:solidFill>
-                      <a:srgbClr val="1A1A2E"/>
-                    </a:solidFill>
-                  </a:tcPr>
-                </a:tc>
-                <a:tc>
-                  <a:txBody>
-                    <a:bodyPr/>
-                    <a:lstStyle/>
-                    <a:p>
-                      <a:pPr algn="ctr">
-                        <a:defRPr sz="1800"/>
-                      </a:pPr>
-                      <a:r>
-                        <a:rPr b="1" sz="1200">
-                          <a:solidFill>
-                            <a:srgbClr val="54A24B"/>
-                          </a:solidFill>
-                        </a:rPr>
-                        <a:t>40.5%</a:t>
-                      </a:r>
-                    </a:p>
-                  </a:txBody>
-                  <a:tcPr marL="45720" marR="45720" marT="45720" marB="45720" anchor="t" anchorCtr="0" horzOverflow="overflow">
-                    <a:lnL w="6350">
-                      <a:solidFill>
-                        <a:srgbClr val="2A2A4A"/>
-                      </a:solidFill>
-                    </a:lnL>
-                    <a:lnR w="6350">
-                      <a:solidFill>
-                        <a:srgbClr val="2A2A4A"/>
-                      </a:solidFill>
-                    </a:lnR>
-                    <a:lnT w="6350">
-                      <a:solidFill>
-                        <a:srgbClr val="2A2A4A"/>
-                      </a:solidFill>
-                    </a:lnT>
-                    <a:lnB w="6350">
-                      <a:solidFill>
-                        <a:srgbClr val="2A2A4A"/>
-                      </a:solidFill>
-                    </a:lnB>
-                    <a:solidFill>
-                      <a:srgbClr val="1A1A2E"/>
-                    </a:solidFill>
-                  </a:tcPr>
-                </a:tc>
-              </a:tr>
-              <a:tr h="320952">
-                <a:tc>
-                  <a:txBody>
-                    <a:bodyPr/>
-                    <a:lstStyle/>
-                    <a:p>
-                      <a:pPr algn="l">
-                        <a:defRPr sz="1800"/>
-                      </a:pPr>
-                      <a:r>
-                        <a:rPr sz="1200">
-                          <a:solidFill>
-                            <a:srgbClr val="FFFFFF"/>
-                          </a:solidFill>
-                        </a:rPr>
-                        <a:t>LogReg (tabell + bild)</a:t>
-                      </a:r>
-                    </a:p>
-                  </a:txBody>
-                  <a:tcPr marL="45720" marR="45720" marT="45720" marB="45720" anchor="t" anchorCtr="0" horzOverflow="overflow">
-                    <a:lnL w="6350">
-                      <a:solidFill>
-                        <a:srgbClr val="2A2A4A"/>
-                      </a:solidFill>
-                    </a:lnL>
-                    <a:lnR w="6350">
-                      <a:solidFill>
-                        <a:srgbClr val="2A2A4A"/>
-                      </a:solidFill>
-                    </a:lnR>
-                    <a:lnT w="6350">
-                      <a:solidFill>
-                        <a:srgbClr val="2A2A4A"/>
-                      </a:solidFill>
-                    </a:lnT>
-                    <a:lnB w="6350">
-                      <a:solidFill>
-                        <a:srgbClr val="2A2A4A"/>
-                      </a:solidFill>
-                    </a:lnB>
-                    <a:solidFill>
-                      <a:srgbClr val="1A1A2E"/>
-                    </a:solidFill>
-                  </a:tcPr>
-                </a:tc>
-                <a:tc>
-                  <a:txBody>
-                    <a:bodyPr/>
-                    <a:lstStyle/>
-                    <a:p>
-                      <a:pPr algn="ctr">
-                        <a:defRPr sz="1800"/>
-                      </a:pPr>
-                      <a:r>
-                        <a:rPr sz="1200">
-                          <a:solidFill>
-                            <a:srgbClr val="F58518"/>
-                          </a:solidFill>
-                        </a:rPr>
-                        <a:t>35.6%</a:t>
-                      </a:r>
-                    </a:p>
-                  </a:txBody>
-                  <a:tcPr marL="45720" marR="45720" marT="45720" marB="45720" anchor="t" anchorCtr="0" horzOverflow="overflow">
-                    <a:lnL w="6350">
-                      <a:solidFill>
-                        <a:srgbClr val="2A2A4A"/>
-                      </a:solidFill>
-                    </a:lnL>
-                    <a:lnR w="6350">
-                      <a:solidFill>
-                        <a:srgbClr val="2A2A4A"/>
-                      </a:solidFill>
-                    </a:lnR>
-                    <a:lnT w="6350">
-                      <a:solidFill>
-                        <a:srgbClr val="2A2A4A"/>
-                      </a:solidFill>
-                    </a:lnT>
-                    <a:lnB w="6350">
-                      <a:solidFill>
-                        <a:srgbClr val="2A2A4A"/>
-                      </a:solidFill>
-                    </a:lnB>
-                    <a:solidFill>
-                      <a:srgbClr val="1A1A2E"/>
-                    </a:solidFill>
-                  </a:tcPr>
-                </a:tc>
-                <a:tc>
-                  <a:txBody>
-                    <a:bodyPr/>
-                    <a:lstStyle/>
-                    <a:p>
-                      <a:pPr algn="ctr">
-                        <a:defRPr sz="1800"/>
-                      </a:pPr>
-                      <a:r>
-                        <a:rPr sz="1200">
-                          <a:solidFill>
-                            <a:srgbClr val="F58518"/>
-                          </a:solidFill>
-                        </a:rPr>
-                        <a:t>27.0%</a:t>
-                      </a:r>
-                    </a:p>
-                  </a:txBody>
-                  <a:tcPr marL="45720" marR="45720" marT="45720" marB="45720" anchor="t" anchorCtr="0" horzOverflow="overflow">
-                    <a:lnL w="6350">
-                      <a:solidFill>
-                        <a:srgbClr val="2A2A4A"/>
-                      </a:solidFill>
-                    </a:lnL>
-                    <a:lnR w="6350">
-                      <a:solidFill>
-                        <a:srgbClr val="2A2A4A"/>
-                      </a:solidFill>
-                    </a:lnR>
-                    <a:lnT w="6350">
-                      <a:solidFill>
-                        <a:srgbClr val="2A2A4A"/>
-                      </a:solidFill>
-                    </a:lnT>
-                    <a:lnB w="6350">
-                      <a:solidFill>
-                        <a:srgbClr val="2A2A4A"/>
-                      </a:solidFill>
-                    </a:lnB>
-                    <a:solidFill>
-                      <a:srgbClr val="1A1A2E"/>
-                    </a:solidFill>
-                  </a:tcPr>
-                </a:tc>
-              </a:tr>
-              <a:tr h="320952">
-                <a:tc>
-                  <a:txBody>
-                    <a:bodyPr/>
-                    <a:lstStyle/>
-                    <a:p>
-                      <a:pPr algn="l">
-                        <a:defRPr sz="1800"/>
-                      </a:pPr>
-                      <a:r>
-                        <a:rPr sz="1200">
-                          <a:solidFill>
-                            <a:srgbClr val="FFFFFF"/>
-                          </a:solidFill>
-                        </a:rPr>
-                        <a:t>LogReg (enbart bild)</a:t>
-                      </a:r>
-                    </a:p>
-                  </a:txBody>
-                  <a:tcPr marL="45720" marR="45720" marT="45720" marB="45720" anchor="t" anchorCtr="0" horzOverflow="overflow">
-                    <a:lnL w="6350">
-                      <a:solidFill>
-                        <a:srgbClr val="2A2A4A"/>
-                      </a:solidFill>
-                    </a:lnL>
-                    <a:lnR w="6350">
-                      <a:solidFill>
-                        <a:srgbClr val="2A2A4A"/>
-                      </a:solidFill>
-                    </a:lnR>
-                    <a:lnT w="6350">
-                      <a:solidFill>
-                        <a:srgbClr val="2A2A4A"/>
-                      </a:solidFill>
-                    </a:lnT>
-                    <a:lnB w="6350">
-                      <a:solidFill>
-                        <a:srgbClr val="2A2A4A"/>
-                      </a:solidFill>
-                    </a:lnB>
-                    <a:solidFill>
-                      <a:srgbClr val="1A1A2E"/>
-                    </a:solidFill>
-                  </a:tcPr>
-                </a:tc>
-                <a:tc>
-                  <a:txBody>
-                    <a:bodyPr/>
-                    <a:lstStyle/>
-                    <a:p>
-                      <a:pPr algn="ctr">
-                        <a:defRPr sz="1800"/>
-                      </a:pPr>
-                      <a:r>
-                        <a:rPr sz="1200">
-                          <a:solidFill>
-                            <a:srgbClr val="E45756"/>
-                          </a:solidFill>
-                        </a:rPr>
-                        <a:t>14.6%</a:t>
-                      </a:r>
-                    </a:p>
-                  </a:txBody>
-                  <a:tcPr marL="45720" marR="45720" marT="45720" marB="45720" anchor="t" anchorCtr="0" horzOverflow="overflow">
-                    <a:lnL w="6350">
-                      <a:solidFill>
-                        <a:srgbClr val="2A2A4A"/>
-                      </a:solidFill>
-                    </a:lnL>
-                    <a:lnR w="6350">
-                      <a:solidFill>
-                        <a:srgbClr val="2A2A4A"/>
-                      </a:solidFill>
-                    </a:lnR>
-                    <a:lnT w="6350">
-                      <a:solidFill>
-                        <a:srgbClr val="2A2A4A"/>
-                      </a:solidFill>
-                    </a:lnT>
-                    <a:lnB w="6350">
-                      <a:solidFill>
-                        <a:srgbClr val="2A2A4A"/>
-                      </a:solidFill>
-                    </a:lnB>
-                    <a:solidFill>
-                      <a:srgbClr val="1A1A2E"/>
-                    </a:solidFill>
-                  </a:tcPr>
-                </a:tc>
-                <a:tc>
-                  <a:txBody>
-                    <a:bodyPr/>
-                    <a:lstStyle/>
-                    <a:p>
-                      <a:pPr algn="ctr">
-                        <a:defRPr sz="1800"/>
-                      </a:pPr>
-                      <a:r>
-                        <a:rPr sz="1200">
-                          <a:solidFill>
-                            <a:srgbClr val="E45756"/>
-                          </a:solidFill>
-                        </a:rPr>
-                        <a:t>9.1%</a:t>
-                      </a:r>
-                    </a:p>
-                  </a:txBody>
-                  <a:tcPr marL="45720" marR="45720" marT="45720" marB="45720" anchor="t" anchorCtr="0" horzOverflow="overflow">
-                    <a:lnL w="6350">
-                      <a:solidFill>
-                        <a:srgbClr val="2A2A4A"/>
-                      </a:solidFill>
-                    </a:lnL>
-                    <a:lnR w="6350">
-                      <a:solidFill>
-                        <a:srgbClr val="2A2A4A"/>
-                      </a:solidFill>
-                    </a:lnR>
-                    <a:lnT w="6350">
-                      <a:solidFill>
-                        <a:srgbClr val="2A2A4A"/>
-                      </a:solidFill>
-                    </a:lnT>
-                    <a:lnB w="6350">
-                      <a:solidFill>
-                        <a:srgbClr val="2A2A4A"/>
-                      </a:solidFill>
-                    </a:lnB>
-                    <a:solidFill>
-                      <a:srgbClr val="1A1A2E"/>
-                    </a:solidFill>
-                  </a:tcPr>
-                </a:tc>
-              </a:tr>
-              <a:tr h="254654">
-                <a:tc>
-                  <a:txBody>
-                    <a:bodyPr/>
-                    <a:lstStyle/>
-                    <a:p>
-                      <a:pPr indent="457200"/>
-                    </a:p>
-                  </a:txBody>
-                  <a:tcPr marL="45720" marR="45720" marT="45720" marB="45720" anchor="t" anchorCtr="0" horzOverflow="overflow">
-                    <a:lnL w="6350">
-                      <a:solidFill>
-                        <a:srgbClr val="2A2A4A"/>
-                      </a:solidFill>
-                    </a:lnL>
-                    <a:lnR w="6350">
-                      <a:solidFill>
-                        <a:srgbClr val="2A2A4A"/>
-                      </a:solidFill>
-                    </a:lnR>
-                    <a:lnT w="6350">
-                      <a:solidFill>
-                        <a:srgbClr val="2A2A4A"/>
-                      </a:solidFill>
-                    </a:lnT>
-                    <a:lnB w="6350">
-                      <a:solidFill>
-                        <a:srgbClr val="2A2A4A"/>
-                      </a:solidFill>
-                    </a:lnB>
-                    <a:solidFill>
-                      <a:srgbClr val="1A1A2E"/>
-                    </a:solidFill>
-                  </a:tcPr>
-                </a:tc>
-                <a:tc>
-                  <a:txBody>
-                    <a:bodyPr/>
-                    <a:lstStyle/>
-                    <a:p>
-                      <a:pPr indent="457200"/>
-                    </a:p>
-                  </a:txBody>
-                  <a:tcPr marL="45720" marR="45720" marT="45720" marB="45720" anchor="t" anchorCtr="0" horzOverflow="overflow">
-                    <a:lnL w="6350">
-                      <a:solidFill>
-                        <a:srgbClr val="2A2A4A"/>
-                      </a:solidFill>
-                    </a:lnL>
-                    <a:lnR w="6350">
-                      <a:solidFill>
-                        <a:srgbClr val="2A2A4A"/>
-                      </a:solidFill>
-                    </a:lnR>
-                    <a:lnT w="6350">
-                      <a:solidFill>
-                        <a:srgbClr val="2A2A4A"/>
-                      </a:solidFill>
-                    </a:lnT>
-                    <a:lnB w="6350">
-                      <a:solidFill>
-                        <a:srgbClr val="2A2A4A"/>
-                      </a:solidFill>
-                    </a:lnB>
-                    <a:solidFill>
-                      <a:srgbClr val="1A1A2E"/>
-                    </a:solidFill>
-                  </a:tcPr>
-                </a:tc>
-                <a:tc>
-                  <a:txBody>
-                    <a:bodyPr/>
-                    <a:lstStyle/>
-                    <a:p>
-                      <a:pPr indent="457200"/>
-                    </a:p>
-                  </a:txBody>
-                  <a:tcPr marL="45720" marR="45720" marT="45720" marB="45720" anchor="t" anchorCtr="0" horzOverflow="overflow">
-                    <a:lnL w="6350">
-                      <a:solidFill>
-                        <a:srgbClr val="2A2A4A"/>
-                      </a:solidFill>
-                    </a:lnL>
-                    <a:lnR w="6350">
-                      <a:solidFill>
-                        <a:srgbClr val="2A2A4A"/>
-                      </a:solidFill>
-                    </a:lnR>
-                    <a:lnT w="6350">
-                      <a:solidFill>
-                        <a:srgbClr val="2A2A4A"/>
-                      </a:solidFill>
-                    </a:lnT>
-                    <a:lnB w="6350">
-                      <a:solidFill>
-                        <a:srgbClr val="2A2A4A"/>
-                      </a:solidFill>
-                    </a:lnB>
-                    <a:solidFill>
-                      <a:srgbClr val="1A1A2E"/>
-                    </a:solidFill>
-                  </a:tcPr>
-                </a:tc>
-              </a:tr>
-              <a:tr h="320952">
-                <a:tc>
-                  <a:txBody>
-                    <a:bodyPr/>
-                    <a:lstStyle/>
-                    <a:p>
-                      <a:pPr algn="l">
-                        <a:defRPr sz="1800"/>
-                      </a:pPr>
-                      <a:r>
-                        <a:rPr sz="1200">
-                          <a:solidFill>
-                            <a:srgbClr val="FFFFFF"/>
-                          </a:solidFill>
-                        </a:rPr>
-                        <a:t>XGBoost (tabell)</a:t>
-                      </a:r>
-                    </a:p>
-                  </a:txBody>
-                  <a:tcPr marL="45720" marR="45720" marT="45720" marB="45720" anchor="t" anchorCtr="0" horzOverflow="overflow">
-                    <a:lnL w="6350">
-                      <a:solidFill>
-                        <a:srgbClr val="2A2A4A"/>
-                      </a:solidFill>
-                    </a:lnL>
-                    <a:lnR w="6350">
-                      <a:solidFill>
-                        <a:srgbClr val="2A2A4A"/>
-                      </a:solidFill>
-                    </a:lnR>
-                    <a:lnT w="6350">
-                      <a:solidFill>
-                        <a:srgbClr val="2A2A4A"/>
-                      </a:solidFill>
-                    </a:lnT>
-                    <a:lnB w="6350">
-                      <a:solidFill>
-                        <a:srgbClr val="2A2A4A"/>
-                      </a:solidFill>
-                    </a:lnB>
-                    <a:solidFill>
-                      <a:srgbClr val="1A1A2E"/>
-                    </a:solidFill>
-                  </a:tcPr>
-                </a:tc>
-                <a:tc>
-                  <a:txBody>
-                    <a:bodyPr/>
-                    <a:lstStyle/>
-                    <a:p>
-                      <a:pPr algn="ctr">
-                        <a:defRPr sz="1800"/>
-                      </a:pPr>
-                      <a:r>
-                        <a:rPr b="1" sz="1200">
-                          <a:solidFill>
-                            <a:srgbClr val="54A24B"/>
-                          </a:solidFill>
-                        </a:rPr>
-                        <a:t>46.3%</a:t>
-                      </a:r>
-                    </a:p>
-                  </a:txBody>
-                  <a:tcPr marL="45720" marR="45720" marT="45720" marB="45720" anchor="t" anchorCtr="0" horzOverflow="overflow">
-                    <a:lnL w="6350">
-                      <a:solidFill>
-                        <a:srgbClr val="2A2A4A"/>
-                      </a:solidFill>
-                    </a:lnL>
-                    <a:lnR w="6350">
-                      <a:solidFill>
-                        <a:srgbClr val="2A2A4A"/>
-                      </a:solidFill>
-                    </a:lnR>
-                    <a:lnT w="6350">
-                      <a:solidFill>
-                        <a:srgbClr val="2A2A4A"/>
-                      </a:solidFill>
-                    </a:lnT>
-                    <a:lnB w="6350">
-                      <a:solidFill>
-                        <a:srgbClr val="2A2A4A"/>
-                      </a:solidFill>
-                    </a:lnB>
-                    <a:solidFill>
-                      <a:srgbClr val="1A1A2E"/>
-                    </a:solidFill>
-                  </a:tcPr>
-                </a:tc>
-                <a:tc>
-                  <a:txBody>
-                    <a:bodyPr/>
-                    <a:lstStyle/>
-                    <a:p>
-                      <a:pPr algn="ctr">
-                        <a:defRPr sz="1800"/>
-                      </a:pPr>
-                      <a:r>
-                        <a:rPr b="1" sz="1200">
-                          <a:solidFill>
-                            <a:srgbClr val="54A24B"/>
-                          </a:solidFill>
-                        </a:rPr>
-                        <a:t>38.7%</a:t>
-                      </a:r>
-                    </a:p>
-                  </a:txBody>
-                  <a:tcPr marL="45720" marR="45720" marT="45720" marB="45720" anchor="t" anchorCtr="0" horzOverflow="overflow">
-                    <a:lnL w="6350">
-                      <a:solidFill>
-                        <a:srgbClr val="2A2A4A"/>
-                      </a:solidFill>
-                    </a:lnL>
-                    <a:lnR w="6350">
-                      <a:solidFill>
-                        <a:srgbClr val="2A2A4A"/>
-                      </a:solidFill>
-                    </a:lnR>
-                    <a:lnT w="6350">
-                      <a:solidFill>
-                        <a:srgbClr val="2A2A4A"/>
-                      </a:solidFill>
-                    </a:lnT>
-                    <a:lnB w="6350">
-                      <a:solidFill>
-                        <a:srgbClr val="2A2A4A"/>
-                      </a:solidFill>
-                    </a:lnB>
-                    <a:solidFill>
-                      <a:srgbClr val="1A1A2E"/>
-                    </a:solidFill>
-                  </a:tcPr>
-                </a:tc>
-              </a:tr>
-              <a:tr h="320952">
-                <a:tc>
-                  <a:txBody>
-                    <a:bodyPr/>
-                    <a:lstStyle/>
-                    <a:p>
-                      <a:pPr algn="l">
-                        <a:defRPr sz="1800"/>
-                      </a:pPr>
-                      <a:r>
-                        <a:rPr sz="1200">
-                          <a:solidFill>
-                            <a:srgbClr val="FFFFFF"/>
-                          </a:solidFill>
-                        </a:rPr>
-                        <a:t>XGBoost (tabell + bild)</a:t>
-                      </a:r>
-                    </a:p>
-                  </a:txBody>
-                  <a:tcPr marL="45720" marR="45720" marT="45720" marB="45720" anchor="t" anchorCtr="0" horzOverflow="overflow">
-                    <a:lnL w="6350">
-                      <a:solidFill>
-                        <a:srgbClr val="2A2A4A"/>
-                      </a:solidFill>
-                    </a:lnL>
-                    <a:lnR w="6350">
-                      <a:solidFill>
-                        <a:srgbClr val="2A2A4A"/>
-                      </a:solidFill>
-                    </a:lnR>
-                    <a:lnT w="6350">
-                      <a:solidFill>
-                        <a:srgbClr val="2A2A4A"/>
-                      </a:solidFill>
-                    </a:lnT>
-                    <a:lnB w="6350">
-                      <a:solidFill>
-                        <a:srgbClr val="2A2A4A"/>
-                      </a:solidFill>
-                    </a:lnB>
-                    <a:solidFill>
-                      <a:srgbClr val="1A1A2E"/>
-                    </a:solidFill>
-                  </a:tcPr>
-                </a:tc>
-                <a:tc>
-                  <a:txBody>
-                    <a:bodyPr/>
-                    <a:lstStyle/>
-                    <a:p>
-                      <a:pPr algn="ctr">
-                        <a:defRPr sz="1800"/>
-                      </a:pPr>
-                      <a:r>
-                        <a:rPr sz="1200">
-                          <a:solidFill>
-                            <a:srgbClr val="F58518"/>
-                          </a:solidFill>
-                        </a:rPr>
-                        <a:t>35.1%</a:t>
-                      </a:r>
-                    </a:p>
-                  </a:txBody>
-                  <a:tcPr marL="45720" marR="45720" marT="45720" marB="45720" anchor="t" anchorCtr="0" horzOverflow="overflow">
-                    <a:lnL w="6350">
-                      <a:solidFill>
-                        <a:srgbClr val="2A2A4A"/>
-                      </a:solidFill>
-                    </a:lnL>
-                    <a:lnR w="6350">
-                      <a:solidFill>
-                        <a:srgbClr val="2A2A4A"/>
-                      </a:solidFill>
-                    </a:lnR>
-                    <a:lnT w="6350">
-                      <a:solidFill>
-                        <a:srgbClr val="2A2A4A"/>
-                      </a:solidFill>
-                    </a:lnT>
-                    <a:lnB w="6350">
-                      <a:solidFill>
-                        <a:srgbClr val="2A2A4A"/>
-                      </a:solidFill>
-                    </a:lnB>
-                    <a:solidFill>
-                      <a:srgbClr val="1A1A2E"/>
-                    </a:solidFill>
-                  </a:tcPr>
-                </a:tc>
-                <a:tc>
-                  <a:txBody>
-                    <a:bodyPr/>
-                    <a:lstStyle/>
-                    <a:p>
-                      <a:pPr algn="ctr">
-                        <a:defRPr sz="1800"/>
-                      </a:pPr>
-                      <a:r>
-                        <a:rPr sz="1200">
-                          <a:solidFill>
-                            <a:srgbClr val="F58518"/>
-                          </a:solidFill>
-                        </a:rPr>
-                        <a:t>21.7%</a:t>
-                      </a:r>
-                    </a:p>
-                  </a:txBody>
-                  <a:tcPr marL="45720" marR="45720" marT="45720" marB="45720" anchor="t" anchorCtr="0" horzOverflow="overflow">
-                    <a:lnL w="6350">
-                      <a:solidFill>
-                        <a:srgbClr val="2A2A4A"/>
-                      </a:solidFill>
-                    </a:lnL>
-                    <a:lnR w="6350">
-                      <a:solidFill>
-                        <a:srgbClr val="2A2A4A"/>
-                      </a:solidFill>
-                    </a:lnR>
-                    <a:lnT w="6350">
-                      <a:solidFill>
-                        <a:srgbClr val="2A2A4A"/>
-                      </a:solidFill>
-                    </a:lnT>
-                    <a:lnB w="6350">
-                      <a:solidFill>
-                        <a:srgbClr val="2A2A4A"/>
-                      </a:solidFill>
-                    </a:lnB>
-                    <a:solidFill>
-                      <a:srgbClr val="1A1A2E"/>
-                    </a:solidFill>
-                  </a:tcPr>
-                </a:tc>
-              </a:tr>
-              <a:tr h="320952">
-                <a:tc>
-                  <a:txBody>
-                    <a:bodyPr/>
-                    <a:lstStyle/>
-                    <a:p>
-                      <a:pPr algn="l">
-                        <a:defRPr sz="1800"/>
-                      </a:pPr>
-                      <a:r>
-                        <a:rPr sz="1200">
-                          <a:solidFill>
-                            <a:srgbClr val="FFFFFF"/>
-                          </a:solidFill>
-                        </a:rPr>
-                        <a:t>XGBoost (enbart bild)</a:t>
-                      </a:r>
-                    </a:p>
-                  </a:txBody>
-                  <a:tcPr marL="45720" marR="45720" marT="45720" marB="45720" anchor="t" anchorCtr="0" horzOverflow="overflow">
-                    <a:lnL w="6350">
-                      <a:solidFill>
-                        <a:srgbClr val="2A2A4A"/>
-                      </a:solidFill>
-                    </a:lnL>
-                    <a:lnR w="6350">
-                      <a:solidFill>
-                        <a:srgbClr val="2A2A4A"/>
-                      </a:solidFill>
-                    </a:lnR>
-                    <a:lnT w="6350">
-                      <a:solidFill>
-                        <a:srgbClr val="2A2A4A"/>
-                      </a:solidFill>
-                    </a:lnT>
-                    <a:lnB w="6350">
-                      <a:solidFill>
-                        <a:srgbClr val="2A2A4A"/>
-                      </a:solidFill>
-                    </a:lnB>
-                    <a:solidFill>
-                      <a:srgbClr val="1A1A2E"/>
-                    </a:solidFill>
-                  </a:tcPr>
-                </a:tc>
-                <a:tc>
-                  <a:txBody>
-                    <a:bodyPr/>
-                    <a:lstStyle/>
-                    <a:p>
-                      <a:pPr algn="ctr">
-                        <a:defRPr sz="1800"/>
-                      </a:pPr>
-                      <a:r>
-                        <a:rPr sz="1200">
-                          <a:solidFill>
-                            <a:srgbClr val="E45756"/>
-                          </a:solidFill>
-                        </a:rPr>
-                        <a:t>17.1%</a:t>
-                      </a:r>
-                    </a:p>
-                  </a:txBody>
-                  <a:tcPr marL="45720" marR="45720" marT="45720" marB="45720" anchor="t" anchorCtr="0" horzOverflow="overflow">
-                    <a:lnL w="6350">
-                      <a:solidFill>
-                        <a:srgbClr val="2A2A4A"/>
-                      </a:solidFill>
-                    </a:lnL>
-                    <a:lnR w="6350">
-                      <a:solidFill>
-                        <a:srgbClr val="2A2A4A"/>
-                      </a:solidFill>
-                    </a:lnR>
-                    <a:lnT w="6350">
-                      <a:solidFill>
-                        <a:srgbClr val="2A2A4A"/>
-                      </a:solidFill>
-                    </a:lnT>
-                    <a:lnB w="6350">
-                      <a:solidFill>
-                        <a:srgbClr val="2A2A4A"/>
-                      </a:solidFill>
-                    </a:lnB>
-                    <a:solidFill>
-                      <a:srgbClr val="1A1A2E"/>
-                    </a:solidFill>
-                  </a:tcPr>
-                </a:tc>
-                <a:tc>
-                  <a:txBody>
-                    <a:bodyPr/>
-                    <a:lstStyle/>
-                    <a:p>
-                      <a:pPr algn="ctr">
-                        <a:defRPr sz="1800"/>
-                      </a:pPr>
-                      <a:r>
-                        <a:rPr sz="1200">
-                          <a:solidFill>
-                            <a:srgbClr val="E45756"/>
-                          </a:solidFill>
-                        </a:rPr>
-                        <a:t>10.0%</a:t>
-                      </a:r>
-                    </a:p>
-                  </a:txBody>
-                  <a:tcPr marL="45720" marR="45720" marT="45720" marB="45720" anchor="t" anchorCtr="0" horzOverflow="overflow">
-                    <a:lnL w="6350">
-                      <a:solidFill>
-                        <a:srgbClr val="2A2A4A"/>
-                      </a:solidFill>
-                    </a:lnL>
-                    <a:lnR w="6350">
-                      <a:solidFill>
-                        <a:srgbClr val="2A2A4A"/>
-                      </a:solidFill>
-                    </a:lnR>
-                    <a:lnT w="6350">
-                      <a:solidFill>
-                        <a:srgbClr val="2A2A4A"/>
-                      </a:solidFill>
-                    </a:lnT>
-                    <a:lnB w="6350">
-                      <a:solidFill>
-                        <a:srgbClr val="2A2A4A"/>
-                      </a:solidFill>
-                    </a:lnB>
-                    <a:solidFill>
-                      <a:srgbClr val="1A1A2E"/>
-                    </a:solidFill>
-                  </a:tcPr>
-                </a:tc>
-              </a:tr>
-              <a:tr h="320952">
-                <a:tc>
-                  <a:txBody>
-                    <a:bodyPr/>
-                    <a:lstStyle/>
-                    <a:p>
-                      <a:pPr algn="l">
-                        <a:defRPr>
-                          <a:solidFill>
-                            <a:srgbClr val="FFFFFF"/>
-                          </a:solidFill>
-                        </a:defRPr>
-                      </a:pPr>
-                    </a:p>
-                  </a:txBody>
-                  <a:tcPr marL="45720" marR="45720" marT="45720" marB="45720" anchor="t" anchorCtr="0" horzOverflow="overflow">
-                    <a:lnL w="6350">
-                      <a:solidFill>
-                        <a:srgbClr val="2A2A4A"/>
-                      </a:solidFill>
-                    </a:lnL>
-                    <a:lnR w="6350">
-                      <a:solidFill>
-                        <a:srgbClr val="2A2A4A"/>
-                      </a:solidFill>
-                    </a:lnR>
-                    <a:lnT w="6350">
-                      <a:solidFill>
-                        <a:srgbClr val="2A2A4A"/>
-                      </a:solidFill>
-                    </a:lnT>
-                    <a:lnB w="6350">
-                      <a:solidFill>
-                        <a:srgbClr val="2A2A4A"/>
-                      </a:solidFill>
-                    </a:lnB>
-                    <a:solidFill>
-                      <a:srgbClr val="1A1A2E"/>
-                    </a:solidFill>
-                  </a:tcPr>
-                </a:tc>
-                <a:tc>
-                  <a:txBody>
-                    <a:bodyPr/>
-                    <a:lstStyle/>
-                    <a:p>
-                      <a:pPr algn="ctr">
-                        <a:defRPr>
-                          <a:solidFill>
-                            <a:srgbClr val="E45756"/>
-                          </a:solidFill>
-                        </a:defRPr>
-                      </a:pPr>
-                    </a:p>
-                  </a:txBody>
-                  <a:tcPr marL="45720" marR="45720" marT="45720" marB="45720" anchor="t" anchorCtr="0" horzOverflow="overflow">
-                    <a:lnL w="6350">
-                      <a:solidFill>
-                        <a:srgbClr val="2A2A4A"/>
-                      </a:solidFill>
-                    </a:lnL>
-                    <a:lnR w="6350">
-                      <a:solidFill>
-                        <a:srgbClr val="2A2A4A"/>
-                      </a:solidFill>
-                    </a:lnR>
-                    <a:lnT w="6350">
-                      <a:solidFill>
-                        <a:srgbClr val="2A2A4A"/>
-                      </a:solidFill>
-                    </a:lnT>
-                    <a:lnB w="6350">
-                      <a:solidFill>
-                        <a:srgbClr val="2A2A4A"/>
-                      </a:solidFill>
-                    </a:lnB>
-                    <a:solidFill>
-                      <a:srgbClr val="1A1A2E"/>
-                    </a:solidFill>
-                  </a:tcPr>
-                </a:tc>
-                <a:tc>
-                  <a:txBody>
-                    <a:bodyPr/>
-                    <a:lstStyle/>
-                    <a:p>
-                      <a:pPr algn="ctr">
-                        <a:defRPr>
-                          <a:solidFill>
-                            <a:srgbClr val="E45756"/>
-                          </a:solidFill>
-                        </a:defRPr>
-                      </a:pPr>
-                    </a:p>
-                  </a:txBody>
-                  <a:tcPr marL="45720" marR="45720" marT="45720" marB="45720" anchor="t" anchorCtr="0" horzOverflow="overflow">
-                    <a:lnL w="6350">
-                      <a:solidFill>
-                        <a:srgbClr val="2A2A4A"/>
-                      </a:solidFill>
-                    </a:lnL>
-                    <a:lnR w="6350">
-                      <a:solidFill>
-                        <a:srgbClr val="2A2A4A"/>
-                      </a:solidFill>
-                    </a:lnR>
-                    <a:lnT w="6350">
-                      <a:solidFill>
-                        <a:srgbClr val="2A2A4A"/>
-                      </a:solidFill>
-                    </a:lnT>
-                    <a:lnB w="6350">
-                      <a:solidFill>
-                        <a:srgbClr val="2A2A4A"/>
-                      </a:solidFill>
-                    </a:lnB>
-                    <a:solidFill>
-                      <a:srgbClr val="1A1A2E"/>
-                    </a:solidFill>
-                  </a:tcPr>
-                </a:tc>
-              </a:tr>
-              <a:tr h="320952">
-                <a:tc>
-                  <a:txBody>
-                    <a:bodyPr/>
-                    <a:lstStyle/>
-                    <a:p>
-                      <a:pPr algn="l">
-                        <a:defRPr sz="1800"/>
-                      </a:pPr>
-                      <a:r>
-                        <a:rPr sz="1200">
-                          <a:solidFill>
-                            <a:srgbClr val="FFFFFF"/>
-                          </a:solidFill>
-                        </a:rPr>
-                        <a:t>Random Forest (tabell)</a:t>
-                      </a:r>
-                    </a:p>
-                  </a:txBody>
-                  <a:tcPr marL="45720" marR="45720" marT="45720" marB="45720" anchor="t" anchorCtr="0" horzOverflow="overflow">
-                    <a:lnL w="6350">
-                      <a:solidFill>
-                        <a:srgbClr val="2A2A4A"/>
-                      </a:solidFill>
-                    </a:lnL>
-                    <a:lnR w="6350">
-                      <a:solidFill>
-                        <a:srgbClr val="2A2A4A"/>
-                      </a:solidFill>
-                    </a:lnR>
-                    <a:lnT w="6350">
-                      <a:solidFill>
-                        <a:srgbClr val="2A2A4A"/>
-                      </a:solidFill>
-                    </a:lnT>
-                    <a:lnB w="6350">
-                      <a:solidFill>
-                        <a:srgbClr val="2A2A4A"/>
-                      </a:solidFill>
-                    </a:lnB>
-                    <a:solidFill>
-                      <a:srgbClr val="1A1A2E"/>
-                    </a:solidFill>
-                  </a:tcPr>
-                </a:tc>
-                <a:tc>
-                  <a:txBody>
-                    <a:bodyPr/>
-                    <a:lstStyle/>
-                    <a:p>
-                      <a:pPr algn="ctr">
-                        <a:defRPr sz="1800"/>
-                      </a:pPr>
-                      <a:r>
-                        <a:rPr b="1" sz="1200">
-                          <a:solidFill>
-                            <a:srgbClr val="54A24B"/>
-                          </a:solidFill>
-                        </a:rPr>
-                        <a:t>48.8%</a:t>
-                      </a:r>
-                    </a:p>
-                  </a:txBody>
-                  <a:tcPr marL="45720" marR="45720" marT="45720" marB="45720" anchor="t" anchorCtr="0" horzOverflow="overflow">
-                    <a:lnL w="6350">
-                      <a:solidFill>
-                        <a:srgbClr val="2A2A4A"/>
-                      </a:solidFill>
-                    </a:lnL>
-                    <a:lnR w="6350">
-                      <a:solidFill>
-                        <a:srgbClr val="2A2A4A"/>
-                      </a:solidFill>
-                    </a:lnR>
-                    <a:lnT w="6350">
-                      <a:solidFill>
-                        <a:srgbClr val="2A2A4A"/>
-                      </a:solidFill>
-                    </a:lnT>
-                    <a:lnB w="6350">
-                      <a:solidFill>
-                        <a:srgbClr val="2A2A4A"/>
-                      </a:solidFill>
-                    </a:lnB>
-                    <a:solidFill>
-                      <a:srgbClr val="1A1A2E"/>
-                    </a:solidFill>
-                  </a:tcPr>
-                </a:tc>
-                <a:tc>
-                  <a:txBody>
-                    <a:bodyPr/>
-                    <a:lstStyle/>
-                    <a:p>
-                      <a:pPr algn="ctr">
-                        <a:defRPr sz="1800"/>
-                      </a:pPr>
-                      <a:r>
-                        <a:rPr b="1" sz="1200">
-                          <a:solidFill>
-                            <a:srgbClr val="54A24B"/>
-                          </a:solidFill>
-                        </a:rPr>
-                        <a:t>37.8%</a:t>
-                      </a:r>
-                    </a:p>
-                  </a:txBody>
-                  <a:tcPr marL="45720" marR="45720" marT="45720" marB="45720" anchor="t" anchorCtr="0" horzOverflow="overflow">
-                    <a:lnL w="6350">
-                      <a:solidFill>
-                        <a:srgbClr val="2A2A4A"/>
-                      </a:solidFill>
-                    </a:lnL>
-                    <a:lnR w="6350">
-                      <a:solidFill>
-                        <a:srgbClr val="2A2A4A"/>
-                      </a:solidFill>
-                    </a:lnR>
-                    <a:lnT w="6350">
-                      <a:solidFill>
-                        <a:srgbClr val="2A2A4A"/>
-                      </a:solidFill>
-                    </a:lnT>
-                    <a:lnB w="6350">
-                      <a:solidFill>
-                        <a:srgbClr val="2A2A4A"/>
-                      </a:solidFill>
-                    </a:lnB>
-                    <a:solidFill>
-                      <a:srgbClr val="1A1A2E"/>
-                    </a:solidFill>
-                  </a:tcPr>
-                </a:tc>
-              </a:tr>
-              <a:tr h="320952">
-                <a:tc>
-                  <a:txBody>
-                    <a:bodyPr/>
-                    <a:lstStyle/>
-                    <a:p>
-                      <a:pPr algn="l">
-                        <a:defRPr sz="1800"/>
-                      </a:pPr>
-                      <a:r>
-                        <a:rPr sz="1200">
-                          <a:solidFill>
-                            <a:srgbClr val="FFFFFF"/>
-                          </a:solidFill>
-                        </a:rPr>
-                        <a:t>Random Forest (tabell + bild)</a:t>
-                      </a:r>
-                    </a:p>
-                  </a:txBody>
-                  <a:tcPr marL="45720" marR="45720" marT="45720" marB="45720" anchor="t" anchorCtr="0" horzOverflow="overflow">
-                    <a:lnL w="6350">
-                      <a:solidFill>
-                        <a:srgbClr val="2A2A4A"/>
-                      </a:solidFill>
-                    </a:lnL>
-                    <a:lnR w="6350">
-                      <a:solidFill>
-                        <a:srgbClr val="2A2A4A"/>
-                      </a:solidFill>
-                    </a:lnR>
-                    <a:lnT w="6350">
-                      <a:solidFill>
-                        <a:srgbClr val="2A2A4A"/>
-                      </a:solidFill>
-                    </a:lnT>
-                    <a:lnB w="6350">
-                      <a:solidFill>
-                        <a:srgbClr val="2A2A4A"/>
-                      </a:solidFill>
-                    </a:lnB>
-                    <a:solidFill>
-                      <a:srgbClr val="1A1A2E"/>
-                    </a:solidFill>
-                  </a:tcPr>
-                </a:tc>
-                <a:tc>
-                  <a:txBody>
-                    <a:bodyPr/>
-                    <a:lstStyle/>
-                    <a:p>
-                      <a:pPr algn="ctr">
-                        <a:defRPr sz="1800"/>
-                      </a:pPr>
-                      <a:r>
-                        <a:rPr sz="1200">
-                          <a:solidFill>
-                            <a:srgbClr val="F58518"/>
-                          </a:solidFill>
-                        </a:rPr>
-                        <a:t>37.1%</a:t>
-                      </a:r>
-                    </a:p>
-                  </a:txBody>
-                  <a:tcPr marL="45720" marR="45720" marT="45720" marB="45720" anchor="t" anchorCtr="0" horzOverflow="overflow">
-                    <a:lnL w="6350">
-                      <a:solidFill>
-                        <a:srgbClr val="2A2A4A"/>
-                      </a:solidFill>
-                    </a:lnL>
-                    <a:lnR w="6350">
-                      <a:solidFill>
-                        <a:srgbClr val="2A2A4A"/>
-                      </a:solidFill>
-                    </a:lnR>
-                    <a:lnT w="6350">
-                      <a:solidFill>
-                        <a:srgbClr val="2A2A4A"/>
-                      </a:solidFill>
-                    </a:lnT>
-                    <a:lnB w="6350">
-                      <a:solidFill>
-                        <a:srgbClr val="2A2A4A"/>
-                      </a:solidFill>
-                    </a:lnB>
-                    <a:solidFill>
-                      <a:srgbClr val="1A1A2E"/>
-                    </a:solidFill>
-                  </a:tcPr>
-                </a:tc>
-                <a:tc>
-                  <a:txBody>
-                    <a:bodyPr/>
-                    <a:lstStyle/>
-                    <a:p>
-                      <a:pPr algn="ctr">
-                        <a:defRPr sz="1800"/>
-                      </a:pPr>
-                      <a:r>
-                        <a:rPr sz="1200">
-                          <a:solidFill>
-                            <a:srgbClr val="F58518"/>
-                          </a:solidFill>
-                        </a:rPr>
-                        <a:t>21.3%</a:t>
-                      </a:r>
-                    </a:p>
-                  </a:txBody>
-                  <a:tcPr marL="45720" marR="45720" marT="45720" marB="45720" anchor="t" anchorCtr="0" horzOverflow="overflow">
-                    <a:lnL w="6350">
-                      <a:solidFill>
-                        <a:srgbClr val="2A2A4A"/>
-                      </a:solidFill>
-                    </a:lnL>
-                    <a:lnR w="6350">
-                      <a:solidFill>
-                        <a:srgbClr val="2A2A4A"/>
-                      </a:solidFill>
-                    </a:lnR>
-                    <a:lnT w="6350">
-                      <a:solidFill>
-                        <a:srgbClr val="2A2A4A"/>
-                      </a:solidFill>
-                    </a:lnT>
-                    <a:lnB w="6350">
-                      <a:solidFill>
-                        <a:srgbClr val="2A2A4A"/>
-                      </a:solidFill>
-                    </a:lnB>
-                    <a:solidFill>
-                      <a:srgbClr val="1A1A2E"/>
-                    </a:solidFill>
-                  </a:tcPr>
-                </a:tc>
-              </a:tr>
-              <a:tr h="320952">
-                <a:tc>
-                  <a:txBody>
-                    <a:bodyPr/>
-                    <a:lstStyle/>
-                    <a:p>
-                      <a:pPr algn="l">
-                        <a:defRPr sz="1800"/>
-                      </a:pPr>
-                      <a:r>
-                        <a:rPr sz="1200">
-                          <a:solidFill>
-                            <a:srgbClr val="FFFFFF"/>
-                          </a:solidFill>
-                        </a:rPr>
-                        <a:t>Random Forest (enbart bild)</a:t>
-                      </a:r>
-                    </a:p>
-                  </a:txBody>
-                  <a:tcPr marL="45720" marR="45720" marT="45720" marB="45720" anchor="t" anchorCtr="0" horzOverflow="overflow">
-                    <a:lnL w="6350">
-                      <a:solidFill>
-                        <a:srgbClr val="2A2A4A"/>
-                      </a:solidFill>
-                    </a:lnL>
-                    <a:lnR w="6350">
-                      <a:solidFill>
-                        <a:srgbClr val="2A2A4A"/>
-                      </a:solidFill>
-                    </a:lnR>
-                    <a:lnT w="6350">
-                      <a:solidFill>
-                        <a:srgbClr val="2A2A4A"/>
-                      </a:solidFill>
-                    </a:lnT>
-                    <a:lnB w="6350">
-                      <a:solidFill>
-                        <a:srgbClr val="2A2A4A"/>
-                      </a:solidFill>
-                    </a:lnB>
-                    <a:solidFill>
-                      <a:srgbClr val="1A1A2E"/>
-                    </a:solidFill>
-                  </a:tcPr>
-                </a:tc>
-                <a:tc>
-                  <a:txBody>
-                    <a:bodyPr/>
-                    <a:lstStyle/>
-                    <a:p>
-                      <a:pPr algn="ctr">
-                        <a:defRPr sz="1800"/>
-                      </a:pPr>
-                      <a:r>
-                        <a:rPr sz="1200">
-                          <a:solidFill>
-                            <a:srgbClr val="E45756"/>
-                          </a:solidFill>
-                        </a:rPr>
-                        <a:t>19.5%</a:t>
-                      </a:r>
-                    </a:p>
-                  </a:txBody>
-                  <a:tcPr marL="45720" marR="45720" marT="45720" marB="45720" anchor="t" anchorCtr="0" horzOverflow="overflow">
-                    <a:lnL w="6350">
-                      <a:solidFill>
-                        <a:srgbClr val="2A2A4A"/>
-                      </a:solidFill>
-                    </a:lnL>
-                    <a:lnR w="6350">
-                      <a:solidFill>
-                        <a:srgbClr val="2A2A4A"/>
-                      </a:solidFill>
-                    </a:lnR>
-                    <a:lnT w="6350">
-                      <a:solidFill>
-                        <a:srgbClr val="2A2A4A"/>
-                      </a:solidFill>
-                    </a:lnT>
-                    <a:lnB w="6350">
-                      <a:solidFill>
-                        <a:srgbClr val="2A2A4A"/>
-                      </a:solidFill>
-                    </a:lnB>
-                    <a:solidFill>
-                      <a:srgbClr val="1A1A2E"/>
-                    </a:solidFill>
-                  </a:tcPr>
-                </a:tc>
-                <a:tc>
-                  <a:txBody>
-                    <a:bodyPr/>
-                    <a:lstStyle/>
-                    <a:p>
-                      <a:pPr algn="ctr">
-                        <a:defRPr sz="1800"/>
-                      </a:pPr>
-                      <a:r>
-                        <a:rPr sz="1200">
-                          <a:solidFill>
-                            <a:srgbClr val="E45756"/>
-                          </a:solidFill>
-                        </a:rPr>
-                        <a:t>9.7%</a:t>
-                      </a:r>
-                    </a:p>
-                  </a:txBody>
-                  <a:tcPr marL="45720" marR="45720" marT="45720" marB="45720" anchor="t" anchorCtr="0" horzOverflow="overflow">
-                    <a:lnL w="6350">
-                      <a:solidFill>
-                        <a:srgbClr val="2A2A4A"/>
-                      </a:solidFill>
-                    </a:lnL>
-                    <a:lnR w="6350">
-                      <a:solidFill>
-                        <a:srgbClr val="2A2A4A"/>
-                      </a:solidFill>
-                    </a:lnR>
-                    <a:lnT w="6350">
-                      <a:solidFill>
-                        <a:srgbClr val="2A2A4A"/>
-                      </a:solidFill>
-                    </a:lnT>
-                    <a:lnB w="6350">
-                      <a:solidFill>
-                        <a:srgbClr val="2A2A4A"/>
-                      </a:solidFill>
-                    </a:lnB>
-                    <a:solidFill>
-                      <a:srgbClr val="1A1A2E"/>
-                    </a:solidFill>
-                  </a:tcPr>
-                </a:tc>
-              </a:tr>
-            </a:tbl>
-          </a:graphicData>
-        </a:graphic>
-      </p:graphicFrame>
-      <p:sp>
-        <p:nvSpPr>
-          <p:cNvPr id="144" name="Text 2"/>
+              <a:t>Confusion Matrix</a:t>
+            </a:r>
+          </a:p>
+        </p:txBody>
+      </p:sp>
+      <p:pic>
+        <p:nvPicPr>
+          <p:cNvPr id="141" name="Image 0" descr="Image 0"/>
+          <p:cNvPicPr>
+            <a:picLocks noChangeAspect="1"/>
+          </p:cNvPicPr>
+          <p:nvPr/>
+        </p:nvPicPr>
+        <p:blipFill>
+          <a:blip r:embed="rId2">
+            <a:extLst/>
+          </a:blip>
+          <a:stretch>
+            <a:fillRect/>
+          </a:stretch>
+        </p:blipFill>
+        <p:spPr>
+          <a:xfrm>
+            <a:off x="182879" y="1051560"/>
+            <a:ext cx="4389124" cy="3657602"/>
+          </a:xfrm>
+          <a:prstGeom prst="rect">
+            <a:avLst/>
+          </a:prstGeom>
+          <a:ln w="12700">
+            <a:miter lim="400000"/>
+          </a:ln>
+        </p:spPr>
+      </p:pic>
+      <p:sp>
+        <p:nvSpPr>
+          <p:cNvPr id="142" name="Text 2"/>
           <p:cNvSpPr txBox="1"/>
           <p:nvPr/>
         </p:nvSpPr>
         <p:spPr>
           <a:xfrm>
-            <a:off x="594359" y="4761503"/>
-            <a:ext cx="4937762" cy="287892"/>
+            <a:off x="4800597" y="779780"/>
+            <a:ext cx="4023364" cy="269237"/>
           </a:xfrm>
           <a:prstGeom prst="rect">
             <a:avLst/>
@@ -8924,218 +9874,56 @@
           <a:bodyPr lIns="45718" tIns="45718" rIns="45718" bIns="45718" anchor="ctr">
             <a:spAutoFit/>
           </a:bodyPr>
-          <a:lstStyle/>
-          <a:p>
-            <a:pPr>
+          <a:lstStyle>
+            <a:lvl1pPr algn="ctr">
               <a:defRPr sz="1200">
                 <a:solidFill>
-                  <a:srgbClr val="54A24B"/>
+                  <a:srgbClr val="64748B"/>
                 </a:solidFill>
-              </a:defRPr>
-            </a:pPr>
-            <a:r>
-              <a:t>■ </a:t>
-            </a:r>
-            <a:r>
-              <a:rPr sz="1100">
-                <a:solidFill>
-                  <a:srgbClr val="94A3B8"/>
-                </a:solidFill>
-              </a:rPr>
-              <a:t>Bättre   </a:t>
-            </a:r>
-            <a:r>
-              <a:rPr>
-                <a:solidFill>
-                  <a:srgbClr val="F58518"/>
-                </a:solidFill>
-              </a:rPr>
-              <a:t>■ </a:t>
-            </a:r>
-            <a:r>
-              <a:rPr sz="1100">
-                <a:solidFill>
-                  <a:srgbClr val="94A3B8"/>
-                </a:solidFill>
-              </a:rPr>
-              <a:t>Sämre   </a:t>
-            </a:r>
-            <a:r>
-              <a:rPr>
-                <a:solidFill>
-                  <a:srgbClr val="E45756"/>
-                </a:solidFill>
-              </a:rPr>
-              <a:t>■ </a:t>
-            </a:r>
-            <a:r>
-              <a:rPr sz="1100">
-                <a:solidFill>
-                  <a:srgbClr val="94A3B8"/>
-                </a:solidFill>
-              </a:rPr>
-              <a:t>Mycket sämre</a:t>
-            </a:r>
-          </a:p>
-        </p:txBody>
-      </p:sp>
-      <p:sp>
-        <p:nvSpPr>
-          <p:cNvPr id="145" name="Shape 3"/>
-          <p:cNvSpPr/>
-          <p:nvPr/>
-        </p:nvSpPr>
-        <p:spPr>
-          <a:xfrm>
-            <a:off x="5852159" y="970280"/>
-            <a:ext cx="3017522" cy="3063240"/>
-          </a:xfrm>
-          <a:prstGeom prst="rect">
-            <a:avLst/>
-          </a:prstGeom>
-          <a:solidFill>
-            <a:srgbClr val="16213E"/>
-          </a:solidFill>
-          <a:ln w="12700">
-            <a:miter lim="400000"/>
-          </a:ln>
-        </p:spPr>
-        <p:txBody>
-          <a:bodyPr lIns="45718" tIns="45718" rIns="45718" bIns="45718"/>
-          <a:lstStyle/>
+                <a:latin typeface="Trebuchet MS"/>
+                <a:ea typeface="Trebuchet MS"/>
+                <a:cs typeface="Trebuchet MS"/>
+                <a:sym typeface="Trebuchet MS"/>
+              </a:defRPr>
+            </a:lvl1pPr>
+          </a:lstStyle>
           <a:p>
             <a:pPr/>
-          </a:p>
-        </p:txBody>
-      </p:sp>
-      <p:sp>
-        <p:nvSpPr>
-          <p:cNvPr id="146" name="Shape 4"/>
-          <p:cNvSpPr/>
-          <p:nvPr/>
-        </p:nvSpPr>
-        <p:spPr>
-          <a:xfrm>
-            <a:off x="5852159" y="1097280"/>
-            <a:ext cx="54866" cy="3063240"/>
-          </a:xfrm>
-          <a:prstGeom prst="rect">
-            <a:avLst/>
-          </a:prstGeom>
-          <a:solidFill>
-            <a:srgbClr val="E45756"/>
-          </a:solidFill>
-          <a:ln w="12700">
-            <a:miter lim="400000"/>
-          </a:ln>
-        </p:spPr>
-        <p:txBody>
-          <a:bodyPr lIns="45718" tIns="45718" rIns="45718" bIns="45718"/>
-          <a:lstStyle/>
-          <a:p>
-            <a:pPr/>
-          </a:p>
-        </p:txBody>
-      </p:sp>
-      <p:sp>
-        <p:nvSpPr>
-          <p:cNvPr id="147" name="Text 5"/>
-          <p:cNvSpPr txBox="1"/>
-          <p:nvPr/>
-        </p:nvSpPr>
-        <p:spPr>
-          <a:xfrm>
-            <a:off x="6172198" y="1153161"/>
-            <a:ext cx="2468882" cy="2493400"/>
-          </a:xfrm>
-          <a:prstGeom prst="rect">
-            <a:avLst/>
-          </a:prstGeom>
-          <a:ln w="12700">
-            <a:miter lim="400000"/>
-          </a:ln>
-          <a:extLst>
-            <a:ext uri="{C572A759-6A51-4108-AA02-DFA0A04FC94B}">
-              <ma14:wrappingTextBoxFlag xmlns:ma14="http://schemas.microsoft.com/office/mac/drawingml/2011/main" val="1"/>
-            </a:ext>
-          </a:extLst>
-        </p:spPr>
-        <p:txBody>
-          <a:bodyPr lIns="45718" tIns="45718" rIns="45718" bIns="45718">
-            <a:spAutoFit/>
-          </a:bodyPr>
-          <a:lstStyle/>
-          <a:p>
-            <a:pPr>
-              <a:defRPr b="1" sz="1600">
-                <a:solidFill>
-                  <a:srgbClr val="FFFFFF"/>
-                </a:solidFill>
-              </a:defRPr>
-            </a:pPr>
-            <a:r>
-              <a:t>Varför?</a:t>
-            </a:r>
-          </a:p>
-          <a:p>
-            <a:pPr>
-              <a:defRPr sz="1600"/>
-            </a:pPr>
-          </a:p>
-          <a:p>
-            <a:pPr>
-              <a:defRPr sz="1300">
-                <a:solidFill>
-                  <a:srgbClr val="FFFFFF"/>
-                </a:solidFill>
-              </a:defRPr>
-            </a:pPr>
-            <a:r>
-              <a:t>Sprite-pixlar kodar visuell design — inte typinformation.</a:t>
-            </a:r>
-            <a:endParaRPr sz="1600"/>
-          </a:p>
-          <a:p>
-            <a:pPr>
-              <a:defRPr sz="1600">
-                <a:solidFill>
-                  <a:srgbClr val="FFFFFF"/>
-                </a:solidFill>
-              </a:defRPr>
-            </a:pPr>
-          </a:p>
-          <a:p>
-            <a:pPr>
-              <a:defRPr sz="1300">
-                <a:solidFill>
-                  <a:srgbClr val="FFFFFF"/>
-                </a:solidFill>
-              </a:defRPr>
-            </a:pPr>
-            <a:r>
-              <a:t>En blå Water-typ och en blå Flying-typ ser likadana ut som pixelvektorer.</a:t>
-            </a:r>
-            <a:endParaRPr sz="1600"/>
-          </a:p>
-          <a:p>
-            <a:pPr>
-              <a:defRPr sz="1600"/>
-            </a:pPr>
-          </a:p>
-          <a:p>
-            <a:pPr>
-              <a:defRPr b="1" sz="1300">
-                <a:solidFill>
-                  <a:srgbClr val="FFFFFF"/>
-                </a:solidFill>
-              </a:defRPr>
-            </a:pPr>
-            <a:r>
-              <a:t>Bildegenskaper introducerar brus som försämrar alla modeller.</a:t>
-            </a:r>
-          </a:p>
-        </p:txBody>
-      </p:sp>
+            <a:r>
+              <a:t>Grupperad Permutation Importance</a:t>
+            </a:r>
+          </a:p>
+        </p:txBody>
+      </p:sp>
+      <p:pic>
+        <p:nvPicPr>
+          <p:cNvPr id="143" name="Image 1" descr="Image 1"/>
+          <p:cNvPicPr>
+            <a:picLocks noChangeAspect="1"/>
+          </p:cNvPicPr>
+          <p:nvPr/>
+        </p:nvPicPr>
+        <p:blipFill>
+          <a:blip r:embed="rId3">
+            <a:extLst/>
+          </a:blip>
+          <a:stretch>
+            <a:fillRect/>
+          </a:stretch>
+        </p:blipFill>
+        <p:spPr>
+          <a:xfrm>
+            <a:off x="4663440" y="1051560"/>
+            <a:ext cx="4297683" cy="3657602"/>
+          </a:xfrm>
+          <a:prstGeom prst="rect">
+            <a:avLst/>
+          </a:prstGeom>
+          <a:ln w="12700">
+            <a:miter lim="400000"/>
+          </a:ln>
+        </p:spPr>
+      </p:pic>
     </p:spTree>
   </p:cSld>
   <p:clrMapOvr>
@@ -9376,10 +10164,10 @@
             </a:solidFill>
             <a:effectLst/>
             <a:uFillTx/>
-            <a:latin typeface="+mj-lt"/>
-            <a:ea typeface="+mj-ea"/>
-            <a:cs typeface="+mj-cs"/>
-            <a:sym typeface="Calibri"/>
+            <a:latin typeface="+mn-lt"/>
+            <a:ea typeface="+mn-ea"/>
+            <a:cs typeface="+mn-cs"/>
+            <a:sym typeface="Helvetica"/>
           </a:defRPr>
         </a:defPPr>
         <a:lvl1pPr marL="0" marR="0" indent="0" algn="l" defTabSz="914400" rtl="0" fontAlgn="auto" latinLnBrk="1" hangingPunct="0">
@@ -9947,10 +10735,10 @@
             </a:solidFill>
             <a:effectLst/>
             <a:uFillTx/>
-            <a:latin typeface="+mj-lt"/>
-            <a:ea typeface="+mj-ea"/>
-            <a:cs typeface="+mj-cs"/>
-            <a:sym typeface="Calibri"/>
+            <a:latin typeface="+mn-lt"/>
+            <a:ea typeface="+mn-ea"/>
+            <a:cs typeface="+mn-cs"/>
+            <a:sym typeface="Helvetica"/>
           </a:defRPr>
         </a:defPPr>
         <a:lvl1pPr marL="0" marR="0" indent="0" algn="l" defTabSz="914400" rtl="0" fontAlgn="auto" latinLnBrk="1" hangingPunct="0">
@@ -10430,10 +11218,10 @@
             </a:solidFill>
             <a:effectLst/>
             <a:uFillTx/>
-            <a:latin typeface="+mj-lt"/>
-            <a:ea typeface="+mj-ea"/>
-            <a:cs typeface="+mj-cs"/>
-            <a:sym typeface="Calibri"/>
+            <a:latin typeface="+mn-lt"/>
+            <a:ea typeface="+mn-ea"/>
+            <a:cs typeface="+mn-cs"/>
+            <a:sym typeface="Helvetica"/>
           </a:defRPr>
         </a:defPPr>
         <a:lvl1pPr marL="0" marR="0" indent="0" algn="l" defTabSz="914400" rtl="0" fontAlgn="auto" latinLnBrk="1" hangingPunct="0">
@@ -11001,10 +11789,10 @@
             </a:solidFill>
             <a:effectLst/>
             <a:uFillTx/>
-            <a:latin typeface="+mj-lt"/>
-            <a:ea typeface="+mj-ea"/>
-            <a:cs typeface="+mj-cs"/>
-            <a:sym typeface="Calibri"/>
+            <a:latin typeface="+mn-lt"/>
+            <a:ea typeface="+mn-ea"/>
+            <a:cs typeface="+mn-cs"/>
+            <a:sym typeface="Helvetica"/>
           </a:defRPr>
         </a:defPPr>
         <a:lvl1pPr marL="0" marR="0" indent="0" algn="l" defTabSz="914400" rtl="0" fontAlgn="auto" latinLnBrk="1" hangingPunct="0">
